--- a/docs/presentation/cloud-holdem-발표.pptx
+++ b/docs/presentation/cloud-holdem-발표.pptx
@@ -515,7 +515,8 @@
           <a:p>
             <a:r>
               <a:rPr lang="en-US" dirty="0"/>
-              <a:t/>
+              <a:t>안녕하세요. AWS ECS 기반 실시간 멀티플레이어 텍사스 홀덤, "Cloud Hold'em" 프로젝트 발표를 시작하겠습니다.
+이 프로젝트는 단순히 게임을 만드는 것이 아니라, "실시간 게임 서버를 AWS 위에서 확장 가능하고 안정적으로 운영하려면 어떻게 설계해야 하는가"를 목표로 진행했습니다.</a:t>
             </a:r>
             <a:endParaRPr lang="en-US" dirty="0"/>
           </a:p>
@@ -603,7 +604,10 @@
           <a:p>
             <a:r>
               <a:rPr lang="en-US" dirty="0"/>
-              <a:t/>
+              <a:t>보안은 최소 권한 원칙으로 설계했습니다.
+보안 그룹을 IP가 아닌 "보안 그룹 참조"로 체인을 만들었습니다. ALB는 인터넷에서 80만, EC2는 ALB에서 오는 3001만, Redis는 EC2에서 오는 6379만 받습니다. 즉 Redis는 인터넷에서 아예 도달이 불가능합니다.
+IAM은 역할을 3종으로 분리했습니다. 컨테이너가 쓰는 Task Role은 S3 쓰기만, Execution Role은 ECR pull과 로그만, Instance Role은 ECS 등록만 가능합니다.
+작업용 IAM 사용자 권한도 필요한 액션만 점진적으로 추가했는데, 예를 들어 ALB 생성이 ec2:DescribeAccountAttributes라는 숨은 권한을 요구해서 실패 메시지를 분석해 추가한 경험도 있었습니다.</a:t>
             </a:r>
             <a:endParaRPr lang="en-US" dirty="0"/>
           </a:p>
@@ -691,7 +695,10 @@
           <a:p>
             <a:r>
               <a:rPr lang="en-US" dirty="0"/>
-              <a:t/>
+              <a:t>"되는 것 같다"가 아니라 증명을 목표로 검증했습니다.
+게임 엔진과 Redis 로직에 단위·통합 테스트 44개를 TDD로 작성했고, Playwright로 실제 브라우저 4개를 자동 조작해 로컬 풀 게임을 완주시켰습니다.
+가장 의미 있는 건 프로덕션 E2E입니다 — ALB를 거쳐 4개 클라이언트가 서로 다른 태스크에 분산된 상태로 쇼다운까지 완주해서, 분산 환경 설계가 실제로 동작함을 확인했습니다.
+TDD 과정에서 베팅 라운드가 끝나지 않는 버그, 턴 타이머가 영원히 발동하지 않는 버그 같은 치명적 결함들을 배포 전에 잡았습니다.</a:t>
             </a:r>
             <a:endParaRPr lang="en-US" dirty="0"/>
           </a:p>
@@ -779,7 +786,10 @@
           <a:p>
             <a:r>
               <a:rPr lang="en-US" dirty="0"/>
-              <a:t/>
+              <a:t>실제 게임 화면입니다.
+왼쪽이 로비 — 닉네임 입력 후 방을 만들거나 열린 방에 입장합니다. 4명이 모이면 5초 카운트다운 후 자동 시작됩니다.
+오른쪽이 게임 테이블 — 내 카드만 보이고 상대 카드는 가려집니다. 블라인드가 자동 차감되고, 자기 턴에만 액션 버튼과 20초 타이머가 표시됩니다.
+쇼다운이 끝나면 칩이 정산되고 다음 핸드가 자동으로 시작됩니다.</a:t>
             </a:r>
             <a:endParaRPr lang="en-US" dirty="0"/>
           </a:p>
@@ -867,7 +877,10 @@
           <a:p>
             <a:r>
               <a:rPr lang="en-US" dirty="0"/>
-              <a:t/>
+              <a:t>이제 라이브로 보여드리겠습니다. (미리 띄워둔 탭 4개로 전환)
+순서: ① 탭 4개 접속 ② 첫 탭에서 방 만들기 ③ 나머지 입장, 카운트다운 확인 ④ 콜/체크로 빠르게 한 바퀴 돌려 플랍 공개 ⑤ 시간 여유가 있으면 탭 하나를 방치해 20초 auto-fold 시연 ⑥ 쇼다운과 칩 정산.
+* 만약 네트워크 문제가 생기면 당황하지 말고 "준비된 화면으로 대체하겠습니다" 하고 앞의 스크린샷 슬라이드로 돌아갈 것.
+* 발표 전 체크: ASG 2대 켜두기, 헬스체크 green, S3 배포 확인.</a:t>
             </a:r>
             <a:endParaRPr lang="en-US" dirty="0"/>
           </a:p>
@@ -955,7 +968,10 @@
           <a:p>
             <a:r>
               <a:rPr lang="en-US" dirty="0"/>
-              <a:t/>
+              <a:t>마지막으로 비용입니다.
+EC2 t3.small 2대, ElastiCache, ALB를 합쳐 월 약 78달러 수준입니다. EKS로 갔다면 여기에 컨트롤 플레인 73달러가 추가됐을 겁니다.
+이번 프로젝트에서 배운 것은 — Stateless 설계와 외부 상태 저장소가 수평 확장의 열쇠라는 것, 관리형 서비스 통합이 운영 부담을 크게 줄여준다는 것, 최소 권한은 불편하지만 그 실패 메시지들이 곧 산 문서가 된다는 것, 그리고 안 쓸 때 끄는 습관이 클라우드 비용 관리의 시작이라는 점입니다.
+이상으로 발표를 마치겠습니다. 감사합니다. 질문 받겠습니다.</a:t>
             </a:r>
             <a:endParaRPr lang="en-US" dirty="0"/>
           </a:p>
@@ -1043,7 +1059,10 @@
           <a:p>
             <a:r>
               <a:rPr lang="en-US" dirty="0"/>
-              <a:t/>
+              <a:t>먼저 어떤 서비스인지 간단히 소개하겠습니다.
+4인용 텍사스 홀덤 웹 게임이고, 회원가입 없이 닉네임만 입력하면 바로 방을 만들고 친구들과 플레이할 수 있습니다.
+기술 스택은 백엔드 Node.js의 ws 라이브러리, 프론트엔드 React, 상태 저장소로 Redis를 사용했습니다.
+오늘 발표의 초점은 게임 로직보다는 오른쪽 화면의 이 게임을 "AWS 위에서 어떻게 운영하는가" — 즉 컨테이너 오케스트레이션, 상태 관리, 오토스케일링입니다.</a:t>
             </a:r>
             <a:endParaRPr lang="en-US" dirty="0"/>
           </a:p>
@@ -1131,7 +1150,12 @@
           <a:p>
             <a:r>
               <a:rPr lang="en-US" dirty="0"/>
-              <a:t/>
+              <a:t>게임 서버는 일반적인 웹 서버와 요구사항이 다릅니다.
+첫째, HTTP 요청-응답이 아니라 WebSocket으로 연결을 계속 유지해야 합니다. 상대가 베팅하면 내 화면이 즉시 갱신되어야 하니까요.
+둘째, 동시 접속이 늘어나면 서버를 수평으로 늘릴 수 있어야 하고,
+셋째, 서버 한 대가 죽어도 진행 중인 게임이 사라지면 안 됩니다.
+그래서 내린 핵심 설계 결정이 이것입니다: 서버는 완전한 Stateless로 만들고, 게임 상태는 전부 ElastiCache Redis에 둔다.
+이 결정 하나로 sticky session이 필요 없어지고, 어느 컨테이너가 어느 플레이어를 처리해도 상관없는 구조가 됩니다.</a:t>
             </a:r>
             <a:endParaRPr lang="en-US" dirty="0"/>
           </a:p>
@@ -1219,7 +1243,12 @@
           <a:p>
             <a:r>
               <a:rPr lang="en-US" dirty="0"/>
-              <a:t/>
+              <a:t>전체 아키텍처입니다. 왼쪽 플레이어부터 흐름을 따라가면 —
+브라우저는 먼저 S3 버킷에서 React 정적 파일을 로드합니다. 별도 웹서버 없이 S3 정적 호스팅만으로 충분합니다.
+게임 통신은 WebSocket으로 ALB를 거쳐 ECS 클러스터의 태스크로 연결됩니다. 가운데 보라색 영역이 ECS 클러스터인데, EC2 Auto Scaling Group 위에서 Node.js 컨테이너가 태스크로 돌고 있습니다.
+모든 태스크는 오른쪽의 ElastiCache Redis 하나를 바라봅니다. 게임 상태를 읽고 쓰고, Pub/Sub으로 이벤트를 주고받습니다.
+완료된 게임 기록은 S3 히스토리 버킷에 저장됩니다.
+하단의 보안 그룹 체인은 보안 슬라이드에서 다시 설명하겠습니다.</a:t>
             </a:r>
             <a:endParaRPr lang="en-US" dirty="0"/>
           </a:p>
@@ -1307,7 +1336,10 @@
           <a:p>
             <a:r>
               <a:rPr lang="en-US" dirty="0"/>
-              <a:t/>
+              <a:t>컨테이너 오케스트레이션 도구로 처음에는 쿠버네티스, EKS를 계획했습니다.
+그런데 EKS는 워커 노드와 별개로 컨트롤 플레인 비용만 월 73달러가 고정으로 나가고, 매니페스트·Helm 등 학습 곡선도 가파릅니다. 게임 서버 컨테이너 2~4개를 돌리는 프로젝트에는 과한 복잡도라고 판단했습니다.
+그래서 ECS로 전환했습니다. 클러스터 관리 비용이 없고, ALB·오토스케일링·CloudWatch와의 통합이 네이티브로 제공됩니다. Fargate가 아닌 EC2 타입을 선택해 비용을 더 줄이고 ASG를 직접 제어하는 경험도 얻었습니다.
+배운 점은 — 기술 선택은 유행이 아니라 규모에 맞는 복잡도로 해야 한다는 것입니다.</a:t>
             </a:r>
             <a:endParaRPr lang="en-US" dirty="0"/>
           </a:p>
@@ -1395,7 +1427,11 @@
           <a:p>
             <a:r>
               <a:rPr lang="en-US" dirty="0"/>
-              <a:t/>
+              <a:t>이 아키텍처의 심장은 상태 관리입니다.
+카드 덱, 팟, 현재 턴, 심지어 턴 타이머의 마감 시각까지 게임 상태 전부가 Redis에 있습니다. 서버 메모리에는 아무것도 없습니다.
+같은 게임의 플레이어 4명이 서로 다른 태스크에 연결될 수 있는데, 이때 Redis Pub/Sub으로 게임 이벤트를 모든 태스크에 전달해서 각자 자기 클라이언트에게 브로드캐스트합니다.
+동시성 문제는 Lua 스크립트로 해결했습니다. 상태 조회, 턴 검증, 업데이트를 Redis 안에서 원자적으로 실행해서 두 액션이 동시에 들어와도 안전합니다.
+이게 말로만이 아니라는 걸 증명하기 위해, 실제로 4개 클라이언트를 ALB로 분산 접속시켜 풀 게임을 완주시켰습니다.</a:t>
             </a:r>
             <a:endParaRPr lang="en-US" dirty="0"/>
           </a:p>
@@ -1483,7 +1519,11 @@
           <a:p>
             <a:r>
               <a:rPr lang="en-US" dirty="0"/>
-              <a:t/>
+              <a:t>배포 파이프라인입니다.
+node:20-alpine 기반 56메가바이트 이미지를 ECR에 푸시하고, Task Definition을 등록한 뒤 ECS 서비스가 롤링 배포합니다.
+awsvpc 네트워크 모드라서 태스크마다 자체 IP와 보안 그룹을 갖습니다.
+롤링 배포는 minimumHealthy 100%로 설정해서, 새 태스크가 헬스체크를 통과한 후에만 구버전을 내립니다. 실제로 발표 준비 중 버그 수정을 무중단으로 배포했습니다.
+재배포는 이미지 푸시 후 명령 한 줄이면 끝납니다.</a:t>
             </a:r>
             <a:endParaRPr lang="en-US" dirty="0"/>
           </a:p>
@@ -1571,7 +1611,10 @@
           <a:p>
             <a:r>
               <a:rPr lang="en-US" dirty="0"/>
-              <a:t/>
+              <a:t>ALB 설정에서 가장 중요한 건 idle timeout입니다.
+기본값 60초를 그대로 두면 플레이어가 1분만 가만히 있어도 WebSocket이 끊깁니다. 3600초로 늘리는 이 설정 한 줄이 WebSocket 서비스의 핵심입니다.
+타깃 타입은 ip로 설정해 awsvpc 태스크의 ENI로 직접 라우팅하고, 30초마다 /health 경로로 헬스체크를 합니다.
+NLB가 아닌 ALB를 쓴 이유는 — L7 헬스체크와 WebSocket 업그레이드 처리, 그리고 이 규모에서의 운영 단순함 때문입니다.</a:t>
             </a:r>
             <a:endParaRPr lang="en-US" dirty="0"/>
           </a:p>
@@ -1659,7 +1702,11 @@
           <a:p>
             <a:r>
               <a:rPr lang="en-US" dirty="0"/>
-              <a:t/>
+              <a:t>오토스케일링은 2단 구조입니다.
+1단은 서비스 레벨 — 태스크의 평균 CPU가 70%를 넘으면 ECS가 태스크 수를 2개에서 최대 8개까지 늘립니다.
+2단은 인프라 레벨 — 늘어난 태스크가 들어갈 EC2 자리가 부족하면, Capacity Provider가 ASG를 조정해 EC2 자체를 2대에서 4대까지 증설합니다.
+오른쪽 흐름처럼 트래픽 증가 → 태스크 증설 → 자리 부족 → EC2 증설이 전부 자동입니다.
+반대로 한가해지면 역순으로 줄어들고, 실습 중에는 비용 절약을 위해 desired를 0으로 내려두기도 했습니다.</a:t>
             </a:r>
             <a:endParaRPr lang="en-US" dirty="0"/>
           </a:p>
@@ -2034,7 +2081,7 @@
       </p:grpSpPr>
       <p:sp>
         <p:nvSpPr>
-          <p:cNvPr id="2" name="Text 0"/>
+          <p:cNvPr id="3" name="Text 0"/>
           <p:cNvSpPr/>
           <p:nvPr/>
         </p:nvSpPr>
@@ -2073,7 +2120,7 @@
       </p:sp>
       <p:sp>
         <p:nvSpPr>
-          <p:cNvPr id="3" name="Text 1"/>
+          <p:cNvPr id="4" name="Text 1"/>
           <p:cNvSpPr/>
           <p:nvPr/>
         </p:nvSpPr>
@@ -2112,7 +2159,7 @@
       </p:sp>
       <p:sp>
         <p:nvSpPr>
-          <p:cNvPr id="4" name="Text 2"/>
+          <p:cNvPr id="5" name="Text 2"/>
           <p:cNvSpPr/>
           <p:nvPr/>
         </p:nvSpPr>
@@ -2151,7 +2198,7 @@
       </p:sp>
       <p:sp>
         <p:nvSpPr>
-          <p:cNvPr id="5" name="Text 3"/>
+          <p:cNvPr id="6" name="Text 3"/>
           <p:cNvSpPr/>
           <p:nvPr/>
         </p:nvSpPr>
@@ -2222,7 +2269,7 @@
       </p:grpSpPr>
       <p:sp>
         <p:nvSpPr>
-          <p:cNvPr id="2" name="Text 0"/>
+          <p:cNvPr id="3" name="Text 0"/>
           <p:cNvSpPr/>
           <p:nvPr/>
         </p:nvSpPr>
@@ -2261,7 +2308,7 @@
       </p:sp>
       <p:sp>
         <p:nvSpPr>
-          <p:cNvPr id="3" name="Text 1"/>
+          <p:cNvPr id="4" name="Text 1"/>
           <p:cNvSpPr/>
           <p:nvPr/>
         </p:nvSpPr>
@@ -2300,7 +2347,7 @@
       </p:sp>
       <p:sp>
         <p:nvSpPr>
-          <p:cNvPr id="4" name="Shape 2"/>
+          <p:cNvPr id="5" name="Shape 2"/>
           <p:cNvSpPr/>
           <p:nvPr/>
         </p:nvSpPr>
@@ -2327,7 +2374,7 @@
       </p:sp>
       <p:sp>
         <p:nvSpPr>
-          <p:cNvPr id="5" name="Text 3"/>
+          <p:cNvPr id="6" name="Text 3"/>
           <p:cNvSpPr/>
           <p:nvPr/>
         </p:nvSpPr>
@@ -2436,7 +2483,7 @@
       </p:sp>
       <p:sp>
         <p:nvSpPr>
-          <p:cNvPr id="6" name="Text 4"/>
+          <p:cNvPr id="7" name="Text 4"/>
           <p:cNvSpPr/>
           <p:nvPr/>
         </p:nvSpPr>
@@ -2752,7 +2799,7 @@
       </p:grpSpPr>
       <p:sp>
         <p:nvSpPr>
-          <p:cNvPr id="2" name="Text 0"/>
+          <p:cNvPr id="3" name="Text 0"/>
           <p:cNvSpPr/>
           <p:nvPr/>
         </p:nvSpPr>
@@ -2791,7 +2838,7 @@
       </p:sp>
       <p:sp>
         <p:nvSpPr>
-          <p:cNvPr id="3" name="Text 1"/>
+          <p:cNvPr id="4" name="Text 1"/>
           <p:cNvSpPr/>
           <p:nvPr/>
         </p:nvSpPr>
@@ -2830,7 +2877,7 @@
       </p:sp>
       <p:sp>
         <p:nvSpPr>
-          <p:cNvPr id="4" name="Text 2"/>
+          <p:cNvPr id="5" name="Text 2"/>
           <p:cNvSpPr/>
           <p:nvPr/>
         </p:nvSpPr>
@@ -3080,7 +3127,7 @@
       </p:sp>
       <p:sp>
         <p:nvSpPr>
-          <p:cNvPr id="5" name="Shape 3"/>
+          <p:cNvPr id="6" name="Shape 3"/>
           <p:cNvSpPr/>
           <p:nvPr/>
         </p:nvSpPr>
@@ -3107,7 +3154,7 @@
       </p:sp>
       <p:sp>
         <p:nvSpPr>
-          <p:cNvPr id="6" name="Text 4"/>
+          <p:cNvPr id="7" name="Text 4"/>
           <p:cNvSpPr/>
           <p:nvPr/>
         </p:nvSpPr>
@@ -3146,7 +3193,7 @@
       </p:sp>
       <p:sp>
         <p:nvSpPr>
-          <p:cNvPr id="7" name="Text 5"/>
+          <p:cNvPr id="8" name="Text 5"/>
           <p:cNvSpPr/>
           <p:nvPr/>
         </p:nvSpPr>
@@ -3220,7 +3267,7 @@
       </p:grpSpPr>
       <p:sp>
         <p:nvSpPr>
-          <p:cNvPr id="2" name="Text 0"/>
+          <p:cNvPr id="3" name="Text 0"/>
           <p:cNvSpPr/>
           <p:nvPr/>
         </p:nvSpPr>
@@ -3259,7 +3306,7 @@
       </p:sp>
       <p:sp>
         <p:nvSpPr>
-          <p:cNvPr id="3" name="Text 1"/>
+          <p:cNvPr id="4" name="Text 1"/>
           <p:cNvSpPr/>
           <p:nvPr/>
         </p:nvSpPr>
@@ -3298,7 +3345,7 @@
       </p:sp>
       <p:pic>
         <p:nvPicPr>
-          <p:cNvPr id="4" name="Image 0" descr="/home/dakori/github/cloud_holdem/docs/presentation/assets/lobby.png">    </p:cNvPr>
+          <p:cNvPr id="5" name="Image 0" descr="/home/dakori/github/cloud_holdem/docs/presentation/assets/lobby.png">    </p:cNvPr>
           <p:cNvPicPr>
             <a:picLocks noChangeAspect="1"/>
           </p:cNvPicPr>
@@ -3322,7 +3369,7 @@
       </p:pic>
       <p:pic>
         <p:nvPicPr>
-          <p:cNvPr id="5" name="Image 1" descr="/home/dakori/github/cloud_holdem/docs/presentation/assets/game-table.png">    </p:cNvPr>
+          <p:cNvPr id="6" name="Image 1" descr="/home/dakori/github/cloud_holdem/docs/presentation/assets/game-table.png">    </p:cNvPr>
           <p:cNvPicPr>
             <a:picLocks noChangeAspect="1"/>
           </p:cNvPicPr>
@@ -3346,7 +3393,7 @@
       </p:pic>
       <p:sp>
         <p:nvSpPr>
-          <p:cNvPr id="6" name="Text 2"/>
+          <p:cNvPr id="7" name="Text 2"/>
           <p:cNvSpPr/>
           <p:nvPr/>
         </p:nvSpPr>
@@ -3417,7 +3464,7 @@
       </p:grpSpPr>
       <p:sp>
         <p:nvSpPr>
-          <p:cNvPr id="2" name="Text 0"/>
+          <p:cNvPr id="3" name="Text 0"/>
           <p:cNvSpPr/>
           <p:nvPr/>
         </p:nvSpPr>
@@ -3456,7 +3503,7 @@
       </p:sp>
       <p:sp>
         <p:nvSpPr>
-          <p:cNvPr id="3" name="Text 1"/>
+          <p:cNvPr id="4" name="Text 1"/>
           <p:cNvSpPr/>
           <p:nvPr/>
         </p:nvSpPr>
@@ -3495,7 +3542,7 @@
       </p:sp>
       <p:sp>
         <p:nvSpPr>
-          <p:cNvPr id="4" name="Shape 2"/>
+          <p:cNvPr id="5" name="Shape 2"/>
           <p:cNvSpPr/>
           <p:nvPr/>
         </p:nvSpPr>
@@ -3515,7 +3562,7 @@
       </p:sp>
       <p:sp>
         <p:nvSpPr>
-          <p:cNvPr id="5" name="Text 3"/>
+          <p:cNvPr id="6" name="Text 3"/>
           <p:cNvSpPr/>
           <p:nvPr/>
         </p:nvSpPr>
@@ -3551,7 +3598,7 @@
       </p:sp>
       <p:sp>
         <p:nvSpPr>
-          <p:cNvPr id="6" name="Text 4"/>
+          <p:cNvPr id="7" name="Text 4"/>
           <p:cNvSpPr/>
           <p:nvPr/>
         </p:nvSpPr>
@@ -3590,7 +3637,7 @@
       </p:sp>
       <p:sp>
         <p:nvSpPr>
-          <p:cNvPr id="7" name="Shape 5"/>
+          <p:cNvPr id="8" name="Shape 5"/>
           <p:cNvSpPr/>
           <p:nvPr/>
         </p:nvSpPr>
@@ -3610,7 +3657,7 @@
       </p:sp>
       <p:sp>
         <p:nvSpPr>
-          <p:cNvPr id="8" name="Text 6"/>
+          <p:cNvPr id="9" name="Text 6"/>
           <p:cNvSpPr/>
           <p:nvPr/>
         </p:nvSpPr>
@@ -3646,7 +3693,7 @@
       </p:sp>
       <p:sp>
         <p:nvSpPr>
-          <p:cNvPr id="9" name="Text 7"/>
+          <p:cNvPr id="10" name="Text 7"/>
           <p:cNvSpPr/>
           <p:nvPr/>
         </p:nvSpPr>
@@ -3685,7 +3732,7 @@
       </p:sp>
       <p:sp>
         <p:nvSpPr>
-          <p:cNvPr id="10" name="Shape 8"/>
+          <p:cNvPr id="11" name="Shape 8"/>
           <p:cNvSpPr/>
           <p:nvPr/>
         </p:nvSpPr>
@@ -3705,7 +3752,7 @@
       </p:sp>
       <p:sp>
         <p:nvSpPr>
-          <p:cNvPr id="11" name="Text 9"/>
+          <p:cNvPr id="12" name="Text 9"/>
           <p:cNvSpPr/>
           <p:nvPr/>
         </p:nvSpPr>
@@ -3741,7 +3788,7 @@
       </p:sp>
       <p:sp>
         <p:nvSpPr>
-          <p:cNvPr id="12" name="Text 10"/>
+          <p:cNvPr id="13" name="Text 10"/>
           <p:cNvSpPr/>
           <p:nvPr/>
         </p:nvSpPr>
@@ -3780,7 +3827,7 @@
       </p:sp>
       <p:sp>
         <p:nvSpPr>
-          <p:cNvPr id="13" name="Shape 11"/>
+          <p:cNvPr id="14" name="Shape 11"/>
           <p:cNvSpPr/>
           <p:nvPr/>
         </p:nvSpPr>
@@ -3800,7 +3847,7 @@
       </p:sp>
       <p:sp>
         <p:nvSpPr>
-          <p:cNvPr id="14" name="Text 12"/>
+          <p:cNvPr id="15" name="Text 12"/>
           <p:cNvSpPr/>
           <p:nvPr/>
         </p:nvSpPr>
@@ -3836,7 +3883,7 @@
       </p:sp>
       <p:sp>
         <p:nvSpPr>
-          <p:cNvPr id="15" name="Text 13"/>
+          <p:cNvPr id="16" name="Text 13"/>
           <p:cNvSpPr/>
           <p:nvPr/>
         </p:nvSpPr>
@@ -3875,7 +3922,7 @@
       </p:sp>
       <p:sp>
         <p:nvSpPr>
-          <p:cNvPr id="16" name="Shape 14"/>
+          <p:cNvPr id="17" name="Shape 14"/>
           <p:cNvSpPr/>
           <p:nvPr/>
         </p:nvSpPr>
@@ -3895,7 +3942,7 @@
       </p:sp>
       <p:sp>
         <p:nvSpPr>
-          <p:cNvPr id="17" name="Text 15"/>
+          <p:cNvPr id="18" name="Text 15"/>
           <p:cNvSpPr/>
           <p:nvPr/>
         </p:nvSpPr>
@@ -3931,7 +3978,7 @@
       </p:sp>
       <p:sp>
         <p:nvSpPr>
-          <p:cNvPr id="18" name="Text 16"/>
+          <p:cNvPr id="19" name="Text 16"/>
           <p:cNvSpPr/>
           <p:nvPr/>
         </p:nvSpPr>
@@ -3970,7 +4017,7 @@
       </p:sp>
       <p:sp>
         <p:nvSpPr>
-          <p:cNvPr id="19" name="Shape 17"/>
+          <p:cNvPr id="20" name="Shape 17"/>
           <p:cNvSpPr/>
           <p:nvPr/>
         </p:nvSpPr>
@@ -3990,7 +4037,7 @@
       </p:sp>
       <p:sp>
         <p:nvSpPr>
-          <p:cNvPr id="20" name="Text 18"/>
+          <p:cNvPr id="21" name="Text 18"/>
           <p:cNvSpPr/>
           <p:nvPr/>
         </p:nvSpPr>
@@ -4026,7 +4073,7 @@
       </p:sp>
       <p:sp>
         <p:nvSpPr>
-          <p:cNvPr id="21" name="Text 19"/>
+          <p:cNvPr id="22" name="Text 19"/>
           <p:cNvSpPr/>
           <p:nvPr/>
         </p:nvSpPr>
@@ -4065,7 +4112,7 @@
       </p:sp>
       <p:sp>
         <p:nvSpPr>
-          <p:cNvPr id="22" name="Shape 20"/>
+          <p:cNvPr id="23" name="Shape 20"/>
           <p:cNvSpPr/>
           <p:nvPr/>
         </p:nvSpPr>
@@ -4092,7 +4139,7 @@
       </p:sp>
       <p:sp>
         <p:nvSpPr>
-          <p:cNvPr id="23" name="Text 21"/>
+          <p:cNvPr id="24" name="Text 21"/>
           <p:cNvSpPr/>
           <p:nvPr/>
         </p:nvSpPr>
@@ -4131,7 +4178,7 @@
       </p:sp>
       <p:sp>
         <p:nvSpPr>
-          <p:cNvPr id="24" name="Text 22"/>
+          <p:cNvPr id="25" name="Text 22"/>
           <p:cNvSpPr/>
           <p:nvPr/>
         </p:nvSpPr>
@@ -4323,7 +4370,7 @@
       </p:grpSpPr>
       <p:sp>
         <p:nvSpPr>
-          <p:cNvPr id="2" name="Text 0"/>
+          <p:cNvPr id="3" name="Text 0"/>
           <p:cNvSpPr/>
           <p:nvPr/>
         </p:nvSpPr>
@@ -4362,7 +4409,7 @@
       </p:sp>
       <p:sp>
         <p:nvSpPr>
-          <p:cNvPr id="3" name="Text 1"/>
+          <p:cNvPr id="4" name="Text 1"/>
           <p:cNvSpPr/>
           <p:nvPr/>
         </p:nvSpPr>
@@ -5657,7 +5704,7 @@
       </p:graphicFrame>
       <p:sp>
         <p:nvSpPr>
-          <p:cNvPr id="5" name="Text 2"/>
+          <p:cNvPr id="6" name="Text 2"/>
           <p:cNvSpPr/>
           <p:nvPr/>
         </p:nvSpPr>
@@ -5890,7 +5937,7 @@
       </p:sp>
       <p:sp>
         <p:nvSpPr>
-          <p:cNvPr id="6" name="Text 3"/>
+          <p:cNvPr id="7" name="Text 3"/>
           <p:cNvSpPr/>
           <p:nvPr/>
         </p:nvSpPr>
@@ -5961,7 +6008,7 @@
       </p:grpSpPr>
       <p:sp>
         <p:nvSpPr>
-          <p:cNvPr id="2" name="Text 0"/>
+          <p:cNvPr id="3" name="Text 0"/>
           <p:cNvSpPr/>
           <p:nvPr/>
         </p:nvSpPr>
@@ -6000,7 +6047,7 @@
       </p:sp>
       <p:sp>
         <p:nvSpPr>
-          <p:cNvPr id="3" name="Text 1"/>
+          <p:cNvPr id="4" name="Text 1"/>
           <p:cNvSpPr/>
           <p:nvPr/>
         </p:nvSpPr>
@@ -6039,7 +6086,7 @@
       </p:sp>
       <p:sp>
         <p:nvSpPr>
-          <p:cNvPr id="4" name="Text 2"/>
+          <p:cNvPr id="5" name="Text 2"/>
           <p:cNvSpPr/>
           <p:nvPr/>
         </p:nvSpPr>
@@ -6306,7 +6353,7 @@
       </p:sp>
       <p:sp>
         <p:nvSpPr>
-          <p:cNvPr id="5" name="Shape 3"/>
+          <p:cNvPr id="6" name="Shape 3"/>
           <p:cNvSpPr/>
           <p:nvPr/>
         </p:nvSpPr>
@@ -6333,7 +6380,7 @@
       </p:sp>
       <p:sp>
         <p:nvSpPr>
-          <p:cNvPr id="6" name="Text 4"/>
+          <p:cNvPr id="7" name="Text 4"/>
           <p:cNvSpPr/>
           <p:nvPr/>
         </p:nvSpPr>
@@ -6372,7 +6419,7 @@
       </p:sp>
       <p:sp>
         <p:nvSpPr>
-          <p:cNvPr id="7" name="Text 5"/>
+          <p:cNvPr id="8" name="Text 5"/>
           <p:cNvSpPr/>
           <p:nvPr/>
         </p:nvSpPr>
@@ -6414,7 +6461,7 @@
       </p:sp>
       <p:pic>
         <p:nvPicPr>
-          <p:cNvPr id="8" name="Image 0" descr="/home/dakori/github/cloud_holdem/docs/presentation/assets/lobby.png">    </p:cNvPr>
+          <p:cNvPr id="9" name="Image 0" descr="/home/dakori/github/cloud_holdem/docs/presentation/assets/lobby.png">    </p:cNvPr>
           <p:cNvPicPr>
             <a:picLocks noChangeAspect="1"/>
           </p:cNvPicPr>
@@ -6470,7 +6517,7 @@
       </p:grpSpPr>
       <p:sp>
         <p:nvSpPr>
-          <p:cNvPr id="2" name="Text 0"/>
+          <p:cNvPr id="3" name="Text 0"/>
           <p:cNvSpPr/>
           <p:nvPr/>
         </p:nvSpPr>
@@ -6509,7 +6556,7 @@
       </p:sp>
       <p:sp>
         <p:nvSpPr>
-          <p:cNvPr id="3" name="Text 1"/>
+          <p:cNvPr id="4" name="Text 1"/>
           <p:cNvSpPr/>
           <p:nvPr/>
         </p:nvSpPr>
@@ -6548,7 +6595,7 @@
       </p:sp>
       <p:sp>
         <p:nvSpPr>
-          <p:cNvPr id="4" name="Text 2"/>
+          <p:cNvPr id="5" name="Text 2"/>
           <p:cNvSpPr/>
           <p:nvPr/>
         </p:nvSpPr>
@@ -6849,7 +6896,7 @@
       </p:sp>
       <p:sp>
         <p:nvSpPr>
-          <p:cNvPr id="5" name="Shape 3"/>
+          <p:cNvPr id="6" name="Shape 3"/>
           <p:cNvSpPr/>
           <p:nvPr/>
         </p:nvSpPr>
@@ -6876,7 +6923,7 @@
       </p:sp>
       <p:sp>
         <p:nvSpPr>
-          <p:cNvPr id="6" name="Text 4"/>
+          <p:cNvPr id="7" name="Text 4"/>
           <p:cNvSpPr/>
           <p:nvPr/>
         </p:nvSpPr>
@@ -6915,7 +6962,7 @@
       </p:sp>
       <p:sp>
         <p:nvSpPr>
-          <p:cNvPr id="7" name="Text 5"/>
+          <p:cNvPr id="8" name="Text 5"/>
           <p:cNvSpPr/>
           <p:nvPr/>
         </p:nvSpPr>
@@ -7009,7 +7056,7 @@
       </p:grpSpPr>
       <p:sp>
         <p:nvSpPr>
-          <p:cNvPr id="2" name="Text 0"/>
+          <p:cNvPr id="3" name="Text 0"/>
           <p:cNvSpPr/>
           <p:nvPr/>
         </p:nvSpPr>
@@ -7048,7 +7095,7 @@
       </p:sp>
       <p:sp>
         <p:nvSpPr>
-          <p:cNvPr id="3" name="Text 1"/>
+          <p:cNvPr id="4" name="Text 1"/>
           <p:cNvSpPr/>
           <p:nvPr/>
         </p:nvSpPr>
@@ -7087,7 +7134,7 @@
       </p:sp>
       <p:pic>
         <p:nvPicPr>
-          <p:cNvPr id="4" name="Image 0" descr="/home/dakori/github/cloud_holdem/docs/presentation/assets/architecture.png">    </p:cNvPr>
+          <p:cNvPr id="5" name="Image 0" descr="/home/dakori/github/cloud_holdem/docs/presentation/assets/architecture.png">    </p:cNvPr>
           <p:cNvPicPr>
             <a:picLocks noChangeAspect="1"/>
           </p:cNvPicPr>
@@ -7143,7 +7190,7 @@
       </p:grpSpPr>
       <p:sp>
         <p:nvSpPr>
-          <p:cNvPr id="2" name="Text 0"/>
+          <p:cNvPr id="3" name="Text 0"/>
           <p:cNvSpPr/>
           <p:nvPr/>
         </p:nvSpPr>
@@ -7182,7 +7229,7 @@
       </p:sp>
       <p:sp>
         <p:nvSpPr>
-          <p:cNvPr id="3" name="Text 1"/>
+          <p:cNvPr id="4" name="Text 1"/>
           <p:cNvSpPr/>
           <p:nvPr/>
         </p:nvSpPr>
@@ -7221,7 +7268,7 @@
       </p:sp>
       <p:sp>
         <p:nvSpPr>
-          <p:cNvPr id="4" name="Shape 2"/>
+          <p:cNvPr id="5" name="Shape 2"/>
           <p:cNvSpPr/>
           <p:nvPr/>
         </p:nvSpPr>
@@ -7248,7 +7295,7 @@
       </p:sp>
       <p:sp>
         <p:nvSpPr>
-          <p:cNvPr id="5" name="Text 3"/>
+          <p:cNvPr id="6" name="Text 3"/>
           <p:cNvSpPr/>
           <p:nvPr/>
         </p:nvSpPr>
@@ -7287,7 +7334,7 @@
       </p:sp>
       <p:sp>
         <p:nvSpPr>
-          <p:cNvPr id="6" name="Text 4"/>
+          <p:cNvPr id="7" name="Text 4"/>
           <p:cNvSpPr/>
           <p:nvPr/>
         </p:nvSpPr>
@@ -7369,7 +7416,7 @@
       </p:sp>
       <p:sp>
         <p:nvSpPr>
-          <p:cNvPr id="7" name="Shape 5"/>
+          <p:cNvPr id="8" name="Shape 5"/>
           <p:cNvSpPr/>
           <p:nvPr/>
         </p:nvSpPr>
@@ -7396,7 +7443,7 @@
       </p:sp>
       <p:sp>
         <p:nvSpPr>
-          <p:cNvPr id="8" name="Text 6"/>
+          <p:cNvPr id="9" name="Text 6"/>
           <p:cNvSpPr/>
           <p:nvPr/>
         </p:nvSpPr>
@@ -7435,7 +7482,7 @@
       </p:sp>
       <p:sp>
         <p:nvSpPr>
-          <p:cNvPr id="9" name="Text 7"/>
+          <p:cNvPr id="10" name="Text 7"/>
           <p:cNvSpPr/>
           <p:nvPr/>
         </p:nvSpPr>
@@ -7537,7 +7584,7 @@
       </p:sp>
       <p:sp>
         <p:nvSpPr>
-          <p:cNvPr id="10" name="Text 8"/>
+          <p:cNvPr id="11" name="Text 8"/>
           <p:cNvSpPr/>
           <p:nvPr/>
         </p:nvSpPr>
@@ -7608,7 +7655,7 @@
       </p:grpSpPr>
       <p:sp>
         <p:nvSpPr>
-          <p:cNvPr id="2" name="Text 0"/>
+          <p:cNvPr id="3" name="Text 0"/>
           <p:cNvSpPr/>
           <p:nvPr/>
         </p:nvSpPr>
@@ -7647,7 +7694,7 @@
       </p:sp>
       <p:sp>
         <p:nvSpPr>
-          <p:cNvPr id="3" name="Text 1"/>
+          <p:cNvPr id="4" name="Text 1"/>
           <p:cNvSpPr/>
           <p:nvPr/>
         </p:nvSpPr>
@@ -7686,7 +7733,7 @@
       </p:sp>
       <p:sp>
         <p:nvSpPr>
-          <p:cNvPr id="4" name="Text 2"/>
+          <p:cNvPr id="5" name="Text 2"/>
           <p:cNvSpPr/>
           <p:nvPr/>
         </p:nvSpPr>
@@ -7970,7 +8017,7 @@
       </p:sp>
       <p:sp>
         <p:nvSpPr>
-          <p:cNvPr id="5" name="Shape 3"/>
+          <p:cNvPr id="6" name="Shape 3"/>
           <p:cNvSpPr/>
           <p:nvPr/>
         </p:nvSpPr>
@@ -7997,7 +8044,7 @@
       </p:sp>
       <p:sp>
         <p:nvSpPr>
-          <p:cNvPr id="6" name="Text 4"/>
+          <p:cNvPr id="7" name="Text 4"/>
           <p:cNvSpPr/>
           <p:nvPr/>
         </p:nvSpPr>
@@ -8036,7 +8083,7 @@
       </p:sp>
       <p:sp>
         <p:nvSpPr>
-          <p:cNvPr id="7" name="Text 5"/>
+          <p:cNvPr id="8" name="Text 5"/>
           <p:cNvSpPr/>
           <p:nvPr/>
         </p:nvSpPr>
@@ -8159,7 +8206,7 @@
       </p:grpSpPr>
       <p:sp>
         <p:nvSpPr>
-          <p:cNvPr id="2" name="Text 0"/>
+          <p:cNvPr id="3" name="Text 0"/>
           <p:cNvSpPr/>
           <p:nvPr/>
         </p:nvSpPr>
@@ -8198,7 +8245,7 @@
       </p:sp>
       <p:sp>
         <p:nvSpPr>
-          <p:cNvPr id="3" name="Text 1"/>
+          <p:cNvPr id="4" name="Text 1"/>
           <p:cNvSpPr/>
           <p:nvPr/>
         </p:nvSpPr>
@@ -8237,7 +8284,7 @@
       </p:sp>
       <p:sp>
         <p:nvSpPr>
-          <p:cNvPr id="4" name="Shape 2"/>
+          <p:cNvPr id="5" name="Shape 2"/>
           <p:cNvSpPr/>
           <p:nvPr/>
         </p:nvSpPr>
@@ -8264,7 +8311,7 @@
       </p:sp>
       <p:sp>
         <p:nvSpPr>
-          <p:cNvPr id="5" name="Text 3"/>
+          <p:cNvPr id="6" name="Text 3"/>
           <p:cNvSpPr/>
           <p:nvPr/>
         </p:nvSpPr>
@@ -8401,7 +8448,7 @@
       </p:sp>
       <p:sp>
         <p:nvSpPr>
-          <p:cNvPr id="6" name="Text 4"/>
+          <p:cNvPr id="7" name="Text 4"/>
           <p:cNvSpPr/>
           <p:nvPr/>
         </p:nvSpPr>
@@ -8700,7 +8747,7 @@
       </p:grpSpPr>
       <p:sp>
         <p:nvSpPr>
-          <p:cNvPr id="2" name="Text 0"/>
+          <p:cNvPr id="3" name="Text 0"/>
           <p:cNvSpPr/>
           <p:nvPr/>
         </p:nvSpPr>
@@ -8739,7 +8786,7 @@
       </p:sp>
       <p:sp>
         <p:nvSpPr>
-          <p:cNvPr id="3" name="Text 1"/>
+          <p:cNvPr id="4" name="Text 1"/>
           <p:cNvSpPr/>
           <p:nvPr/>
         </p:nvSpPr>
@@ -8778,7 +8825,7 @@
       </p:sp>
       <p:sp>
         <p:nvSpPr>
-          <p:cNvPr id="4" name="Text 2"/>
+          <p:cNvPr id="5" name="Text 2"/>
           <p:cNvSpPr/>
           <p:nvPr/>
         </p:nvSpPr>
@@ -9062,7 +9109,7 @@
       </p:sp>
       <p:sp>
         <p:nvSpPr>
-          <p:cNvPr id="5" name="Shape 3"/>
+          <p:cNvPr id="6" name="Shape 3"/>
           <p:cNvSpPr/>
           <p:nvPr/>
         </p:nvSpPr>
@@ -9089,7 +9136,7 @@
       </p:sp>
       <p:sp>
         <p:nvSpPr>
-          <p:cNvPr id="6" name="Text 4"/>
+          <p:cNvPr id="7" name="Text 4"/>
           <p:cNvSpPr/>
           <p:nvPr/>
         </p:nvSpPr>
@@ -9128,7 +9175,7 @@
       </p:sp>
       <p:sp>
         <p:nvSpPr>
-          <p:cNvPr id="7" name="Text 5"/>
+          <p:cNvPr id="8" name="Text 5"/>
           <p:cNvSpPr/>
           <p:nvPr/>
         </p:nvSpPr>
@@ -9202,7 +9249,7 @@
       </p:grpSpPr>
       <p:sp>
         <p:nvSpPr>
-          <p:cNvPr id="2" name="Text 0"/>
+          <p:cNvPr id="3" name="Text 0"/>
           <p:cNvSpPr/>
           <p:nvPr/>
         </p:nvSpPr>
@@ -9241,7 +9288,7 @@
       </p:sp>
       <p:sp>
         <p:nvSpPr>
-          <p:cNvPr id="3" name="Text 1"/>
+          <p:cNvPr id="4" name="Text 1"/>
           <p:cNvSpPr/>
           <p:nvPr/>
         </p:nvSpPr>
@@ -9280,7 +9327,7 @@
       </p:sp>
       <p:sp>
         <p:nvSpPr>
-          <p:cNvPr id="4" name="Shape 2"/>
+          <p:cNvPr id="5" name="Shape 2"/>
           <p:cNvSpPr/>
           <p:nvPr/>
         </p:nvSpPr>
@@ -9307,7 +9354,7 @@
       </p:sp>
       <p:sp>
         <p:nvSpPr>
-          <p:cNvPr id="5" name="Text 3"/>
+          <p:cNvPr id="6" name="Text 3"/>
           <p:cNvSpPr/>
           <p:nvPr/>
         </p:nvSpPr>
@@ -9346,7 +9393,7 @@
       </p:sp>
       <p:sp>
         <p:nvSpPr>
-          <p:cNvPr id="6" name="Text 4"/>
+          <p:cNvPr id="7" name="Text 4"/>
           <p:cNvSpPr/>
           <p:nvPr/>
         </p:nvSpPr>
@@ -9428,7 +9475,7 @@
       </p:sp>
       <p:sp>
         <p:nvSpPr>
-          <p:cNvPr id="7" name="Shape 5"/>
+          <p:cNvPr id="8" name="Shape 5"/>
           <p:cNvSpPr/>
           <p:nvPr/>
         </p:nvSpPr>
@@ -9455,7 +9502,7 @@
       </p:sp>
       <p:sp>
         <p:nvSpPr>
-          <p:cNvPr id="8" name="Text 6"/>
+          <p:cNvPr id="9" name="Text 6"/>
           <p:cNvSpPr/>
           <p:nvPr/>
         </p:nvSpPr>
@@ -9494,7 +9541,7 @@
       </p:sp>
       <p:sp>
         <p:nvSpPr>
-          <p:cNvPr id="9" name="Text 7"/>
+          <p:cNvPr id="10" name="Text 7"/>
           <p:cNvSpPr/>
           <p:nvPr/>
         </p:nvSpPr>
@@ -9576,7 +9623,7 @@
       </p:sp>
       <p:sp>
         <p:nvSpPr>
-          <p:cNvPr id="10" name="Shape 8"/>
+          <p:cNvPr id="11" name="Shape 8"/>
           <p:cNvSpPr/>
           <p:nvPr/>
         </p:nvSpPr>
@@ -9603,7 +9650,7 @@
       </p:sp>
       <p:sp>
         <p:nvSpPr>
-          <p:cNvPr id="11" name="Text 9"/>
+          <p:cNvPr id="12" name="Text 9"/>
           <p:cNvSpPr/>
           <p:nvPr/>
         </p:nvSpPr>
@@ -9642,7 +9689,7 @@
       </p:sp>
       <p:sp>
         <p:nvSpPr>
-          <p:cNvPr id="12" name="Text 10"/>
+          <p:cNvPr id="13" name="Text 10"/>
           <p:cNvSpPr/>
           <p:nvPr/>
         </p:nvSpPr>

--- a/docs/presentation/cloud-holdem-발표.pptx
+++ b/docs/presentation/cloud-holdem-발표.pptx
@@ -19,9 +19,10 @@
     <p:sldId id="267" r:id="rId13"/>
     <p:sldId id="268" r:id="rId14"/>
     <p:sldId id="269" r:id="rId15"/>
+    <p:sldId id="270" r:id="rId16"/>
   </p:sldIdLst>
   <p:notesMasterIdLst>
-    <p:notesMasterId r:id="rId16"/>
+    <p:notesMasterId r:id="rId17"/>
   </p:notesMasterIdLst>
   <p:sldSz cx="12188952" cy="6858000"/>
   <p:notesSz cx="6858000" cy="12188952"/>
@@ -604,10 +605,11 @@
           <a:p>
             <a:r>
               <a:rPr lang="en-US" dirty="0"/>
-              <a:t>보안은 최소 권한 원칙으로 설계했습니다.
-보안 그룹을 IP가 아닌 "보안 그룹 참조"로 체인을 만들었습니다. ALB는 인터넷에서 80만, EC2는 ALB에서 오는 3001만, Redis는 EC2에서 오는 6379만 받습니다. 즉 Redis는 인터넷에서 아예 도달이 불가능합니다.
-IAM은 역할을 3종으로 분리했습니다. 컨테이너가 쓰는 Task Role은 S3 쓰기만, Execution Role은 ECR pull과 로그만, Instance Role은 ECS 등록만 가능합니다.
-작업용 IAM 사용자 권한도 필요한 액션만 점진적으로 추가했는데, 예를 들어 ALB 생성이 ec2:DescribeAccountAttributes라는 숨은 권한을 요구해서 실패 메시지를 분석해 추가한 경험도 있었습니다.</a:t>
+              <a:t>오토스케일링은 2단 구조입니다.
+1단은 서비스 레벨 — 태스크의 평균 CPU가 70%를 넘으면 ECS가 태스크 수를 2개에서 최대 8개까지 늘립니다.
+2단은 인프라 레벨 — 늘어난 태스크가 들어갈 EC2 자리가 부족하면, Capacity Provider가 ASG를 조정해 EC2 자체를 2대에서 4대까지 증설합니다.
+오른쪽 흐름처럼 트래픽 증가 → 태스크 증설 → 자리 부족 → EC2 증설이 전부 자동입니다.
+반대로 한가해지면 역순으로 줄어들고, 실습 중에는 비용 절약을 위해 desired를 0으로 내려두기도 했습니다.</a:t>
             </a:r>
             <a:endParaRPr lang="en-US" dirty="0"/>
           </a:p>
@@ -695,10 +697,10 @@
           <a:p>
             <a:r>
               <a:rPr lang="en-US" dirty="0"/>
-              <a:t>"되는 것 같다"가 아니라 증명을 목표로 검증했습니다.
-게임 엔진과 Redis 로직에 단위·통합 테스트 44개를 TDD로 작성했고, Playwright로 실제 브라우저 4개를 자동 조작해 로컬 풀 게임을 완주시켰습니다.
-가장 의미 있는 건 프로덕션 E2E입니다 — ALB를 거쳐 4개 클라이언트가 서로 다른 태스크에 분산된 상태로 쇼다운까지 완주해서, 분산 환경 설계가 실제로 동작함을 확인했습니다.
-TDD 과정에서 베팅 라운드가 끝나지 않는 버그, 턴 타이머가 영원히 발동하지 않는 버그 같은 치명적 결함들을 배포 전에 잡았습니다.</a:t>
+              <a:t>보안은 최소 권한 원칙으로 설계했습니다.
+보안 그룹을 IP가 아닌 "보안 그룹 참조"로 체인을 만들었습니다. ALB는 인터넷에서 80만, EC2는 ALB에서 오는 3001만, Redis는 EC2에서 오는 6379만 받습니다. 즉 Redis는 인터넷에서 아예 도달이 불가능합니다.
+IAM은 역할을 3종으로 분리했습니다. 컨테이너가 쓰는 Task Role은 S3 쓰기만, Execution Role은 ECR pull과 로그만, Instance Role은 ECS 등록만 가능합니다.
+작업용 IAM 사용자 권한도 필요한 액션만 점진적으로 추가했는데, 예를 들어 ALB 생성이 ec2:DescribeAccountAttributes라는 숨은 권한을 요구해서 실패 메시지를 분석해 추가한 경험도 있었습니다.</a:t>
             </a:r>
             <a:endParaRPr lang="en-US" dirty="0"/>
           </a:p>
@@ -786,10 +788,10 @@
           <a:p>
             <a:r>
               <a:rPr lang="en-US" dirty="0"/>
-              <a:t>실제 게임 화면입니다.
-왼쪽이 로비 — 닉네임 입력 후 방을 만들거나 열린 방에 입장합니다. 4명이 모이면 5초 카운트다운 후 자동 시작됩니다.
-오른쪽이 게임 테이블 — 내 카드만 보이고 상대 카드는 가려집니다. 블라인드가 자동 차감되고, 자기 턴에만 액션 버튼과 20초 타이머가 표시됩니다.
-쇼다운이 끝나면 칩이 정산되고 다음 핸드가 자동으로 시작됩니다.</a:t>
+              <a:t>"되는 것 같다"가 아니라 증명을 목표로 검증했습니다.
+게임 엔진과 Redis 로직에 단위·통합 테스트 44개를 TDD로 작성했고, Playwright로 실제 브라우저 4개를 자동 조작해 로컬 풀 게임을 완주시켰습니다.
+가장 의미 있는 건 프로덕션 E2E입니다 — ALB를 거쳐 4개 클라이언트가 서로 다른 태스크에 분산된 상태로 쇼다운까지 완주해서, 분산 환경 설계가 실제로 동작함을 확인했습니다.
+TDD 과정에서 베팅 라운드가 끝나지 않는 버그, 턴 타이머가 영원히 발동하지 않는 버그 같은 치명적 결함들을 배포 전에 잡았습니다.</a:t>
             </a:r>
             <a:endParaRPr lang="en-US" dirty="0"/>
           </a:p>
@@ -877,10 +879,10 @@
           <a:p>
             <a:r>
               <a:rPr lang="en-US" dirty="0"/>
-              <a:t>이제 라이브로 보여드리겠습니다. (미리 띄워둔 탭 4개로 전환)
-순서: ① 탭 4개 접속 ② 첫 탭에서 방 만들기 ③ 나머지 입장, 카운트다운 확인 ④ 콜/체크로 빠르게 한 바퀴 돌려 플랍 공개 ⑤ 시간 여유가 있으면 탭 하나를 방치해 20초 auto-fold 시연 ⑥ 쇼다운과 칩 정산.
-* 만약 네트워크 문제가 생기면 당황하지 말고 "준비된 화면으로 대체하겠습니다" 하고 앞의 스크린샷 슬라이드로 돌아갈 것.
-* 발표 전 체크: ASG 2대 켜두기, 헬스체크 green, S3 배포 확인.</a:t>
+              <a:t>실제 게임 화면입니다.
+왼쪽이 로비 — 닉네임 입력 후 방을 만들거나 열린 방에 입장합니다. 4명이 모이면 5초 카운트다운 후 자동 시작됩니다.
+오른쪽이 게임 테이블 — 내 카드만 보이고 상대 카드는 가려집니다. 블라인드가 자동 차감되고, 자기 턴에만 액션 버튼과 20초 타이머가 표시됩니다.
+쇼다운이 끝나면 칩이 정산되고 다음 핸드가 자동으로 시작됩니다.</a:t>
             </a:r>
             <a:endParaRPr lang="en-US" dirty="0"/>
           </a:p>
@@ -968,10 +970,10 @@
           <a:p>
             <a:r>
               <a:rPr lang="en-US" dirty="0"/>
-              <a:t>마지막으로 비용입니다.
-EC2 t3.small 2대, ElastiCache, ALB를 합쳐 월 약 78달러 수준입니다. EKS로 갔다면 여기에 컨트롤 플레인 73달러가 추가됐을 겁니다.
-이번 프로젝트에서 배운 것은 — Stateless 설계와 외부 상태 저장소가 수평 확장의 열쇠라는 것, 관리형 서비스 통합이 운영 부담을 크게 줄여준다는 것, 최소 권한은 불편하지만 그 실패 메시지들이 곧 산 문서가 된다는 것, 그리고 안 쓸 때 끄는 습관이 클라우드 비용 관리의 시작이라는 점입니다.
-이상으로 발표를 마치겠습니다. 감사합니다. 질문 받겠습니다.</a:t>
+              <a:t>이제 라이브로 보여드리겠습니다. (미리 띄워둔 탭 4개로 전환)
+순서: ① 탭 4개 접속 ② 첫 탭에서 방 만들기 ③ 나머지 입장, 카운트다운 확인 ④ 콜/체크로 빠르게 한 바퀴 돌려 플랍 공개 ⑤ 시간 여유가 있으면 탭 하나를 방치해 20초 auto-fold 시연 ⑥ 쇼다운과 칩 정산.
+* 만약 네트워크 문제가 생기면 당황하지 말고 "준비된 화면으로 대체하겠습니다" 하고 앞의 스크린샷 슬라이드로 돌아갈 것.
+* 발표 전 체크: ASG 2대 켜두기, 헬스체크 green, S3 배포 확인.</a:t>
             </a:r>
             <a:endParaRPr lang="en-US" dirty="0"/>
           </a:p>
@@ -995,6 +997,97 @@
             <a:fld id="{F7021451-1387-4CA6-816F-3879F97B5CBC}" type="slidenum">
               <a:rPr lang="en-US"/>
               <a:t>14</a:t>
+            </a:fld>
+            <a:endParaRPr lang="en-US"/>
+          </a:p>
+        </p:txBody>
+      </p:sp>
+    </p:spTree>
+    <p:extLst>
+      <p:ext uri="{BB962C8B-B14F-4D97-AF65-F5344CB8AC3E}">
+        <p14:creationId xmlns:p14="http://schemas.microsoft.com/office/powerpoint/2010/main" val="1024086991"/>
+      </p:ext>
+    </p:extLst>
+  </p:cSld>
+  <p:clrMapOvr>
+    <a:masterClrMapping/>
+  </p:clrMapOvr>
+</p:notes>
+</file>
+
+<file path=ppt/notesSlides/notesSlide15.xml><?xml version="1.0" encoding="utf-8"?>
+<p:notes xmlns:a="http://schemas.openxmlformats.org/drawingml/2006/main" xmlns:r="http://schemas.openxmlformats.org/officeDocument/2006/relationships" xmlns:p="http://schemas.openxmlformats.org/presentationml/2006/main">
+  <p:cSld>
+    <p:spTree>
+      <p:nvGrpSpPr>
+        <p:cNvPr id="1" name=""/>
+        <p:cNvGrpSpPr/>
+        <p:nvPr/>
+      </p:nvGrpSpPr>
+      <p:grpSpPr>
+        <a:xfrm>
+          <a:off x="0" y="0"/>
+          <a:ext cx="0" cy="0"/>
+          <a:chOff x="0" y="0"/>
+          <a:chExt cx="0" cy="0"/>
+        </a:xfrm>
+      </p:grpSpPr>
+      <p:sp>
+        <p:nvSpPr>
+          <p:cNvPr id="2" name="Slide Image Placeholder 1"/>
+          <p:cNvSpPr>
+            <a:spLocks noGrp="1" noRot="1" noChangeAspect="1"/>
+          </p:cNvSpPr>
+          <p:nvPr>
+            <p:ph type="sldImg"/>
+          </p:nvPr>
+        </p:nvSpPr>
+        <p:spPr/>
+      </p:sp>
+      <p:sp>
+        <p:nvSpPr>
+          <p:cNvPr id="3" name="Notes Placeholder 2"/>
+          <p:cNvSpPr>
+            <a:spLocks noGrp="1"/>
+          </p:cNvSpPr>
+          <p:nvPr>
+            <p:ph type="body" idx="1"/>
+          </p:nvPr>
+        </p:nvSpPr>
+        <p:spPr/>
+        <p:txBody>
+          <a:bodyPr/>
+          <a:lstStyle/>
+          <a:p>
+            <a:r>
+              <a:rPr lang="en-US" dirty="0"/>
+              <a:t>마지막으로 비용입니다.
+EC2 t3.small 2대, ElastiCache, ALB를 합쳐 월 약 78달러 수준입니다. EKS로 갔다면 여기에 컨트롤 플레인 73달러가 추가됐을 겁니다.
+이번 프로젝트에서 배운 것은 — Stateless 설계와 외부 상태 저장소가 수평 확장의 열쇠라는 것, 관리형 서비스 통합이 운영 부담을 크게 줄여준다는 것, 최소 권한은 불편하지만 그 실패 메시지들이 곧 산 문서가 된다는 것, 그리고 안 쓸 때 끄는 습관이 클라우드 비용 관리의 시작이라는 점입니다.
+이상으로 발표를 마치겠습니다. 감사합니다. 질문 받겠습니다.</a:t>
+            </a:r>
+            <a:endParaRPr lang="en-US" dirty="0"/>
+          </a:p>
+        </p:txBody>
+      </p:sp>
+      <p:sp>
+        <p:nvSpPr>
+          <p:cNvPr id="4" name="Slide Number Placeholder 3"/>
+          <p:cNvSpPr>
+            <a:spLocks noGrp="1"/>
+          </p:cNvSpPr>
+          <p:nvPr>
+            <p:ph type="sldNum" sz="quarter" idx="10"/>
+          </p:nvPr>
+        </p:nvSpPr>
+        <p:spPr/>
+        <p:txBody>
+          <a:bodyPr/>
+          <a:lstStyle/>
+          <a:p>
+            <a:fld id="{F7021451-1387-4CA6-816F-3879F97B5CBC}" type="slidenum">
+              <a:rPr lang="en-US"/>
+              <a:t>15</a:t>
             </a:fld>
             <a:endParaRPr lang="en-US"/>
           </a:p>
@@ -1702,11 +1795,10 @@
           <a:p>
             <a:r>
               <a:rPr lang="en-US" dirty="0"/>
-              <a:t>오토스케일링은 2단 구조입니다.
-1단은 서비스 레벨 — 태스크의 평균 CPU가 70%를 넘으면 ECS가 태스크 수를 2개에서 최대 8개까지 늘립니다.
-2단은 인프라 레벨 — 늘어난 태스크가 들어갈 EC2 자리가 부족하면, Capacity Provider가 ASG를 조정해 EC2 자체를 2대에서 4대까지 증설합니다.
-오른쪽 흐름처럼 트래픽 증가 → 태스크 증설 → 자리 부족 → EC2 증설이 전부 자동입니다.
-반대로 한가해지면 역순으로 줄어들고, 실습 중에는 비용 절약을 위해 desired를 0으로 내려두기도 했습니다.</a:t>
+              <a:t>스토리지는 S3 버킷 두 개로 역할을 나눴습니다.
+버킷 A는 React 정적 호스팅입니다. 웹서버 없이 S3 정적 웹사이트 호스팅만으로 프론트엔드를 서빙하고, 버킷 정책으로 GetObject만 퍼블릭에 허용했습니다. 빌드할 때 ALB 주소를 환경변수로 주입하고, 배포는 aws s3 sync 한 줄입니다.
+버킷 B는 게임 히스토리입니다. 게임이 끝나면 승자와 플레이어별 최종 칩을 JSON으로 저장합니다. 컨테이너의 Task Role에는 이 버킷에 대한 PutObject 권한만 줘서 최소 권한을 지켰고, 저장이 실패해도 게임 흐름은 막지 않습니다.
+정리하면 Redis는 "지금 진행 중인 상태", S3는 "끝난 게임의 영구 기록" — 핫 데이터와 콜드 데이터를 분리한 구조입니다.</a:t>
             </a:r>
             <a:endParaRPr lang="en-US" dirty="0"/>
           </a:p>
@@ -2300,7 +2392,7 @@
                 <a:ea typeface="Noto Sans KR" pitchFamily="34" charset="-122"/>
                 <a:cs typeface="Noto Sans KR" pitchFamily="34" charset="-120"/>
               </a:rPr>
-              <a:t>09 — SECURITY</a:t>
+              <a:t>09 — AUTO SCALING</a:t>
             </a:r>
             <a:endParaRPr lang="en-US" sz="1300" dirty="0"/>
           </a:p>
@@ -2339,7 +2431,7 @@
                 <a:ea typeface="Noto Sans KR" pitchFamily="34" charset="-122"/>
                 <a:cs typeface="Noto Sans KR" pitchFamily="34" charset="-120"/>
               </a:rPr>
-              <a:t>최소 권한 설계</a:t>
+              <a:t>2단 Auto Scaling</a:t>
             </a:r>
             <a:endParaRPr lang="en-US" sz="3000" dirty="0"/>
           </a:p>
@@ -2354,11 +2446,159 @@
         <p:spPr>
           <a:xfrm>
             <a:off x="640080" y="1645920"/>
-            <a:ext cx="10972800" cy="822960"/>
+            <a:ext cx="5394960" cy="2103120"/>
           </a:xfrm>
           <a:prstGeom prst="roundRect">
             <a:avLst>
-              <a:gd name="adj" fmla="val 11111"/>
+              <a:gd name="adj" fmla="val 5217"/>
+            </a:avLst>
+          </a:prstGeom>
+          <a:solidFill>
+            <a:srgbClr val="111120"/>
+          </a:solidFill>
+          <a:ln w="12700">
+            <a:solidFill>
+              <a:srgbClr val="22D3EE"/>
+            </a:solidFill>
+            <a:prstDash val="solid"/>
+          </a:ln>
+        </p:spPr>
+      </p:sp>
+      <p:sp>
+        <p:nvSpPr>
+          <p:cNvPr id="6" name="Text 3"/>
+          <p:cNvSpPr/>
+          <p:nvPr/>
+        </p:nvSpPr>
+        <p:spPr>
+          <a:xfrm>
+            <a:off x="868680" y="1783080"/>
+            <a:ext cx="4937760" cy="365760"/>
+          </a:xfrm>
+          <a:prstGeom prst="rect">
+            <a:avLst/>
+          </a:prstGeom>
+          <a:noFill/>
+          <a:ln/>
+        </p:spPr>
+        <p:txBody>
+          <a:bodyPr wrap="square" rtlCol="0" anchor="ctr"/>
+          <a:lstStyle/>
+          <a:p>
+            <a:pPr indent="0" marL="0">
+              <a:buNone/>
+            </a:pPr>
+            <a:r>
+              <a:rPr lang="en-US" sz="1300" b="1" spc="200" kern="0" dirty="0">
+                <a:solidFill>
+                  <a:srgbClr val="22D3EE"/>
+                </a:solidFill>
+                <a:latin typeface="Noto Sans KR" pitchFamily="34" charset="0"/>
+                <a:ea typeface="Noto Sans KR" pitchFamily="34" charset="-122"/>
+                <a:cs typeface="Noto Sans KR" pitchFamily="34" charset="-120"/>
+              </a:rPr>
+              <a:t>① 서비스 레벨 (App Auto Scaling)</a:t>
+            </a:r>
+            <a:endParaRPr lang="en-US" sz="1300" dirty="0"/>
+          </a:p>
+        </p:txBody>
+      </p:sp>
+      <p:sp>
+        <p:nvSpPr>
+          <p:cNvPr id="7" name="Text 4"/>
+          <p:cNvSpPr/>
+          <p:nvPr/>
+        </p:nvSpPr>
+        <p:spPr>
+          <a:xfrm>
+            <a:off x="868680" y="2148840"/>
+            <a:ext cx="4937760" cy="1417320"/>
+          </a:xfrm>
+          <a:prstGeom prst="rect">
+            <a:avLst/>
+          </a:prstGeom>
+          <a:noFill/>
+          <a:ln/>
+        </p:spPr>
+        <p:txBody>
+          <a:bodyPr wrap="square" rtlCol="0" anchor="t"/>
+          <a:lstStyle/>
+          <a:p>
+            <a:pPr indent="0" marL="0">
+              <a:lnSpc>
+                <a:spcPct val="135000"/>
+              </a:lnSpc>
+              <a:buNone/>
+            </a:pPr>
+            <a:r>
+              <a:rPr lang="en-US" sz="1450" dirty="0">
+                <a:solidFill>
+                  <a:srgbClr val="E7E9FF"/>
+                </a:solidFill>
+                <a:latin typeface="Noto Sans KR" pitchFamily="34" charset="0"/>
+                <a:ea typeface="Noto Sans KR" pitchFamily="34" charset="-122"/>
+                <a:cs typeface="Noto Sans KR" pitchFamily="34" charset="-120"/>
+              </a:rPr>
+              <a:t>• ECS Service 태스크 수: 2 ~ 8개</a:t>
+            </a:r>
+            <a:endParaRPr lang="en-US" sz="1450" dirty="0"/>
+          </a:p>
+          <a:p>
+            <a:pPr indent="0" marL="0">
+              <a:lnSpc>
+                <a:spcPct val="135000"/>
+              </a:lnSpc>
+              <a:buNone/>
+            </a:pPr>
+            <a:r>
+              <a:rPr lang="en-US" sz="1450" dirty="0">
+                <a:solidFill>
+                  <a:srgbClr val="E7E9FF"/>
+                </a:solidFill>
+                <a:latin typeface="Noto Sans KR" pitchFamily="34" charset="0"/>
+                <a:ea typeface="Noto Sans KR" pitchFamily="34" charset="-122"/>
+                <a:cs typeface="Noto Sans KR" pitchFamily="34" charset="-120"/>
+              </a:rPr>
+              <a:t>• CPU 70% 타깃 트래킹</a:t>
+            </a:r>
+            <a:endParaRPr lang="en-US" sz="1450" dirty="0"/>
+          </a:p>
+          <a:p>
+            <a:pPr indent="0" marL="0">
+              <a:lnSpc>
+                <a:spcPct val="135000"/>
+              </a:lnSpc>
+              <a:buNone/>
+            </a:pPr>
+            <a:r>
+              <a:rPr lang="en-US" sz="1450" dirty="0">
+                <a:solidFill>
+                  <a:srgbClr val="E7E9FF"/>
+                </a:solidFill>
+                <a:latin typeface="Noto Sans KR" pitchFamily="34" charset="0"/>
+                <a:ea typeface="Noto Sans KR" pitchFamily="34" charset="-122"/>
+                <a:cs typeface="Noto Sans KR" pitchFamily="34" charset="-120"/>
+              </a:rPr>
+              <a:t>• scale-out 60s / scale-in 300s 쿨다운</a:t>
+            </a:r>
+            <a:endParaRPr lang="en-US" sz="1450" dirty="0"/>
+          </a:p>
+        </p:txBody>
+      </p:sp>
+      <p:sp>
+        <p:nvSpPr>
+          <p:cNvPr id="8" name="Shape 5"/>
+          <p:cNvSpPr/>
+          <p:nvPr/>
+        </p:nvSpPr>
+        <p:spPr>
+          <a:xfrm>
+            <a:off x="640080" y="3931920"/>
+            <a:ext cx="5394960" cy="2194560"/>
+          </a:xfrm>
+          <a:prstGeom prst="roundRect">
+            <a:avLst>
+              <a:gd name="adj" fmla="val 5000"/>
             </a:avLst>
           </a:prstGeom>
           <a:solidFill>
@@ -2374,14 +2614,14 @@
       </p:sp>
       <p:sp>
         <p:nvSpPr>
-          <p:cNvPr id="6" name="Text 3"/>
+          <p:cNvPr id="9" name="Text 6"/>
           <p:cNvSpPr/>
           <p:nvPr/>
         </p:nvSpPr>
         <p:spPr>
           <a:xfrm>
-            <a:off x="822960" y="1691640"/>
-            <a:ext cx="10607040" cy="731520"/>
+            <a:off x="868680" y="4069080"/>
+            <a:ext cx="4937760" cy="365760"/>
           </a:xfrm>
           <a:prstGeom prst="rect">
             <a:avLst/>
@@ -2393,11 +2633,11 @@
           <a:bodyPr wrap="square" rtlCol="0" anchor="ctr"/>
           <a:lstStyle/>
           <a:p>
-            <a:pPr algn="ctr" indent="0" marL="0">
-              <a:buNone/>
-            </a:pPr>
-            <a:r>
-              <a:rPr lang="en-US" sz="1700" b="1" dirty="0">
+            <a:pPr indent="0" marL="0">
+              <a:buNone/>
+            </a:pPr>
+            <a:r>
+              <a:rPr lang="en-US" sz="1300" b="1" spc="200" kern="0" dirty="0">
                 <a:solidFill>
                   <a:srgbClr val="A78BFA"/>
                 </a:solidFill>
@@ -2405,92 +2645,22 @@
                 <a:ea typeface="Noto Sans KR" pitchFamily="34" charset="-122"/>
                 <a:cs typeface="Noto Sans KR" pitchFamily="34" charset="-120"/>
               </a:rPr>
-              <a:t>🔒 ALB-SG</a:t>
-            </a:r>
-            <a:pPr algn="ctr" indent="0" marL="0">
-              <a:buNone/>
-            </a:pPr>
-            <a:r>
-              <a:rPr lang="en-US" sz="1700" dirty="0">
-                <a:solidFill>
-                  <a:srgbClr val="8B8FB8"/>
-                </a:solidFill>
-                <a:latin typeface="Noto Sans KR" pitchFamily="34" charset="0"/>
-                <a:ea typeface="Noto Sans KR" pitchFamily="34" charset="-122"/>
-                <a:cs typeface="Noto Sans KR" pitchFamily="34" charset="-120"/>
-              </a:rPr>
-              <a:t> (80←인터넷)  →  </a:t>
-            </a:r>
-            <a:pPr algn="ctr" indent="0" marL="0">
-              <a:buNone/>
-            </a:pPr>
-            <a:r>
-              <a:rPr lang="en-US" sz="1700" b="1" dirty="0">
-                <a:solidFill>
-                  <a:srgbClr val="22D3EE"/>
-                </a:solidFill>
-                <a:latin typeface="Noto Sans KR" pitchFamily="34" charset="0"/>
-                <a:ea typeface="Noto Sans KR" pitchFamily="34" charset="-122"/>
-                <a:cs typeface="Noto Sans KR" pitchFamily="34" charset="-120"/>
-              </a:rPr>
-              <a:t>EC2-SG</a:t>
-            </a:r>
-            <a:pPr algn="ctr" indent="0" marL="0">
-              <a:buNone/>
-            </a:pPr>
-            <a:r>
-              <a:rPr lang="en-US" sz="1700" dirty="0">
-                <a:solidFill>
-                  <a:srgbClr val="8B8FB8"/>
-                </a:solidFill>
-                <a:latin typeface="Noto Sans KR" pitchFamily="34" charset="0"/>
-                <a:ea typeface="Noto Sans KR" pitchFamily="34" charset="-122"/>
-                <a:cs typeface="Noto Sans KR" pitchFamily="34" charset="-120"/>
-              </a:rPr>
-              <a:t> (3001←ALB만)  →  </a:t>
-            </a:r>
-            <a:pPr algn="ctr" indent="0" marL="0">
-              <a:buNone/>
-            </a:pPr>
-            <a:r>
-              <a:rPr lang="en-US" sz="1700" b="1" dirty="0">
-                <a:solidFill>
-                  <a:srgbClr val="EF4444"/>
-                </a:solidFill>
-                <a:latin typeface="Noto Sans KR" pitchFamily="34" charset="0"/>
-                <a:ea typeface="Noto Sans KR" pitchFamily="34" charset="-122"/>
-                <a:cs typeface="Noto Sans KR" pitchFamily="34" charset="-120"/>
-              </a:rPr>
-              <a:t>Redis-SG</a:t>
-            </a:r>
-            <a:pPr algn="ctr" indent="0" marL="0">
-              <a:buNone/>
-            </a:pPr>
-            <a:r>
-              <a:rPr lang="en-US" sz="1700" dirty="0">
-                <a:solidFill>
-                  <a:srgbClr val="8B8FB8"/>
-                </a:solidFill>
-                <a:latin typeface="Noto Sans KR" pitchFamily="34" charset="0"/>
-                <a:ea typeface="Noto Sans KR" pitchFamily="34" charset="-122"/>
-                <a:cs typeface="Noto Sans KR" pitchFamily="34" charset="-120"/>
-              </a:rPr>
-              <a:t> (6379←EC2만)</a:t>
-            </a:r>
-            <a:endParaRPr lang="en-US" sz="1700" dirty="0"/>
-          </a:p>
-        </p:txBody>
-      </p:sp>
-      <p:sp>
-        <p:nvSpPr>
-          <p:cNvPr id="7" name="Text 4"/>
+              <a:t>② 인프라 레벨 (Capacity Provider)</a:t>
+            </a:r>
+            <a:endParaRPr lang="en-US" sz="1300" dirty="0"/>
+          </a:p>
+        </p:txBody>
+      </p:sp>
+      <p:sp>
+        <p:nvSpPr>
+          <p:cNvPr id="10" name="Text 7"/>
           <p:cNvSpPr/>
           <p:nvPr/>
         </p:nvSpPr>
         <p:spPr>
           <a:xfrm>
-            <a:off x="640080" y="2743200"/>
-            <a:ext cx="10972800" cy="4572000"/>
+            <a:off x="868680" y="4434840"/>
+            <a:ext cx="4937760" cy="1508760"/>
           </a:xfrm>
           <a:prstGeom prst="rect">
             <a:avLst/>
@@ -2504,29 +2674,12 @@
           <a:p>
             <a:pPr indent="0" marL="0">
               <a:lnSpc>
-                <a:spcPct val="145000"/>
-              </a:lnSpc>
-              <a:buNone/>
-            </a:pPr>
-            <a:r>
-              <a:rPr lang="en-US" sz="1300" dirty="0">
-                <a:solidFill>
-                  <a:srgbClr val="22D3EE"/>
-                </a:solidFill>
-                <a:latin typeface="Noto Sans KR" pitchFamily="34" charset="0"/>
-                <a:ea typeface="Noto Sans KR" pitchFamily="34" charset="-122"/>
-                <a:cs typeface="Noto Sans KR" pitchFamily="34" charset="-120"/>
-              </a:rPr>
-              <a:t>◆ </a:t>
-            </a:r>
-            <a:pPr indent="0" marL="0">
-              <a:lnSpc>
-                <a:spcPct val="145000"/>
-              </a:lnSpc>
-              <a:buNone/>
-            </a:pPr>
-            <a:r>
-              <a:rPr lang="en-US" sz="1600" b="1" dirty="0">
+                <a:spcPct val="135000"/>
+              </a:lnSpc>
+              <a:buNone/>
+            </a:pPr>
+            <a:r>
+              <a:rPr lang="en-US" sz="1450" dirty="0">
                 <a:solidFill>
                   <a:srgbClr val="E7E9FF"/>
                 </a:solidFill>
@@ -2534,68 +2687,19 @@
                 <a:ea typeface="Noto Sans KR" pitchFamily="34" charset="-122"/>
                 <a:cs typeface="Noto Sans KR" pitchFamily="34" charset="-120"/>
               </a:rPr>
-              <a:t>보안 그룹 참조 체인</a:t>
-            </a:r>
-            <a:pPr indent="0" marL="0">
-              <a:lnSpc>
-                <a:spcPct val="145000"/>
-              </a:lnSpc>
-              <a:buNone/>
-            </a:pPr>
-            <a:r>
-              <a:rPr lang="en-US" sz="1350" dirty="0">
-                <a:solidFill>
-                  <a:srgbClr val="8B8FB8"/>
-                </a:solidFill>
-                <a:latin typeface="Noto Sans KR" pitchFamily="34" charset="0"/>
-                <a:ea typeface="Noto Sans KR" pitchFamily="34" charset="-122"/>
-                <a:cs typeface="Noto Sans KR" pitchFamily="34" charset="-120"/>
-              </a:rPr>
-              <a:t>  — IP가 아닌 SG 참조로 제한. Redis는 인터넷에서 도달 불가</a:t>
-            </a:r>
-            <a:pPr indent="0" marL="0">
-              <a:lnSpc>
-                <a:spcPct val="145000"/>
-              </a:lnSpc>
-              <a:buNone/>
-            </a:pPr>
-            <a:r>
-              <a:rPr lang="en-US" sz="1300" dirty="0">
-                <a:solidFill>
-                  <a:srgbClr val="000000"/>
-                </a:solidFill>
-                <a:latin typeface="Noto Sans KR" pitchFamily="34" charset="0"/>
-                <a:ea typeface="Noto Sans KR" pitchFamily="34" charset="-122"/>
-                <a:cs typeface="Noto Sans KR" pitchFamily="34" charset="-120"/>
-              </a:rPr>
-              <a:t>
-</a:t>
-            </a:r>
-            <a:pPr indent="0" marL="0">
-              <a:lnSpc>
-                <a:spcPct val="145000"/>
-              </a:lnSpc>
-              <a:buNone/>
-            </a:pPr>
-            <a:r>
-              <a:rPr lang="en-US" sz="1300" dirty="0">
-                <a:solidFill>
-                  <a:srgbClr val="22D3EE"/>
-                </a:solidFill>
-                <a:latin typeface="Noto Sans KR" pitchFamily="34" charset="0"/>
-                <a:ea typeface="Noto Sans KR" pitchFamily="34" charset="-122"/>
-                <a:cs typeface="Noto Sans KR" pitchFamily="34" charset="-120"/>
-              </a:rPr>
-              <a:t>◆ </a:t>
-            </a:r>
-            <a:pPr indent="0" marL="0">
-              <a:lnSpc>
-                <a:spcPct val="145000"/>
-              </a:lnSpc>
-              <a:buNone/>
-            </a:pPr>
-            <a:r>
-              <a:rPr lang="en-US" sz="1600" b="1" dirty="0">
+              <a:t>• ASG: t3.small 2 ~ 4대</a:t>
+            </a:r>
+            <a:endParaRPr lang="en-US" sz="1450" dirty="0"/>
+          </a:p>
+          <a:p>
+            <a:pPr indent="0" marL="0">
+              <a:lnSpc>
+                <a:spcPct val="135000"/>
+              </a:lnSpc>
+              <a:buNone/>
+            </a:pPr>
+            <a:r>
+              <a:rPr lang="en-US" sz="1450" dirty="0">
                 <a:solidFill>
                   <a:srgbClr val="E7E9FF"/>
                 </a:solidFill>
@@ -2603,68 +2707,19 @@
                 <a:ea typeface="Noto Sans KR" pitchFamily="34" charset="-122"/>
                 <a:cs typeface="Noto Sans KR" pitchFamily="34" charset="-120"/>
               </a:rPr>
-              <a:t>IAM 역할 3종 분리</a:t>
-            </a:r>
-            <a:pPr indent="0" marL="0">
-              <a:lnSpc>
-                <a:spcPct val="145000"/>
-              </a:lnSpc>
-              <a:buNone/>
-            </a:pPr>
-            <a:r>
-              <a:rPr lang="en-US" sz="1350" dirty="0">
-                <a:solidFill>
-                  <a:srgbClr val="8B8FB8"/>
-                </a:solidFill>
-                <a:latin typeface="Noto Sans KR" pitchFamily="34" charset="0"/>
-                <a:ea typeface="Noto Sans KR" pitchFamily="34" charset="-122"/>
-                <a:cs typeface="Noto Sans KR" pitchFamily="34" charset="-120"/>
-              </a:rPr>
-              <a:t>  — Task Role(S3 쓰기만) / Execution Role(ECR pull·로그) / Instance Role(ECS 등록)</a:t>
-            </a:r>
-            <a:pPr indent="0" marL="0">
-              <a:lnSpc>
-                <a:spcPct val="145000"/>
-              </a:lnSpc>
-              <a:buNone/>
-            </a:pPr>
-            <a:r>
-              <a:rPr lang="en-US" sz="1300" dirty="0">
-                <a:solidFill>
-                  <a:srgbClr val="000000"/>
-                </a:solidFill>
-                <a:latin typeface="Noto Sans KR" pitchFamily="34" charset="0"/>
-                <a:ea typeface="Noto Sans KR" pitchFamily="34" charset="-122"/>
-                <a:cs typeface="Noto Sans KR" pitchFamily="34" charset="-120"/>
-              </a:rPr>
-              <a:t>
-</a:t>
-            </a:r>
-            <a:pPr indent="0" marL="0">
-              <a:lnSpc>
-                <a:spcPct val="145000"/>
-              </a:lnSpc>
-              <a:buNone/>
-            </a:pPr>
-            <a:r>
-              <a:rPr lang="en-US" sz="1300" dirty="0">
-                <a:solidFill>
-                  <a:srgbClr val="22D3EE"/>
-                </a:solidFill>
-                <a:latin typeface="Noto Sans KR" pitchFamily="34" charset="0"/>
-                <a:ea typeface="Noto Sans KR" pitchFamily="34" charset="-122"/>
-                <a:cs typeface="Noto Sans KR" pitchFamily="34" charset="-120"/>
-              </a:rPr>
-              <a:t>◆ </a:t>
-            </a:r>
-            <a:pPr indent="0" marL="0">
-              <a:lnSpc>
-                <a:spcPct val="145000"/>
-              </a:lnSpc>
-              <a:buNone/>
-            </a:pPr>
-            <a:r>
-              <a:rPr lang="en-US" sz="1600" b="1" dirty="0">
+              <a:t>• 타깃 capacity 80% — 태스크가 못 들어가면 EC2 자동 증설</a:t>
+            </a:r>
+            <a:endParaRPr lang="en-US" sz="1450" dirty="0"/>
+          </a:p>
+          <a:p>
+            <a:pPr indent="0" marL="0">
+              <a:lnSpc>
+                <a:spcPct val="135000"/>
+              </a:lnSpc>
+              <a:buNone/>
+            </a:pPr>
+            <a:r>
+              <a:rPr lang="en-US" sz="1450" dirty="0">
                 <a:solidFill>
                   <a:srgbClr val="E7E9FF"/>
                 </a:solidFill>
@@ -2672,68 +2727,107 @@
                 <a:ea typeface="Noto Sans KR" pitchFamily="34" charset="-122"/>
                 <a:cs typeface="Noto Sans KR" pitchFamily="34" charset="-120"/>
               </a:rPr>
-              <a:t>IAM 사용자도 최소 권한</a:t>
-            </a:r>
-            <a:pPr indent="0" marL="0">
-              <a:lnSpc>
-                <a:spcPct val="145000"/>
-              </a:lnSpc>
-              <a:buNone/>
-            </a:pPr>
-            <a:r>
-              <a:rPr lang="en-US" sz="1350" dirty="0">
-                <a:solidFill>
-                  <a:srgbClr val="8B8FB8"/>
-                </a:solidFill>
-                <a:latin typeface="Noto Sans KR" pitchFamily="34" charset="0"/>
-                <a:ea typeface="Noto Sans KR" pitchFamily="34" charset="-122"/>
-                <a:cs typeface="Noto Sans KR" pitchFamily="34" charset="-120"/>
-              </a:rPr>
-              <a:t>  — 필요한 액션만 명시한 정책 파일을 관리하며 점진적으로 요청</a:t>
-            </a:r>
-            <a:pPr indent="0" marL="0">
-              <a:lnSpc>
-                <a:spcPct val="145000"/>
-              </a:lnSpc>
-              <a:buNone/>
-            </a:pPr>
-            <a:r>
-              <a:rPr lang="en-US" sz="1300" dirty="0">
-                <a:solidFill>
-                  <a:srgbClr val="000000"/>
-                </a:solidFill>
-                <a:latin typeface="Noto Sans KR" pitchFamily="34" charset="0"/>
-                <a:ea typeface="Noto Sans KR" pitchFamily="34" charset="-122"/>
-                <a:cs typeface="Noto Sans KR" pitchFamily="34" charset="-120"/>
-              </a:rPr>
-              <a:t>
-</a:t>
-            </a:r>
-            <a:pPr indent="0" marL="0">
-              <a:lnSpc>
-                <a:spcPct val="145000"/>
-              </a:lnSpc>
-              <a:buNone/>
-            </a:pPr>
-            <a:r>
-              <a:rPr lang="en-US" sz="1300" dirty="0">
-                <a:solidFill>
-                  <a:srgbClr val="22D3EE"/>
-                </a:solidFill>
-                <a:latin typeface="Noto Sans KR" pitchFamily="34" charset="0"/>
-                <a:ea typeface="Noto Sans KR" pitchFamily="34" charset="-122"/>
-                <a:cs typeface="Noto Sans KR" pitchFamily="34" charset="-120"/>
-              </a:rPr>
-              <a:t>◆ </a:t>
-            </a:r>
-            <a:pPr indent="0" marL="0">
-              <a:lnSpc>
-                <a:spcPct val="145000"/>
-              </a:lnSpc>
-              <a:buNone/>
-            </a:pPr>
-            <a:r>
-              <a:rPr lang="en-US" sz="1600" b="1" dirty="0">
+              <a:t>• 관리형 스케일링: ECS가 ASG를 직접 조정</a:t>
+            </a:r>
+            <a:endParaRPr lang="en-US" sz="1450" dirty="0"/>
+          </a:p>
+        </p:txBody>
+      </p:sp>
+      <p:sp>
+        <p:nvSpPr>
+          <p:cNvPr id="11" name="Shape 8"/>
+          <p:cNvSpPr/>
+          <p:nvPr/>
+        </p:nvSpPr>
+        <p:spPr>
+          <a:xfrm>
+            <a:off x="6309360" y="1645920"/>
+            <a:ext cx="5394960" cy="4480560"/>
+          </a:xfrm>
+          <a:prstGeom prst="roundRect">
+            <a:avLst>
+              <a:gd name="adj" fmla="val 2449"/>
+            </a:avLst>
+          </a:prstGeom>
+          <a:solidFill>
+            <a:srgbClr val="111120"/>
+          </a:solidFill>
+          <a:ln w="12700">
+            <a:solidFill>
+              <a:srgbClr val="34D399"/>
+            </a:solidFill>
+            <a:prstDash val="solid"/>
+          </a:ln>
+        </p:spPr>
+      </p:sp>
+      <p:sp>
+        <p:nvSpPr>
+          <p:cNvPr id="12" name="Text 9"/>
+          <p:cNvSpPr/>
+          <p:nvPr/>
+        </p:nvSpPr>
+        <p:spPr>
+          <a:xfrm>
+            <a:off x="6537960" y="1783080"/>
+            <a:ext cx="4937760" cy="365760"/>
+          </a:xfrm>
+          <a:prstGeom prst="rect">
+            <a:avLst/>
+          </a:prstGeom>
+          <a:noFill/>
+          <a:ln/>
+        </p:spPr>
+        <p:txBody>
+          <a:bodyPr wrap="square" rtlCol="0" anchor="ctr"/>
+          <a:lstStyle/>
+          <a:p>
+            <a:pPr indent="0" marL="0">
+              <a:buNone/>
+            </a:pPr>
+            <a:r>
+              <a:rPr lang="en-US" sz="1300" b="1" spc="200" kern="0" dirty="0">
+                <a:solidFill>
+                  <a:srgbClr val="34D399"/>
+                </a:solidFill>
+                <a:latin typeface="Noto Sans KR" pitchFamily="34" charset="0"/>
+                <a:ea typeface="Noto Sans KR" pitchFamily="34" charset="-122"/>
+                <a:cs typeface="Noto Sans KR" pitchFamily="34" charset="-120"/>
+              </a:rPr>
+              <a:t>동작 흐름</a:t>
+            </a:r>
+            <a:endParaRPr lang="en-US" sz="1300" dirty="0"/>
+          </a:p>
+        </p:txBody>
+      </p:sp>
+      <p:sp>
+        <p:nvSpPr>
+          <p:cNvPr id="13" name="Text 10"/>
+          <p:cNvSpPr/>
+          <p:nvPr/>
+        </p:nvSpPr>
+        <p:spPr>
+          <a:xfrm>
+            <a:off x="6537960" y="2148840"/>
+            <a:ext cx="4937760" cy="3794760"/>
+          </a:xfrm>
+          <a:prstGeom prst="rect">
+            <a:avLst/>
+          </a:prstGeom>
+          <a:noFill/>
+          <a:ln/>
+        </p:spPr>
+        <p:txBody>
+          <a:bodyPr wrap="square" rtlCol="0" anchor="t"/>
+          <a:lstStyle/>
+          <a:p>
+            <a:pPr indent="0" marL="0">
+              <a:lnSpc>
+                <a:spcPct val="135000"/>
+              </a:lnSpc>
+              <a:buNone/>
+            </a:pPr>
+            <a:r>
+              <a:rPr lang="en-US" sz="1450" dirty="0">
                 <a:solidFill>
                   <a:srgbClr val="E7E9FF"/>
                 </a:solidFill>
@@ -2741,27 +2835,138 @@
                 <a:ea typeface="Noto Sans KR" pitchFamily="34" charset="-122"/>
                 <a:cs typeface="Noto Sans KR" pitchFamily="34" charset="-120"/>
               </a:rPr>
-              <a:t>예: CreateLoadBalancer의 숨은 의존 권한을 실패 → 분석 → 추가로 해결</a:t>
-            </a:r>
-            <a:pPr indent="0" marL="0">
-              <a:lnSpc>
-                <a:spcPct val="145000"/>
-              </a:lnSpc>
-              <a:buNone/>
-            </a:pPr>
-            <a:r>
-              <a:rPr lang="en-US" sz="1300" dirty="0">
-                <a:solidFill>
-                  <a:srgbClr val="000000"/>
-                </a:solidFill>
-                <a:latin typeface="Noto Sans KR" pitchFamily="34" charset="0"/>
-                <a:ea typeface="Noto Sans KR" pitchFamily="34" charset="-122"/>
-                <a:cs typeface="Noto Sans KR" pitchFamily="34" charset="-120"/>
-              </a:rPr>
-              <a:t>
-</a:t>
-            </a:r>
-            <a:endParaRPr lang="en-US" sz="1300" dirty="0"/>
+              <a:t>트래픽 증가</a:t>
+            </a:r>
+            <a:endParaRPr lang="en-US" sz="1450" dirty="0"/>
+          </a:p>
+          <a:p>
+            <a:pPr indent="0" marL="0">
+              <a:lnSpc>
+                <a:spcPct val="135000"/>
+              </a:lnSpc>
+              <a:buNone/>
+            </a:pPr>
+            <a:r>
+              <a:rPr lang="en-US" sz="1450" dirty="0">
+                <a:solidFill>
+                  <a:srgbClr val="E7E9FF"/>
+                </a:solidFill>
+                <a:latin typeface="Noto Sans KR" pitchFamily="34" charset="0"/>
+                <a:ea typeface="Noto Sans KR" pitchFamily="34" charset="-122"/>
+                <a:cs typeface="Noto Sans KR" pitchFamily="34" charset="-120"/>
+              </a:rPr>
+              <a:t>→ 태스크 CPU 70% 초과</a:t>
+            </a:r>
+            <a:endParaRPr lang="en-US" sz="1450" dirty="0"/>
+          </a:p>
+          <a:p>
+            <a:pPr indent="0" marL="0">
+              <a:lnSpc>
+                <a:spcPct val="135000"/>
+              </a:lnSpc>
+              <a:buNone/>
+            </a:pPr>
+            <a:r>
+              <a:rPr lang="en-US" sz="1450" dirty="0">
+                <a:solidFill>
+                  <a:srgbClr val="E7E9FF"/>
+                </a:solidFill>
+                <a:latin typeface="Noto Sans KR" pitchFamily="34" charset="0"/>
+                <a:ea typeface="Noto Sans KR" pitchFamily="34" charset="-122"/>
+                <a:cs typeface="Noto Sans KR" pitchFamily="34" charset="-120"/>
+              </a:rPr>
+              <a:t>→ 태스크 증설 (서비스 레벨)</a:t>
+            </a:r>
+            <a:endParaRPr lang="en-US" sz="1450" dirty="0"/>
+          </a:p>
+          <a:p>
+            <a:pPr indent="0" marL="0">
+              <a:lnSpc>
+                <a:spcPct val="135000"/>
+              </a:lnSpc>
+              <a:buNone/>
+            </a:pPr>
+            <a:r>
+              <a:rPr lang="en-US" sz="1450" dirty="0">
+                <a:solidFill>
+                  <a:srgbClr val="E7E9FF"/>
+                </a:solidFill>
+                <a:latin typeface="Noto Sans KR" pitchFamily="34" charset="0"/>
+                <a:ea typeface="Noto Sans KR" pitchFamily="34" charset="-122"/>
+                <a:cs typeface="Noto Sans KR" pitchFamily="34" charset="-120"/>
+              </a:rPr>
+              <a:t>→ EC2에 빈 자리 부족</a:t>
+            </a:r>
+            <a:endParaRPr lang="en-US" sz="1450" dirty="0"/>
+          </a:p>
+          <a:p>
+            <a:pPr indent="0" marL="0">
+              <a:lnSpc>
+                <a:spcPct val="135000"/>
+              </a:lnSpc>
+              <a:buNone/>
+            </a:pPr>
+            <a:r>
+              <a:rPr lang="en-US" sz="1450" dirty="0">
+                <a:solidFill>
+                  <a:srgbClr val="E7E9FF"/>
+                </a:solidFill>
+                <a:latin typeface="Noto Sans KR" pitchFamily="34" charset="0"/>
+                <a:ea typeface="Noto Sans KR" pitchFamily="34" charset="-122"/>
+                <a:cs typeface="Noto Sans KR" pitchFamily="34" charset="-120"/>
+              </a:rPr>
+              <a:t>→ EC2 증설 (Capacity Provider)</a:t>
+            </a:r>
+            <a:endParaRPr lang="en-US" sz="1450" dirty="0"/>
+          </a:p>
+          <a:p>
+            <a:pPr indent="0" marL="0">
+              <a:lnSpc>
+                <a:spcPct val="135000"/>
+              </a:lnSpc>
+              <a:buNone/>
+            </a:pPr>
+            <a:endParaRPr lang="en-US" sz="1450" dirty="0"/>
+          </a:p>
+          <a:p>
+            <a:pPr indent="0" marL="0">
+              <a:lnSpc>
+                <a:spcPct val="135000"/>
+              </a:lnSpc>
+              <a:buNone/>
+            </a:pPr>
+            <a:r>
+              <a:rPr lang="en-US" sz="1450" dirty="0">
+                <a:solidFill>
+                  <a:srgbClr val="E7E9FF"/>
+                </a:solidFill>
+                <a:latin typeface="Noto Sans KR" pitchFamily="34" charset="0"/>
+                <a:ea typeface="Noto Sans KR" pitchFamily="34" charset="-122"/>
+                <a:cs typeface="Noto Sans KR" pitchFamily="34" charset="-120"/>
+              </a:rPr>
+              <a:t>반대로 한가하면 역순 축소</a:t>
+            </a:r>
+            <a:endParaRPr lang="en-US" sz="1450" dirty="0"/>
+          </a:p>
+          <a:p>
+            <a:pPr indent="0" marL="0">
+              <a:lnSpc>
+                <a:spcPct val="135000"/>
+              </a:lnSpc>
+              <a:buNone/>
+            </a:pPr>
+            <a:r>
+              <a:rPr lang="en-US" sz="1450" dirty="0">
+                <a:solidFill>
+                  <a:srgbClr val="E7E9FF"/>
+                </a:solidFill>
+                <a:latin typeface="Noto Sans KR" pitchFamily="34" charset="0"/>
+                <a:ea typeface="Noto Sans KR" pitchFamily="34" charset="-122"/>
+                <a:cs typeface="Noto Sans KR" pitchFamily="34" charset="-120"/>
+              </a:rPr>
+              <a:t>실습 중에는 비용 절약을 위해 desired 0으로 내려두기도</a:t>
+            </a:r>
+            <a:endParaRPr lang="en-US" sz="1450" dirty="0"/>
           </a:p>
         </p:txBody>
       </p:sp>
@@ -2830,7 +3035,7 @@
                 <a:ea typeface="Noto Sans KR" pitchFamily="34" charset="-122"/>
                 <a:cs typeface="Noto Sans KR" pitchFamily="34" charset="-120"/>
               </a:rPr>
-              <a:t>10 — VERIFICATION</a:t>
+              <a:t>10 — SECURITY</a:t>
             </a:r>
             <a:endParaRPr lang="en-US" sz="1300" dirty="0"/>
           </a:p>
@@ -2869,7 +3074,7 @@
                 <a:ea typeface="Noto Sans KR" pitchFamily="34" charset="-122"/>
                 <a:cs typeface="Noto Sans KR" pitchFamily="34" charset="-120"/>
               </a:rPr>
-              <a:t>검증 — "되는 것 같다"가 아니라 증명</a:t>
+              <a:t>최소 권한 설계</a:t>
             </a:r>
             <a:endParaRPr lang="en-US" sz="3000" dirty="0"/>
           </a:p>
@@ -2877,268 +3082,18 @@
       </p:sp>
       <p:sp>
         <p:nvSpPr>
-          <p:cNvPr id="5" name="Text 2"/>
+          <p:cNvPr id="5" name="Shape 2"/>
           <p:cNvSpPr/>
           <p:nvPr/>
         </p:nvSpPr>
         <p:spPr>
           <a:xfrm>
             <a:off x="640080" y="1645920"/>
-            <a:ext cx="10972800" cy="4572000"/>
-          </a:xfrm>
-          <a:prstGeom prst="rect">
-            <a:avLst/>
-          </a:prstGeom>
-          <a:noFill/>
-          <a:ln/>
-        </p:spPr>
-        <p:txBody>
-          <a:bodyPr wrap="square" rtlCol="0" anchor="t"/>
-          <a:lstStyle/>
-          <a:p>
-            <a:pPr indent="0" marL="0">
-              <a:lnSpc>
-                <a:spcPct val="145000"/>
-              </a:lnSpc>
-              <a:buNone/>
-            </a:pPr>
-            <a:r>
-              <a:rPr lang="en-US" sz="1350" dirty="0">
-                <a:solidFill>
-                  <a:srgbClr val="22D3EE"/>
-                </a:solidFill>
-                <a:latin typeface="Noto Sans KR" pitchFamily="34" charset="0"/>
-                <a:ea typeface="Noto Sans KR" pitchFamily="34" charset="-122"/>
-                <a:cs typeface="Noto Sans KR" pitchFamily="34" charset="-120"/>
-              </a:rPr>
-              <a:t>◆ </a:t>
-            </a:r>
-            <a:pPr indent="0" marL="0">
-              <a:lnSpc>
-                <a:spcPct val="145000"/>
-              </a:lnSpc>
-              <a:buNone/>
-            </a:pPr>
-            <a:r>
-              <a:rPr lang="en-US" sz="1650" b="1" dirty="0">
-                <a:solidFill>
-                  <a:srgbClr val="E7E9FF"/>
-                </a:solidFill>
-                <a:latin typeface="Noto Sans KR" pitchFamily="34" charset="0"/>
-                <a:ea typeface="Noto Sans KR" pitchFamily="34" charset="-122"/>
-                <a:cs typeface="Noto Sans KR" pitchFamily="34" charset="-120"/>
-              </a:rPr>
-              <a:t>단위/통합 테스트 44개</a:t>
-            </a:r>
-            <a:pPr indent="0" marL="0">
-              <a:lnSpc>
-                <a:spcPct val="145000"/>
-              </a:lnSpc>
-              <a:buNone/>
-            </a:pPr>
-            <a:r>
-              <a:rPr lang="en-US" sz="1400" dirty="0">
-                <a:solidFill>
-                  <a:srgbClr val="8B8FB8"/>
-                </a:solidFill>
-                <a:latin typeface="Noto Sans KR" pitchFamily="34" charset="0"/>
-                <a:ea typeface="Noto Sans KR" pitchFamily="34" charset="-122"/>
-                <a:cs typeface="Noto Sans KR" pitchFamily="34" charset="-120"/>
-              </a:rPr>
-              <a:t>  — 게임 엔진, Redis 타이머, WS 연결 종료 처리</a:t>
-            </a:r>
-            <a:pPr indent="0" marL="0">
-              <a:lnSpc>
-                <a:spcPct val="145000"/>
-              </a:lnSpc>
-              <a:buNone/>
-            </a:pPr>
-            <a:r>
-              <a:rPr lang="en-US" sz="1350" dirty="0">
-                <a:solidFill>
-                  <a:srgbClr val="000000"/>
-                </a:solidFill>
-                <a:latin typeface="Noto Sans KR" pitchFamily="34" charset="0"/>
-                <a:ea typeface="Noto Sans KR" pitchFamily="34" charset="-122"/>
-                <a:cs typeface="Noto Sans KR" pitchFamily="34" charset="-120"/>
-              </a:rPr>
-              <a:t>
-</a:t>
-            </a:r>
-            <a:pPr indent="0" marL="0">
-              <a:lnSpc>
-                <a:spcPct val="145000"/>
-              </a:lnSpc>
-              <a:buNone/>
-            </a:pPr>
-            <a:r>
-              <a:rPr lang="en-US" sz="1350" dirty="0">
-                <a:solidFill>
-                  <a:srgbClr val="22D3EE"/>
-                </a:solidFill>
-                <a:latin typeface="Noto Sans KR" pitchFamily="34" charset="0"/>
-                <a:ea typeface="Noto Sans KR" pitchFamily="34" charset="-122"/>
-                <a:cs typeface="Noto Sans KR" pitchFamily="34" charset="-120"/>
-              </a:rPr>
-              <a:t>◆ </a:t>
-            </a:r>
-            <a:pPr indent="0" marL="0">
-              <a:lnSpc>
-                <a:spcPct val="145000"/>
-              </a:lnSpc>
-              <a:buNone/>
-            </a:pPr>
-            <a:r>
-              <a:rPr lang="en-US" sz="1650" b="1" dirty="0">
-                <a:solidFill>
-                  <a:srgbClr val="E7E9FF"/>
-                </a:solidFill>
-                <a:latin typeface="Noto Sans KR" pitchFamily="34" charset="0"/>
-                <a:ea typeface="Noto Sans KR" pitchFamily="34" charset="-122"/>
-                <a:cs typeface="Noto Sans KR" pitchFamily="34" charset="-120"/>
-              </a:rPr>
-              <a:t>로컬 E2E: 실제 브라우저 4개 자동 조작 → 풀 게임 완주 (Playwright)</a:t>
-            </a:r>
-            <a:pPr indent="0" marL="0">
-              <a:lnSpc>
-                <a:spcPct val="145000"/>
-              </a:lnSpc>
-              <a:buNone/>
-            </a:pPr>
-            <a:r>
-              <a:rPr lang="en-US" sz="1350" dirty="0">
-                <a:solidFill>
-                  <a:srgbClr val="000000"/>
-                </a:solidFill>
-                <a:latin typeface="Noto Sans KR" pitchFamily="34" charset="0"/>
-                <a:ea typeface="Noto Sans KR" pitchFamily="34" charset="-122"/>
-                <a:cs typeface="Noto Sans KR" pitchFamily="34" charset="-120"/>
-              </a:rPr>
-              <a:t>
-</a:t>
-            </a:r>
-            <a:pPr indent="0" marL="0">
-              <a:lnSpc>
-                <a:spcPct val="145000"/>
-              </a:lnSpc>
-              <a:buNone/>
-            </a:pPr>
-            <a:r>
-              <a:rPr lang="en-US" sz="1350" dirty="0">
-                <a:solidFill>
-                  <a:srgbClr val="22D3EE"/>
-                </a:solidFill>
-                <a:latin typeface="Noto Sans KR" pitchFamily="34" charset="0"/>
-                <a:ea typeface="Noto Sans KR" pitchFamily="34" charset="-122"/>
-                <a:cs typeface="Noto Sans KR" pitchFamily="34" charset="-120"/>
-              </a:rPr>
-              <a:t>◆ </a:t>
-            </a:r>
-            <a:pPr indent="0" marL="0">
-              <a:lnSpc>
-                <a:spcPct val="145000"/>
-              </a:lnSpc>
-              <a:buNone/>
-            </a:pPr>
-            <a:r>
-              <a:rPr lang="en-US" sz="1650" b="1" dirty="0">
-                <a:solidFill>
-                  <a:srgbClr val="E7E9FF"/>
-                </a:solidFill>
-                <a:latin typeface="Noto Sans KR" pitchFamily="34" charset="0"/>
-                <a:ea typeface="Noto Sans KR" pitchFamily="34" charset="-122"/>
-                <a:cs typeface="Noto Sans KR" pitchFamily="34" charset="-120"/>
-              </a:rPr>
-              <a:t>프로덕션 E2E: ALB 경유 4클라이언트 → 멀티 태스크 분산 환경에서 쇼다운까지</a:t>
-            </a:r>
-            <a:pPr indent="0" marL="0">
-              <a:lnSpc>
-                <a:spcPct val="145000"/>
-              </a:lnSpc>
-              <a:buNone/>
-            </a:pPr>
-            <a:r>
-              <a:rPr lang="en-US" sz="1350" dirty="0">
-                <a:solidFill>
-                  <a:srgbClr val="000000"/>
-                </a:solidFill>
-                <a:latin typeface="Noto Sans KR" pitchFamily="34" charset="0"/>
-                <a:ea typeface="Noto Sans KR" pitchFamily="34" charset="-122"/>
-                <a:cs typeface="Noto Sans KR" pitchFamily="34" charset="-120"/>
-              </a:rPr>
-              <a:t>
-</a:t>
-            </a:r>
-            <a:pPr indent="0" marL="0">
-              <a:lnSpc>
-                <a:spcPct val="145000"/>
-              </a:lnSpc>
-              <a:buNone/>
-            </a:pPr>
-            <a:r>
-              <a:rPr lang="en-US" sz="1350" dirty="0">
-                <a:solidFill>
-                  <a:srgbClr val="22D3EE"/>
-                </a:solidFill>
-                <a:latin typeface="Noto Sans KR" pitchFamily="34" charset="0"/>
-                <a:ea typeface="Noto Sans KR" pitchFamily="34" charset="-122"/>
-                <a:cs typeface="Noto Sans KR" pitchFamily="34" charset="-120"/>
-              </a:rPr>
-              <a:t>◆ </a:t>
-            </a:r>
-            <a:pPr indent="0" marL="0">
-              <a:lnSpc>
-                <a:spcPct val="145000"/>
-              </a:lnSpc>
-              <a:buNone/>
-            </a:pPr>
-            <a:r>
-              <a:rPr lang="en-US" sz="1650" b="1" dirty="0">
-                <a:solidFill>
-                  <a:srgbClr val="E7E9FF"/>
-                </a:solidFill>
-                <a:latin typeface="Noto Sans KR" pitchFamily="34" charset="0"/>
-                <a:ea typeface="Noto Sans KR" pitchFamily="34" charset="-122"/>
-                <a:cs typeface="Noto Sans KR" pitchFamily="34" charset="-120"/>
-              </a:rPr>
-              <a:t>ALB 헬스체크 OK · 타깃 2/2 healthy · 롤링 배포 무중단 확인</a:t>
-            </a:r>
-            <a:pPr indent="0" marL="0">
-              <a:lnSpc>
-                <a:spcPct val="145000"/>
-              </a:lnSpc>
-              <a:buNone/>
-            </a:pPr>
-            <a:r>
-              <a:rPr lang="en-US" sz="1350" dirty="0">
-                <a:solidFill>
-                  <a:srgbClr val="000000"/>
-                </a:solidFill>
-                <a:latin typeface="Noto Sans KR" pitchFamily="34" charset="0"/>
-                <a:ea typeface="Noto Sans KR" pitchFamily="34" charset="-122"/>
-                <a:cs typeface="Noto Sans KR" pitchFamily="34" charset="-120"/>
-              </a:rPr>
-              <a:t>
-</a:t>
-            </a:r>
-            <a:endParaRPr lang="en-US" sz="1350" dirty="0"/>
-          </a:p>
-        </p:txBody>
-      </p:sp>
-      <p:sp>
-        <p:nvSpPr>
-          <p:cNvPr id="6" name="Shape 3"/>
-          <p:cNvSpPr/>
-          <p:nvPr/>
-        </p:nvSpPr>
-        <p:spPr>
-          <a:xfrm>
-            <a:off x="640080" y="4480560"/>
-            <a:ext cx="10972800" cy="1737360"/>
+            <a:ext cx="10972800" cy="822960"/>
           </a:xfrm>
           <a:prstGeom prst="roundRect">
             <a:avLst>
-              <a:gd name="adj" fmla="val 6316"/>
+              <a:gd name="adj" fmla="val 11111"/>
             </a:avLst>
           </a:prstGeom>
           <a:solidFill>
@@ -3146,7 +3101,7 @@
           </a:solidFill>
           <a:ln w="12700">
             <a:solidFill>
-              <a:srgbClr val="F59E0B"/>
+              <a:srgbClr val="A78BFA"/>
             </a:solidFill>
             <a:prstDash val="solid"/>
           </a:ln>
@@ -3154,14 +3109,123 @@
       </p:sp>
       <p:sp>
         <p:nvSpPr>
+          <p:cNvPr id="6" name="Text 3"/>
+          <p:cNvSpPr/>
+          <p:nvPr/>
+        </p:nvSpPr>
+        <p:spPr>
+          <a:xfrm>
+            <a:off x="822960" y="1691640"/>
+            <a:ext cx="10607040" cy="731520"/>
+          </a:xfrm>
+          <a:prstGeom prst="rect">
+            <a:avLst/>
+          </a:prstGeom>
+          <a:noFill/>
+          <a:ln/>
+        </p:spPr>
+        <p:txBody>
+          <a:bodyPr wrap="square" rtlCol="0" anchor="ctr"/>
+          <a:lstStyle/>
+          <a:p>
+            <a:pPr algn="ctr" indent="0" marL="0">
+              <a:buNone/>
+            </a:pPr>
+            <a:r>
+              <a:rPr lang="en-US" sz="1700" b="1" dirty="0">
+                <a:solidFill>
+                  <a:srgbClr val="A78BFA"/>
+                </a:solidFill>
+                <a:latin typeface="Noto Sans KR" pitchFamily="34" charset="0"/>
+                <a:ea typeface="Noto Sans KR" pitchFamily="34" charset="-122"/>
+                <a:cs typeface="Noto Sans KR" pitchFamily="34" charset="-120"/>
+              </a:rPr>
+              <a:t>🔒 ALB-SG</a:t>
+            </a:r>
+            <a:pPr algn="ctr" indent="0" marL="0">
+              <a:buNone/>
+            </a:pPr>
+            <a:r>
+              <a:rPr lang="en-US" sz="1700" dirty="0">
+                <a:solidFill>
+                  <a:srgbClr val="8B8FB8"/>
+                </a:solidFill>
+                <a:latin typeface="Noto Sans KR" pitchFamily="34" charset="0"/>
+                <a:ea typeface="Noto Sans KR" pitchFamily="34" charset="-122"/>
+                <a:cs typeface="Noto Sans KR" pitchFamily="34" charset="-120"/>
+              </a:rPr>
+              <a:t> (80←인터넷)  →  </a:t>
+            </a:r>
+            <a:pPr algn="ctr" indent="0" marL="0">
+              <a:buNone/>
+            </a:pPr>
+            <a:r>
+              <a:rPr lang="en-US" sz="1700" b="1" dirty="0">
+                <a:solidFill>
+                  <a:srgbClr val="22D3EE"/>
+                </a:solidFill>
+                <a:latin typeface="Noto Sans KR" pitchFamily="34" charset="0"/>
+                <a:ea typeface="Noto Sans KR" pitchFamily="34" charset="-122"/>
+                <a:cs typeface="Noto Sans KR" pitchFamily="34" charset="-120"/>
+              </a:rPr>
+              <a:t>EC2-SG</a:t>
+            </a:r>
+            <a:pPr algn="ctr" indent="0" marL="0">
+              <a:buNone/>
+            </a:pPr>
+            <a:r>
+              <a:rPr lang="en-US" sz="1700" dirty="0">
+                <a:solidFill>
+                  <a:srgbClr val="8B8FB8"/>
+                </a:solidFill>
+                <a:latin typeface="Noto Sans KR" pitchFamily="34" charset="0"/>
+                <a:ea typeface="Noto Sans KR" pitchFamily="34" charset="-122"/>
+                <a:cs typeface="Noto Sans KR" pitchFamily="34" charset="-120"/>
+              </a:rPr>
+              <a:t> (3001←ALB만)  →  </a:t>
+            </a:r>
+            <a:pPr algn="ctr" indent="0" marL="0">
+              <a:buNone/>
+            </a:pPr>
+            <a:r>
+              <a:rPr lang="en-US" sz="1700" b="1" dirty="0">
+                <a:solidFill>
+                  <a:srgbClr val="EF4444"/>
+                </a:solidFill>
+                <a:latin typeface="Noto Sans KR" pitchFamily="34" charset="0"/>
+                <a:ea typeface="Noto Sans KR" pitchFamily="34" charset="-122"/>
+                <a:cs typeface="Noto Sans KR" pitchFamily="34" charset="-120"/>
+              </a:rPr>
+              <a:t>Redis-SG</a:t>
+            </a:r>
+            <a:pPr algn="ctr" indent="0" marL="0">
+              <a:buNone/>
+            </a:pPr>
+            <a:r>
+              <a:rPr lang="en-US" sz="1700" dirty="0">
+                <a:solidFill>
+                  <a:srgbClr val="8B8FB8"/>
+                </a:solidFill>
+                <a:latin typeface="Noto Sans KR" pitchFamily="34" charset="0"/>
+                <a:ea typeface="Noto Sans KR" pitchFamily="34" charset="-122"/>
+                <a:cs typeface="Noto Sans KR" pitchFamily="34" charset="-120"/>
+              </a:rPr>
+              <a:t> (6379←EC2만)</a:t>
+            </a:r>
+            <a:endParaRPr lang="en-US" sz="1700" dirty="0"/>
+          </a:p>
+        </p:txBody>
+      </p:sp>
+      <p:sp>
+        <p:nvSpPr>
           <p:cNvPr id="7" name="Text 4"/>
           <p:cNvSpPr/>
           <p:nvPr/>
         </p:nvSpPr>
         <p:spPr>
           <a:xfrm>
-            <a:off x="868680" y="4617720"/>
-            <a:ext cx="10515600" cy="365760"/>
+            <a:off x="640080" y="2743200"/>
+            <a:ext cx="10972800" cy="4572000"/>
           </a:xfrm>
           <a:prstGeom prst="rect">
             <a:avLst/>
@@ -3170,66 +3234,269 @@
           <a:ln/>
         </p:spPr>
         <p:txBody>
-          <a:bodyPr wrap="square" rtlCol="0" anchor="ctr"/>
-          <a:lstStyle/>
-          <a:p>
-            <a:pPr indent="0" marL="0">
-              <a:buNone/>
-            </a:pPr>
-            <a:r>
-              <a:rPr lang="en-US" sz="1300" b="1" spc="200" kern="0" dirty="0">
-                <a:solidFill>
-                  <a:srgbClr val="F59E0B"/>
-                </a:solidFill>
-                <a:latin typeface="Noto Sans KR" pitchFamily="34" charset="0"/>
-                <a:ea typeface="Noto Sans KR" pitchFamily="34" charset="-122"/>
-                <a:cs typeface="Noto Sans KR" pitchFamily="34" charset="-120"/>
-              </a:rPr>
-              <a:t>TDD로 잡은 실제 버그들</a:t>
+          <a:bodyPr wrap="square" rtlCol="0" anchor="t"/>
+          <a:lstStyle/>
+          <a:p>
+            <a:pPr indent="0" marL="0">
+              <a:lnSpc>
+                <a:spcPct val="145000"/>
+              </a:lnSpc>
+              <a:buNone/>
+            </a:pPr>
+            <a:r>
+              <a:rPr lang="en-US" sz="1300" dirty="0">
+                <a:solidFill>
+                  <a:srgbClr val="22D3EE"/>
+                </a:solidFill>
+                <a:latin typeface="Noto Sans KR" pitchFamily="34" charset="0"/>
+                <a:ea typeface="Noto Sans KR" pitchFamily="34" charset="-122"/>
+                <a:cs typeface="Noto Sans KR" pitchFamily="34" charset="-120"/>
+              </a:rPr>
+              <a:t>◆ </a:t>
+            </a:r>
+            <a:pPr indent="0" marL="0">
+              <a:lnSpc>
+                <a:spcPct val="145000"/>
+              </a:lnSpc>
+              <a:buNone/>
+            </a:pPr>
+            <a:r>
+              <a:rPr lang="en-US" sz="1600" b="1" dirty="0">
+                <a:solidFill>
+                  <a:srgbClr val="E7E9FF"/>
+                </a:solidFill>
+                <a:latin typeface="Noto Sans KR" pitchFamily="34" charset="0"/>
+                <a:ea typeface="Noto Sans KR" pitchFamily="34" charset="-122"/>
+                <a:cs typeface="Noto Sans KR" pitchFamily="34" charset="-120"/>
+              </a:rPr>
+              <a:t>보안 그룹 참조 체인</a:t>
+            </a:r>
+            <a:pPr indent="0" marL="0">
+              <a:lnSpc>
+                <a:spcPct val="145000"/>
+              </a:lnSpc>
+              <a:buNone/>
+            </a:pPr>
+            <a:r>
+              <a:rPr lang="en-US" sz="1350" dirty="0">
+                <a:solidFill>
+                  <a:srgbClr val="8B8FB8"/>
+                </a:solidFill>
+                <a:latin typeface="Noto Sans KR" pitchFamily="34" charset="0"/>
+                <a:ea typeface="Noto Sans KR" pitchFamily="34" charset="-122"/>
+                <a:cs typeface="Noto Sans KR" pitchFamily="34" charset="-120"/>
+              </a:rPr>
+              <a:t>  — IP가 아닌 SG 참조로 제한. Redis는 인터넷에서 도달 불가</a:t>
+            </a:r>
+            <a:pPr indent="0" marL="0">
+              <a:lnSpc>
+                <a:spcPct val="145000"/>
+              </a:lnSpc>
+              <a:buNone/>
+            </a:pPr>
+            <a:r>
+              <a:rPr lang="en-US" sz="1300" dirty="0">
+                <a:solidFill>
+                  <a:srgbClr val="000000"/>
+                </a:solidFill>
+                <a:latin typeface="Noto Sans KR" pitchFamily="34" charset="0"/>
+                <a:ea typeface="Noto Sans KR" pitchFamily="34" charset="-122"/>
+                <a:cs typeface="Noto Sans KR" pitchFamily="34" charset="-120"/>
+              </a:rPr>
+              <a:t>
+</a:t>
+            </a:r>
+            <a:pPr indent="0" marL="0">
+              <a:lnSpc>
+                <a:spcPct val="145000"/>
+              </a:lnSpc>
+              <a:buNone/>
+            </a:pPr>
+            <a:r>
+              <a:rPr lang="en-US" sz="1300" dirty="0">
+                <a:solidFill>
+                  <a:srgbClr val="22D3EE"/>
+                </a:solidFill>
+                <a:latin typeface="Noto Sans KR" pitchFamily="34" charset="0"/>
+                <a:ea typeface="Noto Sans KR" pitchFamily="34" charset="-122"/>
+                <a:cs typeface="Noto Sans KR" pitchFamily="34" charset="-120"/>
+              </a:rPr>
+              <a:t>◆ </a:t>
+            </a:r>
+            <a:pPr indent="0" marL="0">
+              <a:lnSpc>
+                <a:spcPct val="145000"/>
+              </a:lnSpc>
+              <a:buNone/>
+            </a:pPr>
+            <a:r>
+              <a:rPr lang="en-US" sz="1600" b="1" dirty="0">
+                <a:solidFill>
+                  <a:srgbClr val="E7E9FF"/>
+                </a:solidFill>
+                <a:latin typeface="Noto Sans KR" pitchFamily="34" charset="0"/>
+                <a:ea typeface="Noto Sans KR" pitchFamily="34" charset="-122"/>
+                <a:cs typeface="Noto Sans KR" pitchFamily="34" charset="-120"/>
+              </a:rPr>
+              <a:t>IAM 역할 3종 분리</a:t>
+            </a:r>
+            <a:pPr indent="0" marL="0">
+              <a:lnSpc>
+                <a:spcPct val="145000"/>
+              </a:lnSpc>
+              <a:buNone/>
+            </a:pPr>
+            <a:r>
+              <a:rPr lang="en-US" sz="1350" dirty="0">
+                <a:solidFill>
+                  <a:srgbClr val="8B8FB8"/>
+                </a:solidFill>
+                <a:latin typeface="Noto Sans KR" pitchFamily="34" charset="0"/>
+                <a:ea typeface="Noto Sans KR" pitchFamily="34" charset="-122"/>
+                <a:cs typeface="Noto Sans KR" pitchFamily="34" charset="-120"/>
+              </a:rPr>
+              <a:t>  — Task Role(S3 쓰기만) / Execution Role(ECR pull·로그) / Instance Role(ECS 등록)</a:t>
+            </a:r>
+            <a:pPr indent="0" marL="0">
+              <a:lnSpc>
+                <a:spcPct val="145000"/>
+              </a:lnSpc>
+              <a:buNone/>
+            </a:pPr>
+            <a:r>
+              <a:rPr lang="en-US" sz="1300" dirty="0">
+                <a:solidFill>
+                  <a:srgbClr val="000000"/>
+                </a:solidFill>
+                <a:latin typeface="Noto Sans KR" pitchFamily="34" charset="0"/>
+                <a:ea typeface="Noto Sans KR" pitchFamily="34" charset="-122"/>
+                <a:cs typeface="Noto Sans KR" pitchFamily="34" charset="-120"/>
+              </a:rPr>
+              <a:t>
+</a:t>
+            </a:r>
+            <a:pPr indent="0" marL="0">
+              <a:lnSpc>
+                <a:spcPct val="145000"/>
+              </a:lnSpc>
+              <a:buNone/>
+            </a:pPr>
+            <a:r>
+              <a:rPr lang="en-US" sz="1300" dirty="0">
+                <a:solidFill>
+                  <a:srgbClr val="22D3EE"/>
+                </a:solidFill>
+                <a:latin typeface="Noto Sans KR" pitchFamily="34" charset="0"/>
+                <a:ea typeface="Noto Sans KR" pitchFamily="34" charset="-122"/>
+                <a:cs typeface="Noto Sans KR" pitchFamily="34" charset="-120"/>
+              </a:rPr>
+              <a:t>◆ </a:t>
+            </a:r>
+            <a:pPr indent="0" marL="0">
+              <a:lnSpc>
+                <a:spcPct val="145000"/>
+              </a:lnSpc>
+              <a:buNone/>
+            </a:pPr>
+            <a:r>
+              <a:rPr lang="en-US" sz="1600" b="1" dirty="0">
+                <a:solidFill>
+                  <a:srgbClr val="E7E9FF"/>
+                </a:solidFill>
+                <a:latin typeface="Noto Sans KR" pitchFamily="34" charset="0"/>
+                <a:ea typeface="Noto Sans KR" pitchFamily="34" charset="-122"/>
+                <a:cs typeface="Noto Sans KR" pitchFamily="34" charset="-120"/>
+              </a:rPr>
+              <a:t>IAM 사용자도 최소 권한</a:t>
+            </a:r>
+            <a:pPr indent="0" marL="0">
+              <a:lnSpc>
+                <a:spcPct val="145000"/>
+              </a:lnSpc>
+              <a:buNone/>
+            </a:pPr>
+            <a:r>
+              <a:rPr lang="en-US" sz="1350" dirty="0">
+                <a:solidFill>
+                  <a:srgbClr val="8B8FB8"/>
+                </a:solidFill>
+                <a:latin typeface="Noto Sans KR" pitchFamily="34" charset="0"/>
+                <a:ea typeface="Noto Sans KR" pitchFamily="34" charset="-122"/>
+                <a:cs typeface="Noto Sans KR" pitchFamily="34" charset="-120"/>
+              </a:rPr>
+              <a:t>  — 필요한 액션만 명시한 정책 파일을 관리하며 점진적으로 요청</a:t>
+            </a:r>
+            <a:pPr indent="0" marL="0">
+              <a:lnSpc>
+                <a:spcPct val="145000"/>
+              </a:lnSpc>
+              <a:buNone/>
+            </a:pPr>
+            <a:r>
+              <a:rPr lang="en-US" sz="1300" dirty="0">
+                <a:solidFill>
+                  <a:srgbClr val="000000"/>
+                </a:solidFill>
+                <a:latin typeface="Noto Sans KR" pitchFamily="34" charset="0"/>
+                <a:ea typeface="Noto Sans KR" pitchFamily="34" charset="-122"/>
+                <a:cs typeface="Noto Sans KR" pitchFamily="34" charset="-120"/>
+              </a:rPr>
+              <a:t>
+</a:t>
+            </a:r>
+            <a:pPr indent="0" marL="0">
+              <a:lnSpc>
+                <a:spcPct val="145000"/>
+              </a:lnSpc>
+              <a:buNone/>
+            </a:pPr>
+            <a:r>
+              <a:rPr lang="en-US" sz="1300" dirty="0">
+                <a:solidFill>
+                  <a:srgbClr val="22D3EE"/>
+                </a:solidFill>
+                <a:latin typeface="Noto Sans KR" pitchFamily="34" charset="0"/>
+                <a:ea typeface="Noto Sans KR" pitchFamily="34" charset="-122"/>
+                <a:cs typeface="Noto Sans KR" pitchFamily="34" charset="-120"/>
+              </a:rPr>
+              <a:t>◆ </a:t>
+            </a:r>
+            <a:pPr indent="0" marL="0">
+              <a:lnSpc>
+                <a:spcPct val="145000"/>
+              </a:lnSpc>
+              <a:buNone/>
+            </a:pPr>
+            <a:r>
+              <a:rPr lang="en-US" sz="1600" b="1" dirty="0">
+                <a:solidFill>
+                  <a:srgbClr val="E7E9FF"/>
+                </a:solidFill>
+                <a:latin typeface="Noto Sans KR" pitchFamily="34" charset="0"/>
+                <a:ea typeface="Noto Sans KR" pitchFamily="34" charset="-122"/>
+                <a:cs typeface="Noto Sans KR" pitchFamily="34" charset="-120"/>
+              </a:rPr>
+              <a:t>예: CreateLoadBalancer의 숨은 의존 권한을 실패 → 분석 → 추가로 해결</a:t>
+            </a:r>
+            <a:pPr indent="0" marL="0">
+              <a:lnSpc>
+                <a:spcPct val="145000"/>
+              </a:lnSpc>
+              <a:buNone/>
+            </a:pPr>
+            <a:r>
+              <a:rPr lang="en-US" sz="1300" dirty="0">
+                <a:solidFill>
+                  <a:srgbClr val="000000"/>
+                </a:solidFill>
+                <a:latin typeface="Noto Sans KR" pitchFamily="34" charset="0"/>
+                <a:ea typeface="Noto Sans KR" pitchFamily="34" charset="-122"/>
+                <a:cs typeface="Noto Sans KR" pitchFamily="34" charset="-120"/>
+              </a:rPr>
+              <a:t>
+</a:t>
             </a:r>
             <a:endParaRPr lang="en-US" sz="1300" dirty="0"/>
-          </a:p>
-        </p:txBody>
-      </p:sp>
-      <p:sp>
-        <p:nvSpPr>
-          <p:cNvPr id="8" name="Text 5"/>
-          <p:cNvSpPr/>
-          <p:nvPr/>
-        </p:nvSpPr>
-        <p:spPr>
-          <a:xfrm>
-            <a:off x="868680" y="4983480"/>
-            <a:ext cx="10515600" cy="1051560"/>
-          </a:xfrm>
-          <a:prstGeom prst="rect">
-            <a:avLst/>
-          </a:prstGeom>
-          <a:noFill/>
-          <a:ln/>
-        </p:spPr>
-        <p:txBody>
-          <a:bodyPr wrap="square" rtlCol="0" anchor="t"/>
-          <a:lstStyle/>
-          <a:p>
-            <a:pPr indent="0" marL="0">
-              <a:lnSpc>
-                <a:spcPct val="135000"/>
-              </a:lnSpc>
-              <a:buNone/>
-            </a:pPr>
-            <a:r>
-              <a:rPr lang="en-US" sz="1450" dirty="0">
-                <a:solidFill>
-                  <a:srgbClr val="E7E9FF"/>
-                </a:solidFill>
-                <a:latin typeface="Noto Sans KR" pitchFamily="34" charset="0"/>
-                <a:ea typeface="Noto Sans KR" pitchFamily="34" charset="-122"/>
-                <a:cs typeface="Noto Sans KR" pitchFamily="34" charset="-120"/>
-              </a:rPr>
-              <a:t>베팅 라운드 종료 판정 누락(게임이 플랍을 못 봄) · 턴 타이머 TTL이 deadline과 동시 만료(auto-fold 불능) · 쇼다운 키커 무시(A페어=K페어 무승부) · 연결 끊김 시 유령 방 잔류</a:t>
-            </a:r>
-            <a:endParaRPr lang="en-US" sz="1450" dirty="0"/>
           </a:p>
         </p:txBody>
       </p:sp>
@@ -3298,7 +3565,7 @@
                 <a:ea typeface="Noto Sans KR" pitchFamily="34" charset="-122"/>
                 <a:cs typeface="Noto Sans KR" pitchFamily="34" charset="-120"/>
               </a:rPr>
-              <a:t>11 — DEMO (SCREENSHOTS)</a:t>
+              <a:t>11 — VERIFICATION</a:t>
             </a:r>
             <a:endParaRPr lang="en-US" sz="1300" dirty="0"/>
           </a:p>
@@ -3337,70 +3604,338 @@
                 <a:ea typeface="Noto Sans KR" pitchFamily="34" charset="-122"/>
                 <a:cs typeface="Noto Sans KR" pitchFamily="34" charset="-120"/>
               </a:rPr>
-              <a:t>게임 플레이</a:t>
+              <a:t>검증 — "되는 것 같다"가 아니라 증명</a:t>
             </a:r>
             <a:endParaRPr lang="en-US" sz="3000" dirty="0"/>
           </a:p>
         </p:txBody>
       </p:sp>
-      <p:pic>
-        <p:nvPicPr>
-          <p:cNvPr id="5" name="Image 0" descr="/home/dakori/github/cloud_holdem/docs/presentation/assets/lobby.png">    </p:cNvPr>
-          <p:cNvPicPr>
-            <a:picLocks noChangeAspect="1"/>
-          </p:cNvPicPr>
+      <p:sp>
+        <p:nvSpPr>
+          <p:cNvPr id="5" name="Text 2"/>
+          <p:cNvSpPr/>
           <p:nvPr/>
-        </p:nvPicPr>
-        <p:blipFill>
-          <a:blip r:embed="rId1"/>
-          <a:stretch>
-            <a:fillRect/>
-          </a:stretch>
-        </p:blipFill>
-        <p:spPr>
-          <a:xfrm>
-            <a:off x="640080" y="1554480"/>
-            <a:ext cx="5394960" cy="4639666"/>
+        </p:nvSpPr>
+        <p:spPr>
+          <a:xfrm>
+            <a:off x="640080" y="1645920"/>
+            <a:ext cx="10972800" cy="4572000"/>
           </a:xfrm>
           <a:prstGeom prst="rect">
             <a:avLst/>
           </a:prstGeom>
-        </p:spPr>
-      </p:pic>
-      <p:pic>
-        <p:nvPicPr>
-          <p:cNvPr id="6" name="Image 1" descr="/home/dakori/github/cloud_holdem/docs/presentation/assets/game-table.png">    </p:cNvPr>
-          <p:cNvPicPr>
-            <a:picLocks noChangeAspect="1"/>
-          </p:cNvPicPr>
+          <a:noFill/>
+          <a:ln/>
+        </p:spPr>
+        <p:txBody>
+          <a:bodyPr wrap="square" rtlCol="0" anchor="t"/>
+          <a:lstStyle/>
+          <a:p>
+            <a:pPr indent="0" marL="0">
+              <a:lnSpc>
+                <a:spcPct val="145000"/>
+              </a:lnSpc>
+              <a:buNone/>
+            </a:pPr>
+            <a:r>
+              <a:rPr lang="en-US" sz="1350" dirty="0">
+                <a:solidFill>
+                  <a:srgbClr val="22D3EE"/>
+                </a:solidFill>
+                <a:latin typeface="Noto Sans KR" pitchFamily="34" charset="0"/>
+                <a:ea typeface="Noto Sans KR" pitchFamily="34" charset="-122"/>
+                <a:cs typeface="Noto Sans KR" pitchFamily="34" charset="-120"/>
+              </a:rPr>
+              <a:t>◆ </a:t>
+            </a:r>
+            <a:pPr indent="0" marL="0">
+              <a:lnSpc>
+                <a:spcPct val="145000"/>
+              </a:lnSpc>
+              <a:buNone/>
+            </a:pPr>
+            <a:r>
+              <a:rPr lang="en-US" sz="1650" b="1" dirty="0">
+                <a:solidFill>
+                  <a:srgbClr val="E7E9FF"/>
+                </a:solidFill>
+                <a:latin typeface="Noto Sans KR" pitchFamily="34" charset="0"/>
+                <a:ea typeface="Noto Sans KR" pitchFamily="34" charset="-122"/>
+                <a:cs typeface="Noto Sans KR" pitchFamily="34" charset="-120"/>
+              </a:rPr>
+              <a:t>단위/통합 테스트 44개</a:t>
+            </a:r>
+            <a:pPr indent="0" marL="0">
+              <a:lnSpc>
+                <a:spcPct val="145000"/>
+              </a:lnSpc>
+              <a:buNone/>
+            </a:pPr>
+            <a:r>
+              <a:rPr lang="en-US" sz="1400" dirty="0">
+                <a:solidFill>
+                  <a:srgbClr val="8B8FB8"/>
+                </a:solidFill>
+                <a:latin typeface="Noto Sans KR" pitchFamily="34" charset="0"/>
+                <a:ea typeface="Noto Sans KR" pitchFamily="34" charset="-122"/>
+                <a:cs typeface="Noto Sans KR" pitchFamily="34" charset="-120"/>
+              </a:rPr>
+              <a:t>  — 게임 엔진, Redis 타이머, WS 연결 종료 처리</a:t>
+            </a:r>
+            <a:pPr indent="0" marL="0">
+              <a:lnSpc>
+                <a:spcPct val="145000"/>
+              </a:lnSpc>
+              <a:buNone/>
+            </a:pPr>
+            <a:r>
+              <a:rPr lang="en-US" sz="1350" dirty="0">
+                <a:solidFill>
+                  <a:srgbClr val="000000"/>
+                </a:solidFill>
+                <a:latin typeface="Noto Sans KR" pitchFamily="34" charset="0"/>
+                <a:ea typeface="Noto Sans KR" pitchFamily="34" charset="-122"/>
+                <a:cs typeface="Noto Sans KR" pitchFamily="34" charset="-120"/>
+              </a:rPr>
+              <a:t>
+</a:t>
+            </a:r>
+            <a:pPr indent="0" marL="0">
+              <a:lnSpc>
+                <a:spcPct val="145000"/>
+              </a:lnSpc>
+              <a:buNone/>
+            </a:pPr>
+            <a:r>
+              <a:rPr lang="en-US" sz="1350" dirty="0">
+                <a:solidFill>
+                  <a:srgbClr val="22D3EE"/>
+                </a:solidFill>
+                <a:latin typeface="Noto Sans KR" pitchFamily="34" charset="0"/>
+                <a:ea typeface="Noto Sans KR" pitchFamily="34" charset="-122"/>
+                <a:cs typeface="Noto Sans KR" pitchFamily="34" charset="-120"/>
+              </a:rPr>
+              <a:t>◆ </a:t>
+            </a:r>
+            <a:pPr indent="0" marL="0">
+              <a:lnSpc>
+                <a:spcPct val="145000"/>
+              </a:lnSpc>
+              <a:buNone/>
+            </a:pPr>
+            <a:r>
+              <a:rPr lang="en-US" sz="1650" b="1" dirty="0">
+                <a:solidFill>
+                  <a:srgbClr val="E7E9FF"/>
+                </a:solidFill>
+                <a:latin typeface="Noto Sans KR" pitchFamily="34" charset="0"/>
+                <a:ea typeface="Noto Sans KR" pitchFamily="34" charset="-122"/>
+                <a:cs typeface="Noto Sans KR" pitchFamily="34" charset="-120"/>
+              </a:rPr>
+              <a:t>로컬 E2E: 실제 브라우저 4개 자동 조작 → 풀 게임 완주 (Playwright)</a:t>
+            </a:r>
+            <a:pPr indent="0" marL="0">
+              <a:lnSpc>
+                <a:spcPct val="145000"/>
+              </a:lnSpc>
+              <a:buNone/>
+            </a:pPr>
+            <a:r>
+              <a:rPr lang="en-US" sz="1350" dirty="0">
+                <a:solidFill>
+                  <a:srgbClr val="000000"/>
+                </a:solidFill>
+                <a:latin typeface="Noto Sans KR" pitchFamily="34" charset="0"/>
+                <a:ea typeface="Noto Sans KR" pitchFamily="34" charset="-122"/>
+                <a:cs typeface="Noto Sans KR" pitchFamily="34" charset="-120"/>
+              </a:rPr>
+              <a:t>
+</a:t>
+            </a:r>
+            <a:pPr indent="0" marL="0">
+              <a:lnSpc>
+                <a:spcPct val="145000"/>
+              </a:lnSpc>
+              <a:buNone/>
+            </a:pPr>
+            <a:r>
+              <a:rPr lang="en-US" sz="1350" dirty="0">
+                <a:solidFill>
+                  <a:srgbClr val="22D3EE"/>
+                </a:solidFill>
+                <a:latin typeface="Noto Sans KR" pitchFamily="34" charset="0"/>
+                <a:ea typeface="Noto Sans KR" pitchFamily="34" charset="-122"/>
+                <a:cs typeface="Noto Sans KR" pitchFamily="34" charset="-120"/>
+              </a:rPr>
+              <a:t>◆ </a:t>
+            </a:r>
+            <a:pPr indent="0" marL="0">
+              <a:lnSpc>
+                <a:spcPct val="145000"/>
+              </a:lnSpc>
+              <a:buNone/>
+            </a:pPr>
+            <a:r>
+              <a:rPr lang="en-US" sz="1650" b="1" dirty="0">
+                <a:solidFill>
+                  <a:srgbClr val="E7E9FF"/>
+                </a:solidFill>
+                <a:latin typeface="Noto Sans KR" pitchFamily="34" charset="0"/>
+                <a:ea typeface="Noto Sans KR" pitchFamily="34" charset="-122"/>
+                <a:cs typeface="Noto Sans KR" pitchFamily="34" charset="-120"/>
+              </a:rPr>
+              <a:t>프로덕션 E2E: ALB 경유 4클라이언트 → 멀티 태스크 분산 환경에서 쇼다운까지</a:t>
+            </a:r>
+            <a:pPr indent="0" marL="0">
+              <a:lnSpc>
+                <a:spcPct val="145000"/>
+              </a:lnSpc>
+              <a:buNone/>
+            </a:pPr>
+            <a:r>
+              <a:rPr lang="en-US" sz="1350" dirty="0">
+                <a:solidFill>
+                  <a:srgbClr val="000000"/>
+                </a:solidFill>
+                <a:latin typeface="Noto Sans KR" pitchFamily="34" charset="0"/>
+                <a:ea typeface="Noto Sans KR" pitchFamily="34" charset="-122"/>
+                <a:cs typeface="Noto Sans KR" pitchFamily="34" charset="-120"/>
+              </a:rPr>
+              <a:t>
+</a:t>
+            </a:r>
+            <a:pPr indent="0" marL="0">
+              <a:lnSpc>
+                <a:spcPct val="145000"/>
+              </a:lnSpc>
+              <a:buNone/>
+            </a:pPr>
+            <a:r>
+              <a:rPr lang="en-US" sz="1350" dirty="0">
+                <a:solidFill>
+                  <a:srgbClr val="22D3EE"/>
+                </a:solidFill>
+                <a:latin typeface="Noto Sans KR" pitchFamily="34" charset="0"/>
+                <a:ea typeface="Noto Sans KR" pitchFamily="34" charset="-122"/>
+                <a:cs typeface="Noto Sans KR" pitchFamily="34" charset="-120"/>
+              </a:rPr>
+              <a:t>◆ </a:t>
+            </a:r>
+            <a:pPr indent="0" marL="0">
+              <a:lnSpc>
+                <a:spcPct val="145000"/>
+              </a:lnSpc>
+              <a:buNone/>
+            </a:pPr>
+            <a:r>
+              <a:rPr lang="en-US" sz="1650" b="1" dirty="0">
+                <a:solidFill>
+                  <a:srgbClr val="E7E9FF"/>
+                </a:solidFill>
+                <a:latin typeface="Noto Sans KR" pitchFamily="34" charset="0"/>
+                <a:ea typeface="Noto Sans KR" pitchFamily="34" charset="-122"/>
+                <a:cs typeface="Noto Sans KR" pitchFamily="34" charset="-120"/>
+              </a:rPr>
+              <a:t>ALB 헬스체크 OK · 타깃 2/2 healthy · 롤링 배포 무중단 확인</a:t>
+            </a:r>
+            <a:pPr indent="0" marL="0">
+              <a:lnSpc>
+                <a:spcPct val="145000"/>
+              </a:lnSpc>
+              <a:buNone/>
+            </a:pPr>
+            <a:r>
+              <a:rPr lang="en-US" sz="1350" dirty="0">
+                <a:solidFill>
+                  <a:srgbClr val="000000"/>
+                </a:solidFill>
+                <a:latin typeface="Noto Sans KR" pitchFamily="34" charset="0"/>
+                <a:ea typeface="Noto Sans KR" pitchFamily="34" charset="-122"/>
+                <a:cs typeface="Noto Sans KR" pitchFamily="34" charset="-120"/>
+              </a:rPr>
+              <a:t>
+</a:t>
+            </a:r>
+            <a:endParaRPr lang="en-US" sz="1350" dirty="0"/>
+          </a:p>
+        </p:txBody>
+      </p:sp>
+      <p:sp>
+        <p:nvSpPr>
+          <p:cNvPr id="6" name="Shape 3"/>
+          <p:cNvSpPr/>
           <p:nvPr/>
-        </p:nvPicPr>
-        <p:blipFill>
-          <a:blip r:embed="rId2"/>
-          <a:stretch>
-            <a:fillRect/>
-          </a:stretch>
-        </p:blipFill>
-        <p:spPr>
-          <a:xfrm>
-            <a:off x="6309360" y="1554480"/>
-            <a:ext cx="5074920" cy="4653702"/>
+        </p:nvSpPr>
+        <p:spPr>
+          <a:xfrm>
+            <a:off x="640080" y="4480560"/>
+            <a:ext cx="10972800" cy="1737360"/>
+          </a:xfrm>
+          <a:prstGeom prst="roundRect">
+            <a:avLst>
+              <a:gd name="adj" fmla="val 6316"/>
+            </a:avLst>
+          </a:prstGeom>
+          <a:solidFill>
+            <a:srgbClr val="111120"/>
+          </a:solidFill>
+          <a:ln w="12700">
+            <a:solidFill>
+              <a:srgbClr val="F59E0B"/>
+            </a:solidFill>
+            <a:prstDash val="solid"/>
+          </a:ln>
+        </p:spPr>
+      </p:sp>
+      <p:sp>
+        <p:nvSpPr>
+          <p:cNvPr id="7" name="Text 4"/>
+          <p:cNvSpPr/>
+          <p:nvPr/>
+        </p:nvSpPr>
+        <p:spPr>
+          <a:xfrm>
+            <a:off x="868680" y="4617720"/>
+            <a:ext cx="10515600" cy="365760"/>
           </a:xfrm>
           <a:prstGeom prst="rect">
             <a:avLst/>
           </a:prstGeom>
-        </p:spPr>
-      </p:pic>
-      <p:sp>
-        <p:nvSpPr>
-          <p:cNvPr id="7" name="Text 2"/>
+          <a:noFill/>
+          <a:ln/>
+        </p:spPr>
+        <p:txBody>
+          <a:bodyPr wrap="square" rtlCol="0" anchor="ctr"/>
+          <a:lstStyle/>
+          <a:p>
+            <a:pPr indent="0" marL="0">
+              <a:buNone/>
+            </a:pPr>
+            <a:r>
+              <a:rPr lang="en-US" sz="1300" b="1" spc="200" kern="0" dirty="0">
+                <a:solidFill>
+                  <a:srgbClr val="F59E0B"/>
+                </a:solidFill>
+                <a:latin typeface="Noto Sans KR" pitchFamily="34" charset="0"/>
+                <a:ea typeface="Noto Sans KR" pitchFamily="34" charset="-122"/>
+                <a:cs typeface="Noto Sans KR" pitchFamily="34" charset="-120"/>
+              </a:rPr>
+              <a:t>TDD로 잡은 실제 버그들</a:t>
+            </a:r>
+            <a:endParaRPr lang="en-US" sz="1300" dirty="0"/>
+          </a:p>
+        </p:txBody>
+      </p:sp>
+      <p:sp>
+        <p:nvSpPr>
+          <p:cNvPr id="8" name="Text 5"/>
           <p:cNvSpPr/>
           <p:nvPr/>
         </p:nvSpPr>
         <p:spPr>
           <a:xfrm>
-            <a:off x="640080" y="6400800"/>
-            <a:ext cx="10972800" cy="365760"/>
+            <a:off x="868680" y="4983480"/>
+            <a:ext cx="10515600" cy="1051560"/>
           </a:xfrm>
           <a:prstGeom prst="rect">
             <a:avLst/>
@@ -3409,24 +3944,27 @@
           <a:ln/>
         </p:spPr>
         <p:txBody>
-          <a:bodyPr wrap="square" rtlCol="0" anchor="ctr"/>
-          <a:lstStyle/>
-          <a:p>
-            <a:pPr algn="ctr" indent="0" marL="0">
-              <a:buNone/>
-            </a:pPr>
-            <a:r>
-              <a:rPr lang="en-US" sz="1300" dirty="0">
-                <a:solidFill>
-                  <a:srgbClr val="8B8FB8"/>
-                </a:solidFill>
-                <a:latin typeface="Noto Sans KR" pitchFamily="34" charset="0"/>
-                <a:ea typeface="Noto Sans KR" pitchFamily="34" charset="-122"/>
-                <a:cs typeface="Noto Sans KR" pitchFamily="34" charset="-120"/>
-              </a:rPr>
-              <a:t>로비(방 생성/입장) → 4인 자동 시작 → 블라인드/베팅 → 쇼다운 → 칩 정산 후 다음 핸드</a:t>
-            </a:r>
-            <a:endParaRPr lang="en-US" sz="1300" dirty="0"/>
+          <a:bodyPr wrap="square" rtlCol="0" anchor="t"/>
+          <a:lstStyle/>
+          <a:p>
+            <a:pPr indent="0" marL="0">
+              <a:lnSpc>
+                <a:spcPct val="135000"/>
+              </a:lnSpc>
+              <a:buNone/>
+            </a:pPr>
+            <a:r>
+              <a:rPr lang="en-US" sz="1450" dirty="0">
+                <a:solidFill>
+                  <a:srgbClr val="E7E9FF"/>
+                </a:solidFill>
+                <a:latin typeface="Noto Sans KR" pitchFamily="34" charset="0"/>
+                <a:ea typeface="Noto Sans KR" pitchFamily="34" charset="-122"/>
+                <a:cs typeface="Noto Sans KR" pitchFamily="34" charset="-120"/>
+              </a:rPr>
+              <a:t>베팅 라운드 종료 판정 누락(게임이 플랍을 못 봄) · 턴 타이머 TTL이 deadline과 동시 만료(auto-fold 불능) · 쇼다운 키커 무시(A페어=K페어 무승부) · 연결 끊김 시 유령 방 잔류</a:t>
+            </a:r>
+            <a:endParaRPr lang="en-US" sz="1450" dirty="0"/>
           </a:p>
         </p:txBody>
       </p:sp>
@@ -3495,7 +4033,7 @@
                 <a:ea typeface="Noto Sans KR" pitchFamily="34" charset="-122"/>
                 <a:cs typeface="Noto Sans KR" pitchFamily="34" charset="-120"/>
               </a:rPr>
-              <a:t>11 — LIVE DEMO</a:t>
+              <a:t>12 — DEMO (SCREENSHOTS)</a:t>
             </a:r>
             <a:endParaRPr lang="en-US" sz="1300" dirty="0"/>
           </a:p>
@@ -3534,42 +4072,70 @@
                 <a:ea typeface="Noto Sans KR" pitchFamily="34" charset="-122"/>
                 <a:cs typeface="Noto Sans KR" pitchFamily="34" charset="-120"/>
               </a:rPr>
-              <a:t>라이브 데모 🔴</a:t>
+              <a:t>게임 플레이</a:t>
             </a:r>
             <a:endParaRPr lang="en-US" sz="3000" dirty="0"/>
           </a:p>
         </p:txBody>
       </p:sp>
-      <p:sp>
-        <p:nvSpPr>
-          <p:cNvPr id="5" name="Shape 2"/>
+      <p:pic>
+        <p:nvPicPr>
+          <p:cNvPr id="5" name="Image 0" descr="/home/dakori/github/cloud_holdem/docs/presentation/assets/lobby.png">    </p:cNvPr>
+          <p:cNvPicPr>
+            <a:picLocks noChangeAspect="1"/>
+          </p:cNvPicPr>
+          <p:nvPr/>
+        </p:nvPicPr>
+        <p:blipFill>
+          <a:blip r:embed="rId1"/>
+          <a:stretch>
+            <a:fillRect/>
+          </a:stretch>
+        </p:blipFill>
+        <p:spPr>
+          <a:xfrm>
+            <a:off x="640080" y="1554480"/>
+            <a:ext cx="5394960" cy="4639666"/>
+          </a:xfrm>
+          <a:prstGeom prst="rect">
+            <a:avLst/>
+          </a:prstGeom>
+        </p:spPr>
+      </p:pic>
+      <p:pic>
+        <p:nvPicPr>
+          <p:cNvPr id="6" name="Image 1" descr="/home/dakori/github/cloud_holdem/docs/presentation/assets/game-table.png">    </p:cNvPr>
+          <p:cNvPicPr>
+            <a:picLocks noChangeAspect="1"/>
+          </p:cNvPicPr>
+          <p:nvPr/>
+        </p:nvPicPr>
+        <p:blipFill>
+          <a:blip r:embed="rId2"/>
+          <a:stretch>
+            <a:fillRect/>
+          </a:stretch>
+        </p:blipFill>
+        <p:spPr>
+          <a:xfrm>
+            <a:off x="6309360" y="1554480"/>
+            <a:ext cx="5074920" cy="4653702"/>
+          </a:xfrm>
+          <a:prstGeom prst="rect">
+            <a:avLst/>
+          </a:prstGeom>
+        </p:spPr>
+      </p:pic>
+      <p:sp>
+        <p:nvSpPr>
+          <p:cNvPr id="7" name="Text 2"/>
           <p:cNvSpPr/>
           <p:nvPr/>
         </p:nvSpPr>
         <p:spPr>
           <a:xfrm>
-            <a:off x="640080" y="1600200"/>
-            <a:ext cx="457200" cy="457200"/>
-          </a:xfrm>
-          <a:prstGeom prst="ellipse">
-            <a:avLst/>
-          </a:prstGeom>
-          <a:solidFill>
-            <a:srgbClr val="7C3AED"/>
-          </a:solidFill>
-          <a:ln/>
-        </p:spPr>
-      </p:sp>
-      <p:sp>
-        <p:nvSpPr>
-          <p:cNvPr id="6" name="Text 3"/>
-          <p:cNvSpPr/>
-          <p:nvPr/>
-        </p:nvSpPr>
-        <p:spPr>
-          <a:xfrm>
-            <a:off x="640080" y="1600200"/>
-            <a:ext cx="457200" cy="457200"/>
+            <a:off x="640080" y="6400800"/>
+            <a:ext cx="10972800" cy="365760"/>
           </a:xfrm>
           <a:prstGeom prst="rect">
             <a:avLst/>
@@ -3585,754 +4151,17 @@
               <a:buNone/>
             </a:pPr>
             <a:r>
-              <a:rPr lang="en-US" sz="1500" b="1" dirty="0">
-                <a:solidFill>
-                  <a:srgbClr val="FFFFFF"/>
-                </a:solidFill>
-              </a:rPr>
-              <a:t>1</a:t>
-            </a:r>
-            <a:endParaRPr lang="en-US" sz="1500" dirty="0"/>
-          </a:p>
-        </p:txBody>
-      </p:sp>
-      <p:sp>
-        <p:nvSpPr>
-          <p:cNvPr id="7" name="Text 4"/>
-          <p:cNvSpPr/>
-          <p:nvPr/>
-        </p:nvSpPr>
-        <p:spPr>
-          <a:xfrm>
-            <a:off x="1280160" y="1600200"/>
-            <a:ext cx="5120640" cy="548640"/>
-          </a:xfrm>
-          <a:prstGeom prst="rect">
-            <a:avLst/>
-          </a:prstGeom>
-          <a:noFill/>
-          <a:ln/>
-        </p:spPr>
-        <p:txBody>
-          <a:bodyPr wrap="square" rtlCol="0" anchor="ctr"/>
-          <a:lstStyle/>
-          <a:p>
-            <a:pPr indent="0" marL="0">
-              <a:buNone/>
-            </a:pPr>
-            <a:r>
-              <a:rPr lang="en-US" sz="1550" dirty="0">
-                <a:solidFill>
-                  <a:srgbClr val="E7E9FF"/>
-                </a:solidFill>
-                <a:latin typeface="Noto Sans KR" pitchFamily="34" charset="0"/>
-                <a:ea typeface="Noto Sans KR" pitchFamily="34" charset="-122"/>
-                <a:cs typeface="Noto Sans KR" pitchFamily="34" charset="-120"/>
-              </a:rPr>
-              <a:t>브라우저 탭 4개로 접속 (시크릿 창 혼용)</a:t>
-            </a:r>
-            <a:endParaRPr lang="en-US" sz="1550" dirty="0"/>
-          </a:p>
-        </p:txBody>
-      </p:sp>
-      <p:sp>
-        <p:nvSpPr>
-          <p:cNvPr id="8" name="Shape 5"/>
-          <p:cNvSpPr/>
-          <p:nvPr/>
-        </p:nvSpPr>
-        <p:spPr>
-          <a:xfrm>
-            <a:off x="640080" y="2350008"/>
-            <a:ext cx="457200" cy="457200"/>
-          </a:xfrm>
-          <a:prstGeom prst="ellipse">
-            <a:avLst/>
-          </a:prstGeom>
-          <a:solidFill>
-            <a:srgbClr val="7C3AED"/>
-          </a:solidFill>
-          <a:ln/>
-        </p:spPr>
-      </p:sp>
-      <p:sp>
-        <p:nvSpPr>
-          <p:cNvPr id="9" name="Text 6"/>
-          <p:cNvSpPr/>
-          <p:nvPr/>
-        </p:nvSpPr>
-        <p:spPr>
-          <a:xfrm>
-            <a:off x="640080" y="2350008"/>
-            <a:ext cx="457200" cy="457200"/>
-          </a:xfrm>
-          <a:prstGeom prst="rect">
-            <a:avLst/>
-          </a:prstGeom>
-          <a:noFill/>
-          <a:ln/>
-        </p:spPr>
-        <p:txBody>
-          <a:bodyPr wrap="square" rtlCol="0" anchor="ctr"/>
-          <a:lstStyle/>
-          <a:p>
-            <a:pPr algn="ctr" indent="0" marL="0">
-              <a:buNone/>
-            </a:pPr>
-            <a:r>
-              <a:rPr lang="en-US" sz="1500" b="1" dirty="0">
-                <a:solidFill>
-                  <a:srgbClr val="FFFFFF"/>
-                </a:solidFill>
-              </a:rPr>
-              <a:t>2</a:t>
-            </a:r>
-            <a:endParaRPr lang="en-US" sz="1500" dirty="0"/>
-          </a:p>
-        </p:txBody>
-      </p:sp>
-      <p:sp>
-        <p:nvSpPr>
-          <p:cNvPr id="10" name="Text 7"/>
-          <p:cNvSpPr/>
-          <p:nvPr/>
-        </p:nvSpPr>
-        <p:spPr>
-          <a:xfrm>
-            <a:off x="1280160" y="2350008"/>
-            <a:ext cx="5120640" cy="548640"/>
-          </a:xfrm>
-          <a:prstGeom prst="rect">
-            <a:avLst/>
-          </a:prstGeom>
-          <a:noFill/>
-          <a:ln/>
-        </p:spPr>
-        <p:txBody>
-          <a:bodyPr wrap="square" rtlCol="0" anchor="ctr"/>
-          <a:lstStyle/>
-          <a:p>
-            <a:pPr indent="0" marL="0">
-              <a:buNone/>
-            </a:pPr>
-            <a:r>
-              <a:rPr lang="en-US" sz="1550" dirty="0">
-                <a:solidFill>
-                  <a:srgbClr val="E7E9FF"/>
-                </a:solidFill>
-                <a:latin typeface="Noto Sans KR" pitchFamily="34" charset="0"/>
-                <a:ea typeface="Noto Sans KR" pitchFamily="34" charset="-122"/>
-                <a:cs typeface="Noto Sans KR" pitchFamily="34" charset="-120"/>
-              </a:rPr>
-              <a:t>탭1: 닉네임 입력 → 방 만들기</a:t>
-            </a:r>
-            <a:endParaRPr lang="en-US" sz="1550" dirty="0"/>
-          </a:p>
-        </p:txBody>
-      </p:sp>
-      <p:sp>
-        <p:nvSpPr>
-          <p:cNvPr id="11" name="Shape 8"/>
-          <p:cNvSpPr/>
-          <p:nvPr/>
-        </p:nvSpPr>
-        <p:spPr>
-          <a:xfrm>
-            <a:off x="640080" y="3099816"/>
-            <a:ext cx="457200" cy="457200"/>
-          </a:xfrm>
-          <a:prstGeom prst="ellipse">
-            <a:avLst/>
-          </a:prstGeom>
-          <a:solidFill>
-            <a:srgbClr val="7C3AED"/>
-          </a:solidFill>
-          <a:ln/>
-        </p:spPr>
-      </p:sp>
-      <p:sp>
-        <p:nvSpPr>
-          <p:cNvPr id="12" name="Text 9"/>
-          <p:cNvSpPr/>
-          <p:nvPr/>
-        </p:nvSpPr>
-        <p:spPr>
-          <a:xfrm>
-            <a:off x="640080" y="3099816"/>
-            <a:ext cx="457200" cy="457200"/>
-          </a:xfrm>
-          <a:prstGeom prst="rect">
-            <a:avLst/>
-          </a:prstGeom>
-          <a:noFill/>
-          <a:ln/>
-        </p:spPr>
-        <p:txBody>
-          <a:bodyPr wrap="square" rtlCol="0" anchor="ctr"/>
-          <a:lstStyle/>
-          <a:p>
-            <a:pPr algn="ctr" indent="0" marL="0">
-              <a:buNone/>
-            </a:pPr>
-            <a:r>
-              <a:rPr lang="en-US" sz="1500" b="1" dirty="0">
-                <a:solidFill>
-                  <a:srgbClr val="FFFFFF"/>
-                </a:solidFill>
-              </a:rPr>
-              <a:t>3</a:t>
-            </a:r>
-            <a:endParaRPr lang="en-US" sz="1500" dirty="0"/>
-          </a:p>
-        </p:txBody>
-      </p:sp>
-      <p:sp>
-        <p:nvSpPr>
-          <p:cNvPr id="13" name="Text 10"/>
-          <p:cNvSpPr/>
-          <p:nvPr/>
-        </p:nvSpPr>
-        <p:spPr>
-          <a:xfrm>
-            <a:off x="1280160" y="3099816"/>
-            <a:ext cx="5120640" cy="548640"/>
-          </a:xfrm>
-          <a:prstGeom prst="rect">
-            <a:avLst/>
-          </a:prstGeom>
-          <a:noFill/>
-          <a:ln/>
-        </p:spPr>
-        <p:txBody>
-          <a:bodyPr wrap="square" rtlCol="0" anchor="ctr"/>
-          <a:lstStyle/>
-          <a:p>
-            <a:pPr indent="0" marL="0">
-              <a:buNone/>
-            </a:pPr>
-            <a:r>
-              <a:rPr lang="en-US" sz="1550" dirty="0">
-                <a:solidFill>
-                  <a:srgbClr val="E7E9FF"/>
-                </a:solidFill>
-                <a:latin typeface="Noto Sans KR" pitchFamily="34" charset="0"/>
-                <a:ea typeface="Noto Sans KR" pitchFamily="34" charset="-122"/>
-                <a:cs typeface="Noto Sans KR" pitchFamily="34" charset="-120"/>
-              </a:rPr>
-              <a:t>탭2~4: 같은 방 입장 → 5초 카운트다운</a:t>
-            </a:r>
-            <a:endParaRPr lang="en-US" sz="1550" dirty="0"/>
-          </a:p>
-        </p:txBody>
-      </p:sp>
-      <p:sp>
-        <p:nvSpPr>
-          <p:cNvPr id="14" name="Shape 11"/>
-          <p:cNvSpPr/>
-          <p:nvPr/>
-        </p:nvSpPr>
-        <p:spPr>
-          <a:xfrm>
-            <a:off x="640080" y="3849624"/>
-            <a:ext cx="457200" cy="457200"/>
-          </a:xfrm>
-          <a:prstGeom prst="ellipse">
-            <a:avLst/>
-          </a:prstGeom>
-          <a:solidFill>
-            <a:srgbClr val="7C3AED"/>
-          </a:solidFill>
-          <a:ln/>
-        </p:spPr>
-      </p:sp>
-      <p:sp>
-        <p:nvSpPr>
-          <p:cNvPr id="15" name="Text 12"/>
-          <p:cNvSpPr/>
-          <p:nvPr/>
-        </p:nvSpPr>
-        <p:spPr>
-          <a:xfrm>
-            <a:off x="640080" y="3849624"/>
-            <a:ext cx="457200" cy="457200"/>
-          </a:xfrm>
-          <a:prstGeom prst="rect">
-            <a:avLst/>
-          </a:prstGeom>
-          <a:noFill/>
-          <a:ln/>
-        </p:spPr>
-        <p:txBody>
-          <a:bodyPr wrap="square" rtlCol="0" anchor="ctr"/>
-          <a:lstStyle/>
-          <a:p>
-            <a:pPr algn="ctr" indent="0" marL="0">
-              <a:buNone/>
-            </a:pPr>
-            <a:r>
-              <a:rPr lang="en-US" sz="1500" b="1" dirty="0">
-                <a:solidFill>
-                  <a:srgbClr val="FFFFFF"/>
-                </a:solidFill>
-              </a:rPr>
-              <a:t>4</a:t>
-            </a:r>
-            <a:endParaRPr lang="en-US" sz="1500" dirty="0"/>
-          </a:p>
-        </p:txBody>
-      </p:sp>
-      <p:sp>
-        <p:nvSpPr>
-          <p:cNvPr id="16" name="Text 13"/>
-          <p:cNvSpPr/>
-          <p:nvPr/>
-        </p:nvSpPr>
-        <p:spPr>
-          <a:xfrm>
-            <a:off x="1280160" y="3849624"/>
-            <a:ext cx="5120640" cy="548640"/>
-          </a:xfrm>
-          <a:prstGeom prst="rect">
-            <a:avLst/>
-          </a:prstGeom>
-          <a:noFill/>
-          <a:ln/>
-        </p:spPr>
-        <p:txBody>
-          <a:bodyPr wrap="square" rtlCol="0" anchor="ctr"/>
-          <a:lstStyle/>
-          <a:p>
-            <a:pPr indent="0" marL="0">
-              <a:buNone/>
-            </a:pPr>
-            <a:r>
-              <a:rPr lang="en-US" sz="1550" dirty="0">
-                <a:solidFill>
-                  <a:srgbClr val="E7E9FF"/>
-                </a:solidFill>
-                <a:latin typeface="Noto Sans KR" pitchFamily="34" charset="0"/>
-                <a:ea typeface="Noto Sans KR" pitchFamily="34" charset="-122"/>
-                <a:cs typeface="Noto Sans KR" pitchFamily="34" charset="-120"/>
-              </a:rPr>
-              <a:t>베팅 한 바퀴 (콜/체크로 빠르게) → 플랍 공개</a:t>
-            </a:r>
-            <a:endParaRPr lang="en-US" sz="1550" dirty="0"/>
-          </a:p>
-        </p:txBody>
-      </p:sp>
-      <p:sp>
-        <p:nvSpPr>
-          <p:cNvPr id="17" name="Shape 14"/>
-          <p:cNvSpPr/>
-          <p:nvPr/>
-        </p:nvSpPr>
-        <p:spPr>
-          <a:xfrm>
-            <a:off x="640080" y="4599432"/>
-            <a:ext cx="457200" cy="457200"/>
-          </a:xfrm>
-          <a:prstGeom prst="ellipse">
-            <a:avLst/>
-          </a:prstGeom>
-          <a:solidFill>
-            <a:srgbClr val="7C3AED"/>
-          </a:solidFill>
-          <a:ln/>
-        </p:spPr>
-      </p:sp>
-      <p:sp>
-        <p:nvSpPr>
-          <p:cNvPr id="18" name="Text 15"/>
-          <p:cNvSpPr/>
-          <p:nvPr/>
-        </p:nvSpPr>
-        <p:spPr>
-          <a:xfrm>
-            <a:off x="640080" y="4599432"/>
-            <a:ext cx="457200" cy="457200"/>
-          </a:xfrm>
-          <a:prstGeom prst="rect">
-            <a:avLst/>
-          </a:prstGeom>
-          <a:noFill/>
-          <a:ln/>
-        </p:spPr>
-        <p:txBody>
-          <a:bodyPr wrap="square" rtlCol="0" anchor="ctr"/>
-          <a:lstStyle/>
-          <a:p>
-            <a:pPr algn="ctr" indent="0" marL="0">
-              <a:buNone/>
-            </a:pPr>
-            <a:r>
-              <a:rPr lang="en-US" sz="1500" b="1" dirty="0">
-                <a:solidFill>
-                  <a:srgbClr val="FFFFFF"/>
-                </a:solidFill>
-              </a:rPr>
-              <a:t>5</a:t>
-            </a:r>
-            <a:endParaRPr lang="en-US" sz="1500" dirty="0"/>
-          </a:p>
-        </p:txBody>
-      </p:sp>
-      <p:sp>
-        <p:nvSpPr>
-          <p:cNvPr id="19" name="Text 16"/>
-          <p:cNvSpPr/>
-          <p:nvPr/>
-        </p:nvSpPr>
-        <p:spPr>
-          <a:xfrm>
-            <a:off x="1280160" y="4599432"/>
-            <a:ext cx="5120640" cy="548640"/>
-          </a:xfrm>
-          <a:prstGeom prst="rect">
-            <a:avLst/>
-          </a:prstGeom>
-          <a:noFill/>
-          <a:ln/>
-        </p:spPr>
-        <p:txBody>
-          <a:bodyPr wrap="square" rtlCol="0" anchor="ctr"/>
-          <a:lstStyle/>
-          <a:p>
-            <a:pPr indent="0" marL="0">
-              <a:buNone/>
-            </a:pPr>
-            <a:r>
-              <a:rPr lang="en-US" sz="1550" dirty="0">
-                <a:solidFill>
-                  <a:srgbClr val="E7E9FF"/>
-                </a:solidFill>
-                <a:latin typeface="Noto Sans KR" pitchFamily="34" charset="0"/>
-                <a:ea typeface="Noto Sans KR" pitchFamily="34" charset="-122"/>
-                <a:cs typeface="Noto Sans KR" pitchFamily="34" charset="-120"/>
-              </a:rPr>
-              <a:t>탭 하나 방치 → 20초 auto-fold 시연</a:t>
-            </a:r>
-            <a:endParaRPr lang="en-US" sz="1550" dirty="0"/>
-          </a:p>
-        </p:txBody>
-      </p:sp>
-      <p:sp>
-        <p:nvSpPr>
-          <p:cNvPr id="20" name="Shape 17"/>
-          <p:cNvSpPr/>
-          <p:nvPr/>
-        </p:nvSpPr>
-        <p:spPr>
-          <a:xfrm>
-            <a:off x="640080" y="5349240"/>
-            <a:ext cx="457200" cy="457200"/>
-          </a:xfrm>
-          <a:prstGeom prst="ellipse">
-            <a:avLst/>
-          </a:prstGeom>
-          <a:solidFill>
-            <a:srgbClr val="7C3AED"/>
-          </a:solidFill>
-          <a:ln/>
-        </p:spPr>
-      </p:sp>
-      <p:sp>
-        <p:nvSpPr>
-          <p:cNvPr id="21" name="Text 18"/>
-          <p:cNvSpPr/>
-          <p:nvPr/>
-        </p:nvSpPr>
-        <p:spPr>
-          <a:xfrm>
-            <a:off x="640080" y="5349240"/>
-            <a:ext cx="457200" cy="457200"/>
-          </a:xfrm>
-          <a:prstGeom prst="rect">
-            <a:avLst/>
-          </a:prstGeom>
-          <a:noFill/>
-          <a:ln/>
-        </p:spPr>
-        <p:txBody>
-          <a:bodyPr wrap="square" rtlCol="0" anchor="ctr"/>
-          <a:lstStyle/>
-          <a:p>
-            <a:pPr algn="ctr" indent="0" marL="0">
-              <a:buNone/>
-            </a:pPr>
-            <a:r>
-              <a:rPr lang="en-US" sz="1500" b="1" dirty="0">
-                <a:solidFill>
-                  <a:srgbClr val="FFFFFF"/>
-                </a:solidFill>
-              </a:rPr>
-              <a:t>6</a:t>
-            </a:r>
-            <a:endParaRPr lang="en-US" sz="1500" dirty="0"/>
-          </a:p>
-        </p:txBody>
-      </p:sp>
-      <p:sp>
-        <p:nvSpPr>
-          <p:cNvPr id="22" name="Text 19"/>
-          <p:cNvSpPr/>
-          <p:nvPr/>
-        </p:nvSpPr>
-        <p:spPr>
-          <a:xfrm>
-            <a:off x="1280160" y="5349240"/>
-            <a:ext cx="5120640" cy="548640"/>
-          </a:xfrm>
-          <a:prstGeom prst="rect">
-            <a:avLst/>
-          </a:prstGeom>
-          <a:noFill/>
-          <a:ln/>
-        </p:spPr>
-        <p:txBody>
-          <a:bodyPr wrap="square" rtlCol="0" anchor="ctr"/>
-          <a:lstStyle/>
-          <a:p>
-            <a:pPr indent="0" marL="0">
-              <a:buNone/>
-            </a:pPr>
-            <a:r>
-              <a:rPr lang="en-US" sz="1550" dirty="0">
-                <a:solidFill>
-                  <a:srgbClr val="E7E9FF"/>
-                </a:solidFill>
-                <a:latin typeface="Noto Sans KR" pitchFamily="34" charset="0"/>
-                <a:ea typeface="Noto Sans KR" pitchFamily="34" charset="-122"/>
-                <a:cs typeface="Noto Sans KR" pitchFamily="34" charset="-120"/>
-              </a:rPr>
-              <a:t>쇼다운 → 칩 정산 → 다음 핸드 자동 시작</a:t>
-            </a:r>
-            <a:endParaRPr lang="en-US" sz="1550" dirty="0"/>
-          </a:p>
-        </p:txBody>
-      </p:sp>
-      <p:sp>
-        <p:nvSpPr>
-          <p:cNvPr id="23" name="Shape 20"/>
-          <p:cNvSpPr/>
-          <p:nvPr/>
-        </p:nvSpPr>
-        <p:spPr>
-          <a:xfrm>
-            <a:off x="6766560" y="1600200"/>
-            <a:ext cx="4846320" cy="4480560"/>
-          </a:xfrm>
-          <a:prstGeom prst="roundRect">
-            <a:avLst>
-              <a:gd name="adj" fmla="val 2449"/>
-            </a:avLst>
-          </a:prstGeom>
-          <a:solidFill>
-            <a:srgbClr val="111120"/>
-          </a:solidFill>
-          <a:ln w="12700">
-            <a:solidFill>
-              <a:srgbClr val="22D3EE"/>
-            </a:solidFill>
-            <a:prstDash val="solid"/>
-          </a:ln>
-        </p:spPr>
-      </p:sp>
-      <p:sp>
-        <p:nvSpPr>
-          <p:cNvPr id="24" name="Text 21"/>
-          <p:cNvSpPr/>
-          <p:nvPr/>
-        </p:nvSpPr>
-        <p:spPr>
-          <a:xfrm>
-            <a:off x="6995160" y="1737360"/>
-            <a:ext cx="4389120" cy="365760"/>
-          </a:xfrm>
-          <a:prstGeom prst="rect">
-            <a:avLst/>
-          </a:prstGeom>
-          <a:noFill/>
-          <a:ln/>
-        </p:spPr>
-        <p:txBody>
-          <a:bodyPr wrap="square" rtlCol="0" anchor="ctr"/>
-          <a:lstStyle/>
-          <a:p>
-            <a:pPr indent="0" marL="0">
-              <a:buNone/>
-            </a:pPr>
-            <a:r>
-              <a:rPr lang="en-US" sz="1300" b="1" spc="200" kern="0" dirty="0">
-                <a:solidFill>
-                  <a:srgbClr val="22D3EE"/>
-                </a:solidFill>
-                <a:latin typeface="Noto Sans KR" pitchFamily="34" charset="0"/>
-                <a:ea typeface="Noto Sans KR" pitchFamily="34" charset="-122"/>
-                <a:cs typeface="Noto Sans KR" pitchFamily="34" charset="-120"/>
-              </a:rPr>
-              <a:t>접속 주소 &amp; 체크리스트</a:t>
+              <a:rPr lang="en-US" sz="1300" dirty="0">
+                <a:solidFill>
+                  <a:srgbClr val="8B8FB8"/>
+                </a:solidFill>
+                <a:latin typeface="Noto Sans KR" pitchFamily="34" charset="0"/>
+                <a:ea typeface="Noto Sans KR" pitchFamily="34" charset="-122"/>
+                <a:cs typeface="Noto Sans KR" pitchFamily="34" charset="-120"/>
+              </a:rPr>
+              <a:t>로비(방 생성/입장) → 4인 자동 시작 → 블라인드/베팅 → 쇼다운 → 칩 정산 후 다음 핸드</a:t>
             </a:r>
             <a:endParaRPr lang="en-US" sz="1300" dirty="0"/>
-          </a:p>
-        </p:txBody>
-      </p:sp>
-      <p:sp>
-        <p:nvSpPr>
-          <p:cNvPr id="25" name="Text 22"/>
-          <p:cNvSpPr/>
-          <p:nvPr/>
-        </p:nvSpPr>
-        <p:spPr>
-          <a:xfrm>
-            <a:off x="6995160" y="2103120"/>
-            <a:ext cx="4389120" cy="3794760"/>
-          </a:xfrm>
-          <a:prstGeom prst="rect">
-            <a:avLst/>
-          </a:prstGeom>
-          <a:noFill/>
-          <a:ln/>
-        </p:spPr>
-        <p:txBody>
-          <a:bodyPr wrap="square" rtlCol="0" anchor="t"/>
-          <a:lstStyle/>
-          <a:p>
-            <a:pPr indent="0" marL="0">
-              <a:lnSpc>
-                <a:spcPct val="135000"/>
-              </a:lnSpc>
-              <a:buNone/>
-            </a:pPr>
-            <a:r>
-              <a:rPr lang="en-US" sz="1450" dirty="0">
-                <a:solidFill>
-                  <a:srgbClr val="E7E9FF"/>
-                </a:solidFill>
-                <a:latin typeface="Noto Sans KR" pitchFamily="34" charset="0"/>
-                <a:ea typeface="Noto Sans KR" pitchFamily="34" charset="-122"/>
-                <a:cs typeface="Noto Sans KR" pitchFamily="34" charset="-120"/>
-              </a:rPr>
-              <a:t>http://holdem-client-026951011097.s3-website.ap-northeast-2.amazonaws.com</a:t>
-            </a:r>
-            <a:endParaRPr lang="en-US" sz="1450" dirty="0"/>
-          </a:p>
-          <a:p>
-            <a:pPr indent="0" marL="0">
-              <a:lnSpc>
-                <a:spcPct val="135000"/>
-              </a:lnSpc>
-              <a:buNone/>
-            </a:pPr>
-            <a:endParaRPr lang="en-US" sz="1450" dirty="0"/>
-          </a:p>
-          <a:p>
-            <a:pPr indent="0" marL="0">
-              <a:lnSpc>
-                <a:spcPct val="135000"/>
-              </a:lnSpc>
-              <a:buNone/>
-            </a:pPr>
-            <a:r>
-              <a:rPr lang="en-US" sz="1450" dirty="0">
-                <a:solidFill>
-                  <a:srgbClr val="E7E9FF"/>
-                </a:solidFill>
-                <a:latin typeface="Noto Sans KR" pitchFamily="34" charset="0"/>
-                <a:ea typeface="Noto Sans KR" pitchFamily="34" charset="-122"/>
-                <a:cs typeface="Noto Sans KR" pitchFamily="34" charset="-120"/>
-              </a:rPr>
-              <a:t>(백업: 로컬 데모 — localhost:5173)</a:t>
-            </a:r>
-            <a:endParaRPr lang="en-US" sz="1450" dirty="0"/>
-          </a:p>
-          <a:p>
-            <a:pPr indent="0" marL="0">
-              <a:lnSpc>
-                <a:spcPct val="135000"/>
-              </a:lnSpc>
-              <a:buNone/>
-            </a:pPr>
-            <a:endParaRPr lang="en-US" sz="1450" dirty="0"/>
-          </a:p>
-          <a:p>
-            <a:pPr indent="0" marL="0">
-              <a:lnSpc>
-                <a:spcPct val="135000"/>
-              </a:lnSpc>
-              <a:buNone/>
-            </a:pPr>
-            <a:r>
-              <a:rPr lang="en-US" sz="1450" dirty="0">
-                <a:solidFill>
-                  <a:srgbClr val="E7E9FF"/>
-                </a:solidFill>
-                <a:latin typeface="Noto Sans KR" pitchFamily="34" charset="0"/>
-                <a:ea typeface="Noto Sans KR" pitchFamily="34" charset="-122"/>
-                <a:cs typeface="Noto Sans KR" pitchFamily="34" charset="-120"/>
-              </a:rPr>
-              <a:t>발표 전 체크리스트</a:t>
-            </a:r>
-            <a:endParaRPr lang="en-US" sz="1450" dirty="0"/>
-          </a:p>
-          <a:p>
-            <a:pPr indent="0" marL="0">
-              <a:lnSpc>
-                <a:spcPct val="135000"/>
-              </a:lnSpc>
-              <a:buNone/>
-            </a:pPr>
-            <a:r>
-              <a:rPr lang="en-US" sz="1450" dirty="0">
-                <a:solidFill>
-                  <a:srgbClr val="E7E9FF"/>
-                </a:solidFill>
-                <a:latin typeface="Noto Sans KR" pitchFamily="34" charset="0"/>
-                <a:ea typeface="Noto Sans KR" pitchFamily="34" charset="-122"/>
-                <a:cs typeface="Noto Sans KR" pitchFamily="34" charset="-120"/>
-              </a:rPr>
-              <a:t>• ASG desired 2로 켜두기 (~5분)</a:t>
-            </a:r>
-            <a:endParaRPr lang="en-US" sz="1450" dirty="0"/>
-          </a:p>
-          <a:p>
-            <a:pPr indent="0" marL="0">
-              <a:lnSpc>
-                <a:spcPct val="135000"/>
-              </a:lnSpc>
-              <a:buNone/>
-            </a:pPr>
-            <a:r>
-              <a:rPr lang="en-US" sz="1450" dirty="0">
-                <a:solidFill>
-                  <a:srgbClr val="E7E9FF"/>
-                </a:solidFill>
-                <a:latin typeface="Noto Sans KR" pitchFamily="34" charset="0"/>
-                <a:ea typeface="Noto Sans KR" pitchFamily="34" charset="-122"/>
-                <a:cs typeface="Noto Sans KR" pitchFamily="34" charset="-120"/>
-              </a:rPr>
-              <a:t>• ALB 헬스체크 green 확인</a:t>
-            </a:r>
-            <a:endParaRPr lang="en-US" sz="1450" dirty="0"/>
-          </a:p>
-          <a:p>
-            <a:pPr indent="0" marL="0">
-              <a:lnSpc>
-                <a:spcPct val="135000"/>
-              </a:lnSpc>
-              <a:buNone/>
-            </a:pPr>
-            <a:r>
-              <a:rPr lang="en-US" sz="1450" dirty="0">
-                <a:solidFill>
-                  <a:srgbClr val="E7E9FF"/>
-                </a:solidFill>
-                <a:latin typeface="Noto Sans KR" pitchFamily="34" charset="0"/>
-                <a:ea typeface="Noto Sans KR" pitchFamily="34" charset="-122"/>
-                <a:cs typeface="Noto Sans KR" pitchFamily="34" charset="-120"/>
-              </a:rPr>
-              <a:t>• 프론트 S3 배포 완료 확인</a:t>
-            </a:r>
-            <a:endParaRPr lang="en-US" sz="1450" dirty="0"/>
           </a:p>
         </p:txBody>
       </p:sp>
@@ -4401,7 +4230,7 @@
                 <a:ea typeface="Noto Sans KR" pitchFamily="34" charset="-122"/>
                 <a:cs typeface="Noto Sans KR" pitchFamily="34" charset="-120"/>
               </a:rPr>
-              <a:t>12 — COST &amp; LESSONS</a:t>
+              <a:t>12 — LIVE DEMO</a:t>
             </a:r>
             <a:endParaRPr lang="en-US" sz="1300" dirty="0"/>
           </a:p>
@@ -4440,6 +4269,912 @@
                 <a:ea typeface="Noto Sans KR" pitchFamily="34" charset="-122"/>
                 <a:cs typeface="Noto Sans KR" pitchFamily="34" charset="-120"/>
               </a:rPr>
+              <a:t>라이브 데모 🔴</a:t>
+            </a:r>
+            <a:endParaRPr lang="en-US" sz="3000" dirty="0"/>
+          </a:p>
+        </p:txBody>
+      </p:sp>
+      <p:sp>
+        <p:nvSpPr>
+          <p:cNvPr id="5" name="Shape 2"/>
+          <p:cNvSpPr/>
+          <p:nvPr/>
+        </p:nvSpPr>
+        <p:spPr>
+          <a:xfrm>
+            <a:off x="640080" y="1600200"/>
+            <a:ext cx="457200" cy="457200"/>
+          </a:xfrm>
+          <a:prstGeom prst="ellipse">
+            <a:avLst/>
+          </a:prstGeom>
+          <a:solidFill>
+            <a:srgbClr val="7C3AED"/>
+          </a:solidFill>
+          <a:ln/>
+        </p:spPr>
+      </p:sp>
+      <p:sp>
+        <p:nvSpPr>
+          <p:cNvPr id="6" name="Text 3"/>
+          <p:cNvSpPr/>
+          <p:nvPr/>
+        </p:nvSpPr>
+        <p:spPr>
+          <a:xfrm>
+            <a:off x="640080" y="1600200"/>
+            <a:ext cx="457200" cy="457200"/>
+          </a:xfrm>
+          <a:prstGeom prst="rect">
+            <a:avLst/>
+          </a:prstGeom>
+          <a:noFill/>
+          <a:ln/>
+        </p:spPr>
+        <p:txBody>
+          <a:bodyPr wrap="square" rtlCol="0" anchor="ctr"/>
+          <a:lstStyle/>
+          <a:p>
+            <a:pPr algn="ctr" indent="0" marL="0">
+              <a:buNone/>
+            </a:pPr>
+            <a:r>
+              <a:rPr lang="en-US" sz="1500" b="1" dirty="0">
+                <a:solidFill>
+                  <a:srgbClr val="FFFFFF"/>
+                </a:solidFill>
+              </a:rPr>
+              <a:t>1</a:t>
+            </a:r>
+            <a:endParaRPr lang="en-US" sz="1500" dirty="0"/>
+          </a:p>
+        </p:txBody>
+      </p:sp>
+      <p:sp>
+        <p:nvSpPr>
+          <p:cNvPr id="7" name="Text 4"/>
+          <p:cNvSpPr/>
+          <p:nvPr/>
+        </p:nvSpPr>
+        <p:spPr>
+          <a:xfrm>
+            <a:off x="1280160" y="1600200"/>
+            <a:ext cx="5120640" cy="548640"/>
+          </a:xfrm>
+          <a:prstGeom prst="rect">
+            <a:avLst/>
+          </a:prstGeom>
+          <a:noFill/>
+          <a:ln/>
+        </p:spPr>
+        <p:txBody>
+          <a:bodyPr wrap="square" rtlCol="0" anchor="ctr"/>
+          <a:lstStyle/>
+          <a:p>
+            <a:pPr indent="0" marL="0">
+              <a:buNone/>
+            </a:pPr>
+            <a:r>
+              <a:rPr lang="en-US" sz="1550" dirty="0">
+                <a:solidFill>
+                  <a:srgbClr val="E7E9FF"/>
+                </a:solidFill>
+                <a:latin typeface="Noto Sans KR" pitchFamily="34" charset="0"/>
+                <a:ea typeface="Noto Sans KR" pitchFamily="34" charset="-122"/>
+                <a:cs typeface="Noto Sans KR" pitchFamily="34" charset="-120"/>
+              </a:rPr>
+              <a:t>브라우저 탭 4개로 접속 (시크릿 창 혼용)</a:t>
+            </a:r>
+            <a:endParaRPr lang="en-US" sz="1550" dirty="0"/>
+          </a:p>
+        </p:txBody>
+      </p:sp>
+      <p:sp>
+        <p:nvSpPr>
+          <p:cNvPr id="8" name="Shape 5"/>
+          <p:cNvSpPr/>
+          <p:nvPr/>
+        </p:nvSpPr>
+        <p:spPr>
+          <a:xfrm>
+            <a:off x="640080" y="2350008"/>
+            <a:ext cx="457200" cy="457200"/>
+          </a:xfrm>
+          <a:prstGeom prst="ellipse">
+            <a:avLst/>
+          </a:prstGeom>
+          <a:solidFill>
+            <a:srgbClr val="7C3AED"/>
+          </a:solidFill>
+          <a:ln/>
+        </p:spPr>
+      </p:sp>
+      <p:sp>
+        <p:nvSpPr>
+          <p:cNvPr id="9" name="Text 6"/>
+          <p:cNvSpPr/>
+          <p:nvPr/>
+        </p:nvSpPr>
+        <p:spPr>
+          <a:xfrm>
+            <a:off x="640080" y="2350008"/>
+            <a:ext cx="457200" cy="457200"/>
+          </a:xfrm>
+          <a:prstGeom prst="rect">
+            <a:avLst/>
+          </a:prstGeom>
+          <a:noFill/>
+          <a:ln/>
+        </p:spPr>
+        <p:txBody>
+          <a:bodyPr wrap="square" rtlCol="0" anchor="ctr"/>
+          <a:lstStyle/>
+          <a:p>
+            <a:pPr algn="ctr" indent="0" marL="0">
+              <a:buNone/>
+            </a:pPr>
+            <a:r>
+              <a:rPr lang="en-US" sz="1500" b="1" dirty="0">
+                <a:solidFill>
+                  <a:srgbClr val="FFFFFF"/>
+                </a:solidFill>
+              </a:rPr>
+              <a:t>2</a:t>
+            </a:r>
+            <a:endParaRPr lang="en-US" sz="1500" dirty="0"/>
+          </a:p>
+        </p:txBody>
+      </p:sp>
+      <p:sp>
+        <p:nvSpPr>
+          <p:cNvPr id="10" name="Text 7"/>
+          <p:cNvSpPr/>
+          <p:nvPr/>
+        </p:nvSpPr>
+        <p:spPr>
+          <a:xfrm>
+            <a:off x="1280160" y="2350008"/>
+            <a:ext cx="5120640" cy="548640"/>
+          </a:xfrm>
+          <a:prstGeom prst="rect">
+            <a:avLst/>
+          </a:prstGeom>
+          <a:noFill/>
+          <a:ln/>
+        </p:spPr>
+        <p:txBody>
+          <a:bodyPr wrap="square" rtlCol="0" anchor="ctr"/>
+          <a:lstStyle/>
+          <a:p>
+            <a:pPr indent="0" marL="0">
+              <a:buNone/>
+            </a:pPr>
+            <a:r>
+              <a:rPr lang="en-US" sz="1550" dirty="0">
+                <a:solidFill>
+                  <a:srgbClr val="E7E9FF"/>
+                </a:solidFill>
+                <a:latin typeface="Noto Sans KR" pitchFamily="34" charset="0"/>
+                <a:ea typeface="Noto Sans KR" pitchFamily="34" charset="-122"/>
+                <a:cs typeface="Noto Sans KR" pitchFamily="34" charset="-120"/>
+              </a:rPr>
+              <a:t>탭1: 닉네임 입력 → 방 만들기</a:t>
+            </a:r>
+            <a:endParaRPr lang="en-US" sz="1550" dirty="0"/>
+          </a:p>
+        </p:txBody>
+      </p:sp>
+      <p:sp>
+        <p:nvSpPr>
+          <p:cNvPr id="11" name="Shape 8"/>
+          <p:cNvSpPr/>
+          <p:nvPr/>
+        </p:nvSpPr>
+        <p:spPr>
+          <a:xfrm>
+            <a:off x="640080" y="3099816"/>
+            <a:ext cx="457200" cy="457200"/>
+          </a:xfrm>
+          <a:prstGeom prst="ellipse">
+            <a:avLst/>
+          </a:prstGeom>
+          <a:solidFill>
+            <a:srgbClr val="7C3AED"/>
+          </a:solidFill>
+          <a:ln/>
+        </p:spPr>
+      </p:sp>
+      <p:sp>
+        <p:nvSpPr>
+          <p:cNvPr id="12" name="Text 9"/>
+          <p:cNvSpPr/>
+          <p:nvPr/>
+        </p:nvSpPr>
+        <p:spPr>
+          <a:xfrm>
+            <a:off x="640080" y="3099816"/>
+            <a:ext cx="457200" cy="457200"/>
+          </a:xfrm>
+          <a:prstGeom prst="rect">
+            <a:avLst/>
+          </a:prstGeom>
+          <a:noFill/>
+          <a:ln/>
+        </p:spPr>
+        <p:txBody>
+          <a:bodyPr wrap="square" rtlCol="0" anchor="ctr"/>
+          <a:lstStyle/>
+          <a:p>
+            <a:pPr algn="ctr" indent="0" marL="0">
+              <a:buNone/>
+            </a:pPr>
+            <a:r>
+              <a:rPr lang="en-US" sz="1500" b="1" dirty="0">
+                <a:solidFill>
+                  <a:srgbClr val="FFFFFF"/>
+                </a:solidFill>
+              </a:rPr>
+              <a:t>3</a:t>
+            </a:r>
+            <a:endParaRPr lang="en-US" sz="1500" dirty="0"/>
+          </a:p>
+        </p:txBody>
+      </p:sp>
+      <p:sp>
+        <p:nvSpPr>
+          <p:cNvPr id="13" name="Text 10"/>
+          <p:cNvSpPr/>
+          <p:nvPr/>
+        </p:nvSpPr>
+        <p:spPr>
+          <a:xfrm>
+            <a:off x="1280160" y="3099816"/>
+            <a:ext cx="5120640" cy="548640"/>
+          </a:xfrm>
+          <a:prstGeom prst="rect">
+            <a:avLst/>
+          </a:prstGeom>
+          <a:noFill/>
+          <a:ln/>
+        </p:spPr>
+        <p:txBody>
+          <a:bodyPr wrap="square" rtlCol="0" anchor="ctr"/>
+          <a:lstStyle/>
+          <a:p>
+            <a:pPr indent="0" marL="0">
+              <a:buNone/>
+            </a:pPr>
+            <a:r>
+              <a:rPr lang="en-US" sz="1550" dirty="0">
+                <a:solidFill>
+                  <a:srgbClr val="E7E9FF"/>
+                </a:solidFill>
+                <a:latin typeface="Noto Sans KR" pitchFamily="34" charset="0"/>
+                <a:ea typeface="Noto Sans KR" pitchFamily="34" charset="-122"/>
+                <a:cs typeface="Noto Sans KR" pitchFamily="34" charset="-120"/>
+              </a:rPr>
+              <a:t>탭2~4: 같은 방 입장 → 5초 카운트다운</a:t>
+            </a:r>
+            <a:endParaRPr lang="en-US" sz="1550" dirty="0"/>
+          </a:p>
+        </p:txBody>
+      </p:sp>
+      <p:sp>
+        <p:nvSpPr>
+          <p:cNvPr id="14" name="Shape 11"/>
+          <p:cNvSpPr/>
+          <p:nvPr/>
+        </p:nvSpPr>
+        <p:spPr>
+          <a:xfrm>
+            <a:off x="640080" y="3849624"/>
+            <a:ext cx="457200" cy="457200"/>
+          </a:xfrm>
+          <a:prstGeom prst="ellipse">
+            <a:avLst/>
+          </a:prstGeom>
+          <a:solidFill>
+            <a:srgbClr val="7C3AED"/>
+          </a:solidFill>
+          <a:ln/>
+        </p:spPr>
+      </p:sp>
+      <p:sp>
+        <p:nvSpPr>
+          <p:cNvPr id="15" name="Text 12"/>
+          <p:cNvSpPr/>
+          <p:nvPr/>
+        </p:nvSpPr>
+        <p:spPr>
+          <a:xfrm>
+            <a:off x="640080" y="3849624"/>
+            <a:ext cx="457200" cy="457200"/>
+          </a:xfrm>
+          <a:prstGeom prst="rect">
+            <a:avLst/>
+          </a:prstGeom>
+          <a:noFill/>
+          <a:ln/>
+        </p:spPr>
+        <p:txBody>
+          <a:bodyPr wrap="square" rtlCol="0" anchor="ctr"/>
+          <a:lstStyle/>
+          <a:p>
+            <a:pPr algn="ctr" indent="0" marL="0">
+              <a:buNone/>
+            </a:pPr>
+            <a:r>
+              <a:rPr lang="en-US" sz="1500" b="1" dirty="0">
+                <a:solidFill>
+                  <a:srgbClr val="FFFFFF"/>
+                </a:solidFill>
+              </a:rPr>
+              <a:t>4</a:t>
+            </a:r>
+            <a:endParaRPr lang="en-US" sz="1500" dirty="0"/>
+          </a:p>
+        </p:txBody>
+      </p:sp>
+      <p:sp>
+        <p:nvSpPr>
+          <p:cNvPr id="16" name="Text 13"/>
+          <p:cNvSpPr/>
+          <p:nvPr/>
+        </p:nvSpPr>
+        <p:spPr>
+          <a:xfrm>
+            <a:off x="1280160" y="3849624"/>
+            <a:ext cx="5120640" cy="548640"/>
+          </a:xfrm>
+          <a:prstGeom prst="rect">
+            <a:avLst/>
+          </a:prstGeom>
+          <a:noFill/>
+          <a:ln/>
+        </p:spPr>
+        <p:txBody>
+          <a:bodyPr wrap="square" rtlCol="0" anchor="ctr"/>
+          <a:lstStyle/>
+          <a:p>
+            <a:pPr indent="0" marL="0">
+              <a:buNone/>
+            </a:pPr>
+            <a:r>
+              <a:rPr lang="en-US" sz="1550" dirty="0">
+                <a:solidFill>
+                  <a:srgbClr val="E7E9FF"/>
+                </a:solidFill>
+                <a:latin typeface="Noto Sans KR" pitchFamily="34" charset="0"/>
+                <a:ea typeface="Noto Sans KR" pitchFamily="34" charset="-122"/>
+                <a:cs typeface="Noto Sans KR" pitchFamily="34" charset="-120"/>
+              </a:rPr>
+              <a:t>베팅 한 바퀴 (콜/체크로 빠르게) → 플랍 공개</a:t>
+            </a:r>
+            <a:endParaRPr lang="en-US" sz="1550" dirty="0"/>
+          </a:p>
+        </p:txBody>
+      </p:sp>
+      <p:sp>
+        <p:nvSpPr>
+          <p:cNvPr id="17" name="Shape 14"/>
+          <p:cNvSpPr/>
+          <p:nvPr/>
+        </p:nvSpPr>
+        <p:spPr>
+          <a:xfrm>
+            <a:off x="640080" y="4599432"/>
+            <a:ext cx="457200" cy="457200"/>
+          </a:xfrm>
+          <a:prstGeom prst="ellipse">
+            <a:avLst/>
+          </a:prstGeom>
+          <a:solidFill>
+            <a:srgbClr val="7C3AED"/>
+          </a:solidFill>
+          <a:ln/>
+        </p:spPr>
+      </p:sp>
+      <p:sp>
+        <p:nvSpPr>
+          <p:cNvPr id="18" name="Text 15"/>
+          <p:cNvSpPr/>
+          <p:nvPr/>
+        </p:nvSpPr>
+        <p:spPr>
+          <a:xfrm>
+            <a:off x="640080" y="4599432"/>
+            <a:ext cx="457200" cy="457200"/>
+          </a:xfrm>
+          <a:prstGeom prst="rect">
+            <a:avLst/>
+          </a:prstGeom>
+          <a:noFill/>
+          <a:ln/>
+        </p:spPr>
+        <p:txBody>
+          <a:bodyPr wrap="square" rtlCol="0" anchor="ctr"/>
+          <a:lstStyle/>
+          <a:p>
+            <a:pPr algn="ctr" indent="0" marL="0">
+              <a:buNone/>
+            </a:pPr>
+            <a:r>
+              <a:rPr lang="en-US" sz="1500" b="1" dirty="0">
+                <a:solidFill>
+                  <a:srgbClr val="FFFFFF"/>
+                </a:solidFill>
+              </a:rPr>
+              <a:t>5</a:t>
+            </a:r>
+            <a:endParaRPr lang="en-US" sz="1500" dirty="0"/>
+          </a:p>
+        </p:txBody>
+      </p:sp>
+      <p:sp>
+        <p:nvSpPr>
+          <p:cNvPr id="19" name="Text 16"/>
+          <p:cNvSpPr/>
+          <p:nvPr/>
+        </p:nvSpPr>
+        <p:spPr>
+          <a:xfrm>
+            <a:off x="1280160" y="4599432"/>
+            <a:ext cx="5120640" cy="548640"/>
+          </a:xfrm>
+          <a:prstGeom prst="rect">
+            <a:avLst/>
+          </a:prstGeom>
+          <a:noFill/>
+          <a:ln/>
+        </p:spPr>
+        <p:txBody>
+          <a:bodyPr wrap="square" rtlCol="0" anchor="ctr"/>
+          <a:lstStyle/>
+          <a:p>
+            <a:pPr indent="0" marL="0">
+              <a:buNone/>
+            </a:pPr>
+            <a:r>
+              <a:rPr lang="en-US" sz="1550" dirty="0">
+                <a:solidFill>
+                  <a:srgbClr val="E7E9FF"/>
+                </a:solidFill>
+                <a:latin typeface="Noto Sans KR" pitchFamily="34" charset="0"/>
+                <a:ea typeface="Noto Sans KR" pitchFamily="34" charset="-122"/>
+                <a:cs typeface="Noto Sans KR" pitchFamily="34" charset="-120"/>
+              </a:rPr>
+              <a:t>탭 하나 방치 → 20초 auto-fold 시연</a:t>
+            </a:r>
+            <a:endParaRPr lang="en-US" sz="1550" dirty="0"/>
+          </a:p>
+        </p:txBody>
+      </p:sp>
+      <p:sp>
+        <p:nvSpPr>
+          <p:cNvPr id="20" name="Shape 17"/>
+          <p:cNvSpPr/>
+          <p:nvPr/>
+        </p:nvSpPr>
+        <p:spPr>
+          <a:xfrm>
+            <a:off x="640080" y="5349240"/>
+            <a:ext cx="457200" cy="457200"/>
+          </a:xfrm>
+          <a:prstGeom prst="ellipse">
+            <a:avLst/>
+          </a:prstGeom>
+          <a:solidFill>
+            <a:srgbClr val="7C3AED"/>
+          </a:solidFill>
+          <a:ln/>
+        </p:spPr>
+      </p:sp>
+      <p:sp>
+        <p:nvSpPr>
+          <p:cNvPr id="21" name="Text 18"/>
+          <p:cNvSpPr/>
+          <p:nvPr/>
+        </p:nvSpPr>
+        <p:spPr>
+          <a:xfrm>
+            <a:off x="640080" y="5349240"/>
+            <a:ext cx="457200" cy="457200"/>
+          </a:xfrm>
+          <a:prstGeom prst="rect">
+            <a:avLst/>
+          </a:prstGeom>
+          <a:noFill/>
+          <a:ln/>
+        </p:spPr>
+        <p:txBody>
+          <a:bodyPr wrap="square" rtlCol="0" anchor="ctr"/>
+          <a:lstStyle/>
+          <a:p>
+            <a:pPr algn="ctr" indent="0" marL="0">
+              <a:buNone/>
+            </a:pPr>
+            <a:r>
+              <a:rPr lang="en-US" sz="1500" b="1" dirty="0">
+                <a:solidFill>
+                  <a:srgbClr val="FFFFFF"/>
+                </a:solidFill>
+              </a:rPr>
+              <a:t>6</a:t>
+            </a:r>
+            <a:endParaRPr lang="en-US" sz="1500" dirty="0"/>
+          </a:p>
+        </p:txBody>
+      </p:sp>
+      <p:sp>
+        <p:nvSpPr>
+          <p:cNvPr id="22" name="Text 19"/>
+          <p:cNvSpPr/>
+          <p:nvPr/>
+        </p:nvSpPr>
+        <p:spPr>
+          <a:xfrm>
+            <a:off x="1280160" y="5349240"/>
+            <a:ext cx="5120640" cy="548640"/>
+          </a:xfrm>
+          <a:prstGeom prst="rect">
+            <a:avLst/>
+          </a:prstGeom>
+          <a:noFill/>
+          <a:ln/>
+        </p:spPr>
+        <p:txBody>
+          <a:bodyPr wrap="square" rtlCol="0" anchor="ctr"/>
+          <a:lstStyle/>
+          <a:p>
+            <a:pPr indent="0" marL="0">
+              <a:buNone/>
+            </a:pPr>
+            <a:r>
+              <a:rPr lang="en-US" sz="1550" dirty="0">
+                <a:solidFill>
+                  <a:srgbClr val="E7E9FF"/>
+                </a:solidFill>
+                <a:latin typeface="Noto Sans KR" pitchFamily="34" charset="0"/>
+                <a:ea typeface="Noto Sans KR" pitchFamily="34" charset="-122"/>
+                <a:cs typeface="Noto Sans KR" pitchFamily="34" charset="-120"/>
+              </a:rPr>
+              <a:t>쇼다운 → 칩 정산 → 다음 핸드 자동 시작</a:t>
+            </a:r>
+            <a:endParaRPr lang="en-US" sz="1550" dirty="0"/>
+          </a:p>
+        </p:txBody>
+      </p:sp>
+      <p:sp>
+        <p:nvSpPr>
+          <p:cNvPr id="23" name="Shape 20"/>
+          <p:cNvSpPr/>
+          <p:nvPr/>
+        </p:nvSpPr>
+        <p:spPr>
+          <a:xfrm>
+            <a:off x="6766560" y="1600200"/>
+            <a:ext cx="4846320" cy="4480560"/>
+          </a:xfrm>
+          <a:prstGeom prst="roundRect">
+            <a:avLst>
+              <a:gd name="adj" fmla="val 2449"/>
+            </a:avLst>
+          </a:prstGeom>
+          <a:solidFill>
+            <a:srgbClr val="111120"/>
+          </a:solidFill>
+          <a:ln w="12700">
+            <a:solidFill>
+              <a:srgbClr val="22D3EE"/>
+            </a:solidFill>
+            <a:prstDash val="solid"/>
+          </a:ln>
+        </p:spPr>
+      </p:sp>
+      <p:sp>
+        <p:nvSpPr>
+          <p:cNvPr id="24" name="Text 21"/>
+          <p:cNvSpPr/>
+          <p:nvPr/>
+        </p:nvSpPr>
+        <p:spPr>
+          <a:xfrm>
+            <a:off x="6995160" y="1737360"/>
+            <a:ext cx="4389120" cy="365760"/>
+          </a:xfrm>
+          <a:prstGeom prst="rect">
+            <a:avLst/>
+          </a:prstGeom>
+          <a:noFill/>
+          <a:ln/>
+        </p:spPr>
+        <p:txBody>
+          <a:bodyPr wrap="square" rtlCol="0" anchor="ctr"/>
+          <a:lstStyle/>
+          <a:p>
+            <a:pPr indent="0" marL="0">
+              <a:buNone/>
+            </a:pPr>
+            <a:r>
+              <a:rPr lang="en-US" sz="1300" b="1" spc="200" kern="0" dirty="0">
+                <a:solidFill>
+                  <a:srgbClr val="22D3EE"/>
+                </a:solidFill>
+                <a:latin typeface="Noto Sans KR" pitchFamily="34" charset="0"/>
+                <a:ea typeface="Noto Sans KR" pitchFamily="34" charset="-122"/>
+                <a:cs typeface="Noto Sans KR" pitchFamily="34" charset="-120"/>
+              </a:rPr>
+              <a:t>접속 주소 &amp; 체크리스트</a:t>
+            </a:r>
+            <a:endParaRPr lang="en-US" sz="1300" dirty="0"/>
+          </a:p>
+        </p:txBody>
+      </p:sp>
+      <p:sp>
+        <p:nvSpPr>
+          <p:cNvPr id="25" name="Text 22"/>
+          <p:cNvSpPr/>
+          <p:nvPr/>
+        </p:nvSpPr>
+        <p:spPr>
+          <a:xfrm>
+            <a:off x="6995160" y="2103120"/>
+            <a:ext cx="4389120" cy="3794760"/>
+          </a:xfrm>
+          <a:prstGeom prst="rect">
+            <a:avLst/>
+          </a:prstGeom>
+          <a:noFill/>
+          <a:ln/>
+        </p:spPr>
+        <p:txBody>
+          <a:bodyPr wrap="square" rtlCol="0" anchor="t"/>
+          <a:lstStyle/>
+          <a:p>
+            <a:pPr indent="0" marL="0">
+              <a:lnSpc>
+                <a:spcPct val="135000"/>
+              </a:lnSpc>
+              <a:buNone/>
+            </a:pPr>
+            <a:r>
+              <a:rPr lang="en-US" sz="1450" dirty="0">
+                <a:solidFill>
+                  <a:srgbClr val="E7E9FF"/>
+                </a:solidFill>
+                <a:latin typeface="Noto Sans KR" pitchFamily="34" charset="0"/>
+                <a:ea typeface="Noto Sans KR" pitchFamily="34" charset="-122"/>
+                <a:cs typeface="Noto Sans KR" pitchFamily="34" charset="-120"/>
+              </a:rPr>
+              <a:t>http://holdem-client-026951011097.s3-website.ap-northeast-2.amazonaws.com</a:t>
+            </a:r>
+            <a:endParaRPr lang="en-US" sz="1450" dirty="0"/>
+          </a:p>
+          <a:p>
+            <a:pPr indent="0" marL="0">
+              <a:lnSpc>
+                <a:spcPct val="135000"/>
+              </a:lnSpc>
+              <a:buNone/>
+            </a:pPr>
+            <a:endParaRPr lang="en-US" sz="1450" dirty="0"/>
+          </a:p>
+          <a:p>
+            <a:pPr indent="0" marL="0">
+              <a:lnSpc>
+                <a:spcPct val="135000"/>
+              </a:lnSpc>
+              <a:buNone/>
+            </a:pPr>
+            <a:r>
+              <a:rPr lang="en-US" sz="1450" dirty="0">
+                <a:solidFill>
+                  <a:srgbClr val="E7E9FF"/>
+                </a:solidFill>
+                <a:latin typeface="Noto Sans KR" pitchFamily="34" charset="0"/>
+                <a:ea typeface="Noto Sans KR" pitchFamily="34" charset="-122"/>
+                <a:cs typeface="Noto Sans KR" pitchFamily="34" charset="-120"/>
+              </a:rPr>
+              <a:t>(백업: 로컬 데모 — localhost:5173)</a:t>
+            </a:r>
+            <a:endParaRPr lang="en-US" sz="1450" dirty="0"/>
+          </a:p>
+          <a:p>
+            <a:pPr indent="0" marL="0">
+              <a:lnSpc>
+                <a:spcPct val="135000"/>
+              </a:lnSpc>
+              <a:buNone/>
+            </a:pPr>
+            <a:endParaRPr lang="en-US" sz="1450" dirty="0"/>
+          </a:p>
+          <a:p>
+            <a:pPr indent="0" marL="0">
+              <a:lnSpc>
+                <a:spcPct val="135000"/>
+              </a:lnSpc>
+              <a:buNone/>
+            </a:pPr>
+            <a:r>
+              <a:rPr lang="en-US" sz="1450" dirty="0">
+                <a:solidFill>
+                  <a:srgbClr val="E7E9FF"/>
+                </a:solidFill>
+                <a:latin typeface="Noto Sans KR" pitchFamily="34" charset="0"/>
+                <a:ea typeface="Noto Sans KR" pitchFamily="34" charset="-122"/>
+                <a:cs typeface="Noto Sans KR" pitchFamily="34" charset="-120"/>
+              </a:rPr>
+              <a:t>발표 전 체크리스트</a:t>
+            </a:r>
+            <a:endParaRPr lang="en-US" sz="1450" dirty="0"/>
+          </a:p>
+          <a:p>
+            <a:pPr indent="0" marL="0">
+              <a:lnSpc>
+                <a:spcPct val="135000"/>
+              </a:lnSpc>
+              <a:buNone/>
+            </a:pPr>
+            <a:r>
+              <a:rPr lang="en-US" sz="1450" dirty="0">
+                <a:solidFill>
+                  <a:srgbClr val="E7E9FF"/>
+                </a:solidFill>
+                <a:latin typeface="Noto Sans KR" pitchFamily="34" charset="0"/>
+                <a:ea typeface="Noto Sans KR" pitchFamily="34" charset="-122"/>
+                <a:cs typeface="Noto Sans KR" pitchFamily="34" charset="-120"/>
+              </a:rPr>
+              <a:t>• ASG desired 2로 켜두기 (~5분)</a:t>
+            </a:r>
+            <a:endParaRPr lang="en-US" sz="1450" dirty="0"/>
+          </a:p>
+          <a:p>
+            <a:pPr indent="0" marL="0">
+              <a:lnSpc>
+                <a:spcPct val="135000"/>
+              </a:lnSpc>
+              <a:buNone/>
+            </a:pPr>
+            <a:r>
+              <a:rPr lang="en-US" sz="1450" dirty="0">
+                <a:solidFill>
+                  <a:srgbClr val="E7E9FF"/>
+                </a:solidFill>
+                <a:latin typeface="Noto Sans KR" pitchFamily="34" charset="0"/>
+                <a:ea typeface="Noto Sans KR" pitchFamily="34" charset="-122"/>
+                <a:cs typeface="Noto Sans KR" pitchFamily="34" charset="-120"/>
+              </a:rPr>
+              <a:t>• ALB 헬스체크 green 확인</a:t>
+            </a:r>
+            <a:endParaRPr lang="en-US" sz="1450" dirty="0"/>
+          </a:p>
+          <a:p>
+            <a:pPr indent="0" marL="0">
+              <a:lnSpc>
+                <a:spcPct val="135000"/>
+              </a:lnSpc>
+              <a:buNone/>
+            </a:pPr>
+            <a:r>
+              <a:rPr lang="en-US" sz="1450" dirty="0">
+                <a:solidFill>
+                  <a:srgbClr val="E7E9FF"/>
+                </a:solidFill>
+                <a:latin typeface="Noto Sans KR" pitchFamily="34" charset="0"/>
+                <a:ea typeface="Noto Sans KR" pitchFamily="34" charset="-122"/>
+                <a:cs typeface="Noto Sans KR" pitchFamily="34" charset="-120"/>
+              </a:rPr>
+              <a:t>• 프론트 S3 배포 완료 확인</a:t>
+            </a:r>
+            <a:endParaRPr lang="en-US" sz="1450" dirty="0"/>
+          </a:p>
+        </p:txBody>
+      </p:sp>
+    </p:spTree>
+  </p:cSld>
+  <p:clrMapOvr>
+    <a:masterClrMapping/>
+  </p:clrMapOvr>
+</p:sld>
+</file>
+
+<file path=ppt/slides/slide15.xml><?xml version="1.0" encoding="utf-8"?>
+<p:sld xmlns:a="http://schemas.openxmlformats.org/drawingml/2006/main" xmlns:r="http://schemas.openxmlformats.org/officeDocument/2006/relationships" xmlns:p="http://schemas.openxmlformats.org/presentationml/2006/main">
+  <p:cSld name="Slide 15">
+    <p:bg>
+      <p:bgPr>
+        <a:solidFill>
+          <a:srgbClr val="0B0B16"/>
+        </a:solidFill>
+      </p:bgPr>
+    </p:bg>
+    <p:spTree>
+      <p:nvGrpSpPr>
+        <p:cNvPr id="1" name=""/>
+        <p:cNvGrpSpPr/>
+        <p:nvPr/>
+      </p:nvGrpSpPr>
+      <p:grpSpPr>
+        <a:xfrm>
+          <a:off x="0" y="0"/>
+          <a:ext cx="0" cy="0"/>
+          <a:chOff x="0" y="0"/>
+          <a:chExt cx="0" cy="0"/>
+        </a:xfrm>
+      </p:grpSpPr>
+      <p:sp>
+        <p:nvSpPr>
+          <p:cNvPr id="3" name="Text 0"/>
+          <p:cNvSpPr/>
+          <p:nvPr/>
+        </p:nvSpPr>
+        <p:spPr>
+          <a:xfrm>
+            <a:off x="640080" y="320040"/>
+            <a:ext cx="10058400" cy="365760"/>
+          </a:xfrm>
+          <a:prstGeom prst="rect">
+            <a:avLst/>
+          </a:prstGeom>
+          <a:noFill/>
+          <a:ln/>
+        </p:spPr>
+        <p:txBody>
+          <a:bodyPr wrap="square" rtlCol="0" anchor="ctr"/>
+          <a:lstStyle/>
+          <a:p>
+            <a:pPr indent="0" marL="0">
+              <a:buNone/>
+            </a:pPr>
+            <a:r>
+              <a:rPr lang="en-US" sz="1300" b="1" spc="400" kern="0" dirty="0">
+                <a:solidFill>
+                  <a:srgbClr val="22D3EE"/>
+                </a:solidFill>
+                <a:latin typeface="Noto Sans KR" pitchFamily="34" charset="0"/>
+                <a:ea typeface="Noto Sans KR" pitchFamily="34" charset="-122"/>
+                <a:cs typeface="Noto Sans KR" pitchFamily="34" charset="-120"/>
+              </a:rPr>
+              <a:t>13 — COST &amp; LESSONS</a:t>
+            </a:r>
+            <a:endParaRPr lang="en-US" sz="1300" dirty="0"/>
+          </a:p>
+        </p:txBody>
+      </p:sp>
+      <p:sp>
+        <p:nvSpPr>
+          <p:cNvPr id="4" name="Text 1"/>
+          <p:cNvSpPr/>
+          <p:nvPr/>
+        </p:nvSpPr>
+        <p:spPr>
+          <a:xfrm>
+            <a:off x="640080" y="685800"/>
+            <a:ext cx="10972800" cy="731520"/>
+          </a:xfrm>
+          <a:prstGeom prst="rect">
+            <a:avLst/>
+          </a:prstGeom>
+          <a:noFill/>
+          <a:ln/>
+        </p:spPr>
+        <p:txBody>
+          <a:bodyPr wrap="square" rtlCol="0" anchor="ctr"/>
+          <a:lstStyle/>
+          <a:p>
+            <a:pPr indent="0" marL="0">
+              <a:buNone/>
+            </a:pPr>
+            <a:r>
+              <a:rPr lang="en-US" sz="3000" b="1" dirty="0">
+                <a:solidFill>
+                  <a:srgbClr val="E7E9FF"/>
+                </a:solidFill>
+                <a:latin typeface="Noto Sans KR" pitchFamily="34" charset="0"/>
+                <a:ea typeface="Noto Sans KR" pitchFamily="34" charset="-122"/>
+                <a:cs typeface="Noto Sans KR" pitchFamily="34" charset="-120"/>
+              </a:rPr>
               <a:t>비용과 배운 점</a:t>
             </a:r>
             <a:endParaRPr lang="en-US" sz="3000" dirty="0"/>
@@ -4448,7 +5183,7 @@
       </p:sp>
       <p:graphicFrame>
         <p:nvGraphicFramePr>
-          <p:cNvPr id="15" name="Table 0"/>
+          <p:cNvPr id="16" name="Table 0"/>
           <p:cNvGraphicFramePr>
             <a:graphicFrameLocks noGrp="1"/>
           </p:cNvGraphicFramePr>
@@ -9280,7 +10015,7 @@
                 <a:ea typeface="Noto Sans KR" pitchFamily="34" charset="-122"/>
                 <a:cs typeface="Noto Sans KR" pitchFamily="34" charset="-120"/>
               </a:rPr>
-              <a:t>08 — AUTO SCALING</a:t>
+              <a:t>08 — STORAGE</a:t>
             </a:r>
             <a:endParaRPr lang="en-US" sz="1300" dirty="0"/>
           </a:p>
@@ -9319,7 +10054,7 @@
                 <a:ea typeface="Noto Sans KR" pitchFamily="34" charset="-122"/>
                 <a:cs typeface="Noto Sans KR" pitchFamily="34" charset="-120"/>
               </a:rPr>
-              <a:t>2단 Auto Scaling</a:t>
+              <a:t>S3 — 정적 호스팅과 게임 히스토리</a:t>
             </a:r>
             <a:endParaRPr lang="en-US" sz="3000" dirty="0"/>
           </a:p>
@@ -9334,11 +10069,226 @@
         <p:spPr>
           <a:xfrm>
             <a:off x="640080" y="1645920"/>
-            <a:ext cx="5394960" cy="2103120"/>
+            <a:ext cx="5394960" cy="4480560"/>
           </a:xfrm>
           <a:prstGeom prst="roundRect">
             <a:avLst>
-              <a:gd name="adj" fmla="val 5217"/>
+              <a:gd name="adj" fmla="val 2449"/>
+            </a:avLst>
+          </a:prstGeom>
+          <a:solidFill>
+            <a:srgbClr val="111120"/>
+          </a:solidFill>
+          <a:ln w="12700">
+            <a:solidFill>
+              <a:srgbClr val="F59E0B"/>
+            </a:solidFill>
+            <a:prstDash val="solid"/>
+          </a:ln>
+        </p:spPr>
+      </p:sp>
+      <p:sp>
+        <p:nvSpPr>
+          <p:cNvPr id="6" name="Text 3"/>
+          <p:cNvSpPr/>
+          <p:nvPr/>
+        </p:nvSpPr>
+        <p:spPr>
+          <a:xfrm>
+            <a:off x="868680" y="1783080"/>
+            <a:ext cx="4937760" cy="365760"/>
+          </a:xfrm>
+          <a:prstGeom prst="rect">
+            <a:avLst/>
+          </a:prstGeom>
+          <a:noFill/>
+          <a:ln/>
+        </p:spPr>
+        <p:txBody>
+          <a:bodyPr wrap="square" rtlCol="0" anchor="ctr"/>
+          <a:lstStyle/>
+          <a:p>
+            <a:pPr indent="0" marL="0">
+              <a:buNone/>
+            </a:pPr>
+            <a:r>
+              <a:rPr lang="en-US" sz="1300" b="1" spc="200" kern="0" dirty="0">
+                <a:solidFill>
+                  <a:srgbClr val="F59E0B"/>
+                </a:solidFill>
+                <a:latin typeface="Noto Sans KR" pitchFamily="34" charset="0"/>
+                <a:ea typeface="Noto Sans KR" pitchFamily="34" charset="-122"/>
+                <a:cs typeface="Noto Sans KR" pitchFamily="34" charset="-120"/>
+              </a:rPr>
+              <a:t>버킷 A — React 정적 호스팅</a:t>
+            </a:r>
+            <a:endParaRPr lang="en-US" sz="1300" dirty="0"/>
+          </a:p>
+        </p:txBody>
+      </p:sp>
+      <p:sp>
+        <p:nvSpPr>
+          <p:cNvPr id="7" name="Text 4"/>
+          <p:cNvSpPr/>
+          <p:nvPr/>
+        </p:nvSpPr>
+        <p:spPr>
+          <a:xfrm>
+            <a:off x="868680" y="2148840"/>
+            <a:ext cx="4937760" cy="3794760"/>
+          </a:xfrm>
+          <a:prstGeom prst="rect">
+            <a:avLst/>
+          </a:prstGeom>
+          <a:noFill/>
+          <a:ln/>
+        </p:spPr>
+        <p:txBody>
+          <a:bodyPr wrap="square" rtlCol="0" anchor="t"/>
+          <a:lstStyle/>
+          <a:p>
+            <a:pPr indent="0" marL="0">
+              <a:lnSpc>
+                <a:spcPct val="135000"/>
+              </a:lnSpc>
+              <a:buNone/>
+            </a:pPr>
+            <a:r>
+              <a:rPr lang="en-US" sz="1450" dirty="0">
+                <a:solidFill>
+                  <a:srgbClr val="E7E9FF"/>
+                </a:solidFill>
+                <a:latin typeface="Noto Sans KR" pitchFamily="34" charset="0"/>
+                <a:ea typeface="Noto Sans KR" pitchFamily="34" charset="-122"/>
+                <a:cs typeface="Noto Sans KR" pitchFamily="34" charset="-120"/>
+              </a:rPr>
+              <a:t>• 웹서버 없이 S3 정적 웹사이트 호스팅만으로 프론트엔드 서빙</a:t>
+            </a:r>
+            <a:endParaRPr lang="en-US" sz="1450" dirty="0"/>
+          </a:p>
+          <a:p>
+            <a:pPr indent="0" marL="0">
+              <a:lnSpc>
+                <a:spcPct val="135000"/>
+              </a:lnSpc>
+              <a:buNone/>
+            </a:pPr>
+            <a:endParaRPr lang="en-US" sz="1450" dirty="0"/>
+          </a:p>
+          <a:p>
+            <a:pPr indent="0" marL="0">
+              <a:lnSpc>
+                <a:spcPct val="135000"/>
+              </a:lnSpc>
+              <a:buNone/>
+            </a:pPr>
+            <a:r>
+              <a:rPr lang="en-US" sz="1450" dirty="0">
+                <a:solidFill>
+                  <a:srgbClr val="E7E9FF"/>
+                </a:solidFill>
+                <a:latin typeface="Noto Sans KR" pitchFamily="34" charset="0"/>
+                <a:ea typeface="Noto Sans KR" pitchFamily="34" charset="-122"/>
+                <a:cs typeface="Noto Sans KR" pitchFamily="34" charset="-120"/>
+              </a:rPr>
+              <a:t>• 버킷 정책으로 s3:GetObject만 퍼블릭 허용</a:t>
+            </a:r>
+            <a:endParaRPr lang="en-US" sz="1450" dirty="0"/>
+          </a:p>
+          <a:p>
+            <a:pPr indent="0" marL="0">
+              <a:lnSpc>
+                <a:spcPct val="135000"/>
+              </a:lnSpc>
+              <a:buNone/>
+            </a:pPr>
+            <a:endParaRPr lang="en-US" sz="1450" dirty="0"/>
+          </a:p>
+          <a:p>
+            <a:pPr indent="0" marL="0">
+              <a:lnSpc>
+                <a:spcPct val="135000"/>
+              </a:lnSpc>
+              <a:buNone/>
+            </a:pPr>
+            <a:r>
+              <a:rPr lang="en-US" sz="1450" dirty="0">
+                <a:solidFill>
+                  <a:srgbClr val="E7E9FF"/>
+                </a:solidFill>
+                <a:latin typeface="Noto Sans KR" pitchFamily="34" charset="0"/>
+                <a:ea typeface="Noto Sans KR" pitchFamily="34" charset="-122"/>
+                <a:cs typeface="Noto Sans KR" pitchFamily="34" charset="-120"/>
+              </a:rPr>
+              <a:t>• 빌드 시 ALB 주소 주입:</a:t>
+            </a:r>
+            <a:endParaRPr lang="en-US" sz="1450" dirty="0"/>
+          </a:p>
+          <a:p>
+            <a:pPr indent="0" marL="0">
+              <a:lnSpc>
+                <a:spcPct val="135000"/>
+              </a:lnSpc>
+              <a:buNone/>
+            </a:pPr>
+            <a:r>
+              <a:rPr lang="en-US" sz="1450" dirty="0">
+                <a:solidFill>
+                  <a:srgbClr val="E7E9FF"/>
+                </a:solidFill>
+                <a:latin typeface="Noto Sans KR" pitchFamily="34" charset="0"/>
+                <a:ea typeface="Noto Sans KR" pitchFamily="34" charset="-122"/>
+                <a:cs typeface="Noto Sans KR" pitchFamily="34" charset="-120"/>
+              </a:rPr>
+              <a:t>  VITE_WS_URL=ws://ALB… npm run build</a:t>
+            </a:r>
+            <a:endParaRPr lang="en-US" sz="1450" dirty="0"/>
+          </a:p>
+          <a:p>
+            <a:pPr indent="0" marL="0">
+              <a:lnSpc>
+                <a:spcPct val="135000"/>
+              </a:lnSpc>
+              <a:buNone/>
+            </a:pPr>
+            <a:endParaRPr lang="en-US" sz="1450" dirty="0"/>
+          </a:p>
+          <a:p>
+            <a:pPr indent="0" marL="0">
+              <a:lnSpc>
+                <a:spcPct val="135000"/>
+              </a:lnSpc>
+              <a:buNone/>
+            </a:pPr>
+            <a:r>
+              <a:rPr lang="en-US" sz="1450" dirty="0">
+                <a:solidFill>
+                  <a:srgbClr val="E7E9FF"/>
+                </a:solidFill>
+                <a:latin typeface="Noto Sans KR" pitchFamily="34" charset="0"/>
+                <a:ea typeface="Noto Sans KR" pitchFamily="34" charset="-122"/>
+                <a:cs typeface="Noto Sans KR" pitchFamily="34" charset="-120"/>
+              </a:rPr>
+              <a:t>• 배포 = aws s3 sync dist/ s3://… --delete 한 줄</a:t>
+            </a:r>
+            <a:endParaRPr lang="en-US" sz="1450" dirty="0"/>
+          </a:p>
+        </p:txBody>
+      </p:sp>
+      <p:sp>
+        <p:nvSpPr>
+          <p:cNvPr id="8" name="Shape 5"/>
+          <p:cNvSpPr/>
+          <p:nvPr/>
+        </p:nvSpPr>
+        <p:spPr>
+          <a:xfrm>
+            <a:off x="6309360" y="1645920"/>
+            <a:ext cx="5394960" cy="4480560"/>
+          </a:xfrm>
+          <a:prstGeom prst="roundRect">
+            <a:avLst>
+              <a:gd name="adj" fmla="val 2449"/>
             </a:avLst>
           </a:prstGeom>
           <a:solidFill>
@@ -9354,161 +10304,13 @@
       </p:sp>
       <p:sp>
         <p:nvSpPr>
-          <p:cNvPr id="6" name="Text 3"/>
-          <p:cNvSpPr/>
-          <p:nvPr/>
-        </p:nvSpPr>
-        <p:spPr>
-          <a:xfrm>
-            <a:off x="868680" y="1783080"/>
-            <a:ext cx="4937760" cy="365760"/>
-          </a:xfrm>
-          <a:prstGeom prst="rect">
-            <a:avLst/>
-          </a:prstGeom>
-          <a:noFill/>
-          <a:ln/>
-        </p:spPr>
-        <p:txBody>
-          <a:bodyPr wrap="square" rtlCol="0" anchor="ctr"/>
-          <a:lstStyle/>
-          <a:p>
-            <a:pPr indent="0" marL="0">
-              <a:buNone/>
-            </a:pPr>
-            <a:r>
-              <a:rPr lang="en-US" sz="1300" b="1" spc="200" kern="0" dirty="0">
-                <a:solidFill>
-                  <a:srgbClr val="22D3EE"/>
-                </a:solidFill>
-                <a:latin typeface="Noto Sans KR" pitchFamily="34" charset="0"/>
-                <a:ea typeface="Noto Sans KR" pitchFamily="34" charset="-122"/>
-                <a:cs typeface="Noto Sans KR" pitchFamily="34" charset="-120"/>
-              </a:rPr>
-              <a:t>① 서비스 레벨 (App Auto Scaling)</a:t>
-            </a:r>
-            <a:endParaRPr lang="en-US" sz="1300" dirty="0"/>
-          </a:p>
-        </p:txBody>
-      </p:sp>
-      <p:sp>
-        <p:nvSpPr>
-          <p:cNvPr id="7" name="Text 4"/>
-          <p:cNvSpPr/>
-          <p:nvPr/>
-        </p:nvSpPr>
-        <p:spPr>
-          <a:xfrm>
-            <a:off x="868680" y="2148840"/>
-            <a:ext cx="4937760" cy="1417320"/>
-          </a:xfrm>
-          <a:prstGeom prst="rect">
-            <a:avLst/>
-          </a:prstGeom>
-          <a:noFill/>
-          <a:ln/>
-        </p:spPr>
-        <p:txBody>
-          <a:bodyPr wrap="square" rtlCol="0" anchor="t"/>
-          <a:lstStyle/>
-          <a:p>
-            <a:pPr indent="0" marL="0">
-              <a:lnSpc>
-                <a:spcPct val="135000"/>
-              </a:lnSpc>
-              <a:buNone/>
-            </a:pPr>
-            <a:r>
-              <a:rPr lang="en-US" sz="1450" dirty="0">
-                <a:solidFill>
-                  <a:srgbClr val="E7E9FF"/>
-                </a:solidFill>
-                <a:latin typeface="Noto Sans KR" pitchFamily="34" charset="0"/>
-                <a:ea typeface="Noto Sans KR" pitchFamily="34" charset="-122"/>
-                <a:cs typeface="Noto Sans KR" pitchFamily="34" charset="-120"/>
-              </a:rPr>
-              <a:t>• ECS Service 태스크 수: 2 ~ 8개</a:t>
-            </a:r>
-            <a:endParaRPr lang="en-US" sz="1450" dirty="0"/>
-          </a:p>
-          <a:p>
-            <a:pPr indent="0" marL="0">
-              <a:lnSpc>
-                <a:spcPct val="135000"/>
-              </a:lnSpc>
-              <a:buNone/>
-            </a:pPr>
-            <a:r>
-              <a:rPr lang="en-US" sz="1450" dirty="0">
-                <a:solidFill>
-                  <a:srgbClr val="E7E9FF"/>
-                </a:solidFill>
-                <a:latin typeface="Noto Sans KR" pitchFamily="34" charset="0"/>
-                <a:ea typeface="Noto Sans KR" pitchFamily="34" charset="-122"/>
-                <a:cs typeface="Noto Sans KR" pitchFamily="34" charset="-120"/>
-              </a:rPr>
-              <a:t>• CPU 70% 타깃 트래킹</a:t>
-            </a:r>
-            <a:endParaRPr lang="en-US" sz="1450" dirty="0"/>
-          </a:p>
-          <a:p>
-            <a:pPr indent="0" marL="0">
-              <a:lnSpc>
-                <a:spcPct val="135000"/>
-              </a:lnSpc>
-              <a:buNone/>
-            </a:pPr>
-            <a:r>
-              <a:rPr lang="en-US" sz="1450" dirty="0">
-                <a:solidFill>
-                  <a:srgbClr val="E7E9FF"/>
-                </a:solidFill>
-                <a:latin typeface="Noto Sans KR" pitchFamily="34" charset="0"/>
-                <a:ea typeface="Noto Sans KR" pitchFamily="34" charset="-122"/>
-                <a:cs typeface="Noto Sans KR" pitchFamily="34" charset="-120"/>
-              </a:rPr>
-              <a:t>• scale-out 60s / scale-in 300s 쿨다운</a:t>
-            </a:r>
-            <a:endParaRPr lang="en-US" sz="1450" dirty="0"/>
-          </a:p>
-        </p:txBody>
-      </p:sp>
-      <p:sp>
-        <p:nvSpPr>
-          <p:cNvPr id="8" name="Shape 5"/>
-          <p:cNvSpPr/>
-          <p:nvPr/>
-        </p:nvSpPr>
-        <p:spPr>
-          <a:xfrm>
-            <a:off x="640080" y="3931920"/>
-            <a:ext cx="5394960" cy="2194560"/>
-          </a:xfrm>
-          <a:prstGeom prst="roundRect">
-            <a:avLst>
-              <a:gd name="adj" fmla="val 5000"/>
-            </a:avLst>
-          </a:prstGeom>
-          <a:solidFill>
-            <a:srgbClr val="111120"/>
-          </a:solidFill>
-          <a:ln w="12700">
-            <a:solidFill>
-              <a:srgbClr val="A78BFA"/>
-            </a:solidFill>
-            <a:prstDash val="solid"/>
-          </a:ln>
-        </p:spPr>
-      </p:sp>
-      <p:sp>
-        <p:nvSpPr>
           <p:cNvPr id="9" name="Text 6"/>
           <p:cNvSpPr/>
           <p:nvPr/>
         </p:nvSpPr>
         <p:spPr>
           <a:xfrm>
-            <a:off x="868680" y="4069080"/>
+            <a:off x="6537960" y="1783080"/>
             <a:ext cx="4937760" cy="365760"/>
           </a:xfrm>
           <a:prstGeom prst="rect">
@@ -9527,13 +10329,13 @@
             <a:r>
               <a:rPr lang="en-US" sz="1300" b="1" spc="200" kern="0" dirty="0">
                 <a:solidFill>
-                  <a:srgbClr val="A78BFA"/>
-                </a:solidFill>
-                <a:latin typeface="Noto Sans KR" pitchFamily="34" charset="0"/>
-                <a:ea typeface="Noto Sans KR" pitchFamily="34" charset="-122"/>
-                <a:cs typeface="Noto Sans KR" pitchFamily="34" charset="-120"/>
-              </a:rPr>
-              <a:t>② 인프라 레벨 (Capacity Provider)</a:t>
+                  <a:srgbClr val="22D3EE"/>
+                </a:solidFill>
+                <a:latin typeface="Noto Sans KR" pitchFamily="34" charset="0"/>
+                <a:ea typeface="Noto Sans KR" pitchFamily="34" charset="-122"/>
+                <a:cs typeface="Noto Sans KR" pitchFamily="34" charset="-120"/>
+              </a:rPr>
+              <a:t>버킷 B — 게임 히스토리</a:t>
             </a:r>
             <a:endParaRPr lang="en-US" sz="1300" dirty="0"/>
           </a:p>
@@ -9547,8 +10349,8 @@
         </p:nvSpPr>
         <p:spPr>
           <a:xfrm>
-            <a:off x="868680" y="4434840"/>
-            <a:ext cx="4937760" cy="1508760"/>
+            <a:off x="6537960" y="2148840"/>
+            <a:ext cx="4937760" cy="3794760"/>
           </a:xfrm>
           <a:prstGeom prst="rect">
             <a:avLst/>
@@ -9575,7 +10377,7 @@
                 <a:ea typeface="Noto Sans KR" pitchFamily="34" charset="-122"/>
                 <a:cs typeface="Noto Sans KR" pitchFamily="34" charset="-120"/>
               </a:rPr>
-              <a:t>• ASG: t3.small 2 ~ 4대</a:t>
+              <a:t>• 게임 종료 시 결과를 games/{game_id}.json으로 저장</a:t>
             </a:r>
             <a:endParaRPr lang="en-US" sz="1450" dirty="0"/>
           </a:p>
@@ -9595,7 +10397,7 @@
                 <a:ea typeface="Noto Sans KR" pitchFamily="34" charset="-122"/>
                 <a:cs typeface="Noto Sans KR" pitchFamily="34" charset="-120"/>
               </a:rPr>
-              <a:t>• 타깃 capacity 80% — 태스크가 못 들어가면 EC2 자동 증설</a:t>
+              <a:t>  (승자, 플레이어별 최종 칩, 종료 시각)</a:t>
             </a:r>
             <a:endParaRPr lang="en-US" sz="1450" dirty="0"/>
           </a:p>
@@ -9606,6 +10408,15 @@
               </a:lnSpc>
               <a:buNone/>
             </a:pPr>
+            <a:endParaRPr lang="en-US" sz="1450" dirty="0"/>
+          </a:p>
+          <a:p>
+            <a:pPr indent="0" marL="0">
+              <a:lnSpc>
+                <a:spcPct val="135000"/>
+              </a:lnSpc>
+              <a:buNone/>
+            </a:pPr>
             <a:r>
               <a:rPr lang="en-US" sz="1450" dirty="0">
                 <a:solidFill>
@@ -9615,98 +10426,10 @@
                 <a:ea typeface="Noto Sans KR" pitchFamily="34" charset="-122"/>
                 <a:cs typeface="Noto Sans KR" pitchFamily="34" charset="-120"/>
               </a:rPr>
-              <a:t>• 관리형 스케일링: ECS가 ASG를 직접 조정</a:t>
+              <a:t>• Task Role에는 이 버킷 PutObject 권한만 부여 (최소 권한)</a:t>
             </a:r>
             <a:endParaRPr lang="en-US" sz="1450" dirty="0"/>
           </a:p>
-        </p:txBody>
-      </p:sp>
-      <p:sp>
-        <p:nvSpPr>
-          <p:cNvPr id="11" name="Shape 8"/>
-          <p:cNvSpPr/>
-          <p:nvPr/>
-        </p:nvSpPr>
-        <p:spPr>
-          <a:xfrm>
-            <a:off x="6309360" y="1645920"/>
-            <a:ext cx="5394960" cy="4480560"/>
-          </a:xfrm>
-          <a:prstGeom prst="roundRect">
-            <a:avLst>
-              <a:gd name="adj" fmla="val 2449"/>
-            </a:avLst>
-          </a:prstGeom>
-          <a:solidFill>
-            <a:srgbClr val="111120"/>
-          </a:solidFill>
-          <a:ln w="12700">
-            <a:solidFill>
-              <a:srgbClr val="34D399"/>
-            </a:solidFill>
-            <a:prstDash val="solid"/>
-          </a:ln>
-        </p:spPr>
-      </p:sp>
-      <p:sp>
-        <p:nvSpPr>
-          <p:cNvPr id="12" name="Text 9"/>
-          <p:cNvSpPr/>
-          <p:nvPr/>
-        </p:nvSpPr>
-        <p:spPr>
-          <a:xfrm>
-            <a:off x="6537960" y="1783080"/>
-            <a:ext cx="4937760" cy="365760"/>
-          </a:xfrm>
-          <a:prstGeom prst="rect">
-            <a:avLst/>
-          </a:prstGeom>
-          <a:noFill/>
-          <a:ln/>
-        </p:spPr>
-        <p:txBody>
-          <a:bodyPr wrap="square" rtlCol="0" anchor="ctr"/>
-          <a:lstStyle/>
-          <a:p>
-            <a:pPr indent="0" marL="0">
-              <a:buNone/>
-            </a:pPr>
-            <a:r>
-              <a:rPr lang="en-US" sz="1300" b="1" spc="200" kern="0" dirty="0">
-                <a:solidFill>
-                  <a:srgbClr val="34D399"/>
-                </a:solidFill>
-                <a:latin typeface="Noto Sans KR" pitchFamily="34" charset="0"/>
-                <a:ea typeface="Noto Sans KR" pitchFamily="34" charset="-122"/>
-                <a:cs typeface="Noto Sans KR" pitchFamily="34" charset="-120"/>
-              </a:rPr>
-              <a:t>동작 흐름</a:t>
-            </a:r>
-            <a:endParaRPr lang="en-US" sz="1300" dirty="0"/>
-          </a:p>
-        </p:txBody>
-      </p:sp>
-      <p:sp>
-        <p:nvSpPr>
-          <p:cNvPr id="13" name="Text 10"/>
-          <p:cNvSpPr/>
-          <p:nvPr/>
-        </p:nvSpPr>
-        <p:spPr>
-          <a:xfrm>
-            <a:off x="6537960" y="2148840"/>
-            <a:ext cx="4937760" cy="3794760"/>
-          </a:xfrm>
-          <a:prstGeom prst="rect">
-            <a:avLst/>
-          </a:prstGeom>
-          <a:noFill/>
-          <a:ln/>
-        </p:spPr>
-        <p:txBody>
-          <a:bodyPr wrap="square" rtlCol="0" anchor="t"/>
-          <a:lstStyle/>
           <a:p>
             <a:pPr indent="0" marL="0">
               <a:lnSpc>
@@ -9714,6 +10437,15 @@
               </a:lnSpc>
               <a:buNone/>
             </a:pPr>
+            <a:endParaRPr lang="en-US" sz="1450" dirty="0"/>
+          </a:p>
+          <a:p>
+            <a:pPr indent="0" marL="0">
+              <a:lnSpc>
+                <a:spcPct val="135000"/>
+              </a:lnSpc>
+              <a:buNone/>
+            </a:pPr>
             <a:r>
               <a:rPr lang="en-US" sz="1450" dirty="0">
                 <a:solidFill>
@@ -9723,7 +10455,7 @@
                 <a:ea typeface="Noto Sans KR" pitchFamily="34" charset="-122"/>
                 <a:cs typeface="Noto Sans KR" pitchFamily="34" charset="-120"/>
               </a:rPr>
-              <a:t>트래픽 증가</a:t>
+              <a:t>• 저장 실패해도 게임 흐름은 막지 않음 (비동기 + 로깅)</a:t>
             </a:r>
             <a:endParaRPr lang="en-US" sz="1450" dirty="0"/>
           </a:p>
@@ -9734,6 +10466,15 @@
               </a:lnSpc>
               <a:buNone/>
             </a:pPr>
+            <a:endParaRPr lang="en-US" sz="1450" dirty="0"/>
+          </a:p>
+          <a:p>
+            <a:pPr indent="0" marL="0">
+              <a:lnSpc>
+                <a:spcPct val="135000"/>
+              </a:lnSpc>
+              <a:buNone/>
+            </a:pPr>
             <a:r>
               <a:rPr lang="en-US" sz="1450" dirty="0">
                 <a:solidFill>
@@ -9743,116 +10484,7 @@
                 <a:ea typeface="Noto Sans KR" pitchFamily="34" charset="-122"/>
                 <a:cs typeface="Noto Sans KR" pitchFamily="34" charset="-120"/>
               </a:rPr>
-              <a:t>→ 태스크 CPU 70% 초과</a:t>
-            </a:r>
-            <a:endParaRPr lang="en-US" sz="1450" dirty="0"/>
-          </a:p>
-          <a:p>
-            <a:pPr indent="0" marL="0">
-              <a:lnSpc>
-                <a:spcPct val="135000"/>
-              </a:lnSpc>
-              <a:buNone/>
-            </a:pPr>
-            <a:r>
-              <a:rPr lang="en-US" sz="1450" dirty="0">
-                <a:solidFill>
-                  <a:srgbClr val="E7E9FF"/>
-                </a:solidFill>
-                <a:latin typeface="Noto Sans KR" pitchFamily="34" charset="0"/>
-                <a:ea typeface="Noto Sans KR" pitchFamily="34" charset="-122"/>
-                <a:cs typeface="Noto Sans KR" pitchFamily="34" charset="-120"/>
-              </a:rPr>
-              <a:t>→ 태스크 증설 (서비스 레벨)</a:t>
-            </a:r>
-            <a:endParaRPr lang="en-US" sz="1450" dirty="0"/>
-          </a:p>
-          <a:p>
-            <a:pPr indent="0" marL="0">
-              <a:lnSpc>
-                <a:spcPct val="135000"/>
-              </a:lnSpc>
-              <a:buNone/>
-            </a:pPr>
-            <a:r>
-              <a:rPr lang="en-US" sz="1450" dirty="0">
-                <a:solidFill>
-                  <a:srgbClr val="E7E9FF"/>
-                </a:solidFill>
-                <a:latin typeface="Noto Sans KR" pitchFamily="34" charset="0"/>
-                <a:ea typeface="Noto Sans KR" pitchFamily="34" charset="-122"/>
-                <a:cs typeface="Noto Sans KR" pitchFamily="34" charset="-120"/>
-              </a:rPr>
-              <a:t>→ EC2에 빈 자리 부족</a:t>
-            </a:r>
-            <a:endParaRPr lang="en-US" sz="1450" dirty="0"/>
-          </a:p>
-          <a:p>
-            <a:pPr indent="0" marL="0">
-              <a:lnSpc>
-                <a:spcPct val="135000"/>
-              </a:lnSpc>
-              <a:buNone/>
-            </a:pPr>
-            <a:r>
-              <a:rPr lang="en-US" sz="1450" dirty="0">
-                <a:solidFill>
-                  <a:srgbClr val="E7E9FF"/>
-                </a:solidFill>
-                <a:latin typeface="Noto Sans KR" pitchFamily="34" charset="0"/>
-                <a:ea typeface="Noto Sans KR" pitchFamily="34" charset="-122"/>
-                <a:cs typeface="Noto Sans KR" pitchFamily="34" charset="-120"/>
-              </a:rPr>
-              <a:t>→ EC2 증설 (Capacity Provider)</a:t>
-            </a:r>
-            <a:endParaRPr lang="en-US" sz="1450" dirty="0"/>
-          </a:p>
-          <a:p>
-            <a:pPr indent="0" marL="0">
-              <a:lnSpc>
-                <a:spcPct val="135000"/>
-              </a:lnSpc>
-              <a:buNone/>
-            </a:pPr>
-            <a:endParaRPr lang="en-US" sz="1450" dirty="0"/>
-          </a:p>
-          <a:p>
-            <a:pPr indent="0" marL="0">
-              <a:lnSpc>
-                <a:spcPct val="135000"/>
-              </a:lnSpc>
-              <a:buNone/>
-            </a:pPr>
-            <a:r>
-              <a:rPr lang="en-US" sz="1450" dirty="0">
-                <a:solidFill>
-                  <a:srgbClr val="E7E9FF"/>
-                </a:solidFill>
-                <a:latin typeface="Noto Sans KR" pitchFamily="34" charset="0"/>
-                <a:ea typeface="Noto Sans KR" pitchFamily="34" charset="-122"/>
-                <a:cs typeface="Noto Sans KR" pitchFamily="34" charset="-120"/>
-              </a:rPr>
-              <a:t>반대로 한가하면 역순 축소</a:t>
-            </a:r>
-            <a:endParaRPr lang="en-US" sz="1450" dirty="0"/>
-          </a:p>
-          <a:p>
-            <a:pPr indent="0" marL="0">
-              <a:lnSpc>
-                <a:spcPct val="135000"/>
-              </a:lnSpc>
-              <a:buNone/>
-            </a:pPr>
-            <a:r>
-              <a:rPr lang="en-US" sz="1450" dirty="0">
-                <a:solidFill>
-                  <a:srgbClr val="E7E9FF"/>
-                </a:solidFill>
-                <a:latin typeface="Noto Sans KR" pitchFamily="34" charset="0"/>
-                <a:ea typeface="Noto Sans KR" pitchFamily="34" charset="-122"/>
-                <a:cs typeface="Noto Sans KR" pitchFamily="34" charset="-120"/>
-              </a:rPr>
-              <a:t>실습 중에는 비용 절약을 위해 desired 0으로 내려두기도</a:t>
+              <a:t>• Redis는 "현재 상태", S3는 "영구 기록" — 핫/콜드 분리</a:t>
             </a:r>
             <a:endParaRPr lang="en-US" sz="1450" dirty="0"/>
           </a:p>

--- a/docs/presentation/cloud-holdem-발표.pptx
+++ b/docs/presentation/cloud-holdem-발표.pptx
@@ -4,6 +4,9 @@
   <p:sldMasterIdLst>
     <p:sldMasterId id="2147483648" r:id="rId1"/>
   </p:sldMasterIdLst>
+  <p:notesMasterIdLst>
+    <p:notesMasterId r:id="rId19"/>
+  </p:notesMasterIdLst>
   <p:sldIdLst>
     <p:sldId id="256" r:id="rId2"/>
     <p:sldId id="257" r:id="rId3"/>
@@ -23,11 +26,8 @@
     <p:sldId id="271" r:id="rId17"/>
     <p:sldId id="272" r:id="rId18"/>
   </p:sldIdLst>
-  <p:notesMasterIdLst>
-    <p:notesMasterId r:id="rId19"/>
-  </p:notesMasterIdLst>
-  <p:sldSz cx="12188952" cy="6858000"/>
-  <p:notesSz cx="6858000" cy="12188952"/>
+  <p:sldSz cx="12188825" cy="6858000"/>
+  <p:notesSz cx="6858000" cy="12188825"/>
   <p:defaultTextStyle>
     <a:lvl1pPr marL="0" algn="l" defTabSz="914400" rtl="0" eaLnBrk="1" latinLnBrk="0" hangingPunct="1">
       <a:defRPr sz="1800" kern="1200">
@@ -120,6 +120,11 @@
       </a:defRPr>
     </a:lvl9pPr>
   </p:defaultTextStyle>
+  <p:extLst>
+    <p:ext uri="{EFAFB233-063F-42B5-8137-9DF3F51BA10A}">
+      <p15:sldGuideLst xmlns:p15="http://schemas.microsoft.com/office/powerpoint/2012/main"/>
+    </p:ext>
+  </p:extLst>
 </p:presentation>
 </file>
 
@@ -145,240 +150,16 @@
           <a:chExt cx="0" cy="0"/>
         </a:xfrm>
       </p:grpSpPr>
-      <p:sp>
-        <p:nvSpPr>
-          <p:cNvPr id="2" name="Header Placeholder 1"/>
-          <p:cNvSpPr>
-            <a:spLocks noGrp="1"/>
-          </p:cNvSpPr>
-          <p:nvPr>
-            <p:ph type="hdr" sz="quarter"/>
-          </p:nvPr>
-        </p:nvSpPr>
-        <p:spPr>
-          <a:xfrm>
-            <a:off x="0" y="0"/>
-            <a:ext cx="2971800" cy="458788"/>
-          </a:xfrm>
-          <a:prstGeom prst="rect">
-            <a:avLst/>
-          </a:prstGeom>
-        </p:spPr>
-        <p:txBody>
-          <a:bodyPr vert="horz" lIns="91440" tIns="45720" rIns="91440" bIns="45720" rtlCol="0"/>
-          <a:lstStyle>
-            <a:lvl1pPr algn="l">
-              <a:defRPr sz="1200"/>
-            </a:lvl1pPr>
-          </a:lstStyle>
-          <a:p>
-            <a:endParaRPr lang="en-US"/>
-          </a:p>
-        </p:txBody>
-      </p:sp>
-      <p:sp>
-        <p:nvSpPr>
-          <p:cNvPr id="3" name="Date Placeholder 2"/>
-          <p:cNvSpPr>
-            <a:spLocks noGrp="1"/>
-          </p:cNvSpPr>
-          <p:nvPr>
-            <p:ph type="dt" idx="1"/>
-          </p:nvPr>
-        </p:nvSpPr>
-        <p:spPr>
-          <a:xfrm>
-            <a:off x="3884613" y="0"/>
-            <a:ext cx="2971800" cy="458788"/>
-          </a:xfrm>
-          <a:prstGeom prst="rect">
-            <a:avLst/>
-          </a:prstGeom>
-        </p:spPr>
-        <p:txBody>
-          <a:bodyPr vert="horz" lIns="91440" tIns="45720" rIns="91440" bIns="45720" rtlCol="0"/>
-          <a:lstStyle>
-            <a:lvl1pPr algn="r">
-              <a:defRPr sz="1200"/>
-            </a:lvl1pPr>
-          </a:lstStyle>
-          <a:p>
-            <a:fld id="{5282F153-3F37-0F45-9E97-73ACFA13230C}" type="datetimeFigureOut">
-              <a:rPr lang="en-US"/>
-              <a:t>7/23/19</a:t>
-            </a:fld>
-            <a:endParaRPr lang="en-US"/>
-          </a:p>
-        </p:txBody>
-      </p:sp>
-      <p:sp>
-        <p:nvSpPr>
-          <p:cNvPr id="4" name="Slide Image Placeholder 3"/>
-          <p:cNvSpPr>
-            <a:spLocks noGrp="1" noRot="1" noChangeAspect="1"/>
-          </p:cNvSpPr>
-          <p:nvPr>
-            <p:ph type="sldImg" idx="2"/>
-          </p:nvPr>
-        </p:nvSpPr>
-        <p:spPr>
-          <a:xfrm>
-            <a:off x="685800" y="1143000"/>
-            <a:ext cx="5486400" cy="3086100"/>
-          </a:xfrm>
-          <a:prstGeom prst="rect">
-            <a:avLst/>
-          </a:prstGeom>
-          <a:noFill/>
-          <a:ln w="12700">
-            <a:solidFill>
-              <a:prstClr val="black"/>
-            </a:solidFill>
-          </a:ln>
-        </p:spPr>
-        <p:txBody>
-          <a:bodyPr vert="horz" lIns="91440" tIns="45720" rIns="91440" bIns="45720" rtlCol="0" anchor="ctr"/>
-          <a:lstStyle/>
-          <a:p>
-            <a:endParaRPr lang="en-US"/>
-          </a:p>
-        </p:txBody>
-      </p:sp>
-      <p:sp>
-        <p:nvSpPr>
-          <p:cNvPr id="5" name="Notes Placeholder 4"/>
-          <p:cNvSpPr>
-            <a:spLocks noGrp="1"/>
-          </p:cNvSpPr>
-          <p:nvPr>
-            <p:ph type="body" sz="quarter" idx="3"/>
-          </p:nvPr>
-        </p:nvSpPr>
-        <p:spPr>
-          <a:xfrm>
-            <a:off x="685800" y="4400550"/>
-            <a:ext cx="5486400" cy="3600450"/>
-          </a:xfrm>
-          <a:prstGeom prst="rect">
-            <a:avLst/>
-          </a:prstGeom>
-        </p:spPr>
-        <p:txBody>
-          <a:bodyPr vert="horz" lIns="91440" tIns="45720" rIns="91440" bIns="45720" rtlCol="0"/>
-          <a:lstStyle/>
-          <a:p>
-            <a:pPr lvl="0"/>
-            <a:r>
-              <a:rPr lang="en-US"/>
-              <a:t>Click to edit Master text styles</a:t>
-            </a:r>
-          </a:p>
-          <a:p>
-            <a:pPr lvl="1"/>
-            <a:r>
-              <a:rPr lang="en-US"/>
-              <a:t>Second level</a:t>
-            </a:r>
-          </a:p>
-          <a:p>
-            <a:pPr lvl="2"/>
-            <a:r>
-              <a:rPr lang="en-US"/>
-              <a:t>Third level</a:t>
-            </a:r>
-          </a:p>
-          <a:p>
-            <a:pPr lvl="3"/>
-            <a:r>
-              <a:rPr lang="en-US"/>
-              <a:t>Fourth level</a:t>
-            </a:r>
-          </a:p>
-          <a:p>
-            <a:pPr lvl="4"/>
-            <a:r>
-              <a:rPr lang="en-US"/>
-              <a:t>Fifth level</a:t>
-            </a:r>
-          </a:p>
-        </p:txBody>
-      </p:sp>
-      <p:sp>
-        <p:nvSpPr>
-          <p:cNvPr id="6" name="Footer Placeholder 5"/>
-          <p:cNvSpPr>
-            <a:spLocks noGrp="1"/>
-          </p:cNvSpPr>
-          <p:nvPr>
-            <p:ph type="ftr" sz="quarter" idx="4"/>
-          </p:nvPr>
-        </p:nvSpPr>
-        <p:spPr>
-          <a:xfrm>
-            <a:off x="0" y="8685213"/>
-            <a:ext cx="2971800" cy="458787"/>
-          </a:xfrm>
-          <a:prstGeom prst="rect">
-            <a:avLst/>
-          </a:prstGeom>
-        </p:spPr>
-        <p:txBody>
-          <a:bodyPr vert="horz" lIns="91440" tIns="45720" rIns="91440" bIns="45720" rtlCol="0" anchor="b"/>
-          <a:lstStyle>
-            <a:lvl1pPr algn="l">
-              <a:defRPr sz="1200"/>
-            </a:lvl1pPr>
-          </a:lstStyle>
-          <a:p>
-            <a:endParaRPr lang="en-US"/>
-          </a:p>
-        </p:txBody>
-      </p:sp>
-      <p:sp>
-        <p:nvSpPr>
-          <p:cNvPr id="7" name="Slide Number Placeholder 6"/>
-          <p:cNvSpPr>
-            <a:spLocks noGrp="1"/>
-          </p:cNvSpPr>
-          <p:nvPr>
-            <p:ph type="sldNum" sz="quarter" idx="5"/>
-          </p:nvPr>
-        </p:nvSpPr>
-        <p:spPr>
-          <a:xfrm>
-            <a:off x="3884613" y="8685213"/>
-            <a:ext cx="2971800" cy="458787"/>
-          </a:xfrm>
-          <a:prstGeom prst="rect">
-            <a:avLst/>
-          </a:prstGeom>
-        </p:spPr>
-        <p:txBody>
-          <a:bodyPr vert="horz" lIns="91440" tIns="45720" rIns="91440" bIns="45720" rtlCol="0" anchor="b"/>
-          <a:lstStyle>
-            <a:lvl1pPr algn="r">
-              <a:defRPr sz="1200"/>
-            </a:lvl1pPr>
-          </a:lstStyle>
-          <a:p>
-            <a:fld id="{CE5E9CC1-C706-0F49-92D6-E571CC5EEA8F}" type="slidenum">
-              <a:rPr lang="en-US"/>
-              <a:t>‹#›</a:t>
-            </a:fld>
-            <a:endParaRPr lang="en-US"/>
-          </a:p>
-        </p:txBody>
-      </p:sp>
     </p:spTree>
     <p:extLst>
       <p:ext uri="{BB962C8B-B14F-4D97-AF65-F5344CB8AC3E}">
-        <p14:creationId xmlns:p14="http://schemas.microsoft.com/office/powerpoint/2010/main" val="1024086991"/>
+        <p14:creationId xmlns:p14="http://schemas.microsoft.com/office/powerpoint/2010/main" val="3460504015"/>
       </p:ext>
     </p:extLst>
   </p:cSld>
   <p:clrMap bg1="lt1" tx1="dk1" bg2="lt2" tx2="dk2" accent1="accent1" accent2="accent2" accent3="accent3" accent4="accent4" accent5="accent5" accent6="accent6" hlink="hlink" folHlink="folHlink"/>
   <p:notesStyle>
-    <a:lvl1pPr marL="0" algn="l" defTabSz="914400" rtl="0" eaLnBrk="1" latinLnBrk="0" hangingPunct="1">
+    <a:lvl1pPr marL="0" algn="l" defTabSz="914400" rtl="0" eaLnBrk="1" latinLnBrk="1" hangingPunct="1">
       <a:defRPr sz="1200" kern="1200">
         <a:solidFill>
           <a:schemeClr val="tx1"/>
@@ -388,7 +169,7 @@
         <a:cs typeface="+mn-cs"/>
       </a:defRPr>
     </a:lvl1pPr>
-    <a:lvl2pPr marL="457200" algn="l" defTabSz="914400" rtl="0" eaLnBrk="1" latinLnBrk="0" hangingPunct="1">
+    <a:lvl2pPr marL="457200" algn="l" defTabSz="914400" rtl="0" eaLnBrk="1" latinLnBrk="1" hangingPunct="1">
       <a:defRPr sz="1200" kern="1200">
         <a:solidFill>
           <a:schemeClr val="tx1"/>
@@ -398,7 +179,7 @@
         <a:cs typeface="+mn-cs"/>
       </a:defRPr>
     </a:lvl2pPr>
-    <a:lvl3pPr marL="914400" algn="l" defTabSz="914400" rtl="0" eaLnBrk="1" latinLnBrk="0" hangingPunct="1">
+    <a:lvl3pPr marL="914400" algn="l" defTabSz="914400" rtl="0" eaLnBrk="1" latinLnBrk="1" hangingPunct="1">
       <a:defRPr sz="1200" kern="1200">
         <a:solidFill>
           <a:schemeClr val="tx1"/>
@@ -408,7 +189,7 @@
         <a:cs typeface="+mn-cs"/>
       </a:defRPr>
     </a:lvl3pPr>
-    <a:lvl4pPr marL="1371600" algn="l" defTabSz="914400" rtl="0" eaLnBrk="1" latinLnBrk="0" hangingPunct="1">
+    <a:lvl4pPr marL="1371600" algn="l" defTabSz="914400" rtl="0" eaLnBrk="1" latinLnBrk="1" hangingPunct="1">
       <a:defRPr sz="1200" kern="1200">
         <a:solidFill>
           <a:schemeClr val="tx1"/>
@@ -418,7 +199,7 @@
         <a:cs typeface="+mn-cs"/>
       </a:defRPr>
     </a:lvl4pPr>
-    <a:lvl5pPr marL="1828800" algn="l" defTabSz="914400" rtl="0" eaLnBrk="1" latinLnBrk="0" hangingPunct="1">
+    <a:lvl5pPr marL="1828800" algn="l" defTabSz="914400" rtl="0" eaLnBrk="1" latinLnBrk="1" hangingPunct="1">
       <a:defRPr sz="1200" kern="1200">
         <a:solidFill>
           <a:schemeClr val="tx1"/>
@@ -428,7 +209,7 @@
         <a:cs typeface="+mn-cs"/>
       </a:defRPr>
     </a:lvl5pPr>
-    <a:lvl6pPr marL="2286000" algn="l" defTabSz="914400" rtl="0" eaLnBrk="1" latinLnBrk="0" hangingPunct="1">
+    <a:lvl6pPr marL="2286000" algn="l" defTabSz="914400" rtl="0" eaLnBrk="1" latinLnBrk="1" hangingPunct="1">
       <a:defRPr sz="1200" kern="1200">
         <a:solidFill>
           <a:schemeClr val="tx1"/>
@@ -438,7 +219,7 @@
         <a:cs typeface="+mn-cs"/>
       </a:defRPr>
     </a:lvl6pPr>
-    <a:lvl7pPr marL="2743200" algn="l" defTabSz="914400" rtl="0" eaLnBrk="1" latinLnBrk="0" hangingPunct="1">
+    <a:lvl7pPr marL="2743200" algn="l" defTabSz="914400" rtl="0" eaLnBrk="1" latinLnBrk="1" hangingPunct="1">
       <a:defRPr sz="1200" kern="1200">
         <a:solidFill>
           <a:schemeClr val="tx1"/>
@@ -448,7 +229,7 @@
         <a:cs typeface="+mn-cs"/>
       </a:defRPr>
     </a:lvl7pPr>
-    <a:lvl8pPr marL="3200400" algn="l" defTabSz="914400" rtl="0" eaLnBrk="1" latinLnBrk="0" hangingPunct="1">
+    <a:lvl8pPr marL="3200400" algn="l" defTabSz="914400" rtl="0" eaLnBrk="1" latinLnBrk="1" hangingPunct="1">
       <a:defRPr sz="1200" kern="1200">
         <a:solidFill>
           <a:schemeClr val="tx1"/>
@@ -458,7 +239,7 @@
         <a:cs typeface="+mn-cs"/>
       </a:defRPr>
     </a:lvl8pPr>
-    <a:lvl9pPr marL="3657600" algn="l" defTabSz="914400" rtl="0" eaLnBrk="1" latinLnBrk="0" hangingPunct="1">
+    <a:lvl9pPr marL="3657600" algn="l" defTabSz="914400" rtl="0" eaLnBrk="1" latinLnBrk="1" hangingPunct="1">
       <a:defRPr sz="1200" kern="1200">
         <a:solidFill>
           <a:schemeClr val="tx1"/>
@@ -521,7 +302,6 @@
               <a:t>안녕하세요. AWS 위에 구축한 실시간 멀티플레이어 텍사스 홀덤, Cloud Hold'em 발표를 시작하겠습니다.
 이 발표는 게임 자체보다 "실시간 게임 서비스를 클라우드에서 어떻게 운영하는가" — 즉 AWS 아키텍처 설계가 중심입니다.</a:t>
             </a:r>
-            <a:endParaRPr lang="en-US" dirty="0"/>
           </a:p>
         </p:txBody>
       </p:sp>
@@ -611,7 +391,6 @@
 기본 60초면 1분만 가만히 있어도 WebSocket이 끊깁니다. 3600초로 늘렸습니다.
 타깃 타입은 ip로 해서 컨테이너의 ENI로 직접 라우팅하고, 30초마다 /health를 검사해 아픈 컨테이너는 라우팅에서 제외합니다.</a:t>
             </a:r>
-            <a:endParaRPr lang="en-US" dirty="0"/>
           </a:p>
         </p:txBody>
       </p:sp>
@@ -701,7 +480,6 @@
 A는 정적 웹 호스팅 — 웹서버 없이 S3가 React 앱을 서빙합니다. 사실상 무료에 가깝고 관리할 서버가 없습니다.
 B는 게임 히스토리 — 게임이 끝나면 결과 JSON이 저장됩니다. Redis가 "현재 진행 중인 상태"라면 S3는 "영구 기록"입니다. 핫 데이터와 콜드 데이터의 분리입니다.</a:t>
             </a:r>
-            <a:endParaRPr lang="en-US" dirty="0"/>
           </a:p>
         </p:txBody>
       </p:sp>
@@ -792,7 +570,6 @@
 2단: 컨테이너 들어갈 자리가 부족하면 Capacity Provider가 EC2 자체를 2~4대로 늘립니다.
 트래픽 증가 → 컨테이너 증설 → 자리 부족 → EC2 증설까지 전부 자동이고, 한가하면 역순으로 줄어듭니다. 실습 중엔 밤마다 0대로 내려 비용을 아꼈습니다.</a:t>
             </a:r>
-            <a:endParaRPr lang="en-US" dirty="0"/>
           </a:p>
         </p:txBody>
       </p:sp>
@@ -883,7 +660,6 @@
 IAM 역할도 컨테이너용/배포용/EC2용 3개로 분리해 각자 필요한 권한만 갖습니다.
 작업자 계정 권한도 필요할 때마다 최소로 추가받는 방식으로 운영했습니다.</a:t>
             </a:r>
-            <a:endParaRPr lang="en-US" dirty="0"/>
           </a:p>
         </p:txBody>
       </p:sp>
@@ -973,7 +749,6 @@
 로그와 CPU 지표는 CloudWatch로 모이고, 5xx 급증·컨테이너 이상을 잡는 알람 2개가 동작 중입니다.
 검증은 실제 배포 환경에서 — 브라우저 4개가 자동으로 풀 게임을 완주하는 테스트로 했습니다.</a:t>
             </a:r>
-            <a:endParaRPr lang="en-US" dirty="0"/>
           </a:p>
         </p:txBody>
       </p:sp>
@@ -1062,7 +837,6 @@
               <a:t>실제 화면입니다. 왼쪽이 로비 — 닉네임 입력 후 방을 만들거나 입장하고, 4명이 모이면 자동 시작됩니다.
 오른쪽이 게임 — 내 카드만 보이고, 자기 턴에만 20초 타이머와 액션 버튼이 나타납니다.</a:t>
             </a:r>
-            <a:endParaRPr lang="en-US" dirty="0"/>
           </a:p>
         </p:txBody>
       </p:sp>
@@ -1152,7 +926,6 @@
 문제가 생기면 당황하지 말고 앞의 스크린샷 슬라이드로 대체할 것.
 발표 전 체크: EC2 2대 가동, 헬스체크 정상, S3 최신 배포.</a:t>
             </a:r>
-            <a:endParaRPr lang="en-US" dirty="0"/>
           </a:p>
         </p:txBody>
       </p:sp>
@@ -1242,7 +1015,6 @@
 정리하면 — 상태를 밖으로 빼면(Stateless) 확장과 장애 복구가 쉬워지고, 관리형 서비스 조합이 직접 구축보다 운영 부담이 적으며, 안 쓸 때 끄는 것이 클라우드 비용 관리의 시작입니다.
 이상입니다. 감사합니다.</a:t>
             </a:r>
-            <a:endParaRPr lang="en-US" dirty="0"/>
           </a:p>
         </p:txBody>
       </p:sp>
@@ -1332,7 +1104,6 @@
 지금 화면의 주소로 실제 서비스가 AWS에 배포되어 돌아가고 있습니다.
 오늘은 이 게임을 받치고 있는 클라우드 인프라를 하나씩 설명드리겠습니다.</a:t>
             </a:r>
-            <a:endParaRPr lang="en-US" dirty="0"/>
           </a:p>
         </p:txBody>
       </p:sp>
@@ -1423,7 +1194,6 @@
 셋째, 서버 한 대가 장애 나도 게임이 사라지면 안 되고. 넷째, 여러 서버에 분산 접속해도 같은 게임이 일관되게 보여야 합니다.
 이 네 가지를 만족시키는 것이 아키텍처 설계의 목표였습니다.</a:t>
             </a:r>
-            <a:endParaRPr lang="en-US" dirty="0"/>
           </a:p>
         </p:txBody>
       </p:sp>
@@ -1515,7 +1285,6 @@
 끝난 게임은 ⑤번 S3에 기록으로 남고, ⑥번 ECR에서 컨테이너 이미지를 받아옵니다.
 다음 두 장에서 이 흐름과 각 구성요소를 자세히 설명드리겠습니다.</a:t>
             </a:r>
-            <a:endParaRPr lang="en-US" dirty="0"/>
           </a:p>
         </p:txBody>
       </p:sp>
@@ -1608,7 +1377,6 @@
 ④ 게임 상태는 전부 Redis에 있고, "누가 베팅했다" 같은 이벤트는 Redis Pub/Sub으로 모든 컨테이너에 전파됩니다.
 ⑤ 게임이 끝나면 결과가 S3에 영구 저장되고, ⑥ 배포 시에는 ECR의 이미지를 받아 무중단으로 교체됩니다.</a:t>
             </a:r>
-            <a:endParaRPr lang="en-US" dirty="0"/>
           </a:p>
         </p:txBody>
       </p:sp>
@@ -1699,7 +1467,6 @@
 ElastiCache가 이 아키텍처의 심장인데, 서버를 무상태로 만들어주는 단일 상태 저장소입니다.
 모든 리소스는 서울 리전, 기본 VPC의 3개 가용영역에 걸쳐 있습니다.</a:t>
             </a:r>
-            <a:endParaRPr lang="en-US" dirty="0"/>
           </a:p>
         </p:txBody>
       </p:sp>
@@ -1789,7 +1556,6 @@
 Fargate도 검토했지만 24시간 상시 가동 서비스엔 EC2 방식이 더 저렴합니다.
 그래서 ECS on EC2 — 관리비 무료, AWS 서비스와 네이티브 통합, 그리고 EC2를 직접 다루는 학습 효과까지 챙겼습니다.</a:t>
             </a:r>
-            <a:endParaRPr lang="en-US" dirty="0"/>
           </a:p>
         </p:txBody>
       </p:sp>
@@ -1879,7 +1645,6 @@
 ALB도, ECS 태스크도, EC2도 3개 영역에 분산 배치되어 데이터센터 하나가 통째로 장애 나도 서비스가 유지됩니다.
 태스크는 awsvpc 모드라 각자 VPC IP를 갖고, 보안 그룹을 컨테이너 단위로 적용할 수 있습니다.</a:t>
             </a:r>
-            <a:endParaRPr lang="en-US" dirty="0"/>
           </a:p>
         </p:txBody>
       </p:sp>
@@ -1970,7 +1735,6 @@
 덕분에 ① 어느 컨테이너가 죽어도 게임이 보존되고 ② sticky session 없이 아무 컨테이너나 요청을 처리하고 ③ 스케일 아웃이 자유롭습니다.
 4명이 서로 다른 컨테이너에 붙어도 Pub/Sub으로 이벤트가 전파되어 같은 게임이 진행됩니다 — 실제 프로덕션에서 검증했습니다.</a:t>
             </a:r>
-            <a:endParaRPr lang="en-US" dirty="0"/>
           </a:p>
         </p:txBody>
       </p:sp>
@@ -2043,6 +1807,11 @@
 <file path=ppt/slideMasters/slideMaster1.xml><?xml version="1.0" encoding="utf-8"?>
 <p:sldMaster xmlns:a="http://schemas.openxmlformats.org/drawingml/2006/main" xmlns:r="http://schemas.openxmlformats.org/officeDocument/2006/relationships" xmlns:p="http://schemas.openxmlformats.org/presentationml/2006/main">
   <p:cSld>
+    <p:bg>
+      <p:bgRef idx="1001">
+        <a:schemeClr val="bg1"/>
+      </p:bgRef>
+    </p:bg>
     <p:spTree>
       <p:nvGrpSpPr>
         <p:cNvPr id="1" name=""/>
@@ -2325,6 +2094,7 @@
         <a:solidFill>
           <a:srgbClr val="FFFFFF"/>
         </a:solidFill>
+        <a:effectLst/>
       </p:bgPr>
     </p:bg>
     <p:spTree>
@@ -2362,11 +2132,11 @@
           <a:bodyPr wrap="square" rtlCol="0" anchor="ctr"/>
           <a:lstStyle/>
           <a:p>
-            <a:pPr algn="ctr" indent="0" marL="0">
-              <a:buNone/>
-            </a:pPr>
-            <a:r>
-              <a:rPr lang="en-US" sz="1300" spc="600" kern="0" dirty="0">
+            <a:pPr marL="0" indent="0" algn="ctr">
+              <a:buNone/>
+            </a:pPr>
+            <a:r>
+              <a:rPr lang="en-US" sz="1300" kern="0" spc="600" dirty="0">
                 <a:solidFill>
                   <a:srgbClr val="6B7280"/>
                 </a:solidFill>
@@ -2401,11 +2171,11 @@
           <a:bodyPr wrap="square" rtlCol="0" anchor="ctr"/>
           <a:lstStyle/>
           <a:p>
-            <a:pPr algn="ctr" indent="0" marL="0">
-              <a:buNone/>
-            </a:pPr>
-            <a:r>
-              <a:rPr lang="en-US" sz="5600" b="1" spc="300" kern="0" dirty="0">
+            <a:pPr marL="0" indent="0" algn="ctr">
+              <a:buNone/>
+            </a:pPr>
+            <a:r>
+              <a:rPr lang="en-US" sz="5600" b="1" kern="0" spc="300" dirty="0">
                 <a:solidFill>
                   <a:srgbClr val="111827"/>
                 </a:solidFill>
@@ -2441,6 +2211,13 @@
             <a:prstDash val="solid"/>
           </a:ln>
         </p:spPr>
+        <p:txBody>
+          <a:bodyPr/>
+          <a:lstStyle/>
+          <a:p>
+            <a:endParaRPr lang="ko-KR" altLang="en-US"/>
+          </a:p>
+        </p:txBody>
       </p:sp>
       <p:sp>
         <p:nvSpPr>
@@ -2463,7 +2240,7 @@
           <a:bodyPr wrap="square" rtlCol="0" anchor="ctr"/>
           <a:lstStyle/>
           <a:p>
-            <a:pPr algn="ctr" indent="0" marL="0">
+            <a:pPr marL="0" indent="0" algn="ctr">
               <a:buNone/>
             </a:pPr>
             <a:r>
@@ -2502,7 +2279,7 @@
           <a:bodyPr wrap="square" rtlCol="0" anchor="ctr"/>
           <a:lstStyle/>
           <a:p>
-            <a:pPr algn="ctr" indent="0" marL="0">
+            <a:pPr marL="0" indent="0" algn="ctr">
               <a:buNone/>
             </a:pPr>
             <a:r>
@@ -2514,7 +2291,51 @@
                 <a:ea typeface="Noto Sans KR" pitchFamily="34" charset="-122"/>
                 <a:cs typeface="Noto Sans KR" pitchFamily="34" charset="-120"/>
               </a:rPr>
-              <a:t>발표자: ___________   ·   2026.06</a:t>
+              <a:t>발표자</a:t>
+            </a:r>
+            <a:r>
+              <a:rPr lang="en-US" sz="1300">
+                <a:solidFill>
+                  <a:srgbClr val="6B7280"/>
+                </a:solidFill>
+                <a:latin typeface="Noto Sans KR" pitchFamily="34" charset="0"/>
+                <a:ea typeface="Noto Sans KR" pitchFamily="34" charset="-122"/>
+                <a:cs typeface="Noto Sans KR" pitchFamily="34" charset="-120"/>
+              </a:rPr>
+              <a:t>: </a:t>
+            </a:r>
+            <a:r>
+              <a:rPr lang="ko-KR" altLang="en-US" sz="1300">
+                <a:solidFill>
+                  <a:srgbClr val="6B7280"/>
+                </a:solidFill>
+                <a:latin typeface="Noto Sans KR" pitchFamily="34" charset="0"/>
+                <a:ea typeface="Noto Sans KR" pitchFamily="34" charset="-122"/>
+                <a:cs typeface="Noto Sans KR" pitchFamily="34" charset="-120"/>
+              </a:rPr>
+              <a:t>강지훈</a:t>
+            </a:r>
+            <a:r>
+              <a:rPr lang="en-US" sz="1300">
+                <a:solidFill>
+                  <a:srgbClr val="6B7280"/>
+                </a:solidFill>
+                <a:latin typeface="Noto Sans KR" pitchFamily="34" charset="0"/>
+                <a:ea typeface="Noto Sans KR" pitchFamily="34" charset="-122"/>
+                <a:cs typeface="Noto Sans KR" pitchFamily="34" charset="-120"/>
+              </a:rPr>
+              <a:t>   </a:t>
+            </a:r>
+            <a:r>
+              <a:rPr lang="en-US" sz="1300" dirty="0">
+                <a:solidFill>
+                  <a:srgbClr val="6B7280"/>
+                </a:solidFill>
+                <a:latin typeface="Noto Sans KR" pitchFamily="34" charset="0"/>
+                <a:ea typeface="Noto Sans KR" pitchFamily="34" charset="-122"/>
+                <a:cs typeface="Noto Sans KR" pitchFamily="34" charset="-120"/>
+              </a:rPr>
+              <a:t>·   2026.06</a:t>
             </a:r>
             <a:endParaRPr lang="en-US" sz="1300" dirty="0"/>
           </a:p>
@@ -2536,6 +2357,7 @@
         <a:solidFill>
           <a:srgbClr val="FFFFFF"/>
         </a:solidFill>
+        <a:effectLst/>
       </p:bgPr>
     </p:bg>
     <p:spTree>
@@ -2573,11 +2395,11 @@
           <a:bodyPr wrap="square" rtlCol="0" anchor="ctr"/>
           <a:lstStyle/>
           <a:p>
-            <a:pPr indent="0" marL="0">
-              <a:buNone/>
-            </a:pPr>
-            <a:r>
-              <a:rPr lang="en-US" sz="1200" b="1" spc="400" kern="0" dirty="0">
+            <a:pPr marL="0" indent="0">
+              <a:buNone/>
+            </a:pPr>
+            <a:r>
+              <a:rPr lang="en-US" sz="1200" b="1" kern="0" spc="400" dirty="0">
                 <a:solidFill>
                   <a:srgbClr val="6B7280"/>
                 </a:solidFill>
@@ -2612,7 +2434,7 @@
           <a:bodyPr wrap="square" rtlCol="0" anchor="ctr"/>
           <a:lstStyle/>
           <a:p>
-            <a:pPr indent="0" marL="0">
+            <a:pPr marL="0" indent="0">
               <a:buNone/>
             </a:pPr>
             <a:r>
@@ -2652,6 +2474,13 @@
             <a:prstDash val="solid"/>
           </a:ln>
         </p:spPr>
+        <p:txBody>
+          <a:bodyPr/>
+          <a:lstStyle/>
+          <a:p>
+            <a:endParaRPr lang="ko-KR" altLang="en-US"/>
+          </a:p>
+        </p:txBody>
       </p:sp>
       <p:sp>
         <p:nvSpPr>
@@ -2674,7 +2503,7 @@
           <a:bodyPr wrap="square" rtlCol="0" anchor="t"/>
           <a:lstStyle/>
           <a:p>
-            <a:pPr indent="0" marL="0">
+            <a:pPr marL="0" indent="0">
               <a:lnSpc>
                 <a:spcPct val="145000"/>
               </a:lnSpc>
@@ -2691,12 +2520,6 @@
               </a:rPr>
               <a:t>—  </a:t>
             </a:r>
-            <a:pPr indent="0" marL="0">
-              <a:lnSpc>
-                <a:spcPct val="145000"/>
-              </a:lnSpc>
-              <a:buNone/>
-            </a:pPr>
             <a:r>
               <a:rPr lang="en-US" sz="1700" b="1" dirty="0">
                 <a:solidFill>
@@ -2708,12 +2531,6 @@
               </a:rPr>
               <a:t>idle timeout 3600초</a:t>
             </a:r>
-            <a:pPr indent="0" marL="0">
-              <a:lnSpc>
-                <a:spcPct val="145000"/>
-              </a:lnSpc>
-              <a:buNone/>
-            </a:pPr>
             <a:r>
               <a:rPr lang="en-US" sz="1450" dirty="0">
                 <a:solidFill>
@@ -2725,12 +2542,6 @@
               </a:rPr>
               <a:t>  — 기본 60초면 1분 방치 시 연결 끊김. 이 한 줄이 WebSocket 서비스의 핵심</a:t>
             </a:r>
-            <a:pPr indent="0" marL="0">
-              <a:lnSpc>
-                <a:spcPct val="145000"/>
-              </a:lnSpc>
-              <a:buNone/>
-            </a:pPr>
             <a:r>
               <a:rPr lang="en-US" sz="1700" dirty="0">
                 <a:solidFill>
@@ -2743,12 +2554,6 @@
               <a:t>
 </a:t>
             </a:r>
-            <a:pPr indent="0" marL="0">
-              <a:lnSpc>
-                <a:spcPct val="145000"/>
-              </a:lnSpc>
-              <a:buNone/>
-            </a:pPr>
             <a:r>
               <a:rPr lang="en-US" sz="1700" dirty="0">
                 <a:solidFill>
@@ -2760,12 +2565,6 @@
               </a:rPr>
               <a:t>—  </a:t>
             </a:r>
-            <a:pPr indent="0" marL="0">
-              <a:lnSpc>
-                <a:spcPct val="145000"/>
-              </a:lnSpc>
-              <a:buNone/>
-            </a:pPr>
             <a:r>
               <a:rPr lang="en-US" sz="1700" b="1" dirty="0">
                 <a:solidFill>
@@ -2777,12 +2576,6 @@
               </a:rPr>
               <a:t>target-type: ip</a:t>
             </a:r>
-            <a:pPr indent="0" marL="0">
-              <a:lnSpc>
-                <a:spcPct val="145000"/>
-              </a:lnSpc>
-              <a:buNone/>
-            </a:pPr>
             <a:r>
               <a:rPr lang="en-US" sz="1450" dirty="0">
                 <a:solidFill>
@@ -2794,12 +2587,6 @@
               </a:rPr>
               <a:t>  — 컨테이너의 ENI로 직접 라우팅 (awsvpc 모드와 한 쌍)</a:t>
             </a:r>
-            <a:pPr indent="0" marL="0">
-              <a:lnSpc>
-                <a:spcPct val="145000"/>
-              </a:lnSpc>
-              <a:buNone/>
-            </a:pPr>
             <a:r>
               <a:rPr lang="en-US" sz="1700" dirty="0">
                 <a:solidFill>
@@ -2812,12 +2599,6 @@
               <a:t>
 </a:t>
             </a:r>
-            <a:pPr indent="0" marL="0">
-              <a:lnSpc>
-                <a:spcPct val="145000"/>
-              </a:lnSpc>
-              <a:buNone/>
-            </a:pPr>
             <a:r>
               <a:rPr lang="en-US" sz="1700" dirty="0">
                 <a:solidFill>
@@ -2829,12 +2610,6 @@
               </a:rPr>
               <a:t>—  </a:t>
             </a:r>
-            <a:pPr indent="0" marL="0">
-              <a:lnSpc>
-                <a:spcPct val="145000"/>
-              </a:lnSpc>
-              <a:buNone/>
-            </a:pPr>
             <a:r>
               <a:rPr lang="en-US" sz="1700" b="1" dirty="0">
                 <a:solidFill>
@@ -2846,12 +2621,6 @@
               </a:rPr>
               <a:t>헬스체크 GET /health · 30초</a:t>
             </a:r>
-            <a:pPr indent="0" marL="0">
-              <a:lnSpc>
-                <a:spcPct val="145000"/>
-              </a:lnSpc>
-              <a:buNone/>
-            </a:pPr>
             <a:r>
               <a:rPr lang="en-US" sz="1450" dirty="0">
                 <a:solidFill>
@@ -2863,12 +2632,6 @@
               </a:rPr>
               <a:t>  — 실패 3회면 라우팅 제외, 회복 2회면 복귀</a:t>
             </a:r>
-            <a:pPr indent="0" marL="0">
-              <a:lnSpc>
-                <a:spcPct val="145000"/>
-              </a:lnSpc>
-              <a:buNone/>
-            </a:pPr>
             <a:r>
               <a:rPr lang="en-US" sz="1700" dirty="0">
                 <a:solidFill>
@@ -2881,12 +2644,6 @@
               <a:t>
 </a:t>
             </a:r>
-            <a:pPr indent="0" marL="0">
-              <a:lnSpc>
-                <a:spcPct val="145000"/>
-              </a:lnSpc>
-              <a:buNone/>
-            </a:pPr>
             <a:r>
               <a:rPr lang="en-US" sz="1700" dirty="0">
                 <a:solidFill>
@@ -2898,12 +2655,6 @@
               </a:rPr>
               <a:t>—  </a:t>
             </a:r>
-            <a:pPr indent="0" marL="0">
-              <a:lnSpc>
-                <a:spcPct val="145000"/>
-              </a:lnSpc>
-              <a:buNone/>
-            </a:pPr>
             <a:r>
               <a:rPr lang="en-US" sz="1700" b="1" dirty="0">
                 <a:solidFill>
@@ -2915,12 +2666,6 @@
               </a:rPr>
               <a:t>ws:// 업그레이드 네이티브 지원</a:t>
             </a:r>
-            <a:pPr indent="0" marL="0">
-              <a:lnSpc>
-                <a:spcPct val="145000"/>
-              </a:lnSpc>
-              <a:buNone/>
-            </a:pPr>
             <a:r>
               <a:rPr lang="en-US" sz="1450" dirty="0">
                 <a:solidFill>
@@ -2932,12 +2677,6 @@
               </a:rPr>
               <a:t>  — 별도 설정 없이 WebSocket 통과</a:t>
             </a:r>
-            <a:pPr indent="0" marL="0">
-              <a:lnSpc>
-                <a:spcPct val="145000"/>
-              </a:lnSpc>
-              <a:buNone/>
-            </a:pPr>
             <a:r>
               <a:rPr lang="en-US" sz="1700" dirty="0">
                 <a:solidFill>
@@ -2970,6 +2709,7 @@
         <a:solidFill>
           <a:srgbClr val="FFFFFF"/>
         </a:solidFill>
+        <a:effectLst/>
       </p:bgPr>
     </p:bg>
     <p:spTree>
@@ -3007,11 +2747,11 @@
           <a:bodyPr wrap="square" rtlCol="0" anchor="ctr"/>
           <a:lstStyle/>
           <a:p>
-            <a:pPr indent="0" marL="0">
-              <a:buNone/>
-            </a:pPr>
-            <a:r>
-              <a:rPr lang="en-US" sz="1200" b="1" spc="400" kern="0" dirty="0">
+            <a:pPr marL="0" indent="0">
+              <a:buNone/>
+            </a:pPr>
+            <a:r>
+              <a:rPr lang="en-US" sz="1200" b="1" kern="0" spc="400" dirty="0">
                 <a:solidFill>
                   <a:srgbClr val="6B7280"/>
                 </a:solidFill>
@@ -3046,7 +2786,7 @@
           <a:bodyPr wrap="square" rtlCol="0" anchor="ctr"/>
           <a:lstStyle/>
           <a:p>
-            <a:pPr indent="0" marL="0">
+            <a:pPr marL="0" indent="0">
               <a:buNone/>
             </a:pPr>
             <a:r>
@@ -3086,6 +2826,13 @@
             <a:prstDash val="solid"/>
           </a:ln>
         </p:spPr>
+        <p:txBody>
+          <a:bodyPr/>
+          <a:lstStyle/>
+          <a:p>
+            <a:endParaRPr lang="ko-KR" altLang="en-US"/>
+          </a:p>
+        </p:txBody>
       </p:sp>
       <p:sp>
         <p:nvSpPr>
@@ -3113,6 +2860,13 @@
             <a:prstDash val="solid"/>
           </a:ln>
         </p:spPr>
+        <p:txBody>
+          <a:bodyPr/>
+          <a:lstStyle/>
+          <a:p>
+            <a:endParaRPr lang="ko-KR" altLang="en-US"/>
+          </a:p>
+        </p:txBody>
       </p:sp>
       <p:sp>
         <p:nvSpPr>
@@ -3135,11 +2889,11 @@
           <a:bodyPr wrap="square" rtlCol="0" anchor="ctr"/>
           <a:lstStyle/>
           <a:p>
-            <a:pPr indent="0" marL="0">
-              <a:buNone/>
-            </a:pPr>
-            <a:r>
-              <a:rPr lang="en-US" sz="1250" b="1" spc="200" kern="0" dirty="0">
+            <a:pPr marL="0" indent="0">
+              <a:buNone/>
+            </a:pPr>
+            <a:r>
+              <a:rPr lang="en-US" sz="1250" b="1" kern="0" spc="200" dirty="0">
                 <a:solidFill>
                   <a:srgbClr val="111827"/>
                 </a:solidFill>
@@ -3174,7 +2928,7 @@
           <a:bodyPr wrap="square" rtlCol="0" anchor="t"/>
           <a:lstStyle/>
           <a:p>
-            <a:pPr indent="0" marL="0">
+            <a:pPr marL="0" indent="0">
               <a:lnSpc>
                 <a:spcPct val="135000"/>
               </a:lnSpc>
@@ -3194,7 +2948,7 @@
             <a:endParaRPr lang="en-US" sz="1450" dirty="0"/>
           </a:p>
           <a:p>
-            <a:pPr indent="0" marL="0">
+            <a:pPr marL="0" indent="0">
               <a:lnSpc>
                 <a:spcPct val="135000"/>
               </a:lnSpc>
@@ -3203,7 +2957,7 @@
             <a:endParaRPr lang="en-US" sz="1450" dirty="0"/>
           </a:p>
           <a:p>
-            <a:pPr indent="0" marL="0">
+            <a:pPr marL="0" indent="0">
               <a:lnSpc>
                 <a:spcPct val="135000"/>
               </a:lnSpc>
@@ -3223,7 +2977,7 @@
             <a:endParaRPr lang="en-US" sz="1450" dirty="0"/>
           </a:p>
           <a:p>
-            <a:pPr indent="0" marL="0">
+            <a:pPr marL="0" indent="0">
               <a:lnSpc>
                 <a:spcPct val="135000"/>
               </a:lnSpc>
@@ -3232,7 +2986,7 @@
             <a:endParaRPr lang="en-US" sz="1450" dirty="0"/>
           </a:p>
           <a:p>
-            <a:pPr indent="0" marL="0">
+            <a:pPr marL="0" indent="0">
               <a:lnSpc>
                 <a:spcPct val="135000"/>
               </a:lnSpc>
@@ -3252,7 +3006,7 @@
             <a:endParaRPr lang="en-US" sz="1450" dirty="0"/>
           </a:p>
           <a:p>
-            <a:pPr indent="0" marL="0">
+            <a:pPr marL="0" indent="0">
               <a:lnSpc>
                 <a:spcPct val="135000"/>
               </a:lnSpc>
@@ -3261,7 +3015,7 @@
             <a:endParaRPr lang="en-US" sz="1450" dirty="0"/>
           </a:p>
           <a:p>
-            <a:pPr indent="0" marL="0">
+            <a:pPr marL="0" indent="0">
               <a:lnSpc>
                 <a:spcPct val="135000"/>
               </a:lnSpc>
@@ -3308,6 +3062,13 @@
             <a:prstDash val="solid"/>
           </a:ln>
         </p:spPr>
+        <p:txBody>
+          <a:bodyPr/>
+          <a:lstStyle/>
+          <a:p>
+            <a:endParaRPr lang="ko-KR" altLang="en-US"/>
+          </a:p>
+        </p:txBody>
       </p:sp>
       <p:sp>
         <p:nvSpPr>
@@ -3330,11 +3091,11 @@
           <a:bodyPr wrap="square" rtlCol="0" anchor="ctr"/>
           <a:lstStyle/>
           <a:p>
-            <a:pPr indent="0" marL="0">
-              <a:buNone/>
-            </a:pPr>
-            <a:r>
-              <a:rPr lang="en-US" sz="1250" b="1" spc="200" kern="0" dirty="0">
+            <a:pPr marL="0" indent="0">
+              <a:buNone/>
+            </a:pPr>
+            <a:r>
+              <a:rPr lang="en-US" sz="1250" b="1" kern="0" spc="200" dirty="0">
                 <a:solidFill>
                   <a:srgbClr val="111827"/>
                 </a:solidFill>
@@ -3369,7 +3130,7 @@
           <a:bodyPr wrap="square" rtlCol="0" anchor="t"/>
           <a:lstStyle/>
           <a:p>
-            <a:pPr indent="0" marL="0">
+            <a:pPr marL="0" indent="0">
               <a:lnSpc>
                 <a:spcPct val="135000"/>
               </a:lnSpc>
@@ -3389,7 +3150,7 @@
             <a:endParaRPr lang="en-US" sz="1450" dirty="0"/>
           </a:p>
           <a:p>
-            <a:pPr indent="0" marL="0">
+            <a:pPr marL="0" indent="0">
               <a:lnSpc>
                 <a:spcPct val="135000"/>
               </a:lnSpc>
@@ -3398,7 +3159,7 @@
             <a:endParaRPr lang="en-US" sz="1450" dirty="0"/>
           </a:p>
           <a:p>
-            <a:pPr indent="0" marL="0">
+            <a:pPr marL="0" indent="0">
               <a:lnSpc>
                 <a:spcPct val="135000"/>
               </a:lnSpc>
@@ -3418,7 +3179,7 @@
             <a:endParaRPr lang="en-US" sz="1450" dirty="0"/>
           </a:p>
           <a:p>
-            <a:pPr indent="0" marL="0">
+            <a:pPr marL="0" indent="0">
               <a:lnSpc>
                 <a:spcPct val="135000"/>
               </a:lnSpc>
@@ -3427,7 +3188,7 @@
             <a:endParaRPr lang="en-US" sz="1450" dirty="0"/>
           </a:p>
           <a:p>
-            <a:pPr indent="0" marL="0">
+            <a:pPr marL="0" indent="0">
               <a:lnSpc>
                 <a:spcPct val="135000"/>
               </a:lnSpc>
@@ -3447,7 +3208,7 @@
             <a:endParaRPr lang="en-US" sz="1450" dirty="0"/>
           </a:p>
           <a:p>
-            <a:pPr indent="0" marL="0">
+            <a:pPr marL="0" indent="0">
               <a:lnSpc>
                 <a:spcPct val="135000"/>
               </a:lnSpc>
@@ -3467,7 +3228,7 @@
             <a:endParaRPr lang="en-US" sz="1450" dirty="0"/>
           </a:p>
           <a:p>
-            <a:pPr indent="0" marL="0">
+            <a:pPr marL="0" indent="0">
               <a:lnSpc>
                 <a:spcPct val="135000"/>
               </a:lnSpc>
@@ -3476,7 +3237,7 @@
             <a:endParaRPr lang="en-US" sz="1450" dirty="0"/>
           </a:p>
           <a:p>
-            <a:pPr indent="0" marL="0">
+            <a:pPr marL="0" indent="0">
               <a:lnSpc>
                 <a:spcPct val="135000"/>
               </a:lnSpc>
@@ -3513,6 +3274,7 @@
         <a:solidFill>
           <a:srgbClr val="FFFFFF"/>
         </a:solidFill>
+        <a:effectLst/>
       </p:bgPr>
     </p:bg>
     <p:spTree>
@@ -3550,11 +3312,11 @@
           <a:bodyPr wrap="square" rtlCol="0" anchor="ctr"/>
           <a:lstStyle/>
           <a:p>
-            <a:pPr indent="0" marL="0">
-              <a:buNone/>
-            </a:pPr>
-            <a:r>
-              <a:rPr lang="en-US" sz="1200" b="1" spc="400" kern="0" dirty="0">
+            <a:pPr marL="0" indent="0">
+              <a:buNone/>
+            </a:pPr>
+            <a:r>
+              <a:rPr lang="en-US" sz="1200" b="1" kern="0" spc="400" dirty="0">
                 <a:solidFill>
                   <a:srgbClr val="6B7280"/>
                 </a:solidFill>
@@ -3589,7 +3351,7 @@
           <a:bodyPr wrap="square" rtlCol="0" anchor="ctr"/>
           <a:lstStyle/>
           <a:p>
-            <a:pPr indent="0" marL="0">
+            <a:pPr marL="0" indent="0">
               <a:buNone/>
             </a:pPr>
             <a:r>
@@ -3629,6 +3391,13 @@
             <a:prstDash val="solid"/>
           </a:ln>
         </p:spPr>
+        <p:txBody>
+          <a:bodyPr/>
+          <a:lstStyle/>
+          <a:p>
+            <a:endParaRPr lang="ko-KR" altLang="en-US"/>
+          </a:p>
+        </p:txBody>
       </p:sp>
       <p:sp>
         <p:nvSpPr>
@@ -3656,6 +3425,13 @@
             <a:prstDash val="solid"/>
           </a:ln>
         </p:spPr>
+        <p:txBody>
+          <a:bodyPr/>
+          <a:lstStyle/>
+          <a:p>
+            <a:endParaRPr lang="ko-KR" altLang="en-US"/>
+          </a:p>
+        </p:txBody>
       </p:sp>
       <p:sp>
         <p:nvSpPr>
@@ -3678,11 +3454,11 @@
           <a:bodyPr wrap="square" rtlCol="0" anchor="ctr"/>
           <a:lstStyle/>
           <a:p>
-            <a:pPr indent="0" marL="0">
-              <a:buNone/>
-            </a:pPr>
-            <a:r>
-              <a:rPr lang="en-US" sz="1250" b="1" spc="200" kern="0" dirty="0">
+            <a:pPr marL="0" indent="0">
+              <a:buNone/>
+            </a:pPr>
+            <a:r>
+              <a:rPr lang="en-US" sz="1250" b="1" kern="0" spc="200" dirty="0">
                 <a:solidFill>
                   <a:srgbClr val="111827"/>
                 </a:solidFill>
@@ -3717,7 +3493,7 @@
           <a:bodyPr wrap="square" rtlCol="0" anchor="t"/>
           <a:lstStyle/>
           <a:p>
-            <a:pPr indent="0" marL="0">
+            <a:pPr marL="0" indent="0">
               <a:lnSpc>
                 <a:spcPct val="135000"/>
               </a:lnSpc>
@@ -3737,7 +3513,7 @@
             <a:endParaRPr lang="en-US" sz="1500" dirty="0"/>
           </a:p>
           <a:p>
-            <a:pPr indent="0" marL="0">
+            <a:pPr marL="0" indent="0">
               <a:lnSpc>
                 <a:spcPct val="135000"/>
               </a:lnSpc>
@@ -3784,6 +3560,13 @@
             <a:prstDash val="solid"/>
           </a:ln>
         </p:spPr>
+        <p:txBody>
+          <a:bodyPr/>
+          <a:lstStyle/>
+          <a:p>
+            <a:endParaRPr lang="ko-KR" altLang="en-US"/>
+          </a:p>
+        </p:txBody>
       </p:sp>
       <p:sp>
         <p:nvSpPr>
@@ -3806,11 +3589,11 @@
           <a:bodyPr wrap="square" rtlCol="0" anchor="ctr"/>
           <a:lstStyle/>
           <a:p>
-            <a:pPr indent="0" marL="0">
-              <a:buNone/>
-            </a:pPr>
-            <a:r>
-              <a:rPr lang="en-US" sz="1250" b="1" spc="200" kern="0" dirty="0">
+            <a:pPr marL="0" indent="0">
+              <a:buNone/>
+            </a:pPr>
+            <a:r>
+              <a:rPr lang="en-US" sz="1250" b="1" kern="0" spc="200" dirty="0">
                 <a:solidFill>
                   <a:srgbClr val="111827"/>
                 </a:solidFill>
@@ -3845,7 +3628,7 @@
           <a:bodyPr wrap="square" rtlCol="0" anchor="t"/>
           <a:lstStyle/>
           <a:p>
-            <a:pPr indent="0" marL="0">
+            <a:pPr marL="0" indent="0">
               <a:lnSpc>
                 <a:spcPct val="135000"/>
               </a:lnSpc>
@@ -3865,7 +3648,7 @@
             <a:endParaRPr lang="en-US" sz="1500" dirty="0"/>
           </a:p>
           <a:p>
-            <a:pPr indent="0" marL="0">
+            <a:pPr marL="0" indent="0">
               <a:lnSpc>
                 <a:spcPct val="135000"/>
               </a:lnSpc>
@@ -3912,6 +3695,13 @@
             <a:prstDash val="solid"/>
           </a:ln>
         </p:spPr>
+        <p:txBody>
+          <a:bodyPr/>
+          <a:lstStyle/>
+          <a:p>
+            <a:endParaRPr lang="ko-KR" altLang="en-US"/>
+          </a:p>
+        </p:txBody>
       </p:sp>
       <p:sp>
         <p:nvSpPr>
@@ -3934,11 +3724,11 @@
           <a:bodyPr wrap="square" rtlCol="0" anchor="ctr"/>
           <a:lstStyle/>
           <a:p>
-            <a:pPr indent="0" marL="0">
-              <a:buNone/>
-            </a:pPr>
-            <a:r>
-              <a:rPr lang="en-US" sz="1250" b="1" spc="200" kern="0" dirty="0">
+            <a:pPr marL="0" indent="0">
+              <a:buNone/>
+            </a:pPr>
+            <a:r>
+              <a:rPr lang="en-US" sz="1250" b="1" kern="0" spc="200" dirty="0">
                 <a:solidFill>
                   <a:srgbClr val="111827"/>
                 </a:solidFill>
@@ -3973,7 +3763,7 @@
           <a:bodyPr wrap="square" rtlCol="0" anchor="t"/>
           <a:lstStyle/>
           <a:p>
-            <a:pPr indent="0" marL="0">
+            <a:pPr marL="0" indent="0">
               <a:lnSpc>
                 <a:spcPct val="135000"/>
               </a:lnSpc>
@@ -3993,7 +3783,7 @@
             <a:endParaRPr lang="en-US" sz="1500" dirty="0"/>
           </a:p>
           <a:p>
-            <a:pPr indent="0" marL="0">
+            <a:pPr marL="0" indent="0">
               <a:lnSpc>
                 <a:spcPct val="135000"/>
               </a:lnSpc>
@@ -4013,7 +3803,7 @@
             <a:endParaRPr lang="en-US" sz="1500" dirty="0"/>
           </a:p>
           <a:p>
-            <a:pPr indent="0" marL="0">
+            <a:pPr marL="0" indent="0">
               <a:lnSpc>
                 <a:spcPct val="135000"/>
               </a:lnSpc>
@@ -4033,7 +3823,7 @@
             <a:endParaRPr lang="en-US" sz="1500" dirty="0"/>
           </a:p>
           <a:p>
-            <a:pPr indent="0" marL="0">
+            <a:pPr marL="0" indent="0">
               <a:lnSpc>
                 <a:spcPct val="135000"/>
               </a:lnSpc>
@@ -4053,7 +3843,7 @@
             <a:endParaRPr lang="en-US" sz="1500" dirty="0"/>
           </a:p>
           <a:p>
-            <a:pPr indent="0" marL="0">
+            <a:pPr marL="0" indent="0">
               <a:lnSpc>
                 <a:spcPct val="135000"/>
               </a:lnSpc>
@@ -4073,7 +3863,7 @@
             <a:endParaRPr lang="en-US" sz="1500" dirty="0"/>
           </a:p>
           <a:p>
-            <a:pPr indent="0" marL="0">
+            <a:pPr marL="0" indent="0">
               <a:lnSpc>
                 <a:spcPct val="135000"/>
               </a:lnSpc>
@@ -4082,7 +3872,7 @@
             <a:endParaRPr lang="en-US" sz="1500" dirty="0"/>
           </a:p>
           <a:p>
-            <a:pPr indent="0" marL="0">
+            <a:pPr marL="0" indent="0">
               <a:lnSpc>
                 <a:spcPct val="135000"/>
               </a:lnSpc>
@@ -4102,7 +3892,7 @@
             <a:endParaRPr lang="en-US" sz="1500" dirty="0"/>
           </a:p>
           <a:p>
-            <a:pPr indent="0" marL="0">
+            <a:pPr marL="0" indent="0">
               <a:lnSpc>
                 <a:spcPct val="135000"/>
               </a:lnSpc>
@@ -4139,6 +3929,7 @@
         <a:solidFill>
           <a:srgbClr val="FFFFFF"/>
         </a:solidFill>
+        <a:effectLst/>
       </p:bgPr>
     </p:bg>
     <p:spTree>
@@ -4176,11 +3967,11 @@
           <a:bodyPr wrap="square" rtlCol="0" anchor="ctr"/>
           <a:lstStyle/>
           <a:p>
-            <a:pPr indent="0" marL="0">
-              <a:buNone/>
-            </a:pPr>
-            <a:r>
-              <a:rPr lang="en-US" sz="1200" b="1" spc="400" kern="0" dirty="0">
+            <a:pPr marL="0" indent="0">
+              <a:buNone/>
+            </a:pPr>
+            <a:r>
+              <a:rPr lang="en-US" sz="1200" b="1" kern="0" spc="400" dirty="0">
                 <a:solidFill>
                   <a:srgbClr val="6B7280"/>
                 </a:solidFill>
@@ -4215,7 +4006,7 @@
           <a:bodyPr wrap="square" rtlCol="0" anchor="ctr"/>
           <a:lstStyle/>
           <a:p>
-            <a:pPr indent="0" marL="0">
+            <a:pPr marL="0" indent="0">
               <a:buNone/>
             </a:pPr>
             <a:r>
@@ -4255,6 +4046,13 @@
             <a:prstDash val="solid"/>
           </a:ln>
         </p:spPr>
+        <p:txBody>
+          <a:bodyPr/>
+          <a:lstStyle/>
+          <a:p>
+            <a:endParaRPr lang="ko-KR" altLang="en-US"/>
+          </a:p>
+        </p:txBody>
       </p:sp>
       <p:sp>
         <p:nvSpPr>
@@ -4282,6 +4080,13 @@
             <a:prstDash val="solid"/>
           </a:ln>
         </p:spPr>
+        <p:txBody>
+          <a:bodyPr/>
+          <a:lstStyle/>
+          <a:p>
+            <a:endParaRPr lang="ko-KR" altLang="en-US"/>
+          </a:p>
+        </p:txBody>
       </p:sp>
       <p:sp>
         <p:nvSpPr>
@@ -4304,7 +4109,7 @@
           <a:bodyPr wrap="square" rtlCol="0" anchor="ctr"/>
           <a:lstStyle/>
           <a:p>
-            <a:pPr algn="ctr" indent="0" marL="0">
+            <a:pPr marL="0" indent="0" algn="ctr">
               <a:buNone/>
             </a:pPr>
             <a:r>
@@ -4318,9 +4123,6 @@
               </a:rPr>
               <a:t>ALB-SG</a:t>
             </a:r>
-            <a:pPr algn="ctr" indent="0" marL="0">
-              <a:buNone/>
-            </a:pPr>
             <a:r>
               <a:rPr lang="en-US" sz="1600" dirty="0">
                 <a:solidFill>
@@ -4332,9 +4134,6 @@
               </a:rPr>
               <a:t> (80 ← 인터넷)   →   </a:t>
             </a:r>
-            <a:pPr algn="ctr" indent="0" marL="0">
-              <a:buNone/>
-            </a:pPr>
             <a:r>
               <a:rPr lang="en-US" sz="1600" b="1" dirty="0">
                 <a:solidFill>
@@ -4346,9 +4145,6 @@
               </a:rPr>
               <a:t>EC2-SG</a:t>
             </a:r>
-            <a:pPr algn="ctr" indent="0" marL="0">
-              <a:buNone/>
-            </a:pPr>
             <a:r>
               <a:rPr lang="en-US" sz="1600" dirty="0">
                 <a:solidFill>
@@ -4360,9 +4156,6 @@
               </a:rPr>
               <a:t> (3001 ← ALB만)   →   </a:t>
             </a:r>
-            <a:pPr algn="ctr" indent="0" marL="0">
-              <a:buNone/>
-            </a:pPr>
             <a:r>
               <a:rPr lang="en-US" sz="1600" b="1" dirty="0">
                 <a:solidFill>
@@ -4374,9 +4167,6 @@
               </a:rPr>
               <a:t>Redis-SG</a:t>
             </a:r>
-            <a:pPr algn="ctr" indent="0" marL="0">
-              <a:buNone/>
-            </a:pPr>
             <a:r>
               <a:rPr lang="en-US" sz="1600" dirty="0">
                 <a:solidFill>
@@ -4413,7 +4203,7 @@
           <a:bodyPr wrap="square" rtlCol="0" anchor="t"/>
           <a:lstStyle/>
           <a:p>
-            <a:pPr indent="0" marL="0">
+            <a:pPr marL="0" indent="0">
               <a:lnSpc>
                 <a:spcPct val="145000"/>
               </a:lnSpc>
@@ -4430,12 +4220,6 @@
               </a:rPr>
               <a:t>—  </a:t>
             </a:r>
-            <a:pPr indent="0" marL="0">
-              <a:lnSpc>
-                <a:spcPct val="145000"/>
-              </a:lnSpc>
-              <a:buNone/>
-            </a:pPr>
             <a:r>
               <a:rPr lang="en-US" sz="1600" b="1" dirty="0">
                 <a:solidFill>
@@ -4447,12 +4231,6 @@
               </a:rPr>
               <a:t>IP가 아닌 보안 그룹 참조로 인바운드 제한</a:t>
             </a:r>
-            <a:pPr indent="0" marL="0">
-              <a:lnSpc>
-                <a:spcPct val="145000"/>
-              </a:lnSpc>
-              <a:buNone/>
-            </a:pPr>
             <a:r>
               <a:rPr lang="en-US" sz="1350" dirty="0">
                 <a:solidFill>
@@ -4464,12 +4242,6 @@
               </a:rPr>
               <a:t>  — Redis는 인터넷에서 도달 자체가 불가</a:t>
             </a:r>
-            <a:pPr indent="0" marL="0">
-              <a:lnSpc>
-                <a:spcPct val="145000"/>
-              </a:lnSpc>
-              <a:buNone/>
-            </a:pPr>
             <a:r>
               <a:rPr lang="en-US" sz="1600" dirty="0">
                 <a:solidFill>
@@ -4482,12 +4254,6 @@
               <a:t>
 </a:t>
             </a:r>
-            <a:pPr indent="0" marL="0">
-              <a:lnSpc>
-                <a:spcPct val="145000"/>
-              </a:lnSpc>
-              <a:buNone/>
-            </a:pPr>
             <a:r>
               <a:rPr lang="en-US" sz="1600" dirty="0">
                 <a:solidFill>
@@ -4499,12 +4265,6 @@
               </a:rPr>
               <a:t>—  </a:t>
             </a:r>
-            <a:pPr indent="0" marL="0">
-              <a:lnSpc>
-                <a:spcPct val="145000"/>
-              </a:lnSpc>
-              <a:buNone/>
-            </a:pPr>
             <a:r>
               <a:rPr lang="en-US" sz="1600" b="1" dirty="0">
                 <a:solidFill>
@@ -4516,12 +4276,6 @@
               </a:rPr>
               <a:t>IAM 역할 3종 분리</a:t>
             </a:r>
-            <a:pPr indent="0" marL="0">
-              <a:lnSpc>
-                <a:spcPct val="145000"/>
-              </a:lnSpc>
-              <a:buNone/>
-            </a:pPr>
             <a:r>
               <a:rPr lang="en-US" sz="1350" dirty="0">
                 <a:solidFill>
@@ -4533,12 +4287,6 @@
               </a:rPr>
               <a:t>  — 컨테이너(히스토리 쓰기만) / 배포(ECR·로그만) / EC2(클러스터 등록만)</a:t>
             </a:r>
-            <a:pPr indent="0" marL="0">
-              <a:lnSpc>
-                <a:spcPct val="145000"/>
-              </a:lnSpc>
-              <a:buNone/>
-            </a:pPr>
             <a:r>
               <a:rPr lang="en-US" sz="1600" dirty="0">
                 <a:solidFill>
@@ -4551,12 +4299,6 @@
               <a:t>
 </a:t>
             </a:r>
-            <a:pPr indent="0" marL="0">
-              <a:lnSpc>
-                <a:spcPct val="145000"/>
-              </a:lnSpc>
-              <a:buNone/>
-            </a:pPr>
             <a:r>
               <a:rPr lang="en-US" sz="1600" dirty="0">
                 <a:solidFill>
@@ -4568,12 +4310,6 @@
               </a:rPr>
               <a:t>—  </a:t>
             </a:r>
-            <a:pPr indent="0" marL="0">
-              <a:lnSpc>
-                <a:spcPct val="145000"/>
-              </a:lnSpc>
-              <a:buNone/>
-            </a:pPr>
             <a:r>
               <a:rPr lang="en-US" sz="1600" b="1" dirty="0">
                 <a:solidFill>
@@ -4585,12 +4321,6 @@
               </a:rPr>
               <a:t>작업자 계정도 최소 권한</a:t>
             </a:r>
-            <a:pPr indent="0" marL="0">
-              <a:lnSpc>
-                <a:spcPct val="145000"/>
-              </a:lnSpc>
-              <a:buNone/>
-            </a:pPr>
             <a:r>
               <a:rPr lang="en-US" sz="1350" dirty="0">
                 <a:solidFill>
@@ -4602,12 +4332,6 @@
               </a:rPr>
               <a:t>  — 필요한 액션만 정책 파일로 관리하며 점진 확장</a:t>
             </a:r>
-            <a:pPr indent="0" marL="0">
-              <a:lnSpc>
-                <a:spcPct val="145000"/>
-              </a:lnSpc>
-              <a:buNone/>
-            </a:pPr>
             <a:r>
               <a:rPr lang="en-US" sz="1600" dirty="0">
                 <a:solidFill>
@@ -4640,6 +4364,7 @@
         <a:solidFill>
           <a:srgbClr val="FFFFFF"/>
         </a:solidFill>
+        <a:effectLst/>
       </p:bgPr>
     </p:bg>
     <p:spTree>
@@ -4677,11 +4402,11 @@
           <a:bodyPr wrap="square" rtlCol="0" anchor="ctr"/>
           <a:lstStyle/>
           <a:p>
-            <a:pPr indent="0" marL="0">
-              <a:buNone/>
-            </a:pPr>
-            <a:r>
-              <a:rPr lang="en-US" sz="1200" b="1" spc="400" kern="0" dirty="0">
+            <a:pPr marL="0" indent="0">
+              <a:buNone/>
+            </a:pPr>
+            <a:r>
+              <a:rPr lang="en-US" sz="1200" b="1" kern="0" spc="400" dirty="0">
                 <a:solidFill>
                   <a:srgbClr val="6B7280"/>
                 </a:solidFill>
@@ -4716,7 +4441,7 @@
           <a:bodyPr wrap="square" rtlCol="0" anchor="ctr"/>
           <a:lstStyle/>
           <a:p>
-            <a:pPr indent="0" marL="0">
+            <a:pPr marL="0" indent="0">
               <a:buNone/>
             </a:pPr>
             <a:r>
@@ -4756,6 +4481,13 @@
             <a:prstDash val="solid"/>
           </a:ln>
         </p:spPr>
+        <p:txBody>
+          <a:bodyPr/>
+          <a:lstStyle/>
+          <a:p>
+            <a:endParaRPr lang="ko-KR" altLang="en-US"/>
+          </a:p>
+        </p:txBody>
       </p:sp>
       <p:sp>
         <p:nvSpPr>
@@ -4778,7 +4510,7 @@
           <a:bodyPr wrap="square" rtlCol="0" anchor="t"/>
           <a:lstStyle/>
           <a:p>
-            <a:pPr indent="0" marL="0">
+            <a:pPr marL="0" indent="0">
               <a:lnSpc>
                 <a:spcPct val="145000"/>
               </a:lnSpc>
@@ -4795,12 +4527,6 @@
               </a:rPr>
               <a:t>—  </a:t>
             </a:r>
-            <a:pPr indent="0" marL="0">
-              <a:lnSpc>
-                <a:spcPct val="145000"/>
-              </a:lnSpc>
-              <a:buNone/>
-            </a:pPr>
             <a:r>
               <a:rPr lang="en-US" sz="1700" b="1" dirty="0">
                 <a:solidFill>
@@ -4812,12 +4538,6 @@
               </a:rPr>
               <a:t>무중단 롤링 배포</a:t>
             </a:r>
-            <a:pPr indent="0" marL="0">
-              <a:lnSpc>
-                <a:spcPct val="145000"/>
-              </a:lnSpc>
-              <a:buNone/>
-            </a:pPr>
             <a:r>
               <a:rPr lang="en-US" sz="1450" dirty="0">
                 <a:solidFill>
@@ -4829,12 +4549,6 @@
               </a:rPr>
               <a:t>  — 새 컨테이너가 헬스체크 통과 후에만 구버전 종료 (minimumHealthy 100%)</a:t>
             </a:r>
-            <a:pPr indent="0" marL="0">
-              <a:lnSpc>
-                <a:spcPct val="145000"/>
-              </a:lnSpc>
-              <a:buNone/>
-            </a:pPr>
             <a:r>
               <a:rPr lang="en-US" sz="1700" dirty="0">
                 <a:solidFill>
@@ -4847,12 +4561,6 @@
               <a:t>
 </a:t>
             </a:r>
-            <a:pPr indent="0" marL="0">
-              <a:lnSpc>
-                <a:spcPct val="145000"/>
-              </a:lnSpc>
-              <a:buNone/>
-            </a:pPr>
             <a:r>
               <a:rPr lang="en-US" sz="1700" dirty="0">
                 <a:solidFill>
@@ -4864,12 +4572,6 @@
               </a:rPr>
               <a:t>—  </a:t>
             </a:r>
-            <a:pPr indent="0" marL="0">
-              <a:lnSpc>
-                <a:spcPct val="145000"/>
-              </a:lnSpc>
-              <a:buNone/>
-            </a:pPr>
             <a:r>
               <a:rPr lang="en-US" sz="1700" b="1" dirty="0">
                 <a:solidFill>
@@ -4881,12 +4583,6 @@
               </a:rPr>
               <a:t>배포 절차 = 이미지 push + 명령 한 줄</a:t>
             </a:r>
-            <a:pPr indent="0" marL="0">
-              <a:lnSpc>
-                <a:spcPct val="145000"/>
-              </a:lnSpc>
-              <a:buNone/>
-            </a:pPr>
             <a:r>
               <a:rPr lang="en-US" sz="1450" dirty="0">
                 <a:solidFill>
@@ -4898,12 +4594,6 @@
               </a:rPr>
               <a:t>  — ECR → update-service</a:t>
             </a:r>
-            <a:pPr indent="0" marL="0">
-              <a:lnSpc>
-                <a:spcPct val="145000"/>
-              </a:lnSpc>
-              <a:buNone/>
-            </a:pPr>
             <a:r>
               <a:rPr lang="en-US" sz="1700" dirty="0">
                 <a:solidFill>
@@ -4916,12 +4606,6 @@
               <a:t>
 </a:t>
             </a:r>
-            <a:pPr indent="0" marL="0">
-              <a:lnSpc>
-                <a:spcPct val="145000"/>
-              </a:lnSpc>
-              <a:buNone/>
-            </a:pPr>
             <a:r>
               <a:rPr lang="en-US" sz="1700" dirty="0">
                 <a:solidFill>
@@ -4933,12 +4617,6 @@
               </a:rPr>
               <a:t>—  </a:t>
             </a:r>
-            <a:pPr indent="0" marL="0">
-              <a:lnSpc>
-                <a:spcPct val="145000"/>
-              </a:lnSpc>
-              <a:buNone/>
-            </a:pPr>
             <a:r>
               <a:rPr lang="en-US" sz="1700" b="1" dirty="0">
                 <a:solidFill>
@@ -4950,12 +4628,6 @@
               </a:rPr>
               <a:t>CloudWatch 로그·지표 수집 + 알람 2종</a:t>
             </a:r>
-            <a:pPr indent="0" marL="0">
-              <a:lnSpc>
-                <a:spcPct val="145000"/>
-              </a:lnSpc>
-              <a:buNone/>
-            </a:pPr>
             <a:r>
               <a:rPr lang="en-US" sz="1450" dirty="0">
                 <a:solidFill>
@@ -4967,12 +4639,6 @@
               </a:rPr>
               <a:t>  — ALB 5xx 급증, 컨테이너 unhealthy</a:t>
             </a:r>
-            <a:pPr indent="0" marL="0">
-              <a:lnSpc>
-                <a:spcPct val="145000"/>
-              </a:lnSpc>
-              <a:buNone/>
-            </a:pPr>
             <a:r>
               <a:rPr lang="en-US" sz="1700" dirty="0">
                 <a:solidFill>
@@ -4985,12 +4651,6 @@
               <a:t>
 </a:t>
             </a:r>
-            <a:pPr indent="0" marL="0">
-              <a:lnSpc>
-                <a:spcPct val="145000"/>
-              </a:lnSpc>
-              <a:buNone/>
-            </a:pPr>
             <a:r>
               <a:rPr lang="en-US" sz="1700" dirty="0">
                 <a:solidFill>
@@ -5002,12 +4662,6 @@
               </a:rPr>
               <a:t>—  </a:t>
             </a:r>
-            <a:pPr indent="0" marL="0">
-              <a:lnSpc>
-                <a:spcPct val="145000"/>
-              </a:lnSpc>
-              <a:buNone/>
-            </a:pPr>
             <a:r>
               <a:rPr lang="en-US" sz="1700" b="1" dirty="0">
                 <a:solidFill>
@@ -5019,12 +4673,6 @@
               </a:rPr>
               <a:t>실배포 환경 검증</a:t>
             </a:r>
-            <a:pPr indent="0" marL="0">
-              <a:lnSpc>
-                <a:spcPct val="145000"/>
-              </a:lnSpc>
-              <a:buNone/>
-            </a:pPr>
             <a:r>
               <a:rPr lang="en-US" sz="1450" dirty="0">
                 <a:solidFill>
@@ -5036,12 +4684,6 @@
               </a:rPr>
               <a:t>  — 브라우저 4개 자동 조작으로 프로덕션 풀 게임 완주 테스트</a:t>
             </a:r>
-            <a:pPr indent="0" marL="0">
-              <a:lnSpc>
-                <a:spcPct val="145000"/>
-              </a:lnSpc>
-              <a:buNone/>
-            </a:pPr>
             <a:r>
               <a:rPr lang="en-US" sz="1700" dirty="0">
                 <a:solidFill>
@@ -5074,6 +4716,7 @@
         <a:solidFill>
           <a:srgbClr val="FFFFFF"/>
         </a:solidFill>
+        <a:effectLst/>
       </p:bgPr>
     </p:bg>
     <p:spTree>
@@ -5111,11 +4754,11 @@
           <a:bodyPr wrap="square" rtlCol="0" anchor="ctr"/>
           <a:lstStyle/>
           <a:p>
-            <a:pPr indent="0" marL="0">
-              <a:buNone/>
-            </a:pPr>
-            <a:r>
-              <a:rPr lang="en-US" sz="1200" b="1" spc="400" kern="0" dirty="0">
+            <a:pPr marL="0" indent="0">
+              <a:buNone/>
+            </a:pPr>
+            <a:r>
+              <a:rPr lang="en-US" sz="1200" b="1" kern="0" spc="400" dirty="0">
                 <a:solidFill>
                   <a:srgbClr val="6B7280"/>
                 </a:solidFill>
@@ -5150,7 +4793,7 @@
           <a:bodyPr wrap="square" rtlCol="0" anchor="ctr"/>
           <a:lstStyle/>
           <a:p>
-            <a:pPr indent="0" marL="0">
+            <a:pPr marL="0" indent="0">
               <a:buNone/>
             </a:pPr>
             <a:r>
@@ -5190,17 +4833,24 @@
             <a:prstDash val="solid"/>
           </a:ln>
         </p:spPr>
+        <p:txBody>
+          <a:bodyPr/>
+          <a:lstStyle/>
+          <a:p>
+            <a:endParaRPr lang="ko-KR" altLang="en-US"/>
+          </a:p>
+        </p:txBody>
       </p:sp>
       <p:pic>
         <p:nvPicPr>
-          <p:cNvPr id="6" name="Image 0" descr="/home/dakori/github/cloud_holdem/docs/presentation/assets/lobby.png">    </p:cNvPr>
+          <p:cNvPr id="6" name="Image 0" descr="/home/dakori/github/cloud_holdem/docs/presentation/assets/lobby.png"/>
           <p:cNvPicPr>
             <a:picLocks noChangeAspect="1"/>
           </p:cNvPicPr>
           <p:nvPr/>
         </p:nvPicPr>
         <p:blipFill>
-          <a:blip r:embed="rId1"/>
+          <a:blip r:embed="rId3"/>
           <a:stretch>
             <a:fillRect/>
           </a:stretch>
@@ -5217,14 +4867,14 @@
       </p:pic>
       <p:pic>
         <p:nvPicPr>
-          <p:cNvPr id="7" name="Image 1" descr="/home/dakori/github/cloud_holdem/docs/presentation/assets/game-table.png">    </p:cNvPr>
+          <p:cNvPr id="7" name="Image 1" descr="/home/dakori/github/cloud_holdem/docs/presentation/assets/game-table.png"/>
           <p:cNvPicPr>
             <a:picLocks noChangeAspect="1"/>
           </p:cNvPicPr>
           <p:nvPr/>
         </p:nvPicPr>
         <p:blipFill>
-          <a:blip r:embed="rId2"/>
+          <a:blip r:embed="rId4"/>
           <a:stretch>
             <a:fillRect/>
           </a:stretch>
@@ -5255,6 +4905,7 @@
         <a:solidFill>
           <a:srgbClr val="FFFFFF"/>
         </a:solidFill>
+        <a:effectLst/>
       </p:bgPr>
     </p:bg>
     <p:spTree>
@@ -5292,11 +4943,11 @@
           <a:bodyPr wrap="square" rtlCol="0" anchor="ctr"/>
           <a:lstStyle/>
           <a:p>
-            <a:pPr indent="0" marL="0">
-              <a:buNone/>
-            </a:pPr>
-            <a:r>
-              <a:rPr lang="en-US" sz="1200" b="1" spc="400" kern="0" dirty="0">
+            <a:pPr marL="0" indent="0">
+              <a:buNone/>
+            </a:pPr>
+            <a:r>
+              <a:rPr lang="en-US" sz="1200" b="1" kern="0" spc="400" dirty="0">
                 <a:solidFill>
                   <a:srgbClr val="6B7280"/>
                 </a:solidFill>
@@ -5331,7 +4982,7 @@
           <a:bodyPr wrap="square" rtlCol="0" anchor="ctr"/>
           <a:lstStyle/>
           <a:p>
-            <a:pPr indent="0" marL="0">
+            <a:pPr marL="0" indent="0">
               <a:buNone/>
             </a:pPr>
             <a:r>
@@ -5371,6 +5022,13 @@
             <a:prstDash val="solid"/>
           </a:ln>
         </p:spPr>
+        <p:txBody>
+          <a:bodyPr/>
+          <a:lstStyle/>
+          <a:p>
+            <a:endParaRPr lang="ko-KR" altLang="en-US"/>
+          </a:p>
+        </p:txBody>
       </p:sp>
       <p:sp>
         <p:nvSpPr>
@@ -5391,6 +5049,13 @@
           </a:solidFill>
           <a:ln/>
         </p:spPr>
+        <p:txBody>
+          <a:bodyPr/>
+          <a:lstStyle/>
+          <a:p>
+            <a:endParaRPr lang="ko-KR" altLang="en-US"/>
+          </a:p>
+        </p:txBody>
       </p:sp>
       <p:sp>
         <p:nvSpPr>
@@ -5413,7 +5078,7 @@
           <a:bodyPr wrap="square" rtlCol="0" anchor="ctr"/>
           <a:lstStyle/>
           <a:p>
-            <a:pPr algn="ctr" indent="0" marL="0">
+            <a:pPr marL="0" indent="0" algn="ctr">
               <a:buNone/>
             </a:pPr>
             <a:r>
@@ -5449,7 +5114,7 @@
           <a:bodyPr wrap="square" rtlCol="0" anchor="ctr"/>
           <a:lstStyle/>
           <a:p>
-            <a:pPr indent="0" marL="0">
+            <a:pPr marL="0" indent="0">
               <a:buNone/>
             </a:pPr>
             <a:r>
@@ -5486,6 +5151,13 @@
           </a:solidFill>
           <a:ln/>
         </p:spPr>
+        <p:txBody>
+          <a:bodyPr/>
+          <a:lstStyle/>
+          <a:p>
+            <a:endParaRPr lang="ko-KR" altLang="en-US"/>
+          </a:p>
+        </p:txBody>
       </p:sp>
       <p:sp>
         <p:nvSpPr>
@@ -5508,7 +5180,7 @@
           <a:bodyPr wrap="square" rtlCol="0" anchor="ctr"/>
           <a:lstStyle/>
           <a:p>
-            <a:pPr algn="ctr" indent="0" marL="0">
+            <a:pPr marL="0" indent="0" algn="ctr">
               <a:buNone/>
             </a:pPr>
             <a:r>
@@ -5544,7 +5216,7 @@
           <a:bodyPr wrap="square" rtlCol="0" anchor="ctr"/>
           <a:lstStyle/>
           <a:p>
-            <a:pPr indent="0" marL="0">
+            <a:pPr marL="0" indent="0">
               <a:buNone/>
             </a:pPr>
             <a:r>
@@ -5581,6 +5253,13 @@
           </a:solidFill>
           <a:ln/>
         </p:spPr>
+        <p:txBody>
+          <a:bodyPr/>
+          <a:lstStyle/>
+          <a:p>
+            <a:endParaRPr lang="ko-KR" altLang="en-US"/>
+          </a:p>
+        </p:txBody>
       </p:sp>
       <p:sp>
         <p:nvSpPr>
@@ -5603,7 +5282,7 @@
           <a:bodyPr wrap="square" rtlCol="0" anchor="ctr"/>
           <a:lstStyle/>
           <a:p>
-            <a:pPr algn="ctr" indent="0" marL="0">
+            <a:pPr marL="0" indent="0" algn="ctr">
               <a:buNone/>
             </a:pPr>
             <a:r>
@@ -5639,7 +5318,7 @@
           <a:bodyPr wrap="square" rtlCol="0" anchor="ctr"/>
           <a:lstStyle/>
           <a:p>
-            <a:pPr indent="0" marL="0">
+            <a:pPr marL="0" indent="0">
               <a:buNone/>
             </a:pPr>
             <a:r>
@@ -5676,6 +5355,13 @@
           </a:solidFill>
           <a:ln/>
         </p:spPr>
+        <p:txBody>
+          <a:bodyPr/>
+          <a:lstStyle/>
+          <a:p>
+            <a:endParaRPr lang="ko-KR" altLang="en-US"/>
+          </a:p>
+        </p:txBody>
       </p:sp>
       <p:sp>
         <p:nvSpPr>
@@ -5698,7 +5384,7 @@
           <a:bodyPr wrap="square" rtlCol="0" anchor="ctr"/>
           <a:lstStyle/>
           <a:p>
-            <a:pPr algn="ctr" indent="0" marL="0">
+            <a:pPr marL="0" indent="0" algn="ctr">
               <a:buNone/>
             </a:pPr>
             <a:r>
@@ -5734,7 +5420,7 @@
           <a:bodyPr wrap="square" rtlCol="0" anchor="ctr"/>
           <a:lstStyle/>
           <a:p>
-            <a:pPr indent="0" marL="0">
+            <a:pPr marL="0" indent="0">
               <a:buNone/>
             </a:pPr>
             <a:r>
@@ -5771,6 +5457,13 @@
           </a:solidFill>
           <a:ln/>
         </p:spPr>
+        <p:txBody>
+          <a:bodyPr/>
+          <a:lstStyle/>
+          <a:p>
+            <a:endParaRPr lang="ko-KR" altLang="en-US"/>
+          </a:p>
+        </p:txBody>
       </p:sp>
       <p:sp>
         <p:nvSpPr>
@@ -5793,7 +5486,7 @@
           <a:bodyPr wrap="square" rtlCol="0" anchor="ctr"/>
           <a:lstStyle/>
           <a:p>
-            <a:pPr algn="ctr" indent="0" marL="0">
+            <a:pPr marL="0" indent="0" algn="ctr">
               <a:buNone/>
             </a:pPr>
             <a:r>
@@ -5829,7 +5522,7 @@
           <a:bodyPr wrap="square" rtlCol="0" anchor="ctr"/>
           <a:lstStyle/>
           <a:p>
-            <a:pPr indent="0" marL="0">
+            <a:pPr marL="0" indent="0">
               <a:buNone/>
             </a:pPr>
             <a:r>
@@ -5866,6 +5559,13 @@
           </a:solidFill>
           <a:ln/>
         </p:spPr>
+        <p:txBody>
+          <a:bodyPr/>
+          <a:lstStyle/>
+          <a:p>
+            <a:endParaRPr lang="ko-KR" altLang="en-US"/>
+          </a:p>
+        </p:txBody>
       </p:sp>
       <p:sp>
         <p:nvSpPr>
@@ -5888,7 +5588,7 @@
           <a:bodyPr wrap="square" rtlCol="0" anchor="ctr"/>
           <a:lstStyle/>
           <a:p>
-            <a:pPr algn="ctr" indent="0" marL="0">
+            <a:pPr marL="0" indent="0" algn="ctr">
               <a:buNone/>
             </a:pPr>
             <a:r>
@@ -5924,7 +5624,7 @@
           <a:bodyPr wrap="square" rtlCol="0" anchor="ctr"/>
           <a:lstStyle/>
           <a:p>
-            <a:pPr indent="0" marL="0">
+            <a:pPr marL="0" indent="0">
               <a:buNone/>
             </a:pPr>
             <a:r>
@@ -5968,6 +5668,13 @@
             <a:prstDash val="solid"/>
           </a:ln>
         </p:spPr>
+        <p:txBody>
+          <a:bodyPr/>
+          <a:lstStyle/>
+          <a:p>
+            <a:endParaRPr lang="ko-KR" altLang="en-US"/>
+          </a:p>
+        </p:txBody>
       </p:sp>
       <p:sp>
         <p:nvSpPr>
@@ -5990,11 +5697,11 @@
           <a:bodyPr wrap="square" rtlCol="0" anchor="ctr"/>
           <a:lstStyle/>
           <a:p>
-            <a:pPr indent="0" marL="0">
-              <a:buNone/>
-            </a:pPr>
-            <a:r>
-              <a:rPr lang="en-US" sz="1250" b="1" spc="200" kern="0" dirty="0">
+            <a:pPr marL="0" indent="0">
+              <a:buNone/>
+            </a:pPr>
+            <a:r>
+              <a:rPr lang="en-US" sz="1250" b="1" kern="0" spc="200" dirty="0">
                 <a:solidFill>
                   <a:srgbClr val="111827"/>
                 </a:solidFill>
@@ -6029,7 +5736,7 @@
           <a:bodyPr wrap="square" rtlCol="0" anchor="t"/>
           <a:lstStyle/>
           <a:p>
-            <a:pPr indent="0" marL="0">
+            <a:pPr marL="0" indent="0">
               <a:lnSpc>
                 <a:spcPct val="135000"/>
               </a:lnSpc>
@@ -6049,7 +5756,7 @@
             <a:endParaRPr lang="en-US" sz="1350" dirty="0"/>
           </a:p>
           <a:p>
-            <a:pPr indent="0" marL="0">
+            <a:pPr marL="0" indent="0">
               <a:lnSpc>
                 <a:spcPct val="135000"/>
               </a:lnSpc>
@@ -6069,7 +5776,7 @@
             <a:endParaRPr lang="en-US" sz="1350" dirty="0"/>
           </a:p>
           <a:p>
-            <a:pPr indent="0" marL="0">
+            <a:pPr marL="0" indent="0">
               <a:lnSpc>
                 <a:spcPct val="135000"/>
               </a:lnSpc>
@@ -6078,7 +5785,7 @@
             <a:endParaRPr lang="en-US" sz="1350" dirty="0"/>
           </a:p>
           <a:p>
-            <a:pPr indent="0" marL="0">
+            <a:pPr marL="0" indent="0">
               <a:lnSpc>
                 <a:spcPct val="135000"/>
               </a:lnSpc>
@@ -6098,7 +5805,7 @@
             <a:endParaRPr lang="en-US" sz="1350" dirty="0"/>
           </a:p>
           <a:p>
-            <a:pPr indent="0" marL="0">
+            <a:pPr marL="0" indent="0">
               <a:lnSpc>
                 <a:spcPct val="135000"/>
               </a:lnSpc>
@@ -6107,7 +5814,7 @@
             <a:endParaRPr lang="en-US" sz="1350" dirty="0"/>
           </a:p>
           <a:p>
-            <a:pPr indent="0" marL="0">
+            <a:pPr marL="0" indent="0">
               <a:lnSpc>
                 <a:spcPct val="135000"/>
               </a:lnSpc>
@@ -6127,7 +5834,7 @@
             <a:endParaRPr lang="en-US" sz="1350" dirty="0"/>
           </a:p>
           <a:p>
-            <a:pPr indent="0" marL="0">
+            <a:pPr marL="0" indent="0">
               <a:lnSpc>
                 <a:spcPct val="135000"/>
               </a:lnSpc>
@@ -6147,7 +5854,7 @@
             <a:endParaRPr lang="en-US" sz="1350" dirty="0"/>
           </a:p>
           <a:p>
-            <a:pPr indent="0" marL="0">
+            <a:pPr marL="0" indent="0">
               <a:lnSpc>
                 <a:spcPct val="135000"/>
               </a:lnSpc>
@@ -6167,7 +5874,7 @@
             <a:endParaRPr lang="en-US" sz="1350" dirty="0"/>
           </a:p>
           <a:p>
-            <a:pPr indent="0" marL="0">
+            <a:pPr marL="0" indent="0">
               <a:lnSpc>
                 <a:spcPct val="135000"/>
               </a:lnSpc>
@@ -6204,6 +5911,7 @@
         <a:solidFill>
           <a:srgbClr val="FFFFFF"/>
         </a:solidFill>
+        <a:effectLst/>
       </p:bgPr>
     </p:bg>
     <p:spTree>
@@ -6241,11 +5949,11 @@
           <a:bodyPr wrap="square" rtlCol="0" anchor="ctr"/>
           <a:lstStyle/>
           <a:p>
-            <a:pPr indent="0" marL="0">
-              <a:buNone/>
-            </a:pPr>
-            <a:r>
-              <a:rPr lang="en-US" sz="1200" b="1" spc="400" kern="0" dirty="0">
+            <a:pPr marL="0" indent="0">
+              <a:buNone/>
+            </a:pPr>
+            <a:r>
+              <a:rPr lang="en-US" sz="1200" b="1" kern="0" spc="400" dirty="0">
                 <a:solidFill>
                   <a:srgbClr val="6B7280"/>
                 </a:solidFill>
@@ -6280,7 +5988,7 @@
           <a:bodyPr wrap="square" rtlCol="0" anchor="ctr"/>
           <a:lstStyle/>
           <a:p>
-            <a:pPr indent="0" marL="0">
+            <a:pPr marL="0" indent="0">
               <a:buNone/>
             </a:pPr>
             <a:r>
@@ -6320,6 +6028,13 @@
             <a:prstDash val="solid"/>
           </a:ln>
         </p:spPr>
+        <p:txBody>
+          <a:bodyPr/>
+          <a:lstStyle/>
+          <a:p>
+            <a:endParaRPr lang="ko-KR" altLang="en-US"/>
+          </a:p>
+        </p:txBody>
       </p:sp>
       <p:graphicFrame>
         <p:nvGraphicFramePr>
@@ -6344,9 +6059,27 @@
             <a:tbl>
               <a:tblPr/>
               <a:tblGrid>
-                <a:gridCol w="1798320"/>
-                <a:gridCol w="1798320"/>
-                <a:gridCol w="1798320"/>
+                <a:gridCol w="1798320">
+                  <a:extLst>
+                    <a:ext uri="{9D8B030D-6E8A-4147-A177-3AD203B41FA5}">
+                      <a16:colId xmlns:a16="http://schemas.microsoft.com/office/drawing/2014/main" val="20000"/>
+                    </a:ext>
+                  </a:extLst>
+                </a:gridCol>
+                <a:gridCol w="1798320">
+                  <a:extLst>
+                    <a:ext uri="{9D8B030D-6E8A-4147-A177-3AD203B41FA5}">
+                      <a16:colId xmlns:a16="http://schemas.microsoft.com/office/drawing/2014/main" val="20001"/>
+                    </a:ext>
+                  </a:extLst>
+                </a:gridCol>
+                <a:gridCol w="1798320">
+                  <a:extLst>
+                    <a:ext uri="{9D8B030D-6E8A-4147-A177-3AD203B41FA5}">
+                      <a16:colId xmlns:a16="http://schemas.microsoft.com/office/drawing/2014/main" val="20002"/>
+                    </a:ext>
+                  </a:extLst>
+                </a:gridCol>
               </a:tblGrid>
               <a:tr h="475488">
                 <a:tc>
@@ -6354,7 +6087,7 @@
                     <a:bodyPr/>
                     <a:lstStyle/>
                     <a:p>
-                      <a:pPr indent="0" marL="0">
+                      <a:pPr marL="0" indent="0">
                         <a:buNone/>
                       </a:pPr>
                       <a:r>
@@ -6375,7 +6108,7 @@
                       </a:endParaRPr>
                     </a:p>
                   </a:txBody>
-                  <a:tcPr marL="91440" marR="91440" marT="45720" marB="45720">
+                  <a:tcPr>
                     <a:lnL w="9525" cap="flat" cmpd="sng" algn="ctr">
                       <a:solidFill>
                         <a:srgbClr val="D1D5DB"/>
@@ -6422,7 +6155,7 @@
                     <a:bodyPr/>
                     <a:lstStyle/>
                     <a:p>
-                      <a:pPr indent="0" marL="0">
+                      <a:pPr marL="0" indent="0">
                         <a:buNone/>
                       </a:pPr>
                       <a:r>
@@ -6443,7 +6176,7 @@
                       </a:endParaRPr>
                     </a:p>
                   </a:txBody>
-                  <a:tcPr marL="91440" marR="91440" marT="45720" marB="45720">
+                  <a:tcPr>
                     <a:lnL w="9525" cap="flat" cmpd="sng" algn="ctr">
                       <a:solidFill>
                         <a:srgbClr val="D1D5DB"/>
@@ -6490,7 +6223,7 @@
                     <a:bodyPr/>
                     <a:lstStyle/>
                     <a:p>
-                      <a:pPr indent="0" marL="0">
+                      <a:pPr marL="0" indent="0">
                         <a:buNone/>
                       </a:pPr>
                       <a:r>
@@ -6511,7 +6244,7 @@
                       </a:endParaRPr>
                     </a:p>
                   </a:txBody>
-                  <a:tcPr marL="91440" marR="91440" marT="45720" marB="45720">
+                  <a:tcPr>
                     <a:lnL w="9525" cap="flat" cmpd="sng" algn="ctr">
                       <a:solidFill>
                         <a:srgbClr val="D1D5DB"/>
@@ -6553,6 +6286,11 @@
                     </a:solidFill>
                   </a:tcPr>
                 </a:tc>
+                <a:extLst>
+                  <a:ext uri="{0D108BD9-81ED-4DB2-BD59-A6C34878D82A}">
+                    <a16:rowId xmlns:a16="http://schemas.microsoft.com/office/drawing/2014/main" val="10000"/>
+                  </a:ext>
+                </a:extLst>
               </a:tr>
               <a:tr h="475488">
                 <a:tc>
@@ -6560,7 +6298,7 @@
                     <a:bodyPr/>
                     <a:lstStyle/>
                     <a:p>
-                      <a:pPr indent="0" marL="0">
+                      <a:pPr marL="0" indent="0">
                         <a:buNone/>
                       </a:pPr>
                       <a:r>
@@ -6581,7 +6319,7 @@
                       </a:endParaRPr>
                     </a:p>
                   </a:txBody>
-                  <a:tcPr marL="91440" marR="91440" marT="45720" marB="45720">
+                  <a:tcPr>
                     <a:lnL w="9525" cap="flat" cmpd="sng" algn="ctr">
                       <a:solidFill>
                         <a:srgbClr val="D1D5DB"/>
@@ -6625,7 +6363,7 @@
                     <a:bodyPr/>
                     <a:lstStyle/>
                     <a:p>
-                      <a:pPr indent="0" marL="0">
+                      <a:pPr marL="0" indent="0">
                         <a:buNone/>
                       </a:pPr>
                       <a:r>
@@ -6646,7 +6384,7 @@
                       </a:endParaRPr>
                     </a:p>
                   </a:txBody>
-                  <a:tcPr marL="91440" marR="91440" marT="45720" marB="45720">
+                  <a:tcPr>
                     <a:lnL w="9525" cap="flat" cmpd="sng" algn="ctr">
                       <a:solidFill>
                         <a:srgbClr val="D1D5DB"/>
@@ -6690,7 +6428,7 @@
                     <a:bodyPr/>
                     <a:lstStyle/>
                     <a:p>
-                      <a:pPr indent="0" marL="0">
+                      <a:pPr marL="0" indent="0">
                         <a:buNone/>
                       </a:pPr>
                       <a:r>
@@ -6711,7 +6449,7 @@
                       </a:endParaRPr>
                     </a:p>
                   </a:txBody>
-                  <a:tcPr marL="91440" marR="91440" marT="45720" marB="45720">
+                  <a:tcPr>
                     <a:lnL w="9525" cap="flat" cmpd="sng" algn="ctr">
                       <a:solidFill>
                         <a:srgbClr val="D1D5DB"/>
@@ -6750,6 +6488,11 @@
                     </a:lnB>
                   </a:tcPr>
                 </a:tc>
+                <a:extLst>
+                  <a:ext uri="{0D108BD9-81ED-4DB2-BD59-A6C34878D82A}">
+                    <a16:rowId xmlns:a16="http://schemas.microsoft.com/office/drawing/2014/main" val="10001"/>
+                  </a:ext>
+                </a:extLst>
               </a:tr>
               <a:tr h="475488">
                 <a:tc>
@@ -6757,7 +6500,7 @@
                     <a:bodyPr/>
                     <a:lstStyle/>
                     <a:p>
-                      <a:pPr indent="0" marL="0">
+                      <a:pPr marL="0" indent="0">
                         <a:buNone/>
                       </a:pPr>
                       <a:r>
@@ -6778,7 +6521,7 @@
                       </a:endParaRPr>
                     </a:p>
                   </a:txBody>
-                  <a:tcPr marL="91440" marR="91440" marT="45720" marB="45720">
+                  <a:tcPr>
                     <a:lnL w="9525" cap="flat" cmpd="sng" algn="ctr">
                       <a:solidFill>
                         <a:srgbClr val="D1D5DB"/>
@@ -6822,7 +6565,7 @@
                     <a:bodyPr/>
                     <a:lstStyle/>
                     <a:p>
-                      <a:pPr indent="0" marL="0">
+                      <a:pPr marL="0" indent="0">
                         <a:buNone/>
                       </a:pPr>
                       <a:r>
@@ -6843,7 +6586,7 @@
                       </a:endParaRPr>
                     </a:p>
                   </a:txBody>
-                  <a:tcPr marL="91440" marR="91440" marT="45720" marB="45720">
+                  <a:tcPr>
                     <a:lnL w="9525" cap="flat" cmpd="sng" algn="ctr">
                       <a:solidFill>
                         <a:srgbClr val="D1D5DB"/>
@@ -6887,7 +6630,7 @@
                     <a:bodyPr/>
                     <a:lstStyle/>
                     <a:p>
-                      <a:pPr indent="0" marL="0">
+                      <a:pPr marL="0" indent="0">
                         <a:buNone/>
                       </a:pPr>
                       <a:r>
@@ -6908,7 +6651,7 @@
                       </a:endParaRPr>
                     </a:p>
                   </a:txBody>
-                  <a:tcPr marL="91440" marR="91440" marT="45720" marB="45720">
+                  <a:tcPr>
                     <a:lnL w="9525" cap="flat" cmpd="sng" algn="ctr">
                       <a:solidFill>
                         <a:srgbClr val="D1D5DB"/>
@@ -6947,6 +6690,11 @@
                     </a:lnB>
                   </a:tcPr>
                 </a:tc>
+                <a:extLst>
+                  <a:ext uri="{0D108BD9-81ED-4DB2-BD59-A6C34878D82A}">
+                    <a16:rowId xmlns:a16="http://schemas.microsoft.com/office/drawing/2014/main" val="10002"/>
+                  </a:ext>
+                </a:extLst>
               </a:tr>
               <a:tr h="475488">
                 <a:tc>
@@ -6954,7 +6702,7 @@
                     <a:bodyPr/>
                     <a:lstStyle/>
                     <a:p>
-                      <a:pPr indent="0" marL="0">
+                      <a:pPr marL="0" indent="0">
                         <a:buNone/>
                       </a:pPr>
                       <a:r>
@@ -6975,7 +6723,7 @@
                       </a:endParaRPr>
                     </a:p>
                   </a:txBody>
-                  <a:tcPr marL="91440" marR="91440" marT="45720" marB="45720">
+                  <a:tcPr>
                     <a:lnL w="9525" cap="flat" cmpd="sng" algn="ctr">
                       <a:solidFill>
                         <a:srgbClr val="D1D5DB"/>
@@ -7019,7 +6767,7 @@
                     <a:bodyPr/>
                     <a:lstStyle/>
                     <a:p>
-                      <a:pPr indent="0" marL="0">
+                      <a:pPr marL="0" indent="0">
                         <a:buNone/>
                       </a:pPr>
                       <a:r>
@@ -7040,7 +6788,7 @@
                       </a:endParaRPr>
                     </a:p>
                   </a:txBody>
-                  <a:tcPr marL="91440" marR="91440" marT="45720" marB="45720">
+                  <a:tcPr>
                     <a:lnL w="9525" cap="flat" cmpd="sng" algn="ctr">
                       <a:solidFill>
                         <a:srgbClr val="D1D5DB"/>
@@ -7084,7 +6832,7 @@
                     <a:bodyPr/>
                     <a:lstStyle/>
                     <a:p>
-                      <a:pPr indent="0" marL="0">
+                      <a:pPr marL="0" indent="0">
                         <a:buNone/>
                       </a:pPr>
                       <a:r>
@@ -7105,7 +6853,7 @@
                       </a:endParaRPr>
                     </a:p>
                   </a:txBody>
-                  <a:tcPr marL="91440" marR="91440" marT="45720" marB="45720">
+                  <a:tcPr>
                     <a:lnL w="9525" cap="flat" cmpd="sng" algn="ctr">
                       <a:solidFill>
                         <a:srgbClr val="D1D5DB"/>
@@ -7144,6 +6892,11 @@
                     </a:lnB>
                   </a:tcPr>
                 </a:tc>
+                <a:extLst>
+                  <a:ext uri="{0D108BD9-81ED-4DB2-BD59-A6C34878D82A}">
+                    <a16:rowId xmlns:a16="http://schemas.microsoft.com/office/drawing/2014/main" val="10003"/>
+                  </a:ext>
+                </a:extLst>
               </a:tr>
               <a:tr h="475488">
                 <a:tc>
@@ -7151,7 +6904,7 @@
                     <a:bodyPr/>
                     <a:lstStyle/>
                     <a:p>
-                      <a:pPr indent="0" marL="0">
+                      <a:pPr marL="0" indent="0">
                         <a:buNone/>
                       </a:pPr>
                       <a:r>
@@ -7172,7 +6925,7 @@
                       </a:endParaRPr>
                     </a:p>
                   </a:txBody>
-                  <a:tcPr marL="91440" marR="91440" marT="45720" marB="45720">
+                  <a:tcPr>
                     <a:lnL w="9525" cap="flat" cmpd="sng" algn="ctr">
                       <a:solidFill>
                         <a:srgbClr val="D1D5DB"/>
@@ -7216,7 +6969,7 @@
                     <a:bodyPr/>
                     <a:lstStyle/>
                     <a:p>
-                      <a:pPr indent="0" marL="0">
+                      <a:pPr marL="0" indent="0">
                         <a:buNone/>
                       </a:pPr>
                       <a:r>
@@ -7237,7 +6990,7 @@
                       </a:endParaRPr>
                     </a:p>
                   </a:txBody>
-                  <a:tcPr marL="91440" marR="91440" marT="45720" marB="45720">
+                  <a:tcPr>
                     <a:lnL w="9525" cap="flat" cmpd="sng" algn="ctr">
                       <a:solidFill>
                         <a:srgbClr val="D1D5DB"/>
@@ -7281,7 +7034,7 @@
                     <a:bodyPr/>
                     <a:lstStyle/>
                     <a:p>
-                      <a:pPr indent="0" marL="0">
+                      <a:pPr marL="0" indent="0">
                         <a:buNone/>
                       </a:pPr>
                       <a:r>
@@ -7302,7 +7055,7 @@
                       </a:endParaRPr>
                     </a:p>
                   </a:txBody>
-                  <a:tcPr marL="91440" marR="91440" marT="45720" marB="45720">
+                  <a:tcPr>
                     <a:lnL w="9525" cap="flat" cmpd="sng" algn="ctr">
                       <a:solidFill>
                         <a:srgbClr val="D1D5DB"/>
@@ -7341,6 +7094,11 @@
                     </a:lnB>
                   </a:tcPr>
                 </a:tc>
+                <a:extLst>
+                  <a:ext uri="{0D108BD9-81ED-4DB2-BD59-A6C34878D82A}">
+                    <a16:rowId xmlns:a16="http://schemas.microsoft.com/office/drawing/2014/main" val="10004"/>
+                  </a:ext>
+                </a:extLst>
               </a:tr>
               <a:tr h="475488">
                 <a:tc>
@@ -7348,7 +7106,7 @@
                     <a:bodyPr/>
                     <a:lstStyle/>
                     <a:p>
-                      <a:pPr indent="0" marL="0">
+                      <a:pPr marL="0" indent="0">
                         <a:buNone/>
                       </a:pPr>
                       <a:r>
@@ -7369,7 +7127,7 @@
                       </a:endParaRPr>
                     </a:p>
                   </a:txBody>
-                  <a:tcPr marL="91440" marR="91440" marT="45720" marB="45720">
+                  <a:tcPr>
                     <a:lnL w="9525" cap="flat" cmpd="sng" algn="ctr">
                       <a:solidFill>
                         <a:srgbClr val="D1D5DB"/>
@@ -7413,7 +7171,7 @@
                     <a:bodyPr/>
                     <a:lstStyle/>
                     <a:p>
-                      <a:pPr indent="0" marL="0">
+                      <a:pPr marL="0" indent="0">
                         <a:buNone/>
                       </a:pPr>
                       <a:endParaRPr lang="en-US" sz="1300" dirty="0">
@@ -7423,7 +7181,7 @@
                       </a:endParaRPr>
                     </a:p>
                   </a:txBody>
-                  <a:tcPr marL="91440" marR="91440" marT="45720" marB="45720">
+                  <a:tcPr>
                     <a:lnL w="9525" cap="flat" cmpd="sng" algn="ctr">
                       <a:solidFill>
                         <a:srgbClr val="D1D5DB"/>
@@ -7467,7 +7225,7 @@
                     <a:bodyPr/>
                     <a:lstStyle/>
                     <a:p>
-                      <a:pPr indent="0" marL="0">
+                      <a:pPr marL="0" indent="0">
                         <a:buNone/>
                       </a:pPr>
                       <a:r>
@@ -7488,7 +7246,7 @@
                       </a:endParaRPr>
                     </a:p>
                   </a:txBody>
-                  <a:tcPr marL="91440" marR="91440" marT="45720" marB="45720">
+                  <a:tcPr>
                     <a:lnL w="9525" cap="flat" cmpd="sng" algn="ctr">
                       <a:solidFill>
                         <a:srgbClr val="D1D5DB"/>
@@ -7527,6 +7285,11 @@
                     </a:lnB>
                   </a:tcPr>
                 </a:tc>
+                <a:extLst>
+                  <a:ext uri="{0D108BD9-81ED-4DB2-BD59-A6C34878D82A}">
+                    <a16:rowId xmlns:a16="http://schemas.microsoft.com/office/drawing/2014/main" val="10005"/>
+                  </a:ext>
+                </a:extLst>
               </a:tr>
             </a:tbl>
           </a:graphicData>
@@ -7553,7 +7316,7 @@
           <a:bodyPr wrap="square" rtlCol="0" anchor="t"/>
           <a:lstStyle/>
           <a:p>
-            <a:pPr indent="0" marL="0">
+            <a:pPr marL="0" indent="0">
               <a:lnSpc>
                 <a:spcPct val="145000"/>
               </a:lnSpc>
@@ -7570,12 +7333,6 @@
               </a:rPr>
               <a:t>—  </a:t>
             </a:r>
-            <a:pPr indent="0" marL="0">
-              <a:lnSpc>
-                <a:spcPct val="145000"/>
-              </a:lnSpc>
-              <a:buNone/>
-            </a:pPr>
             <a:r>
               <a:rPr lang="en-US" sz="1450" b="1" dirty="0">
                 <a:solidFill>
@@ -7587,12 +7344,6 @@
               </a:rPr>
               <a:t>상태를 밖으로 빼면(Stateless) 확장·복구가 쉬워진다</a:t>
             </a:r>
-            <a:pPr indent="0" marL="0">
-              <a:lnSpc>
-                <a:spcPct val="145000"/>
-              </a:lnSpc>
-              <a:buNone/>
-            </a:pPr>
             <a:r>
               <a:rPr lang="en-US" sz="1450" dirty="0">
                 <a:solidFill>
@@ -7605,12 +7356,6 @@
               <a:t>
 </a:t>
             </a:r>
-            <a:pPr indent="0" marL="0">
-              <a:lnSpc>
-                <a:spcPct val="145000"/>
-              </a:lnSpc>
-              <a:buNone/>
-            </a:pPr>
             <a:r>
               <a:rPr lang="en-US" sz="1450" dirty="0">
                 <a:solidFill>
@@ -7622,12 +7367,6 @@
               </a:rPr>
               <a:t>—  </a:t>
             </a:r>
-            <a:pPr indent="0" marL="0">
-              <a:lnSpc>
-                <a:spcPct val="145000"/>
-              </a:lnSpc>
-              <a:buNone/>
-            </a:pPr>
             <a:r>
               <a:rPr lang="en-US" sz="1450" b="1" dirty="0">
                 <a:solidFill>
@@ -7639,12 +7378,6 @@
               </a:rPr>
               <a:t>관리형 서비스 조합 &gt; 직접 구축</a:t>
             </a:r>
-            <a:pPr indent="0" marL="0">
-              <a:lnSpc>
-                <a:spcPct val="145000"/>
-              </a:lnSpc>
-              <a:buNone/>
-            </a:pPr>
             <a:r>
               <a:rPr lang="en-US" sz="1200" dirty="0">
                 <a:solidFill>
@@ -7656,12 +7389,6 @@
               </a:rPr>
               <a:t>  — 운영 부담이 다르다</a:t>
             </a:r>
-            <a:pPr indent="0" marL="0">
-              <a:lnSpc>
-                <a:spcPct val="145000"/>
-              </a:lnSpc>
-              <a:buNone/>
-            </a:pPr>
             <a:r>
               <a:rPr lang="en-US" sz="1450" dirty="0">
                 <a:solidFill>
@@ -7674,12 +7401,6 @@
               <a:t>
 </a:t>
             </a:r>
-            <a:pPr indent="0" marL="0">
-              <a:lnSpc>
-                <a:spcPct val="145000"/>
-              </a:lnSpc>
-              <a:buNone/>
-            </a:pPr>
             <a:r>
               <a:rPr lang="en-US" sz="1450" dirty="0">
                 <a:solidFill>
@@ -7691,12 +7412,6 @@
               </a:rPr>
               <a:t>—  </a:t>
             </a:r>
-            <a:pPr indent="0" marL="0">
-              <a:lnSpc>
-                <a:spcPct val="145000"/>
-              </a:lnSpc>
-              <a:buNone/>
-            </a:pPr>
             <a:r>
               <a:rPr lang="en-US" sz="1450" b="1" dirty="0">
                 <a:solidFill>
@@ -7708,12 +7423,6 @@
               </a:rPr>
               <a:t>고가용성은 "여러 대"가 아니라 "여러 AZ"</a:t>
             </a:r>
-            <a:pPr indent="0" marL="0">
-              <a:lnSpc>
-                <a:spcPct val="145000"/>
-              </a:lnSpc>
-              <a:buNone/>
-            </a:pPr>
             <a:r>
               <a:rPr lang="en-US" sz="1450" dirty="0">
                 <a:solidFill>
@@ -7726,12 +7435,6 @@
               <a:t>
 </a:t>
             </a:r>
-            <a:pPr indent="0" marL="0">
-              <a:lnSpc>
-                <a:spcPct val="145000"/>
-              </a:lnSpc>
-              <a:buNone/>
-            </a:pPr>
             <a:r>
               <a:rPr lang="en-US" sz="1450" dirty="0">
                 <a:solidFill>
@@ -7743,12 +7446,6 @@
               </a:rPr>
               <a:t>—  </a:t>
             </a:r>
-            <a:pPr indent="0" marL="0">
-              <a:lnSpc>
-                <a:spcPct val="145000"/>
-              </a:lnSpc>
-              <a:buNone/>
-            </a:pPr>
             <a:r>
               <a:rPr lang="en-US" sz="1450" b="1" dirty="0">
                 <a:solidFill>
@@ -7760,12 +7457,6 @@
               </a:rPr>
               <a:t>안 쓸 때 끄기 — 클라우드 비용은 습관</a:t>
             </a:r>
-            <a:pPr indent="0" marL="0">
-              <a:lnSpc>
-                <a:spcPct val="145000"/>
-              </a:lnSpc>
-              <a:buNone/>
-            </a:pPr>
             <a:r>
               <a:rPr lang="en-US" sz="1450" dirty="0">
                 <a:solidFill>
@@ -7803,7 +7494,7 @@
           <a:bodyPr wrap="square" rtlCol="0" anchor="ctr"/>
           <a:lstStyle/>
           <a:p>
-            <a:pPr indent="0" marL="0">
+            <a:pPr marL="0" indent="0">
               <a:buNone/>
             </a:pPr>
             <a:r>
@@ -7837,6 +7528,7 @@
         <a:solidFill>
           <a:srgbClr val="FFFFFF"/>
         </a:solidFill>
+        <a:effectLst/>
       </p:bgPr>
     </p:bg>
     <p:spTree>
@@ -7874,11 +7566,11 @@
           <a:bodyPr wrap="square" rtlCol="0" anchor="ctr"/>
           <a:lstStyle/>
           <a:p>
-            <a:pPr indent="0" marL="0">
-              <a:buNone/>
-            </a:pPr>
-            <a:r>
-              <a:rPr lang="en-US" sz="1200" b="1" spc="400" kern="0" dirty="0">
+            <a:pPr marL="0" indent="0">
+              <a:buNone/>
+            </a:pPr>
+            <a:r>
+              <a:rPr lang="en-US" sz="1200" b="1" kern="0" spc="400" dirty="0">
                 <a:solidFill>
                   <a:srgbClr val="6B7280"/>
                 </a:solidFill>
@@ -7913,7 +7605,7 @@
           <a:bodyPr wrap="square" rtlCol="0" anchor="ctr"/>
           <a:lstStyle/>
           <a:p>
-            <a:pPr indent="0" marL="0">
+            <a:pPr marL="0" indent="0">
               <a:buNone/>
             </a:pPr>
             <a:r>
@@ -7953,6 +7645,13 @@
             <a:prstDash val="solid"/>
           </a:ln>
         </p:spPr>
+        <p:txBody>
+          <a:bodyPr/>
+          <a:lstStyle/>
+          <a:p>
+            <a:endParaRPr lang="ko-KR" altLang="en-US"/>
+          </a:p>
+        </p:txBody>
       </p:sp>
       <p:sp>
         <p:nvSpPr>
@@ -7975,7 +7674,7 @@
           <a:bodyPr wrap="square" rtlCol="0" anchor="t"/>
           <a:lstStyle/>
           <a:p>
-            <a:pPr indent="0" marL="0">
+            <a:pPr marL="0" indent="0">
               <a:lnSpc>
                 <a:spcPct val="145000"/>
               </a:lnSpc>
@@ -7992,12 +7691,6 @@
               </a:rPr>
               <a:t>—  </a:t>
             </a:r>
-            <a:pPr indent="0" marL="0">
-              <a:lnSpc>
-                <a:spcPct val="145000"/>
-              </a:lnSpc>
-              <a:buNone/>
-            </a:pPr>
             <a:r>
               <a:rPr lang="en-US" sz="1600" b="1" dirty="0">
                 <a:solidFill>
@@ -8009,12 +7702,6 @@
               </a:rPr>
               <a:t>4인 텍사스 홀덤 웹 게임</a:t>
             </a:r>
-            <a:pPr indent="0" marL="0">
-              <a:lnSpc>
-                <a:spcPct val="145000"/>
-              </a:lnSpc>
-              <a:buNone/>
-            </a:pPr>
             <a:r>
               <a:rPr lang="en-US" sz="1350" dirty="0">
                 <a:solidFill>
@@ -8026,12 +7713,6 @@
               </a:rPr>
               <a:t>  — 회원가입 없이 닉네임만으로 즉시 플레이</a:t>
             </a:r>
-            <a:pPr indent="0" marL="0">
-              <a:lnSpc>
-                <a:spcPct val="145000"/>
-              </a:lnSpc>
-              <a:buNone/>
-            </a:pPr>
             <a:r>
               <a:rPr lang="en-US" sz="1600" dirty="0">
                 <a:solidFill>
@@ -8044,12 +7725,6 @@
               <a:t>
 </a:t>
             </a:r>
-            <a:pPr indent="0" marL="0">
-              <a:lnSpc>
-                <a:spcPct val="145000"/>
-              </a:lnSpc>
-              <a:buNone/>
-            </a:pPr>
             <a:r>
               <a:rPr lang="en-US" sz="1600" dirty="0">
                 <a:solidFill>
@@ -8061,12 +7736,6 @@
               </a:rPr>
               <a:t>—  </a:t>
             </a:r>
-            <a:pPr indent="0" marL="0">
-              <a:lnSpc>
-                <a:spcPct val="145000"/>
-              </a:lnSpc>
-              <a:buNone/>
-            </a:pPr>
             <a:r>
               <a:rPr lang="en-US" sz="1600" b="1" dirty="0">
                 <a:solidFill>
@@ -8078,12 +7747,6 @@
               </a:rPr>
               <a:t>실시간 멀티플레이어</a:t>
             </a:r>
-            <a:pPr indent="0" marL="0">
-              <a:lnSpc>
-                <a:spcPct val="145000"/>
-              </a:lnSpc>
-              <a:buNone/>
-            </a:pPr>
             <a:r>
               <a:rPr lang="en-US" sz="1350" dirty="0">
                 <a:solidFill>
@@ -8095,12 +7758,6 @@
               </a:rPr>
               <a:t>  — WebSocket 양방향 통신, 20초 턴 타이머</a:t>
             </a:r>
-            <a:pPr indent="0" marL="0">
-              <a:lnSpc>
-                <a:spcPct val="145000"/>
-              </a:lnSpc>
-              <a:buNone/>
-            </a:pPr>
             <a:r>
               <a:rPr lang="en-US" sz="1600" dirty="0">
                 <a:solidFill>
@@ -8113,12 +7770,6 @@
               <a:t>
 </a:t>
             </a:r>
-            <a:pPr indent="0" marL="0">
-              <a:lnSpc>
-                <a:spcPct val="145000"/>
-              </a:lnSpc>
-              <a:buNone/>
-            </a:pPr>
             <a:r>
               <a:rPr lang="en-US" sz="1600" dirty="0">
                 <a:solidFill>
@@ -8130,12 +7781,6 @@
               </a:rPr>
               <a:t>—  </a:t>
             </a:r>
-            <a:pPr indent="0" marL="0">
-              <a:lnSpc>
-                <a:spcPct val="145000"/>
-              </a:lnSpc>
-              <a:buNone/>
-            </a:pPr>
             <a:r>
               <a:rPr lang="en-US" sz="1600" b="1" dirty="0">
                 <a:solidFill>
@@ -8147,12 +7792,6 @@
               </a:rPr>
               <a:t>AWS에 실제 배포·운영 중</a:t>
             </a:r>
-            <a:pPr indent="0" marL="0">
-              <a:lnSpc>
-                <a:spcPct val="145000"/>
-              </a:lnSpc>
-              <a:buNone/>
-            </a:pPr>
             <a:r>
               <a:rPr lang="en-US" sz="1350" dirty="0">
                 <a:solidFill>
@@ -8164,12 +7803,6 @@
               </a:rPr>
               <a:t>  — 아래 주소에서 바로 접속 가능</a:t>
             </a:r>
-            <a:pPr indent="0" marL="0">
-              <a:lnSpc>
-                <a:spcPct val="145000"/>
-              </a:lnSpc>
-              <a:buNone/>
-            </a:pPr>
             <a:r>
               <a:rPr lang="en-US" sz="1600" dirty="0">
                 <a:solidFill>
@@ -8212,6 +7845,13 @@
             <a:prstDash val="solid"/>
           </a:ln>
         </p:spPr>
+        <p:txBody>
+          <a:bodyPr/>
+          <a:lstStyle/>
+          <a:p>
+            <a:endParaRPr lang="ko-KR" altLang="en-US"/>
+          </a:p>
+        </p:txBody>
       </p:sp>
       <p:sp>
         <p:nvSpPr>
@@ -8234,11 +7874,11 @@
           <a:bodyPr wrap="square" rtlCol="0" anchor="ctr"/>
           <a:lstStyle/>
           <a:p>
-            <a:pPr indent="0" marL="0">
-              <a:buNone/>
-            </a:pPr>
-            <a:r>
-              <a:rPr lang="en-US" sz="1250" b="1" spc="200" kern="0" dirty="0">
+            <a:pPr marL="0" indent="0">
+              <a:buNone/>
+            </a:pPr>
+            <a:r>
+              <a:rPr lang="en-US" sz="1250" b="1" kern="0" spc="200" dirty="0">
                 <a:solidFill>
                   <a:srgbClr val="111827"/>
                 </a:solidFill>
@@ -8273,7 +7913,7 @@
           <a:bodyPr wrap="square" rtlCol="0" anchor="t"/>
           <a:lstStyle/>
           <a:p>
-            <a:pPr indent="0" marL="0">
+            <a:pPr marL="0" indent="0">
               <a:lnSpc>
                 <a:spcPct val="135000"/>
               </a:lnSpc>
@@ -8293,7 +7933,7 @@
             <a:endParaRPr lang="en-US" sz="1300" dirty="0"/>
           </a:p>
           <a:p>
-            <a:pPr indent="0" marL="0">
+            <a:pPr marL="0" indent="0">
               <a:lnSpc>
                 <a:spcPct val="135000"/>
               </a:lnSpc>
@@ -8316,14 +7956,14 @@
       </p:sp>
       <p:pic>
         <p:nvPicPr>
-          <p:cNvPr id="10" name="Image 0" descr="/home/dakori/github/cloud_holdem/docs/presentation/assets/lobby.png">    </p:cNvPr>
+          <p:cNvPr id="10" name="Image 0" descr="/home/dakori/github/cloud_holdem/docs/presentation/assets/lobby.png"/>
           <p:cNvPicPr>
             <a:picLocks noChangeAspect="1"/>
           </p:cNvPicPr>
           <p:nvPr/>
         </p:nvPicPr>
         <p:blipFill>
-          <a:blip r:embed="rId1"/>
+          <a:blip r:embed="rId3"/>
           <a:stretch>
             <a:fillRect/>
           </a:stretch>
@@ -8354,6 +7994,7 @@
         <a:solidFill>
           <a:srgbClr val="FFFFFF"/>
         </a:solidFill>
+        <a:effectLst/>
       </p:bgPr>
     </p:bg>
     <p:spTree>
@@ -8391,11 +8032,11 @@
           <a:bodyPr wrap="square" rtlCol="0" anchor="ctr"/>
           <a:lstStyle/>
           <a:p>
-            <a:pPr indent="0" marL="0">
-              <a:buNone/>
-            </a:pPr>
-            <a:r>
-              <a:rPr lang="en-US" sz="1200" b="1" spc="400" kern="0" dirty="0">
+            <a:pPr marL="0" indent="0">
+              <a:buNone/>
+            </a:pPr>
+            <a:r>
+              <a:rPr lang="en-US" sz="1200" b="1" kern="0" spc="400" dirty="0">
                 <a:solidFill>
                   <a:srgbClr val="6B7280"/>
                 </a:solidFill>
@@ -8430,7 +8071,7 @@
           <a:bodyPr wrap="square" rtlCol="0" anchor="ctr"/>
           <a:lstStyle/>
           <a:p>
-            <a:pPr indent="0" marL="0">
+            <a:pPr marL="0" indent="0">
               <a:buNone/>
             </a:pPr>
             <a:r>
@@ -8470,6 +8111,13 @@
             <a:prstDash val="solid"/>
           </a:ln>
         </p:spPr>
+        <p:txBody>
+          <a:bodyPr/>
+          <a:lstStyle/>
+          <a:p>
+            <a:endParaRPr lang="ko-KR" altLang="en-US"/>
+          </a:p>
+        </p:txBody>
       </p:sp>
       <p:sp>
         <p:nvSpPr>
@@ -8492,7 +8140,7 @@
           <a:bodyPr wrap="square" rtlCol="0" anchor="t"/>
           <a:lstStyle/>
           <a:p>
-            <a:pPr indent="0" marL="0">
+            <a:pPr marL="0" indent="0">
               <a:lnSpc>
                 <a:spcPct val="145000"/>
               </a:lnSpc>
@@ -8509,12 +8157,6 @@
               </a:rPr>
               <a:t>—  </a:t>
             </a:r>
-            <a:pPr indent="0" marL="0">
-              <a:lnSpc>
-                <a:spcPct val="145000"/>
-              </a:lnSpc>
-              <a:buNone/>
-            </a:pPr>
             <a:r>
               <a:rPr lang="en-US" sz="1800" b="1" dirty="0">
                 <a:solidFill>
@@ -8526,12 +8168,6 @@
               </a:rPr>
               <a:t>연결 유지</a:t>
             </a:r>
-            <a:pPr indent="0" marL="0">
-              <a:lnSpc>
-                <a:spcPct val="145000"/>
-              </a:lnSpc>
-              <a:buNone/>
-            </a:pPr>
             <a:r>
               <a:rPr lang="en-US" sz="1550" dirty="0">
                 <a:solidFill>
@@ -8543,12 +8179,6 @@
               </a:rPr>
               <a:t>  — WebSocket이 게임 내내 끊기지 않아야 한다</a:t>
             </a:r>
-            <a:pPr indent="0" marL="0">
-              <a:lnSpc>
-                <a:spcPct val="145000"/>
-              </a:lnSpc>
-              <a:buNone/>
-            </a:pPr>
             <a:r>
               <a:rPr lang="en-US" sz="1800" dirty="0">
                 <a:solidFill>
@@ -8561,12 +8191,6 @@
               <a:t>
 </a:t>
             </a:r>
-            <a:pPr indent="0" marL="0">
-              <a:lnSpc>
-                <a:spcPct val="145000"/>
-              </a:lnSpc>
-              <a:buNone/>
-            </a:pPr>
             <a:r>
               <a:rPr lang="en-US" sz="1800" dirty="0">
                 <a:solidFill>
@@ -8578,12 +8202,6 @@
               </a:rPr>
               <a:t>—  </a:t>
             </a:r>
-            <a:pPr indent="0" marL="0">
-              <a:lnSpc>
-                <a:spcPct val="145000"/>
-              </a:lnSpc>
-              <a:buNone/>
-            </a:pPr>
             <a:r>
               <a:rPr lang="en-US" sz="1800" b="1" dirty="0">
                 <a:solidFill>
@@ -8595,12 +8213,6 @@
               </a:rPr>
               <a:t>탄력적 확장</a:t>
             </a:r>
-            <a:pPr indent="0" marL="0">
-              <a:lnSpc>
-                <a:spcPct val="145000"/>
-              </a:lnSpc>
-              <a:buNone/>
-            </a:pPr>
             <a:r>
               <a:rPr lang="en-US" sz="1550" dirty="0">
                 <a:solidFill>
@@ -8612,12 +8224,6 @@
               </a:rPr>
               <a:t>  — 사용자가 늘면 서버도 자동으로 늘어야 한다</a:t>
             </a:r>
-            <a:pPr indent="0" marL="0">
-              <a:lnSpc>
-                <a:spcPct val="145000"/>
-              </a:lnSpc>
-              <a:buNone/>
-            </a:pPr>
             <a:r>
               <a:rPr lang="en-US" sz="1800" dirty="0">
                 <a:solidFill>
@@ -8630,12 +8236,6 @@
               <a:t>
 </a:t>
             </a:r>
-            <a:pPr indent="0" marL="0">
-              <a:lnSpc>
-                <a:spcPct val="145000"/>
-              </a:lnSpc>
-              <a:buNone/>
-            </a:pPr>
             <a:r>
               <a:rPr lang="en-US" sz="1800" dirty="0">
                 <a:solidFill>
@@ -8647,12 +8247,6 @@
               </a:rPr>
               <a:t>—  </a:t>
             </a:r>
-            <a:pPr indent="0" marL="0">
-              <a:lnSpc>
-                <a:spcPct val="145000"/>
-              </a:lnSpc>
-              <a:buNone/>
-            </a:pPr>
             <a:r>
               <a:rPr lang="en-US" sz="1800" b="1" dirty="0">
                 <a:solidFill>
@@ -8664,12 +8258,6 @@
               </a:rPr>
               <a:t>장애 격리</a:t>
             </a:r>
-            <a:pPr indent="0" marL="0">
-              <a:lnSpc>
-                <a:spcPct val="145000"/>
-              </a:lnSpc>
-              <a:buNone/>
-            </a:pPr>
             <a:r>
               <a:rPr lang="en-US" sz="1550" dirty="0">
                 <a:solidFill>
@@ -8681,12 +8269,6 @@
               </a:rPr>
               <a:t>  — 서버 한 대가 죽어도 진행 중인 게임은 보존</a:t>
             </a:r>
-            <a:pPr indent="0" marL="0">
-              <a:lnSpc>
-                <a:spcPct val="145000"/>
-              </a:lnSpc>
-              <a:buNone/>
-            </a:pPr>
             <a:r>
               <a:rPr lang="en-US" sz="1800" dirty="0">
                 <a:solidFill>
@@ -8699,12 +8281,6 @@
               <a:t>
 </a:t>
             </a:r>
-            <a:pPr indent="0" marL="0">
-              <a:lnSpc>
-                <a:spcPct val="145000"/>
-              </a:lnSpc>
-              <a:buNone/>
-            </a:pPr>
             <a:r>
               <a:rPr lang="en-US" sz="1800" dirty="0">
                 <a:solidFill>
@@ -8716,12 +8292,6 @@
               </a:rPr>
               <a:t>—  </a:t>
             </a:r>
-            <a:pPr indent="0" marL="0">
-              <a:lnSpc>
-                <a:spcPct val="145000"/>
-              </a:lnSpc>
-              <a:buNone/>
-            </a:pPr>
             <a:r>
               <a:rPr lang="en-US" sz="1800" b="1" dirty="0">
                 <a:solidFill>
@@ -8733,12 +8303,6 @@
               </a:rPr>
               <a:t>분산 일관성</a:t>
             </a:r>
-            <a:pPr indent="0" marL="0">
-              <a:lnSpc>
-                <a:spcPct val="145000"/>
-              </a:lnSpc>
-              <a:buNone/>
-            </a:pPr>
             <a:r>
               <a:rPr lang="en-US" sz="1550" dirty="0">
                 <a:solidFill>
@@ -8750,12 +8314,6 @@
               </a:rPr>
               <a:t>  — 4명이 서로 다른 서버에 붙어도 같은 게임</a:t>
             </a:r>
-            <a:pPr indent="0" marL="0">
-              <a:lnSpc>
-                <a:spcPct val="145000"/>
-              </a:lnSpc>
-              <a:buNone/>
-            </a:pPr>
             <a:r>
               <a:rPr lang="en-US" sz="1800" dirty="0">
                 <a:solidFill>
@@ -8798,6 +8356,13 @@
             <a:prstDash val="solid"/>
           </a:ln>
         </p:spPr>
+        <p:txBody>
+          <a:bodyPr/>
+          <a:lstStyle/>
+          <a:p>
+            <a:endParaRPr lang="ko-KR" altLang="en-US"/>
+          </a:p>
+        </p:txBody>
       </p:sp>
       <p:sp>
         <p:nvSpPr>
@@ -8820,11 +8385,11 @@
           <a:bodyPr wrap="square" rtlCol="0" anchor="ctr"/>
           <a:lstStyle/>
           <a:p>
-            <a:pPr indent="0" marL="0">
-              <a:buNone/>
-            </a:pPr>
-            <a:r>
-              <a:rPr lang="en-US" sz="1250" b="1" spc="200" kern="0" dirty="0">
+            <a:pPr marL="0" indent="0">
+              <a:buNone/>
+            </a:pPr>
+            <a:r>
+              <a:rPr lang="en-US" sz="1250" b="1" kern="0" spc="200" dirty="0">
                 <a:solidFill>
                   <a:srgbClr val="111827"/>
                 </a:solidFill>
@@ -8859,7 +8424,7 @@
           <a:bodyPr wrap="square" rtlCol="0" anchor="t"/>
           <a:lstStyle/>
           <a:p>
-            <a:pPr indent="0" marL="0">
+            <a:pPr marL="0" indent="0">
               <a:lnSpc>
                 <a:spcPct val="135000"/>
               </a:lnSpc>
@@ -8896,6 +8461,7 @@
         <a:solidFill>
           <a:srgbClr val="FFFFFF"/>
         </a:solidFill>
+        <a:effectLst/>
       </p:bgPr>
     </p:bg>
     <p:spTree>
@@ -8933,11 +8499,11 @@
           <a:bodyPr wrap="square" rtlCol="0" anchor="ctr"/>
           <a:lstStyle/>
           <a:p>
-            <a:pPr indent="0" marL="0">
-              <a:buNone/>
-            </a:pPr>
-            <a:r>
-              <a:rPr lang="en-US" sz="1200" b="1" spc="400" kern="0" dirty="0">
+            <a:pPr marL="0" indent="0">
+              <a:buNone/>
+            </a:pPr>
+            <a:r>
+              <a:rPr lang="en-US" sz="1200" b="1" kern="0" spc="400" dirty="0">
                 <a:solidFill>
                   <a:srgbClr val="6B7280"/>
                 </a:solidFill>
@@ -8972,7 +8538,7 @@
           <a:bodyPr wrap="square" rtlCol="0" anchor="ctr"/>
           <a:lstStyle/>
           <a:p>
-            <a:pPr indent="0" marL="0">
+            <a:pPr marL="0" indent="0">
               <a:buNone/>
             </a:pPr>
             <a:r>
@@ -9012,17 +8578,24 @@
             <a:prstDash val="solid"/>
           </a:ln>
         </p:spPr>
+        <p:txBody>
+          <a:bodyPr/>
+          <a:lstStyle/>
+          <a:p>
+            <a:endParaRPr lang="ko-KR" altLang="en-US"/>
+          </a:p>
+        </p:txBody>
       </p:sp>
       <p:pic>
         <p:nvPicPr>
-          <p:cNvPr id="6" name="Image 0" descr="/home/dakori/github/cloud_holdem/docs/presentation/assets/architecture-bw.png">    </p:cNvPr>
+          <p:cNvPr id="6" name="Image 0" descr="/home/dakori/github/cloud_holdem/docs/presentation/assets/architecture-bw.png"/>
           <p:cNvPicPr>
             <a:picLocks noChangeAspect="1"/>
           </p:cNvPicPr>
           <p:nvPr/>
         </p:nvPicPr>
         <p:blipFill>
-          <a:blip r:embed="rId1"/>
+          <a:blip r:embed="rId3"/>
           <a:stretch>
             <a:fillRect/>
           </a:stretch>
@@ -9053,6 +8626,7 @@
         <a:solidFill>
           <a:srgbClr val="FFFFFF"/>
         </a:solidFill>
+        <a:effectLst/>
       </p:bgPr>
     </p:bg>
     <p:spTree>
@@ -9090,11 +8664,11 @@
           <a:bodyPr wrap="square" rtlCol="0" anchor="ctr"/>
           <a:lstStyle/>
           <a:p>
-            <a:pPr indent="0" marL="0">
-              <a:buNone/>
-            </a:pPr>
-            <a:r>
-              <a:rPr lang="en-US" sz="1200" b="1" spc="400" kern="0" dirty="0">
+            <a:pPr marL="0" indent="0">
+              <a:buNone/>
+            </a:pPr>
+            <a:r>
+              <a:rPr lang="en-US" sz="1200" b="1" kern="0" spc="400" dirty="0">
                 <a:solidFill>
                   <a:srgbClr val="6B7280"/>
                 </a:solidFill>
@@ -9129,7 +8703,7 @@
           <a:bodyPr wrap="square" rtlCol="0" anchor="ctr"/>
           <a:lstStyle/>
           <a:p>
-            <a:pPr indent="0" marL="0">
+            <a:pPr marL="0" indent="0">
               <a:buNone/>
             </a:pPr>
             <a:r>
@@ -9169,6 +8743,13 @@
             <a:prstDash val="solid"/>
           </a:ln>
         </p:spPr>
+        <p:txBody>
+          <a:bodyPr/>
+          <a:lstStyle/>
+          <a:p>
+            <a:endParaRPr lang="ko-KR" altLang="en-US"/>
+          </a:p>
+        </p:txBody>
       </p:sp>
       <p:sp>
         <p:nvSpPr>
@@ -9196,6 +8777,13 @@
             <a:prstDash val="solid"/>
           </a:ln>
         </p:spPr>
+        <p:txBody>
+          <a:bodyPr/>
+          <a:lstStyle/>
+          <a:p>
+            <a:endParaRPr lang="ko-KR" altLang="en-US"/>
+          </a:p>
+        </p:txBody>
       </p:sp>
       <p:sp>
         <p:nvSpPr>
@@ -9218,7 +8806,7 @@
           <a:bodyPr wrap="square" rtlCol="0" anchor="ctr"/>
           <a:lstStyle/>
           <a:p>
-            <a:pPr indent="0" marL="0">
+            <a:pPr marL="0" indent="0">
               <a:buNone/>
             </a:pPr>
             <a:r>
@@ -9257,7 +8845,7 @@
           <a:bodyPr wrap="square" rtlCol="0" anchor="t"/>
           <a:lstStyle/>
           <a:p>
-            <a:pPr indent="0" marL="0">
+            <a:pPr marL="0" indent="0">
               <a:lnSpc>
                 <a:spcPct val="125000"/>
               </a:lnSpc>
@@ -9304,6 +8892,13 @@
             <a:prstDash val="solid"/>
           </a:ln>
         </p:spPr>
+        <p:txBody>
+          <a:bodyPr/>
+          <a:lstStyle/>
+          <a:p>
+            <a:endParaRPr lang="ko-KR" altLang="en-US"/>
+          </a:p>
+        </p:txBody>
       </p:sp>
       <p:sp>
         <p:nvSpPr>
@@ -9326,7 +8921,7 @@
           <a:bodyPr wrap="square" rtlCol="0" anchor="ctr"/>
           <a:lstStyle/>
           <a:p>
-            <a:pPr indent="0" marL="0">
+            <a:pPr marL="0" indent="0">
               <a:buNone/>
             </a:pPr>
             <a:r>
@@ -9365,7 +8960,7 @@
           <a:bodyPr wrap="square" rtlCol="0" anchor="t"/>
           <a:lstStyle/>
           <a:p>
-            <a:pPr indent="0" marL="0">
+            <a:pPr marL="0" indent="0">
               <a:lnSpc>
                 <a:spcPct val="125000"/>
               </a:lnSpc>
@@ -9412,6 +9007,13 @@
             <a:prstDash val="solid"/>
           </a:ln>
         </p:spPr>
+        <p:txBody>
+          <a:bodyPr/>
+          <a:lstStyle/>
+          <a:p>
+            <a:endParaRPr lang="ko-KR" altLang="en-US"/>
+          </a:p>
+        </p:txBody>
       </p:sp>
       <p:sp>
         <p:nvSpPr>
@@ -9434,7 +9036,7 @@
           <a:bodyPr wrap="square" rtlCol="0" anchor="ctr"/>
           <a:lstStyle/>
           <a:p>
-            <a:pPr indent="0" marL="0">
+            <a:pPr marL="0" indent="0">
               <a:buNone/>
             </a:pPr>
             <a:r>
@@ -9473,7 +9075,7 @@
           <a:bodyPr wrap="square" rtlCol="0" anchor="t"/>
           <a:lstStyle/>
           <a:p>
-            <a:pPr indent="0" marL="0">
+            <a:pPr marL="0" indent="0">
               <a:lnSpc>
                 <a:spcPct val="125000"/>
               </a:lnSpc>
@@ -9520,6 +9122,13 @@
             <a:prstDash val="solid"/>
           </a:ln>
         </p:spPr>
+        <p:txBody>
+          <a:bodyPr/>
+          <a:lstStyle/>
+          <a:p>
+            <a:endParaRPr lang="ko-KR" altLang="en-US"/>
+          </a:p>
+        </p:txBody>
       </p:sp>
       <p:sp>
         <p:nvSpPr>
@@ -9542,7 +9151,7 @@
           <a:bodyPr wrap="square" rtlCol="0" anchor="ctr"/>
           <a:lstStyle/>
           <a:p>
-            <a:pPr indent="0" marL="0">
+            <a:pPr marL="0" indent="0">
               <a:buNone/>
             </a:pPr>
             <a:r>
@@ -9581,7 +9190,7 @@
           <a:bodyPr wrap="square" rtlCol="0" anchor="t"/>
           <a:lstStyle/>
           <a:p>
-            <a:pPr indent="0" marL="0">
+            <a:pPr marL="0" indent="0">
               <a:lnSpc>
                 <a:spcPct val="125000"/>
               </a:lnSpc>
@@ -9628,6 +9237,13 @@
             <a:prstDash val="solid"/>
           </a:ln>
         </p:spPr>
+        <p:txBody>
+          <a:bodyPr/>
+          <a:lstStyle/>
+          <a:p>
+            <a:endParaRPr lang="ko-KR" altLang="en-US"/>
+          </a:p>
+        </p:txBody>
       </p:sp>
       <p:sp>
         <p:nvSpPr>
@@ -9650,7 +9266,7 @@
           <a:bodyPr wrap="square" rtlCol="0" anchor="ctr"/>
           <a:lstStyle/>
           <a:p>
-            <a:pPr indent="0" marL="0">
+            <a:pPr marL="0" indent="0">
               <a:buNone/>
             </a:pPr>
             <a:r>
@@ -9689,7 +9305,7 @@
           <a:bodyPr wrap="square" rtlCol="0" anchor="t"/>
           <a:lstStyle/>
           <a:p>
-            <a:pPr indent="0" marL="0">
+            <a:pPr marL="0" indent="0">
               <a:lnSpc>
                 <a:spcPct val="125000"/>
               </a:lnSpc>
@@ -9736,6 +9352,13 @@
             <a:prstDash val="solid"/>
           </a:ln>
         </p:spPr>
+        <p:txBody>
+          <a:bodyPr/>
+          <a:lstStyle/>
+          <a:p>
+            <a:endParaRPr lang="ko-KR" altLang="en-US"/>
+          </a:p>
+        </p:txBody>
       </p:sp>
       <p:sp>
         <p:nvSpPr>
@@ -9758,7 +9381,7 @@
           <a:bodyPr wrap="square" rtlCol="0" anchor="ctr"/>
           <a:lstStyle/>
           <a:p>
-            <a:pPr indent="0" marL="0">
+            <a:pPr marL="0" indent="0">
               <a:buNone/>
             </a:pPr>
             <a:r>
@@ -9797,7 +9420,7 @@
           <a:bodyPr wrap="square" rtlCol="0" anchor="t"/>
           <a:lstStyle/>
           <a:p>
-            <a:pPr indent="0" marL="0">
+            <a:pPr marL="0" indent="0">
               <a:lnSpc>
                 <a:spcPct val="125000"/>
               </a:lnSpc>
@@ -9834,6 +9457,7 @@
         <a:solidFill>
           <a:srgbClr val="FFFFFF"/>
         </a:solidFill>
+        <a:effectLst/>
       </p:bgPr>
     </p:bg>
     <p:spTree>
@@ -9871,11 +9495,11 @@
           <a:bodyPr wrap="square" rtlCol="0" anchor="ctr"/>
           <a:lstStyle/>
           <a:p>
-            <a:pPr indent="0" marL="0">
-              <a:buNone/>
-            </a:pPr>
-            <a:r>
-              <a:rPr lang="en-US" sz="1200" b="1" spc="400" kern="0" dirty="0">
+            <a:pPr marL="0" indent="0">
+              <a:buNone/>
+            </a:pPr>
+            <a:r>
+              <a:rPr lang="en-US" sz="1200" b="1" kern="0" spc="400" dirty="0">
                 <a:solidFill>
                   <a:srgbClr val="6B7280"/>
                 </a:solidFill>
@@ -9910,7 +9534,7 @@
           <a:bodyPr wrap="square" rtlCol="0" anchor="ctr"/>
           <a:lstStyle/>
           <a:p>
-            <a:pPr indent="0" marL="0">
+            <a:pPr marL="0" indent="0">
               <a:buNone/>
             </a:pPr>
             <a:r>
@@ -9950,6 +9574,13 @@
             <a:prstDash val="solid"/>
           </a:ln>
         </p:spPr>
+        <p:txBody>
+          <a:bodyPr/>
+          <a:lstStyle/>
+          <a:p>
+            <a:endParaRPr lang="ko-KR" altLang="en-US"/>
+          </a:p>
+        </p:txBody>
       </p:sp>
       <p:graphicFrame>
         <p:nvGraphicFramePr>
@@ -9974,10 +9605,34 @@
             <a:tbl>
               <a:tblPr/>
               <a:tblGrid>
-                <a:gridCol w="2743200"/>
-                <a:gridCol w="2743200"/>
-                <a:gridCol w="2743200"/>
-                <a:gridCol w="2743200"/>
+                <a:gridCol w="2743200">
+                  <a:extLst>
+                    <a:ext uri="{9D8B030D-6E8A-4147-A177-3AD203B41FA5}">
+                      <a16:colId xmlns:a16="http://schemas.microsoft.com/office/drawing/2014/main" val="20000"/>
+                    </a:ext>
+                  </a:extLst>
+                </a:gridCol>
+                <a:gridCol w="2743200">
+                  <a:extLst>
+                    <a:ext uri="{9D8B030D-6E8A-4147-A177-3AD203B41FA5}">
+                      <a16:colId xmlns:a16="http://schemas.microsoft.com/office/drawing/2014/main" val="20001"/>
+                    </a:ext>
+                  </a:extLst>
+                </a:gridCol>
+                <a:gridCol w="2743200">
+                  <a:extLst>
+                    <a:ext uri="{9D8B030D-6E8A-4147-A177-3AD203B41FA5}">
+                      <a16:colId xmlns:a16="http://schemas.microsoft.com/office/drawing/2014/main" val="20002"/>
+                    </a:ext>
+                  </a:extLst>
+                </a:gridCol>
+                <a:gridCol w="2743200">
+                  <a:extLst>
+                    <a:ext uri="{9D8B030D-6E8A-4147-A177-3AD203B41FA5}">
+                      <a16:colId xmlns:a16="http://schemas.microsoft.com/office/drawing/2014/main" val="20003"/>
+                    </a:ext>
+                  </a:extLst>
+                </a:gridCol>
               </a:tblGrid>
               <a:tr h="530352">
                 <a:tc>
@@ -9985,7 +9640,7 @@
                     <a:bodyPr/>
                     <a:lstStyle/>
                     <a:p>
-                      <a:pPr indent="0" marL="0">
+                      <a:pPr marL="0" indent="0">
                         <a:buNone/>
                       </a:pPr>
                       <a:r>
@@ -10006,7 +9661,7 @@
                       </a:endParaRPr>
                     </a:p>
                   </a:txBody>
-                  <a:tcPr marL="91440" marR="91440" marT="45720" marB="45720" anchor="ctr">
+                  <a:tcPr anchor="ctr">
                     <a:lnL w="9525" cap="flat" cmpd="sng" algn="ctr">
                       <a:solidFill>
                         <a:srgbClr val="D1D5DB"/>
@@ -10053,7 +9708,7 @@
                     <a:bodyPr/>
                     <a:lstStyle/>
                     <a:p>
-                      <a:pPr indent="0" marL="0">
+                      <a:pPr marL="0" indent="0">
                         <a:buNone/>
                       </a:pPr>
                       <a:r>
@@ -10074,7 +9729,7 @@
                       </a:endParaRPr>
                     </a:p>
                   </a:txBody>
-                  <a:tcPr marL="91440" marR="91440" marT="45720" marB="45720" anchor="ctr">
+                  <a:tcPr anchor="ctr">
                     <a:lnL w="9525" cap="flat" cmpd="sng" algn="ctr">
                       <a:solidFill>
                         <a:srgbClr val="D1D5DB"/>
@@ -10121,7 +9776,7 @@
                     <a:bodyPr/>
                     <a:lstStyle/>
                     <a:p>
-                      <a:pPr indent="0" marL="0">
+                      <a:pPr marL="0" indent="0">
                         <a:buNone/>
                       </a:pPr>
                       <a:r>
@@ -10142,7 +9797,7 @@
                       </a:endParaRPr>
                     </a:p>
                   </a:txBody>
-                  <a:tcPr marL="91440" marR="91440" marT="45720" marB="45720" anchor="ctr">
+                  <a:tcPr anchor="ctr">
                     <a:lnL w="9525" cap="flat" cmpd="sng" algn="ctr">
                       <a:solidFill>
                         <a:srgbClr val="D1D5DB"/>
@@ -10189,7 +9844,7 @@
                     <a:bodyPr/>
                     <a:lstStyle/>
                     <a:p>
-                      <a:pPr indent="0" marL="0">
+                      <a:pPr marL="0" indent="0">
                         <a:buNone/>
                       </a:pPr>
                       <a:r>
@@ -10210,7 +9865,7 @@
                       </a:endParaRPr>
                     </a:p>
                   </a:txBody>
-                  <a:tcPr marL="91440" marR="91440" marT="45720" marB="45720" anchor="ctr">
+                  <a:tcPr anchor="ctr">
                     <a:lnL w="9525" cap="flat" cmpd="sng" algn="ctr">
                       <a:solidFill>
                         <a:srgbClr val="D1D5DB"/>
@@ -10252,6 +9907,11 @@
                     </a:solidFill>
                   </a:tcPr>
                 </a:tc>
+                <a:extLst>
+                  <a:ext uri="{0D108BD9-81ED-4DB2-BD59-A6C34878D82A}">
+                    <a16:rowId xmlns:a16="http://schemas.microsoft.com/office/drawing/2014/main" val="10000"/>
+                  </a:ext>
+                </a:extLst>
               </a:tr>
               <a:tr h="530352">
                 <a:tc>
@@ -10259,7 +9919,7 @@
                     <a:bodyPr/>
                     <a:lstStyle/>
                     <a:p>
-                      <a:pPr indent="0" marL="0">
+                      <a:pPr marL="0" indent="0">
                         <a:buNone/>
                       </a:pPr>
                       <a:r>
@@ -10280,7 +9940,7 @@
                       </a:endParaRPr>
                     </a:p>
                   </a:txBody>
-                  <a:tcPr marL="91440" marR="91440" marT="45720" marB="45720" anchor="ctr">
+                  <a:tcPr anchor="ctr">
                     <a:lnL w="9525" cap="flat" cmpd="sng" algn="ctr">
                       <a:solidFill>
                         <a:srgbClr val="D1D5DB"/>
@@ -10324,7 +9984,7 @@
                     <a:bodyPr/>
                     <a:lstStyle/>
                     <a:p>
-                      <a:pPr indent="0" marL="0">
+                      <a:pPr marL="0" indent="0">
                         <a:buNone/>
                       </a:pPr>
                       <a:r>
@@ -10345,7 +10005,7 @@
                       </a:endParaRPr>
                     </a:p>
                   </a:txBody>
-                  <a:tcPr marL="91440" marR="91440" marT="45720" marB="45720" anchor="ctr">
+                  <a:tcPr anchor="ctr">
                     <a:lnL w="9525" cap="flat" cmpd="sng" algn="ctr">
                       <a:solidFill>
                         <a:srgbClr val="D1D5DB"/>
@@ -10389,7 +10049,7 @@
                     <a:bodyPr/>
                     <a:lstStyle/>
                     <a:p>
-                      <a:pPr indent="0" marL="0">
+                      <a:pPr marL="0" indent="0">
                         <a:buNone/>
                       </a:pPr>
                       <a:r>
@@ -10410,7 +10070,7 @@
                       </a:endParaRPr>
                     </a:p>
                   </a:txBody>
-                  <a:tcPr marL="91440" marR="91440" marT="45720" marB="45720" anchor="ctr">
+                  <a:tcPr anchor="ctr">
                     <a:lnL w="9525" cap="flat" cmpd="sng" algn="ctr">
                       <a:solidFill>
                         <a:srgbClr val="D1D5DB"/>
@@ -10454,7 +10114,7 @@
                     <a:bodyPr/>
                     <a:lstStyle/>
                     <a:p>
-                      <a:pPr indent="0" marL="0">
+                      <a:pPr marL="0" indent="0">
                         <a:buNone/>
                       </a:pPr>
                       <a:r>
@@ -10475,7 +10135,7 @@
                       </a:endParaRPr>
                     </a:p>
                   </a:txBody>
-                  <a:tcPr marL="91440" marR="91440" marT="45720" marB="45720" anchor="ctr">
+                  <a:tcPr anchor="ctr">
                     <a:lnL w="9525" cap="flat" cmpd="sng" algn="ctr">
                       <a:solidFill>
                         <a:srgbClr val="D1D5DB"/>
@@ -10514,6 +10174,11 @@
                     </a:lnB>
                   </a:tcPr>
                 </a:tc>
+                <a:extLst>
+                  <a:ext uri="{0D108BD9-81ED-4DB2-BD59-A6C34878D82A}">
+                    <a16:rowId xmlns:a16="http://schemas.microsoft.com/office/drawing/2014/main" val="10001"/>
+                  </a:ext>
+                </a:extLst>
               </a:tr>
               <a:tr h="530352">
                 <a:tc>
@@ -10521,7 +10186,7 @@
                     <a:bodyPr/>
                     <a:lstStyle/>
                     <a:p>
-                      <a:pPr indent="0" marL="0">
+                      <a:pPr marL="0" indent="0">
                         <a:buNone/>
                       </a:pPr>
                       <a:r>
@@ -10542,7 +10207,7 @@
                       </a:endParaRPr>
                     </a:p>
                   </a:txBody>
-                  <a:tcPr marL="91440" marR="91440" marT="45720" marB="45720" anchor="ctr">
+                  <a:tcPr anchor="ctr">
                     <a:lnL w="9525" cap="flat" cmpd="sng" algn="ctr">
                       <a:solidFill>
                         <a:srgbClr val="D1D5DB"/>
@@ -10586,7 +10251,7 @@
                     <a:bodyPr/>
                     <a:lstStyle/>
                     <a:p>
-                      <a:pPr indent="0" marL="0">
+                      <a:pPr marL="0" indent="0">
                         <a:buNone/>
                       </a:pPr>
                       <a:r>
@@ -10607,7 +10272,7 @@
                       </a:endParaRPr>
                     </a:p>
                   </a:txBody>
-                  <a:tcPr marL="91440" marR="91440" marT="45720" marB="45720" anchor="ctr">
+                  <a:tcPr anchor="ctr">
                     <a:lnL w="9525" cap="flat" cmpd="sng" algn="ctr">
                       <a:solidFill>
                         <a:srgbClr val="D1D5DB"/>
@@ -10651,7 +10316,7 @@
                     <a:bodyPr/>
                     <a:lstStyle/>
                     <a:p>
-                      <a:pPr indent="0" marL="0">
+                      <a:pPr marL="0" indent="0">
                         <a:buNone/>
                       </a:pPr>
                       <a:r>
@@ -10672,7 +10337,7 @@
                       </a:endParaRPr>
                     </a:p>
                   </a:txBody>
-                  <a:tcPr marL="91440" marR="91440" marT="45720" marB="45720" anchor="ctr">
+                  <a:tcPr anchor="ctr">
                     <a:lnL w="9525" cap="flat" cmpd="sng" algn="ctr">
                       <a:solidFill>
                         <a:srgbClr val="D1D5DB"/>
@@ -10716,7 +10381,7 @@
                     <a:bodyPr/>
                     <a:lstStyle/>
                     <a:p>
-                      <a:pPr indent="0" marL="0">
+                      <a:pPr marL="0" indent="0">
                         <a:buNone/>
                       </a:pPr>
                       <a:r>
@@ -10737,7 +10402,7 @@
                       </a:endParaRPr>
                     </a:p>
                   </a:txBody>
-                  <a:tcPr marL="91440" marR="91440" marT="45720" marB="45720" anchor="ctr">
+                  <a:tcPr anchor="ctr">
                     <a:lnL w="9525" cap="flat" cmpd="sng" algn="ctr">
                       <a:solidFill>
                         <a:srgbClr val="D1D5DB"/>
@@ -10776,6 +10441,11 @@
                     </a:lnB>
                   </a:tcPr>
                 </a:tc>
+                <a:extLst>
+                  <a:ext uri="{0D108BD9-81ED-4DB2-BD59-A6C34878D82A}">
+                    <a16:rowId xmlns:a16="http://schemas.microsoft.com/office/drawing/2014/main" val="10002"/>
+                  </a:ext>
+                </a:extLst>
               </a:tr>
               <a:tr h="530352">
                 <a:tc>
@@ -10783,7 +10453,7 @@
                     <a:bodyPr/>
                     <a:lstStyle/>
                     <a:p>
-                      <a:pPr indent="0" marL="0">
+                      <a:pPr marL="0" indent="0">
                         <a:buNone/>
                       </a:pPr>
                       <a:r>
@@ -10804,7 +10474,7 @@
                       </a:endParaRPr>
                     </a:p>
                   </a:txBody>
-                  <a:tcPr marL="91440" marR="91440" marT="45720" marB="45720" anchor="ctr">
+                  <a:tcPr anchor="ctr">
                     <a:lnL w="9525" cap="flat" cmpd="sng" algn="ctr">
                       <a:solidFill>
                         <a:srgbClr val="D1D5DB"/>
@@ -10848,7 +10518,7 @@
                     <a:bodyPr/>
                     <a:lstStyle/>
                     <a:p>
-                      <a:pPr indent="0" marL="0">
+                      <a:pPr marL="0" indent="0">
                         <a:buNone/>
                       </a:pPr>
                       <a:r>
@@ -10869,7 +10539,7 @@
                       </a:endParaRPr>
                     </a:p>
                   </a:txBody>
-                  <a:tcPr marL="91440" marR="91440" marT="45720" marB="45720" anchor="ctr">
+                  <a:tcPr anchor="ctr">
                     <a:lnL w="9525" cap="flat" cmpd="sng" algn="ctr">
                       <a:solidFill>
                         <a:srgbClr val="D1D5DB"/>
@@ -10913,7 +10583,7 @@
                     <a:bodyPr/>
                     <a:lstStyle/>
                     <a:p>
-                      <a:pPr indent="0" marL="0">
+                      <a:pPr marL="0" indent="0">
                         <a:buNone/>
                       </a:pPr>
                       <a:r>
@@ -10934,7 +10604,7 @@
                       </a:endParaRPr>
                     </a:p>
                   </a:txBody>
-                  <a:tcPr marL="91440" marR="91440" marT="45720" marB="45720" anchor="ctr">
+                  <a:tcPr anchor="ctr">
                     <a:lnL w="9525" cap="flat" cmpd="sng" algn="ctr">
                       <a:solidFill>
                         <a:srgbClr val="D1D5DB"/>
@@ -10978,7 +10648,7 @@
                     <a:bodyPr/>
                     <a:lstStyle/>
                     <a:p>
-                      <a:pPr indent="0" marL="0">
+                      <a:pPr marL="0" indent="0">
                         <a:buNone/>
                       </a:pPr>
                       <a:r>
@@ -10999,7 +10669,7 @@
                       </a:endParaRPr>
                     </a:p>
                   </a:txBody>
-                  <a:tcPr marL="91440" marR="91440" marT="45720" marB="45720" anchor="ctr">
+                  <a:tcPr anchor="ctr">
                     <a:lnL w="9525" cap="flat" cmpd="sng" algn="ctr">
                       <a:solidFill>
                         <a:srgbClr val="D1D5DB"/>
@@ -11038,6 +10708,11 @@
                     </a:lnB>
                   </a:tcPr>
                 </a:tc>
+                <a:extLst>
+                  <a:ext uri="{0D108BD9-81ED-4DB2-BD59-A6C34878D82A}">
+                    <a16:rowId xmlns:a16="http://schemas.microsoft.com/office/drawing/2014/main" val="10003"/>
+                  </a:ext>
+                </a:extLst>
               </a:tr>
               <a:tr h="530352">
                 <a:tc>
@@ -11045,7 +10720,7 @@
                     <a:bodyPr/>
                     <a:lstStyle/>
                     <a:p>
-                      <a:pPr indent="0" marL="0">
+                      <a:pPr marL="0" indent="0">
                         <a:buNone/>
                       </a:pPr>
                       <a:r>
@@ -11066,7 +10741,7 @@
                       </a:endParaRPr>
                     </a:p>
                   </a:txBody>
-                  <a:tcPr marL="91440" marR="91440" marT="45720" marB="45720" anchor="ctr">
+                  <a:tcPr anchor="ctr">
                     <a:lnL w="9525" cap="flat" cmpd="sng" algn="ctr">
                       <a:solidFill>
                         <a:srgbClr val="D1D5DB"/>
@@ -11110,7 +10785,7 @@
                     <a:bodyPr/>
                     <a:lstStyle/>
                     <a:p>
-                      <a:pPr indent="0" marL="0">
+                      <a:pPr marL="0" indent="0">
                         <a:buNone/>
                       </a:pPr>
                       <a:r>
@@ -11131,7 +10806,7 @@
                       </a:endParaRPr>
                     </a:p>
                   </a:txBody>
-                  <a:tcPr marL="91440" marR="91440" marT="45720" marB="45720" anchor="ctr">
+                  <a:tcPr anchor="ctr">
                     <a:lnL w="9525" cap="flat" cmpd="sng" algn="ctr">
                       <a:solidFill>
                         <a:srgbClr val="D1D5DB"/>
@@ -11175,7 +10850,7 @@
                     <a:bodyPr/>
                     <a:lstStyle/>
                     <a:p>
-                      <a:pPr indent="0" marL="0">
+                      <a:pPr marL="0" indent="0">
                         <a:buNone/>
                       </a:pPr>
                       <a:r>
@@ -11196,7 +10871,7 @@
                       </a:endParaRPr>
                     </a:p>
                   </a:txBody>
-                  <a:tcPr marL="91440" marR="91440" marT="45720" marB="45720" anchor="ctr">
+                  <a:tcPr anchor="ctr">
                     <a:lnL w="9525" cap="flat" cmpd="sng" algn="ctr">
                       <a:solidFill>
                         <a:srgbClr val="D1D5DB"/>
@@ -11240,7 +10915,7 @@
                     <a:bodyPr/>
                     <a:lstStyle/>
                     <a:p>
-                      <a:pPr indent="0" marL="0">
+                      <a:pPr marL="0" indent="0">
                         <a:buNone/>
                       </a:pPr>
                       <a:r>
@@ -11261,7 +10936,7 @@
                       </a:endParaRPr>
                     </a:p>
                   </a:txBody>
-                  <a:tcPr marL="91440" marR="91440" marT="45720" marB="45720" anchor="ctr">
+                  <a:tcPr anchor="ctr">
                     <a:lnL w="9525" cap="flat" cmpd="sng" algn="ctr">
                       <a:solidFill>
                         <a:srgbClr val="D1D5DB"/>
@@ -11300,6 +10975,11 @@
                     </a:lnB>
                   </a:tcPr>
                 </a:tc>
+                <a:extLst>
+                  <a:ext uri="{0D108BD9-81ED-4DB2-BD59-A6C34878D82A}">
+                    <a16:rowId xmlns:a16="http://schemas.microsoft.com/office/drawing/2014/main" val="10004"/>
+                  </a:ext>
+                </a:extLst>
               </a:tr>
               <a:tr h="530352">
                 <a:tc>
@@ -11307,7 +10987,7 @@
                     <a:bodyPr/>
                     <a:lstStyle/>
                     <a:p>
-                      <a:pPr indent="0" marL="0">
+                      <a:pPr marL="0" indent="0">
                         <a:buNone/>
                       </a:pPr>
                       <a:r>
@@ -11328,7 +11008,7 @@
                       </a:endParaRPr>
                     </a:p>
                   </a:txBody>
-                  <a:tcPr marL="91440" marR="91440" marT="45720" marB="45720" anchor="ctr">
+                  <a:tcPr anchor="ctr">
                     <a:lnL w="9525" cap="flat" cmpd="sng" algn="ctr">
                       <a:solidFill>
                         <a:srgbClr val="D1D5DB"/>
@@ -11372,7 +11052,7 @@
                     <a:bodyPr/>
                     <a:lstStyle/>
                     <a:p>
-                      <a:pPr indent="0" marL="0">
+                      <a:pPr marL="0" indent="0">
                         <a:buNone/>
                       </a:pPr>
                       <a:r>
@@ -11393,7 +11073,7 @@
                       </a:endParaRPr>
                     </a:p>
                   </a:txBody>
-                  <a:tcPr marL="91440" marR="91440" marT="45720" marB="45720" anchor="ctr">
+                  <a:tcPr anchor="ctr">
                     <a:lnL w="9525" cap="flat" cmpd="sng" algn="ctr">
                       <a:solidFill>
                         <a:srgbClr val="D1D5DB"/>
@@ -11437,7 +11117,7 @@
                     <a:bodyPr/>
                     <a:lstStyle/>
                     <a:p>
-                      <a:pPr indent="0" marL="0">
+                      <a:pPr marL="0" indent="0">
                         <a:buNone/>
                       </a:pPr>
                       <a:r>
@@ -11458,7 +11138,7 @@
                       </a:endParaRPr>
                     </a:p>
                   </a:txBody>
-                  <a:tcPr marL="91440" marR="91440" marT="45720" marB="45720" anchor="ctr">
+                  <a:tcPr anchor="ctr">
                     <a:lnL w="9525" cap="flat" cmpd="sng" algn="ctr">
                       <a:solidFill>
                         <a:srgbClr val="D1D5DB"/>
@@ -11502,7 +11182,7 @@
                     <a:bodyPr/>
                     <a:lstStyle/>
                     <a:p>
-                      <a:pPr indent="0" marL="0">
+                      <a:pPr marL="0" indent="0">
                         <a:buNone/>
                       </a:pPr>
                       <a:r>
@@ -11523,7 +11203,7 @@
                       </a:endParaRPr>
                     </a:p>
                   </a:txBody>
-                  <a:tcPr marL="91440" marR="91440" marT="45720" marB="45720" anchor="ctr">
+                  <a:tcPr anchor="ctr">
                     <a:lnL w="9525" cap="flat" cmpd="sng" algn="ctr">
                       <a:solidFill>
                         <a:srgbClr val="D1D5DB"/>
@@ -11562,6 +11242,11 @@
                     </a:lnB>
                   </a:tcPr>
                 </a:tc>
+                <a:extLst>
+                  <a:ext uri="{0D108BD9-81ED-4DB2-BD59-A6C34878D82A}">
+                    <a16:rowId xmlns:a16="http://schemas.microsoft.com/office/drawing/2014/main" val="10005"/>
+                  </a:ext>
+                </a:extLst>
               </a:tr>
               <a:tr h="530352">
                 <a:tc>
@@ -11569,7 +11254,7 @@
                     <a:bodyPr/>
                     <a:lstStyle/>
                     <a:p>
-                      <a:pPr indent="0" marL="0">
+                      <a:pPr marL="0" indent="0">
                         <a:buNone/>
                       </a:pPr>
                       <a:r>
@@ -11590,7 +11275,7 @@
                       </a:endParaRPr>
                     </a:p>
                   </a:txBody>
-                  <a:tcPr marL="91440" marR="91440" marT="45720" marB="45720" anchor="ctr">
+                  <a:tcPr anchor="ctr">
                     <a:lnL w="9525" cap="flat" cmpd="sng" algn="ctr">
                       <a:solidFill>
                         <a:srgbClr val="D1D5DB"/>
@@ -11634,7 +11319,7 @@
                     <a:bodyPr/>
                     <a:lstStyle/>
                     <a:p>
-                      <a:pPr indent="0" marL="0">
+                      <a:pPr marL="0" indent="0">
                         <a:buNone/>
                       </a:pPr>
                       <a:r>
@@ -11655,7 +11340,7 @@
                       </a:endParaRPr>
                     </a:p>
                   </a:txBody>
-                  <a:tcPr marL="91440" marR="91440" marT="45720" marB="45720" anchor="ctr">
+                  <a:tcPr anchor="ctr">
                     <a:lnL w="9525" cap="flat" cmpd="sng" algn="ctr">
                       <a:solidFill>
                         <a:srgbClr val="D1D5DB"/>
@@ -11699,7 +11384,7 @@
                     <a:bodyPr/>
                     <a:lstStyle/>
                     <a:p>
-                      <a:pPr indent="0" marL="0">
+                      <a:pPr marL="0" indent="0">
                         <a:buNone/>
                       </a:pPr>
                       <a:r>
@@ -11720,7 +11405,7 @@
                       </a:endParaRPr>
                     </a:p>
                   </a:txBody>
-                  <a:tcPr marL="91440" marR="91440" marT="45720" marB="45720" anchor="ctr">
+                  <a:tcPr anchor="ctr">
                     <a:lnL w="9525" cap="flat" cmpd="sng" algn="ctr">
                       <a:solidFill>
                         <a:srgbClr val="D1D5DB"/>
@@ -11764,7 +11449,7 @@
                     <a:bodyPr/>
                     <a:lstStyle/>
                     <a:p>
-                      <a:pPr indent="0" marL="0">
+                      <a:pPr marL="0" indent="0">
                         <a:buNone/>
                       </a:pPr>
                       <a:r>
@@ -11785,7 +11470,7 @@
                       </a:endParaRPr>
                     </a:p>
                   </a:txBody>
-                  <a:tcPr marL="91440" marR="91440" marT="45720" marB="45720" anchor="ctr">
+                  <a:tcPr anchor="ctr">
                     <a:lnL w="9525" cap="flat" cmpd="sng" algn="ctr">
                       <a:solidFill>
                         <a:srgbClr val="D1D5DB"/>
@@ -11824,6 +11509,11 @@
                     </a:lnB>
                   </a:tcPr>
                 </a:tc>
+                <a:extLst>
+                  <a:ext uri="{0D108BD9-81ED-4DB2-BD59-A6C34878D82A}">
+                    <a16:rowId xmlns:a16="http://schemas.microsoft.com/office/drawing/2014/main" val="10006"/>
+                  </a:ext>
+                </a:extLst>
               </a:tr>
               <a:tr h="530352">
                 <a:tc>
@@ -11831,7 +11521,7 @@
                     <a:bodyPr/>
                     <a:lstStyle/>
                     <a:p>
-                      <a:pPr indent="0" marL="0">
+                      <a:pPr marL="0" indent="0">
                         <a:buNone/>
                       </a:pPr>
                       <a:r>
@@ -11852,7 +11542,7 @@
                       </a:endParaRPr>
                     </a:p>
                   </a:txBody>
-                  <a:tcPr marL="91440" marR="91440" marT="45720" marB="45720" anchor="ctr">
+                  <a:tcPr anchor="ctr">
                     <a:lnL w="9525" cap="flat" cmpd="sng" algn="ctr">
                       <a:solidFill>
                         <a:srgbClr val="D1D5DB"/>
@@ -11896,7 +11586,7 @@
                     <a:bodyPr/>
                     <a:lstStyle/>
                     <a:p>
-                      <a:pPr indent="0" marL="0">
+                      <a:pPr marL="0" indent="0">
                         <a:buNone/>
                       </a:pPr>
                       <a:r>
@@ -11917,7 +11607,7 @@
                       </a:endParaRPr>
                     </a:p>
                   </a:txBody>
-                  <a:tcPr marL="91440" marR="91440" marT="45720" marB="45720" anchor="ctr">
+                  <a:tcPr anchor="ctr">
                     <a:lnL w="9525" cap="flat" cmpd="sng" algn="ctr">
                       <a:solidFill>
                         <a:srgbClr val="D1D5DB"/>
@@ -11961,7 +11651,7 @@
                     <a:bodyPr/>
                     <a:lstStyle/>
                     <a:p>
-                      <a:pPr indent="0" marL="0">
+                      <a:pPr marL="0" indent="0">
                         <a:buNone/>
                       </a:pPr>
                       <a:r>
@@ -11982,7 +11672,7 @@
                       </a:endParaRPr>
                     </a:p>
                   </a:txBody>
-                  <a:tcPr marL="91440" marR="91440" marT="45720" marB="45720" anchor="ctr">
+                  <a:tcPr anchor="ctr">
                     <a:lnL w="9525" cap="flat" cmpd="sng" algn="ctr">
                       <a:solidFill>
                         <a:srgbClr val="D1D5DB"/>
@@ -12026,7 +11716,7 @@
                     <a:bodyPr/>
                     <a:lstStyle/>
                     <a:p>
-                      <a:pPr indent="0" marL="0">
+                      <a:pPr marL="0" indent="0">
                         <a:buNone/>
                       </a:pPr>
                       <a:r>
@@ -12047,7 +11737,7 @@
                       </a:endParaRPr>
                     </a:p>
                   </a:txBody>
-                  <a:tcPr marL="91440" marR="91440" marT="45720" marB="45720" anchor="ctr">
+                  <a:tcPr anchor="ctr">
                     <a:lnL w="9525" cap="flat" cmpd="sng" algn="ctr">
                       <a:solidFill>
                         <a:srgbClr val="D1D5DB"/>
@@ -12086,6 +11776,11 @@
                     </a:lnB>
                   </a:tcPr>
                 </a:tc>
+                <a:extLst>
+                  <a:ext uri="{0D108BD9-81ED-4DB2-BD59-A6C34878D82A}">
+                    <a16:rowId xmlns:a16="http://schemas.microsoft.com/office/drawing/2014/main" val="10007"/>
+                  </a:ext>
+                </a:extLst>
               </a:tr>
             </a:tbl>
           </a:graphicData>
@@ -12107,6 +11802,7 @@
         <a:solidFill>
           <a:srgbClr val="FFFFFF"/>
         </a:solidFill>
+        <a:effectLst/>
       </p:bgPr>
     </p:bg>
     <p:spTree>
@@ -12144,11 +11840,11 @@
           <a:bodyPr wrap="square" rtlCol="0" anchor="ctr"/>
           <a:lstStyle/>
           <a:p>
-            <a:pPr indent="0" marL="0">
-              <a:buNone/>
-            </a:pPr>
-            <a:r>
-              <a:rPr lang="en-US" sz="1200" b="1" spc="400" kern="0" dirty="0">
+            <a:pPr marL="0" indent="0">
+              <a:buNone/>
+            </a:pPr>
+            <a:r>
+              <a:rPr lang="en-US" sz="1200" b="1" kern="0" spc="400" dirty="0">
                 <a:solidFill>
                   <a:srgbClr val="6B7280"/>
                 </a:solidFill>
@@ -12183,7 +11879,7 @@
           <a:bodyPr wrap="square" rtlCol="0" anchor="ctr"/>
           <a:lstStyle/>
           <a:p>
-            <a:pPr indent="0" marL="0">
+            <a:pPr marL="0" indent="0">
               <a:buNone/>
             </a:pPr>
             <a:r>
@@ -12223,6 +11919,13 @@
             <a:prstDash val="solid"/>
           </a:ln>
         </p:spPr>
+        <p:txBody>
+          <a:bodyPr/>
+          <a:lstStyle/>
+          <a:p>
+            <a:endParaRPr lang="ko-KR" altLang="en-US"/>
+          </a:p>
+        </p:txBody>
       </p:sp>
       <p:sp>
         <p:nvSpPr>
@@ -12250,6 +11953,13 @@
             <a:prstDash val="solid"/>
           </a:ln>
         </p:spPr>
+        <p:txBody>
+          <a:bodyPr/>
+          <a:lstStyle/>
+          <a:p>
+            <a:endParaRPr lang="ko-KR" altLang="en-US"/>
+          </a:p>
+        </p:txBody>
       </p:sp>
       <p:sp>
         <p:nvSpPr>
@@ -12272,11 +11982,11 @@
           <a:bodyPr wrap="square" rtlCol="0" anchor="ctr"/>
           <a:lstStyle/>
           <a:p>
-            <a:pPr indent="0" marL="0">
-              <a:buNone/>
-            </a:pPr>
-            <a:r>
-              <a:rPr lang="en-US" sz="1250" b="1" spc="200" kern="0" dirty="0">
+            <a:pPr marL="0" indent="0">
+              <a:buNone/>
+            </a:pPr>
+            <a:r>
+              <a:rPr lang="en-US" sz="1250" b="1" kern="0" spc="200" dirty="0">
                 <a:solidFill>
                   <a:srgbClr val="111827"/>
                 </a:solidFill>
@@ -12311,7 +12021,7 @@
           <a:bodyPr wrap="square" rtlCol="0" anchor="t"/>
           <a:lstStyle/>
           <a:p>
-            <a:pPr indent="0" marL="0">
+            <a:pPr marL="0" indent="0">
               <a:lnSpc>
                 <a:spcPct val="135000"/>
               </a:lnSpc>
@@ -12331,7 +12041,7 @@
             <a:endParaRPr lang="en-US" sz="1400" dirty="0"/>
           </a:p>
           <a:p>
-            <a:pPr indent="0" marL="0">
+            <a:pPr marL="0" indent="0">
               <a:lnSpc>
                 <a:spcPct val="135000"/>
               </a:lnSpc>
@@ -12351,7 +12061,7 @@
             <a:endParaRPr lang="en-US" sz="1400" dirty="0"/>
           </a:p>
           <a:p>
-            <a:pPr indent="0" marL="0">
+            <a:pPr marL="0" indent="0">
               <a:lnSpc>
                 <a:spcPct val="135000"/>
               </a:lnSpc>
@@ -12360,7 +12070,7 @@
             <a:endParaRPr lang="en-US" sz="1400" dirty="0"/>
           </a:p>
           <a:p>
-            <a:pPr indent="0" marL="0">
+            <a:pPr marL="0" indent="0">
               <a:lnSpc>
                 <a:spcPct val="135000"/>
               </a:lnSpc>
@@ -12380,7 +12090,7 @@
             <a:endParaRPr lang="en-US" sz="1400" dirty="0"/>
           </a:p>
           <a:p>
-            <a:pPr indent="0" marL="0">
+            <a:pPr marL="0" indent="0">
               <a:lnSpc>
                 <a:spcPct val="135000"/>
               </a:lnSpc>
@@ -12389,7 +12099,7 @@
             <a:endParaRPr lang="en-US" sz="1400" dirty="0"/>
           </a:p>
           <a:p>
-            <a:pPr indent="0" marL="0">
+            <a:pPr marL="0" indent="0">
               <a:lnSpc>
                 <a:spcPct val="135000"/>
               </a:lnSpc>
@@ -12436,6 +12146,13 @@
             <a:prstDash val="solid"/>
           </a:ln>
         </p:spPr>
+        <p:txBody>
+          <a:bodyPr/>
+          <a:lstStyle/>
+          <a:p>
+            <a:endParaRPr lang="ko-KR" altLang="en-US"/>
+          </a:p>
+        </p:txBody>
       </p:sp>
       <p:sp>
         <p:nvSpPr>
@@ -12458,11 +12175,11 @@
           <a:bodyPr wrap="square" rtlCol="0" anchor="ctr"/>
           <a:lstStyle/>
           <a:p>
-            <a:pPr indent="0" marL="0">
-              <a:buNone/>
-            </a:pPr>
-            <a:r>
-              <a:rPr lang="en-US" sz="1250" b="1" spc="200" kern="0" dirty="0">
+            <a:pPr marL="0" indent="0">
+              <a:buNone/>
+            </a:pPr>
+            <a:r>
+              <a:rPr lang="en-US" sz="1250" b="1" kern="0" spc="200" dirty="0">
                 <a:solidFill>
                   <a:srgbClr val="111827"/>
                 </a:solidFill>
@@ -12497,7 +12214,7 @@
           <a:bodyPr wrap="square" rtlCol="0" anchor="t"/>
           <a:lstStyle/>
           <a:p>
-            <a:pPr indent="0" marL="0">
+            <a:pPr marL="0" indent="0">
               <a:lnSpc>
                 <a:spcPct val="135000"/>
               </a:lnSpc>
@@ -12517,7 +12234,7 @@
             <a:endParaRPr lang="en-US" sz="1400" dirty="0"/>
           </a:p>
           <a:p>
-            <a:pPr indent="0" marL="0">
+            <a:pPr marL="0" indent="0">
               <a:lnSpc>
                 <a:spcPct val="135000"/>
               </a:lnSpc>
@@ -12537,7 +12254,7 @@
             <a:endParaRPr lang="en-US" sz="1400" dirty="0"/>
           </a:p>
           <a:p>
-            <a:pPr indent="0" marL="0">
+            <a:pPr marL="0" indent="0">
               <a:lnSpc>
                 <a:spcPct val="135000"/>
               </a:lnSpc>
@@ -12546,7 +12263,7 @@
             <a:endParaRPr lang="en-US" sz="1400" dirty="0"/>
           </a:p>
           <a:p>
-            <a:pPr indent="0" marL="0">
+            <a:pPr marL="0" indent="0">
               <a:lnSpc>
                 <a:spcPct val="135000"/>
               </a:lnSpc>
@@ -12566,7 +12283,7 @@
             <a:endParaRPr lang="en-US" sz="1400" dirty="0"/>
           </a:p>
           <a:p>
-            <a:pPr indent="0" marL="0">
+            <a:pPr marL="0" indent="0">
               <a:lnSpc>
                 <a:spcPct val="135000"/>
               </a:lnSpc>
@@ -12575,7 +12292,7 @@
             <a:endParaRPr lang="en-US" sz="1400" dirty="0"/>
           </a:p>
           <a:p>
-            <a:pPr indent="0" marL="0">
+            <a:pPr marL="0" indent="0">
               <a:lnSpc>
                 <a:spcPct val="135000"/>
               </a:lnSpc>
@@ -12622,6 +12339,13 @@
             <a:prstDash val="solid"/>
           </a:ln>
         </p:spPr>
+        <p:txBody>
+          <a:bodyPr/>
+          <a:lstStyle/>
+          <a:p>
+            <a:endParaRPr lang="ko-KR" altLang="en-US"/>
+          </a:p>
+        </p:txBody>
       </p:sp>
       <p:sp>
         <p:nvSpPr>
@@ -12644,11 +12368,11 @@
           <a:bodyPr wrap="square" rtlCol="0" anchor="ctr"/>
           <a:lstStyle/>
           <a:p>
-            <a:pPr indent="0" marL="0">
-              <a:buNone/>
-            </a:pPr>
-            <a:r>
-              <a:rPr lang="en-US" sz="1250" b="1" spc="200" kern="0" dirty="0">
+            <a:pPr marL="0" indent="0">
+              <a:buNone/>
+            </a:pPr>
+            <a:r>
+              <a:rPr lang="en-US" sz="1250" b="1" kern="0" spc="200" dirty="0">
                 <a:solidFill>
                   <a:srgbClr val="111827"/>
                 </a:solidFill>
@@ -12683,7 +12407,7 @@
           <a:bodyPr wrap="square" rtlCol="0" anchor="t"/>
           <a:lstStyle/>
           <a:p>
-            <a:pPr indent="0" marL="0">
+            <a:pPr marL="0" indent="0">
               <a:lnSpc>
                 <a:spcPct val="135000"/>
               </a:lnSpc>
@@ -12703,7 +12427,7 @@
             <a:endParaRPr lang="en-US" sz="1400" dirty="0"/>
           </a:p>
           <a:p>
-            <a:pPr indent="0" marL="0">
+            <a:pPr marL="0" indent="0">
               <a:lnSpc>
                 <a:spcPct val="135000"/>
               </a:lnSpc>
@@ -12723,7 +12447,7 @@
             <a:endParaRPr lang="en-US" sz="1400" dirty="0"/>
           </a:p>
           <a:p>
-            <a:pPr indent="0" marL="0">
+            <a:pPr marL="0" indent="0">
               <a:lnSpc>
                 <a:spcPct val="135000"/>
               </a:lnSpc>
@@ -12732,7 +12456,7 @@
             <a:endParaRPr lang="en-US" sz="1400" dirty="0"/>
           </a:p>
           <a:p>
-            <a:pPr indent="0" marL="0">
+            <a:pPr marL="0" indent="0">
               <a:lnSpc>
                 <a:spcPct val="135000"/>
               </a:lnSpc>
@@ -12752,7 +12476,7 @@
             <a:endParaRPr lang="en-US" sz="1400" dirty="0"/>
           </a:p>
           <a:p>
-            <a:pPr indent="0" marL="0">
+            <a:pPr marL="0" indent="0">
               <a:lnSpc>
                 <a:spcPct val="135000"/>
               </a:lnSpc>
@@ -12796,6 +12520,13 @@
             <a:prstDash val="solid"/>
           </a:ln>
         </p:spPr>
+        <p:txBody>
+          <a:bodyPr/>
+          <a:lstStyle/>
+          <a:p>
+            <a:endParaRPr lang="ko-KR" altLang="en-US"/>
+          </a:p>
+        </p:txBody>
       </p:sp>
       <p:sp>
         <p:nvSpPr>
@@ -12818,7 +12549,7 @@
           <a:bodyPr wrap="square" rtlCol="0" anchor="ctr"/>
           <a:lstStyle/>
           <a:p>
-            <a:pPr indent="0" marL="0">
+            <a:pPr marL="0" indent="0">
               <a:buNone/>
             </a:pPr>
             <a:r>
@@ -12852,6 +12583,7 @@
         <a:solidFill>
           <a:srgbClr val="FFFFFF"/>
         </a:solidFill>
+        <a:effectLst/>
       </p:bgPr>
     </p:bg>
     <p:spTree>
@@ -12889,11 +12621,11 @@
           <a:bodyPr wrap="square" rtlCol="0" anchor="ctr"/>
           <a:lstStyle/>
           <a:p>
-            <a:pPr indent="0" marL="0">
-              <a:buNone/>
-            </a:pPr>
-            <a:r>
-              <a:rPr lang="en-US" sz="1200" b="1" spc="400" kern="0" dirty="0">
+            <a:pPr marL="0" indent="0">
+              <a:buNone/>
+            </a:pPr>
+            <a:r>
+              <a:rPr lang="en-US" sz="1200" b="1" kern="0" spc="400" dirty="0">
                 <a:solidFill>
                   <a:srgbClr val="6B7280"/>
                 </a:solidFill>
@@ -12928,7 +12660,7 @@
           <a:bodyPr wrap="square" rtlCol="0" anchor="ctr"/>
           <a:lstStyle/>
           <a:p>
-            <a:pPr indent="0" marL="0">
+            <a:pPr marL="0" indent="0">
               <a:buNone/>
             </a:pPr>
             <a:r>
@@ -12968,6 +12700,13 @@
             <a:prstDash val="solid"/>
           </a:ln>
         </p:spPr>
+        <p:txBody>
+          <a:bodyPr/>
+          <a:lstStyle/>
+          <a:p>
+            <a:endParaRPr lang="ko-KR" altLang="en-US"/>
+          </a:p>
+        </p:txBody>
       </p:sp>
       <p:sp>
         <p:nvSpPr>
@@ -12990,7 +12729,7 @@
           <a:bodyPr wrap="square" rtlCol="0" anchor="t"/>
           <a:lstStyle/>
           <a:p>
-            <a:pPr indent="0" marL="0">
+            <a:pPr marL="0" indent="0">
               <a:lnSpc>
                 <a:spcPct val="145000"/>
               </a:lnSpc>
@@ -13007,12 +12746,6 @@
               </a:rPr>
               <a:t>—  </a:t>
             </a:r>
-            <a:pPr indent="0" marL="0">
-              <a:lnSpc>
-                <a:spcPct val="145000"/>
-              </a:lnSpc>
-              <a:buNone/>
-            </a:pPr>
             <a:r>
               <a:rPr lang="en-US" sz="1700" b="1" dirty="0">
                 <a:solidFill>
@@ -13024,12 +12757,6 @@
               </a:rPr>
               <a:t>서울 리전 · Default VPC · 서브넷 3개</a:t>
             </a:r>
-            <a:pPr indent="0" marL="0">
-              <a:lnSpc>
-                <a:spcPct val="145000"/>
-              </a:lnSpc>
-              <a:buNone/>
-            </a:pPr>
             <a:r>
               <a:rPr lang="en-US" sz="1450" dirty="0">
                 <a:solidFill>
@@ -13041,12 +12768,6 @@
               </a:rPr>
               <a:t>  — 각각 다른 가용영역(AZ) = 물리적으로 다른 데이터센터</a:t>
             </a:r>
-            <a:pPr indent="0" marL="0">
-              <a:lnSpc>
-                <a:spcPct val="145000"/>
-              </a:lnSpc>
-              <a:buNone/>
-            </a:pPr>
             <a:r>
               <a:rPr lang="en-US" sz="1700" dirty="0">
                 <a:solidFill>
@@ -13059,12 +12780,6 @@
               <a:t>
 </a:t>
             </a:r>
-            <a:pPr indent="0" marL="0">
-              <a:lnSpc>
-                <a:spcPct val="145000"/>
-              </a:lnSpc>
-              <a:buNone/>
-            </a:pPr>
             <a:r>
               <a:rPr lang="en-US" sz="1700" dirty="0">
                 <a:solidFill>
@@ -13076,12 +12791,6 @@
               </a:rPr>
               <a:t>—  </a:t>
             </a:r>
-            <a:pPr indent="0" marL="0">
-              <a:lnSpc>
-                <a:spcPct val="145000"/>
-              </a:lnSpc>
-              <a:buNone/>
-            </a:pPr>
             <a:r>
               <a:rPr lang="en-US" sz="1700" b="1" dirty="0">
                 <a:solidFill>
@@ -13093,12 +12802,6 @@
               </a:rPr>
               <a:t>ALB·ECS 태스크·EC2 모두 3개 AZ에 분산 배치</a:t>
             </a:r>
-            <a:pPr indent="0" marL="0">
-              <a:lnSpc>
-                <a:spcPct val="145000"/>
-              </a:lnSpc>
-              <a:buNone/>
-            </a:pPr>
             <a:r>
               <a:rPr lang="en-US" sz="1450" dirty="0">
                 <a:solidFill>
@@ -13110,12 +12813,6 @@
               </a:rPr>
               <a:t>  — AZ 하나가 통째로 장애 나도 서비스 유지</a:t>
             </a:r>
-            <a:pPr indent="0" marL="0">
-              <a:lnSpc>
-                <a:spcPct val="145000"/>
-              </a:lnSpc>
-              <a:buNone/>
-            </a:pPr>
             <a:r>
               <a:rPr lang="en-US" sz="1700" dirty="0">
                 <a:solidFill>
@@ -13128,12 +12825,6 @@
               <a:t>
 </a:t>
             </a:r>
-            <a:pPr indent="0" marL="0">
-              <a:lnSpc>
-                <a:spcPct val="145000"/>
-              </a:lnSpc>
-              <a:buNone/>
-            </a:pPr>
             <a:r>
               <a:rPr lang="en-US" sz="1700" dirty="0">
                 <a:solidFill>
@@ -13145,12 +12836,6 @@
               </a:rPr>
               <a:t>—  </a:t>
             </a:r>
-            <a:pPr indent="0" marL="0">
-              <a:lnSpc>
-                <a:spcPct val="145000"/>
-              </a:lnSpc>
-              <a:buNone/>
-            </a:pPr>
             <a:r>
               <a:rPr lang="en-US" sz="1700" b="1" dirty="0">
                 <a:solidFill>
@@ -13162,12 +12847,6 @@
               </a:rPr>
               <a:t>awsvpc 네트워크 모드</a:t>
             </a:r>
-            <a:pPr indent="0" marL="0">
-              <a:lnSpc>
-                <a:spcPct val="145000"/>
-              </a:lnSpc>
-              <a:buNone/>
-            </a:pPr>
             <a:r>
               <a:rPr lang="en-US" sz="1450" dirty="0">
                 <a:solidFill>
@@ -13179,12 +12858,6 @@
               </a:rPr>
               <a:t>  — 컨테이너마다 자체 VPC IP(ENI), 보안 그룹을 컨테이너 단위로 적용</a:t>
             </a:r>
-            <a:pPr indent="0" marL="0">
-              <a:lnSpc>
-                <a:spcPct val="145000"/>
-              </a:lnSpc>
-              <a:buNone/>
-            </a:pPr>
             <a:r>
               <a:rPr lang="en-US" sz="1700" dirty="0">
                 <a:solidFill>
@@ -13197,12 +12870,6 @@
               <a:t>
 </a:t>
             </a:r>
-            <a:pPr indent="0" marL="0">
-              <a:lnSpc>
-                <a:spcPct val="145000"/>
-              </a:lnSpc>
-              <a:buNone/>
-            </a:pPr>
             <a:r>
               <a:rPr lang="en-US" sz="1700" dirty="0">
                 <a:solidFill>
@@ -13214,12 +12881,6 @@
               </a:rPr>
               <a:t>—  </a:t>
             </a:r>
-            <a:pPr indent="0" marL="0">
-              <a:lnSpc>
-                <a:spcPct val="145000"/>
-              </a:lnSpc>
-              <a:buNone/>
-            </a:pPr>
             <a:r>
               <a:rPr lang="en-US" sz="1700" b="1" dirty="0">
                 <a:solidFill>
@@ -13231,12 +12892,6 @@
               </a:rPr>
               <a:t>프라이빗 통신</a:t>
             </a:r>
-            <a:pPr indent="0" marL="0">
-              <a:lnSpc>
-                <a:spcPct val="145000"/>
-              </a:lnSpc>
-              <a:buNone/>
-            </a:pPr>
             <a:r>
               <a:rPr lang="en-US" sz="1450" dirty="0">
                 <a:solidFill>
@@ -13248,12 +12903,6 @@
               </a:rPr>
               <a:t>  — Redis는 VPC 내부 통신만, 인터넷 노출 없음</a:t>
             </a:r>
-            <a:pPr indent="0" marL="0">
-              <a:lnSpc>
-                <a:spcPct val="145000"/>
-              </a:lnSpc>
-              <a:buNone/>
-            </a:pPr>
             <a:r>
               <a:rPr lang="en-US" sz="1700" dirty="0">
                 <a:solidFill>
@@ -13296,6 +12945,13 @@
             <a:prstDash val="solid"/>
           </a:ln>
         </p:spPr>
+        <p:txBody>
+          <a:bodyPr/>
+          <a:lstStyle/>
+          <a:p>
+            <a:endParaRPr lang="ko-KR" altLang="en-US"/>
+          </a:p>
+        </p:txBody>
       </p:sp>
       <p:sp>
         <p:nvSpPr>
@@ -13318,11 +12974,11 @@
           <a:bodyPr wrap="square" rtlCol="0" anchor="ctr"/>
           <a:lstStyle/>
           <a:p>
-            <a:pPr indent="0" marL="0">
-              <a:buNone/>
-            </a:pPr>
-            <a:r>
-              <a:rPr lang="en-US" sz="1250" b="1" spc="200" kern="0" dirty="0">
+            <a:pPr marL="0" indent="0">
+              <a:buNone/>
+            </a:pPr>
+            <a:r>
+              <a:rPr lang="en-US" sz="1250" b="1" kern="0" spc="200" dirty="0">
                 <a:solidFill>
                   <a:srgbClr val="111827"/>
                 </a:solidFill>
@@ -13357,7 +13013,7 @@
           <a:bodyPr wrap="square" rtlCol="0" anchor="t"/>
           <a:lstStyle/>
           <a:p>
-            <a:pPr indent="0" marL="0">
+            <a:pPr marL="0" indent="0">
               <a:lnSpc>
                 <a:spcPct val="135000"/>
               </a:lnSpc>
@@ -13394,6 +13050,7 @@
         <a:solidFill>
           <a:srgbClr val="FFFFFF"/>
         </a:solidFill>
+        <a:effectLst/>
       </p:bgPr>
     </p:bg>
     <p:spTree>
@@ -13431,11 +13088,11 @@
           <a:bodyPr wrap="square" rtlCol="0" anchor="ctr"/>
           <a:lstStyle/>
           <a:p>
-            <a:pPr indent="0" marL="0">
-              <a:buNone/>
-            </a:pPr>
-            <a:r>
-              <a:rPr lang="en-US" sz="1200" b="1" spc="400" kern="0" dirty="0">
+            <a:pPr marL="0" indent="0">
+              <a:buNone/>
+            </a:pPr>
+            <a:r>
+              <a:rPr lang="en-US" sz="1200" b="1" kern="0" spc="400" dirty="0">
                 <a:solidFill>
                   <a:srgbClr val="6B7280"/>
                 </a:solidFill>
@@ -13470,7 +13127,7 @@
           <a:bodyPr wrap="square" rtlCol="0" anchor="ctr"/>
           <a:lstStyle/>
           <a:p>
-            <a:pPr indent="0" marL="0">
+            <a:pPr marL="0" indent="0">
               <a:buNone/>
             </a:pPr>
             <a:r>
@@ -13510,6 +13167,13 @@
             <a:prstDash val="solid"/>
           </a:ln>
         </p:spPr>
+        <p:txBody>
+          <a:bodyPr/>
+          <a:lstStyle/>
+          <a:p>
+            <a:endParaRPr lang="ko-KR" altLang="en-US"/>
+          </a:p>
+        </p:txBody>
       </p:sp>
       <p:sp>
         <p:nvSpPr>
@@ -13532,7 +13196,7 @@
           <a:bodyPr wrap="square" rtlCol="0" anchor="t"/>
           <a:lstStyle/>
           <a:p>
-            <a:pPr indent="0" marL="0">
+            <a:pPr marL="0" indent="0">
               <a:lnSpc>
                 <a:spcPct val="145000"/>
               </a:lnSpc>
@@ -13549,12 +13213,6 @@
               </a:rPr>
               <a:t>—  </a:t>
             </a:r>
-            <a:pPr indent="0" marL="0">
-              <a:lnSpc>
-                <a:spcPct val="145000"/>
-              </a:lnSpc>
-              <a:buNone/>
-            </a:pPr>
             <a:r>
               <a:rPr lang="en-US" sz="1550" b="1" dirty="0">
                 <a:solidFill>
@@ -13566,12 +13224,6 @@
               </a:rPr>
               <a:t>서버(컨테이너)는 아무것도 기억하지 않는다</a:t>
             </a:r>
-            <a:pPr indent="0" marL="0">
-              <a:lnSpc>
-                <a:spcPct val="145000"/>
-              </a:lnSpc>
-              <a:buNone/>
-            </a:pPr>
             <a:r>
               <a:rPr lang="en-US" sz="1300" dirty="0">
                 <a:solidFill>
@@ -13583,12 +13235,6 @@
               </a:rPr>
               <a:t>  — 카드·칩·턴·타이머 전부 Redis에</a:t>
             </a:r>
-            <a:pPr indent="0" marL="0">
-              <a:lnSpc>
-                <a:spcPct val="145000"/>
-              </a:lnSpc>
-              <a:buNone/>
-            </a:pPr>
             <a:r>
               <a:rPr lang="en-US" sz="1550" dirty="0">
                 <a:solidFill>
@@ -13601,12 +13247,6 @@
               <a:t>
 </a:t>
             </a:r>
-            <a:pPr indent="0" marL="0">
-              <a:lnSpc>
-                <a:spcPct val="145000"/>
-              </a:lnSpc>
-              <a:buNone/>
-            </a:pPr>
             <a:r>
               <a:rPr lang="en-US" sz="1550" dirty="0">
                 <a:solidFill>
@@ -13618,12 +13258,6 @@
               </a:rPr>
               <a:t>—  </a:t>
             </a:r>
-            <a:pPr indent="0" marL="0">
-              <a:lnSpc>
-                <a:spcPct val="145000"/>
-              </a:lnSpc>
-              <a:buNone/>
-            </a:pPr>
             <a:r>
               <a:rPr lang="en-US" sz="1550" b="1" dirty="0">
                 <a:solidFill>
@@ -13635,12 +13269,6 @@
               </a:rPr>
               <a:t>그래서 가능한 것 ①</a:t>
             </a:r>
-            <a:pPr indent="0" marL="0">
-              <a:lnSpc>
-                <a:spcPct val="145000"/>
-              </a:lnSpc>
-              <a:buNone/>
-            </a:pPr>
             <a:r>
               <a:rPr lang="en-US" sz="1300" dirty="0">
                 <a:solidFill>
@@ -13652,12 +13280,6 @@
               </a:rPr>
               <a:t>  어느 컨테이너가 죽어도 게임 보존 → 새 컨테이너가 이어서 처리</a:t>
             </a:r>
-            <a:pPr indent="0" marL="0">
-              <a:lnSpc>
-                <a:spcPct val="145000"/>
-              </a:lnSpc>
-              <a:buNone/>
-            </a:pPr>
             <a:r>
               <a:rPr lang="en-US" sz="1550" dirty="0">
                 <a:solidFill>
@@ -13670,12 +13292,6 @@
               <a:t>
 </a:t>
             </a:r>
-            <a:pPr indent="0" marL="0">
-              <a:lnSpc>
-                <a:spcPct val="145000"/>
-              </a:lnSpc>
-              <a:buNone/>
-            </a:pPr>
             <a:r>
               <a:rPr lang="en-US" sz="1550" dirty="0">
                 <a:solidFill>
@@ -13687,12 +13303,6 @@
               </a:rPr>
               <a:t>—  </a:t>
             </a:r>
-            <a:pPr indent="0" marL="0">
-              <a:lnSpc>
-                <a:spcPct val="145000"/>
-              </a:lnSpc>
-              <a:buNone/>
-            </a:pPr>
             <a:r>
               <a:rPr lang="en-US" sz="1550" b="1" dirty="0">
                 <a:solidFill>
@@ -13704,12 +13314,6 @@
               </a:rPr>
               <a:t>그래서 가능한 것 ②</a:t>
             </a:r>
-            <a:pPr indent="0" marL="0">
-              <a:lnSpc>
-                <a:spcPct val="145000"/>
-              </a:lnSpc>
-              <a:buNone/>
-            </a:pPr>
             <a:r>
               <a:rPr lang="en-US" sz="1300" dirty="0">
                 <a:solidFill>
@@ -13721,12 +13325,6 @@
               </a:rPr>
               <a:t>  sticky session 불필요 → 아무 컨테이너나 요청 처리</a:t>
             </a:r>
-            <a:pPr indent="0" marL="0">
-              <a:lnSpc>
-                <a:spcPct val="145000"/>
-              </a:lnSpc>
-              <a:buNone/>
-            </a:pPr>
             <a:r>
               <a:rPr lang="en-US" sz="1550" dirty="0">
                 <a:solidFill>
@@ -13739,12 +13337,6 @@
               <a:t>
 </a:t>
             </a:r>
-            <a:pPr indent="0" marL="0">
-              <a:lnSpc>
-                <a:spcPct val="145000"/>
-              </a:lnSpc>
-              <a:buNone/>
-            </a:pPr>
             <a:r>
               <a:rPr lang="en-US" sz="1550" dirty="0">
                 <a:solidFill>
@@ -13756,12 +13348,6 @@
               </a:rPr>
               <a:t>—  </a:t>
             </a:r>
-            <a:pPr indent="0" marL="0">
-              <a:lnSpc>
-                <a:spcPct val="145000"/>
-              </a:lnSpc>
-              <a:buNone/>
-            </a:pPr>
             <a:r>
               <a:rPr lang="en-US" sz="1550" b="1" dirty="0">
                 <a:solidFill>
@@ -13773,12 +13359,6 @@
               </a:rPr>
               <a:t>그래서 가능한 것 ③</a:t>
             </a:r>
-            <a:pPr indent="0" marL="0">
-              <a:lnSpc>
-                <a:spcPct val="145000"/>
-              </a:lnSpc>
-              <a:buNone/>
-            </a:pPr>
             <a:r>
               <a:rPr lang="en-US" sz="1300" dirty="0">
                 <a:solidFill>
@@ -13790,12 +13370,6 @@
               </a:rPr>
               <a:t>  스케일 아웃 자유 → 컨테이너를 늘리기만 하면 됨</a:t>
             </a:r>
-            <a:pPr indent="0" marL="0">
-              <a:lnSpc>
-                <a:spcPct val="145000"/>
-              </a:lnSpc>
-              <a:buNone/>
-            </a:pPr>
             <a:r>
               <a:rPr lang="en-US" sz="1550" dirty="0">
                 <a:solidFill>
@@ -13838,6 +13412,13 @@
             <a:prstDash val="solid"/>
           </a:ln>
         </p:spPr>
+        <p:txBody>
+          <a:bodyPr/>
+          <a:lstStyle/>
+          <a:p>
+            <a:endParaRPr lang="ko-KR" altLang="en-US"/>
+          </a:p>
+        </p:txBody>
       </p:sp>
       <p:sp>
         <p:nvSpPr>
@@ -13860,11 +13441,11 @@
           <a:bodyPr wrap="square" rtlCol="0" anchor="ctr"/>
           <a:lstStyle/>
           <a:p>
-            <a:pPr indent="0" marL="0">
-              <a:buNone/>
-            </a:pPr>
-            <a:r>
-              <a:rPr lang="en-US" sz="1250" b="1" spc="200" kern="0" dirty="0">
+            <a:pPr marL="0" indent="0">
+              <a:buNone/>
+            </a:pPr>
+            <a:r>
+              <a:rPr lang="en-US" sz="1250" b="1" kern="0" spc="200" dirty="0">
                 <a:solidFill>
                   <a:srgbClr val="111827"/>
                 </a:solidFill>
@@ -13899,7 +13480,7 @@
           <a:bodyPr wrap="square" rtlCol="0" anchor="t"/>
           <a:lstStyle/>
           <a:p>
-            <a:pPr indent="0" marL="0">
+            <a:pPr marL="0" indent="0">
               <a:lnSpc>
                 <a:spcPct val="135000"/>
               </a:lnSpc>
@@ -13919,7 +13500,7 @@
             <a:endParaRPr lang="en-US" sz="1400" dirty="0"/>
           </a:p>
           <a:p>
-            <a:pPr indent="0" marL="0">
+            <a:pPr marL="0" indent="0">
               <a:lnSpc>
                 <a:spcPct val="135000"/>
               </a:lnSpc>
@@ -13928,7 +13509,7 @@
             <a:endParaRPr lang="en-US" sz="1400" dirty="0"/>
           </a:p>
           <a:p>
-            <a:pPr indent="0" marL="0">
+            <a:pPr marL="0" indent="0">
               <a:lnSpc>
                 <a:spcPct val="135000"/>
               </a:lnSpc>
@@ -14250,4 +13831,319 @@
     </a:ext>
   </a:extLst>
 </a:theme>
+</file>
+
+<file path=ppt/theme/theme2.xml><?xml version="1.0" encoding="utf-8"?>
+<a:theme xmlns:a="http://schemas.openxmlformats.org/drawingml/2006/main" name="Office 테마">
+  <a:themeElements>
+    <a:clrScheme name="Office">
+      <a:dk1>
+        <a:sysClr val="windowText" lastClr="000000"/>
+      </a:dk1>
+      <a:lt1>
+        <a:sysClr val="window" lastClr="FFFFFF"/>
+      </a:lt1>
+      <a:dk2>
+        <a:srgbClr val="0E2841"/>
+      </a:dk2>
+      <a:lt2>
+        <a:srgbClr val="E8E8E8"/>
+      </a:lt2>
+      <a:accent1>
+        <a:srgbClr val="156082"/>
+      </a:accent1>
+      <a:accent2>
+        <a:srgbClr val="E97132"/>
+      </a:accent2>
+      <a:accent3>
+        <a:srgbClr val="196B24"/>
+      </a:accent3>
+      <a:accent4>
+        <a:srgbClr val="0F9ED5"/>
+      </a:accent4>
+      <a:accent5>
+        <a:srgbClr val="A02B93"/>
+      </a:accent5>
+      <a:accent6>
+        <a:srgbClr val="4EA72E"/>
+      </a:accent6>
+      <a:hlink>
+        <a:srgbClr val="467886"/>
+      </a:hlink>
+      <a:folHlink>
+        <a:srgbClr val="96607D"/>
+      </a:folHlink>
+    </a:clrScheme>
+    <a:fontScheme name="Office">
+      <a:majorFont>
+        <a:latin typeface="맑은 고딕" panose="02110004020202020204"/>
+        <a:ea typeface=""/>
+        <a:cs typeface=""/>
+        <a:font script="Jpan" typeface="游ゴシック Light"/>
+        <a:font script="Hang" typeface="맑은 고딕"/>
+        <a:font script="Hans" typeface="等线 Light"/>
+        <a:font script="Hant" typeface="新細明體"/>
+        <a:font script="Arab" typeface="Times New Roman"/>
+        <a:font script="Hebr" typeface="Times New Roman"/>
+        <a:font script="Thai" typeface="Angsana New"/>
+        <a:font script="Ethi" typeface="Nyala"/>
+        <a:font script="Beng" typeface="Vrinda"/>
+        <a:font script="Gujr" typeface="Shruti"/>
+        <a:font script="Khmr" typeface="MoolBoran"/>
+        <a:font script="Knda" typeface="Tunga"/>
+        <a:font script="Guru" typeface="Raavi"/>
+        <a:font script="Cans" typeface="Euphemia"/>
+        <a:font script="Cher" typeface="Plantagenet Cherokee"/>
+        <a:font script="Yiii" typeface="Microsoft Yi Baiti"/>
+        <a:font script="Tibt" typeface="Microsoft Himalaya"/>
+        <a:font script="Thaa" typeface="MV Boli"/>
+        <a:font script="Deva" typeface="Mangal"/>
+        <a:font script="Telu" typeface="Gautami"/>
+        <a:font script="Taml" typeface="Latha"/>
+        <a:font script="Syrc" typeface="Estrangelo Edessa"/>
+        <a:font script="Orya" typeface="Kalinga"/>
+        <a:font script="Mlym" typeface="Kartika"/>
+        <a:font script="Laoo" typeface="DokChampa"/>
+        <a:font script="Sinh" typeface="Iskoola Pota"/>
+        <a:font script="Mong" typeface="Mongolian Baiti"/>
+        <a:font script="Viet" typeface="Times New Roman"/>
+        <a:font script="Uigh" typeface="Microsoft Uighur"/>
+        <a:font script="Geor" typeface="Sylfaen"/>
+        <a:font script="Armn" typeface="Arial"/>
+        <a:font script="Bugi" typeface="Leelawadee UI"/>
+        <a:font script="Bopo" typeface="Microsoft JhengHei"/>
+        <a:font script="Java" typeface="Javanese Text"/>
+        <a:font script="Lisu" typeface="Segoe UI"/>
+        <a:font script="Mymr" typeface="Myanmar Text"/>
+        <a:font script="Nkoo" typeface="Ebrima"/>
+        <a:font script="Olck" typeface="Nirmala UI"/>
+        <a:font script="Osma" typeface="Ebrima"/>
+        <a:font script="Phag" typeface="Phagspa"/>
+        <a:font script="Syrn" typeface="Estrangelo Edessa"/>
+        <a:font script="Syrj" typeface="Estrangelo Edessa"/>
+        <a:font script="Syre" typeface="Estrangelo Edessa"/>
+        <a:font script="Sora" typeface="Nirmala UI"/>
+        <a:font script="Tale" typeface="Microsoft Tai Le"/>
+        <a:font script="Talu" typeface="Microsoft New Tai Lue"/>
+        <a:font script="Tfng" typeface="Ebrima"/>
+      </a:majorFont>
+      <a:minorFont>
+        <a:latin typeface="맑은 고딕" panose="02110004020202020204"/>
+        <a:ea typeface=""/>
+        <a:cs typeface=""/>
+        <a:font script="Jpan" typeface="游ゴシック"/>
+        <a:font script="Hang" typeface="맑은 고딕"/>
+        <a:font script="Hans" typeface="等线"/>
+        <a:font script="Hant" typeface="新細明體"/>
+        <a:font script="Arab" typeface="Arial"/>
+        <a:font script="Hebr" typeface="Arial"/>
+        <a:font script="Thai" typeface="Cordia New"/>
+        <a:font script="Ethi" typeface="Nyala"/>
+        <a:font script="Beng" typeface="Vrinda"/>
+        <a:font script="Gujr" typeface="Shruti"/>
+        <a:font script="Khmr" typeface="DaunPenh"/>
+        <a:font script="Knda" typeface="Tunga"/>
+        <a:font script="Guru" typeface="Raavi"/>
+        <a:font script="Cans" typeface="Euphemia"/>
+        <a:font script="Cher" typeface="Plantagenet Cherokee"/>
+        <a:font script="Yiii" typeface="Microsoft Yi Baiti"/>
+        <a:font script="Tibt" typeface="Microsoft Himalaya"/>
+        <a:font script="Thaa" typeface="MV Boli"/>
+        <a:font script="Deva" typeface="Mangal"/>
+        <a:font script="Telu" typeface="Gautami"/>
+        <a:font script="Taml" typeface="Latha"/>
+        <a:font script="Syrc" typeface="Estrangelo Edessa"/>
+        <a:font script="Orya" typeface="Kalinga"/>
+        <a:font script="Mlym" typeface="Kartika"/>
+        <a:font script="Laoo" typeface="DokChampa"/>
+        <a:font script="Sinh" typeface="Iskoola Pota"/>
+        <a:font script="Mong" typeface="Mongolian Baiti"/>
+        <a:font script="Viet" typeface="Arial"/>
+        <a:font script="Uigh" typeface="Microsoft Uighur"/>
+        <a:font script="Geor" typeface="Sylfaen"/>
+        <a:font script="Armn" typeface="Arial"/>
+        <a:font script="Bugi" typeface="Leelawadee UI"/>
+        <a:font script="Bopo" typeface="Microsoft JhengHei"/>
+        <a:font script="Java" typeface="Javanese Text"/>
+        <a:font script="Lisu" typeface="Segoe UI"/>
+        <a:font script="Mymr" typeface="Myanmar Text"/>
+        <a:font script="Nkoo" typeface="Ebrima"/>
+        <a:font script="Olck" typeface="Nirmala UI"/>
+        <a:font script="Osma" typeface="Ebrima"/>
+        <a:font script="Phag" typeface="Phagspa"/>
+        <a:font script="Syrn" typeface="Estrangelo Edessa"/>
+        <a:font script="Syrj" typeface="Estrangelo Edessa"/>
+        <a:font script="Syre" typeface="Estrangelo Edessa"/>
+        <a:font script="Sora" typeface="Nirmala UI"/>
+        <a:font script="Tale" typeface="Microsoft Tai Le"/>
+        <a:font script="Talu" typeface="Microsoft New Tai Lue"/>
+        <a:font script="Tfng" typeface="Ebrima"/>
+      </a:minorFont>
+    </a:fontScheme>
+    <a:fmtScheme name="Office">
+      <a:fillStyleLst>
+        <a:solidFill>
+          <a:schemeClr val="phClr"/>
+        </a:solidFill>
+        <a:gradFill rotWithShape="1">
+          <a:gsLst>
+            <a:gs pos="0">
+              <a:schemeClr val="phClr">
+                <a:lumMod val="110000"/>
+                <a:satMod val="105000"/>
+                <a:tint val="67000"/>
+              </a:schemeClr>
+            </a:gs>
+            <a:gs pos="50000">
+              <a:schemeClr val="phClr">
+                <a:lumMod val="105000"/>
+                <a:satMod val="103000"/>
+                <a:tint val="73000"/>
+              </a:schemeClr>
+            </a:gs>
+            <a:gs pos="100000">
+              <a:schemeClr val="phClr">
+                <a:lumMod val="105000"/>
+                <a:satMod val="109000"/>
+                <a:tint val="81000"/>
+              </a:schemeClr>
+            </a:gs>
+          </a:gsLst>
+          <a:lin ang="5400000" scaled="0"/>
+        </a:gradFill>
+        <a:gradFill rotWithShape="1">
+          <a:gsLst>
+            <a:gs pos="0">
+              <a:schemeClr val="phClr">
+                <a:satMod val="103000"/>
+                <a:lumMod val="102000"/>
+                <a:tint val="94000"/>
+              </a:schemeClr>
+            </a:gs>
+            <a:gs pos="50000">
+              <a:schemeClr val="phClr">
+                <a:satMod val="110000"/>
+                <a:lumMod val="100000"/>
+                <a:shade val="100000"/>
+              </a:schemeClr>
+            </a:gs>
+            <a:gs pos="100000">
+              <a:schemeClr val="phClr">
+                <a:lumMod val="99000"/>
+                <a:satMod val="120000"/>
+                <a:shade val="78000"/>
+              </a:schemeClr>
+            </a:gs>
+          </a:gsLst>
+          <a:lin ang="5400000" scaled="0"/>
+        </a:gradFill>
+      </a:fillStyleLst>
+      <a:lnStyleLst>
+        <a:ln w="12700" cap="flat" cmpd="sng" algn="ctr">
+          <a:solidFill>
+            <a:schemeClr val="phClr"/>
+          </a:solidFill>
+          <a:prstDash val="solid"/>
+          <a:miter lim="800000"/>
+        </a:ln>
+        <a:ln w="19050" cap="flat" cmpd="sng" algn="ctr">
+          <a:solidFill>
+            <a:schemeClr val="phClr"/>
+          </a:solidFill>
+          <a:prstDash val="solid"/>
+          <a:miter lim="800000"/>
+        </a:ln>
+        <a:ln w="25400" cap="flat" cmpd="sng" algn="ctr">
+          <a:solidFill>
+            <a:schemeClr val="phClr"/>
+          </a:solidFill>
+          <a:prstDash val="solid"/>
+          <a:miter lim="800000"/>
+        </a:ln>
+      </a:lnStyleLst>
+      <a:effectStyleLst>
+        <a:effectStyle>
+          <a:effectLst/>
+        </a:effectStyle>
+        <a:effectStyle>
+          <a:effectLst/>
+        </a:effectStyle>
+        <a:effectStyle>
+          <a:effectLst>
+            <a:outerShdw blurRad="57150" dist="19050" dir="5400000" algn="ctr" rotWithShape="0">
+              <a:srgbClr val="000000">
+                <a:alpha val="63000"/>
+              </a:srgbClr>
+            </a:outerShdw>
+          </a:effectLst>
+        </a:effectStyle>
+      </a:effectStyleLst>
+      <a:bgFillStyleLst>
+        <a:solidFill>
+          <a:schemeClr val="phClr"/>
+        </a:solidFill>
+        <a:solidFill>
+          <a:schemeClr val="phClr">
+            <a:tint val="95000"/>
+            <a:satMod val="170000"/>
+          </a:schemeClr>
+        </a:solidFill>
+        <a:gradFill rotWithShape="1">
+          <a:gsLst>
+            <a:gs pos="0">
+              <a:schemeClr val="phClr">
+                <a:tint val="93000"/>
+                <a:satMod val="150000"/>
+                <a:shade val="98000"/>
+                <a:lumMod val="102000"/>
+              </a:schemeClr>
+            </a:gs>
+            <a:gs pos="50000">
+              <a:schemeClr val="phClr">
+                <a:tint val="98000"/>
+                <a:satMod val="130000"/>
+                <a:shade val="90000"/>
+                <a:lumMod val="103000"/>
+              </a:schemeClr>
+            </a:gs>
+            <a:gs pos="100000">
+              <a:schemeClr val="phClr">
+                <a:shade val="63000"/>
+                <a:satMod val="120000"/>
+              </a:schemeClr>
+            </a:gs>
+          </a:gsLst>
+          <a:lin ang="5400000" scaled="0"/>
+        </a:gradFill>
+      </a:bgFillStyleLst>
+    </a:fmtScheme>
+  </a:themeElements>
+  <a:objectDefaults>
+    <a:lnDef>
+      <a:spPr/>
+      <a:bodyPr/>
+      <a:lstStyle/>
+      <a:style>
+        <a:lnRef idx="2">
+          <a:schemeClr val="accent1"/>
+        </a:lnRef>
+        <a:fillRef idx="0">
+          <a:schemeClr val="accent1"/>
+        </a:fillRef>
+        <a:effectRef idx="1">
+          <a:schemeClr val="accent1"/>
+        </a:effectRef>
+        <a:fontRef idx="minor">
+          <a:schemeClr val="tx1"/>
+        </a:fontRef>
+      </a:style>
+    </a:lnDef>
+  </a:objectDefaults>
+  <a:extraClrSchemeLst/>
+  <a:extLst>
+    <a:ext uri="{05A4C25C-085E-4340-85A3-A5531E510DB2}">
+      <thm15:themeFamily xmlns:thm15="http://schemas.microsoft.com/office/thememl/2012/main" name="Office Theme" id="{2E142A2C-CD16-42D6-873A-C26D2A0506FA}" vid="{1BDDFF52-6CD6-40A5-AB3C-68EB2F1E4D0A}"/>
+    </a:ext>
+  </a:extLst>
+</a:theme>
 </file>